--- a/odevzdani/cviceni-04-implementace/prezentace.pptx
+++ b/odevzdani/cviceni-04-implementace/prezentace.pptx
@@ -507,7 +507,7 @@
           <a:lstStyle/>
           <a:p>
             <a:r>
-              <a:t>Na wireframe navazuje kompletní současná implementace. Obsahuje výraznější vlastní identitu, asymetrickou kompozici a originální logo Prague Rocks Festival. Inspirací je obecný festivalový vizuální styl, nikoli převzetí loga nebo grafiky jiné akce. Materiály byly připraveny ze současné verze, protože skutečný historický export ze cvičení nebyl poskytnut. Při prezentaci ukážeme mobilní a desktopové zobrazení a dvě nejdůležitější cesty. Není třeba instalovat runtime nebo spouštět build.</a:t>
+              <a:t>Na wireframe navazuje kompletní současná implementace. Obsahuje výraznější vlastní identitu, asymetrickou kompozici a originální logo Prague Pulse Fest. Inspirací je obecný festivalový vizuální styl, nikoli převzetí loga nebo grafiky jiné akce. Materiály byly připraveny ze současné verze, protože skutečný historický export ze cvičení nebyl poskytnut. Při prezentaci ukážeme mobilní a desktopové zobrazení a dvě nejdůležitější cesty. Není třeba instalovat runtime nebo spouštět build. Název vracíme na Prague Pulse Fest a termín na výslovnou volbu zadavatele posouváme na 1.–3. srpna 2027. Hlavička má na notebooku hledání a navigaci v jednom řádku; odpočet pracuje s pražskou časovou zónou.</a:t>
             </a:r>
           </a:p>
         </p:txBody>
@@ -717,7 +717,7 @@
           <a:lstStyle/>
           <a:p>
             <a:r>
-              <a:t>Zopakujeme S1 a S2 ve finálním rozhraní. Nejprve filtrujeme program a ověříme uložení osobního výběru. Potom hledáme Neon Wave a přejdeme z detailu k jeho koncertu. Při ukázce sledujeme názvy, datum a scénu; efektní animace nesmí nahradit správný obsah. Krátce ukážeme klávesnici a zavření dialogu. Přístupnost není pouze kontrast: důležité je správné pořadí, popisky, zachování focusu a srozumitelná změna stavu. Plnou shodu s WCAG bez odpovídajícího auditu netvrdíme.</a:t>
+              <a:t>Zopakujeme S1 a S2 ve finálním rozhraní. Nejprve filtrujeme program a ověříme uložení osobního výběru. Potom hledáme Atlas Motel a přejdeme z detailu k jeho koncertu. Při ukázce sledujeme názvy, datum a scénu; efektní animace nesmí nahradit správný obsah. Krátce ukážeme klávesnici a zavření dialogu. Přístupnost není pouze kontrast: důležité je správné pořadí, popisky, zachování focusu a srozumitelná změna stavu. Plnou shodu s WCAG bez odpovídajícího auditu netvrdíme.</a:t>
             </a:r>
           </a:p>
         </p:txBody>
@@ -787,7 +787,7 @@
           <a:lstStyle/>
           <a:p>
             <a:r>
-              <a:t>Datová základna v XML je autoritativní. Přibalený JavaScriptový export umožňuje zobrazit program bez síťového načítání, což je důležité pro přímé otevření z disku. Generátor je pouze vývojová pomůcka. Ceny tarifů i hlavní údaje musí odpovídat XML. Objednávkový tok vytváří skutečný PDF soubor s identifikací objednávky, ale neposílá e-mail a neprovádí skutečnou platbu. Hesla, objednávky a obsazenost nemají serverové zázemí; místní účet není bezpečné sdílené přihlašování.</a:t>
+              <a:t>Datová základna v XML je autoritativní. Přibalený JavaScriptový export umožňuje zobrazit program bez síťového načítání, což je důležité pro přímé otevření z disku. Generátor je pouze vývojová pomůcka. Ceny tarifů i hlavní údaje musí odpovídat XML. Objednávkový tok vytváří skutečný PDF soubor s identifikací objednávky, ale neposílá e-mail a neprovádí skutečnou platbu. Hesla, objednávky a obsazenost nemají serverové zázemí; místní účet není bezpečné sdílené přihlašování. Nové objednávky mají ročník 2027, historické bez ročníku zůstávají 2026 a neblokují nový rok. Panel soukromí dovoluje externí mapy samostatně; po povolení se mapa vloží automaticky a odvolání ji odstraní. Analytika ani reklamní sledování nejsou použité.</a:t>
             </a:r>
           </a:p>
         </p:txBody>
@@ -4028,7 +4028,7 @@
               </a:defRPr>
             </a:pPr>
             <a:r>
-              <a:t>ROCKS</a:t>
+              <a:t>PULSE</a:t>
             </a:r>
           </a:p>
         </p:txBody>
@@ -4070,7 +4070,7 @@
               </a:defRPr>
             </a:pPr>
             <a:r>
-              <a:t>FESTIVAL / 2026</a:t>
+              <a:t>FEST / 2027</a:t>
             </a:r>
           </a:p>
         </p:txBody>
@@ -4403,7 +4403,7 @@
               </a:defRPr>
             </a:pPr>
             <a:r>
-              <a:t>2026</a:t>
+              <a:t>2027</a:t>
             </a:r>
           </a:p>
         </p:txBody>
@@ -4754,7 +4754,7 @@
               </a:defRPr>
             </a:pPr>
             <a:r>
-              <a:t>ROCKS</a:t>
+              <a:t>PULSE</a:t>
             </a:r>
           </a:p>
         </p:txBody>
@@ -4796,7 +4796,7 @@
               </a:defRPr>
             </a:pPr>
             <a:r>
-              <a:t>FESTIVAL / 2026</a:t>
+              <a:t>FEST / 2027</a:t>
             </a:r>
           </a:p>
         </p:txBody>
@@ -5886,7 +5886,7 @@
               </a:defRPr>
             </a:pPr>
             <a:r>
-              <a:t>ROCKS</a:t>
+              <a:t>PULSE</a:t>
             </a:r>
           </a:p>
         </p:txBody>
@@ -5928,7 +5928,7 @@
               </a:defRPr>
             </a:pPr>
             <a:r>
-              <a:t>FESTIVAL / 2026</a:t>
+              <a:t>FEST / 2027</a:t>
             </a:r>
           </a:p>
         </p:txBody>
@@ -6779,7 +6779,7 @@
               </a:defRPr>
             </a:pPr>
             <a:r>
-              <a:t>ROCKS</a:t>
+              <a:t>PULSE</a:t>
             </a:r>
           </a:p>
         </p:txBody>
@@ -6821,7 +6821,7 @@
               </a:defRPr>
             </a:pPr>
             <a:r>
-              <a:t>FESTIVAL / 2026</a:t>
+              <a:t>FEST / 2027</a:t>
             </a:r>
           </a:p>
         </p:txBody>
@@ -7582,7 +7582,7 @@
               </a:defRPr>
             </a:pPr>
             <a:r>
-              <a:t>Vyhledat Neon</a:t>
+              <a:t>Vyhledat Atlas</a:t>
             </a:r>
           </a:p>
         </p:txBody>
@@ -8083,7 +8083,7 @@
               </a:defRPr>
             </a:pPr>
             <a:r>
-              <a:t>ROCKS</a:t>
+              <a:t>PULSE</a:t>
             </a:r>
           </a:p>
         </p:txBody>
@@ -8125,7 +8125,7 @@
               </a:defRPr>
             </a:pPr>
             <a:r>
-              <a:t>FESTIVAL / 2026</a:t>
+              <a:t>FEST / 2027</a:t>
             </a:r>
           </a:p>
         </p:txBody>
@@ -8976,7 +8976,7 @@
               </a:defRPr>
             </a:pPr>
             <a:r>
-              <a:t>ROCKS</a:t>
+              <a:t>PULSE</a:t>
             </a:r>
           </a:p>
         </p:txBody>
@@ -9018,7 +9018,7 @@
               </a:defRPr>
             </a:pPr>
             <a:r>
-              <a:t>FESTIVAL / 2026</a:t>
+              <a:t>FEST / 2027</a:t>
             </a:r>
           </a:p>
         </p:txBody>

--- a/odevzdani/cviceni-04-implementace/prezentace.pptx
+++ b/odevzdani/cviceni-04-implementace/prezentace.pptx
@@ -507,7 +507,7 @@
           <a:lstStyle/>
           <a:p>
             <a:r>
-              <a:t>Na wireframe navazuje kompletní současná implementace. Obsahuje výraznější vlastní identitu, asymetrickou kompozici a originální logo Prague Pulse Fest. Inspirací je obecný festivalový vizuální styl, nikoli převzetí loga nebo grafiky jiné akce. Materiály byly připraveny ze současné verze, protože skutečný historický export ze cvičení nebyl poskytnut. Při prezentaci ukážeme mobilní a desktopové zobrazení a dvě nejdůležitější cesty. Není třeba instalovat runtime nebo spouštět build. Název vracíme na Prague Pulse Fest a termín na výslovnou volbu zadavatele posouváme na 1.–3. srpna 2027. Hlavička má na notebooku hledání a navigaci v jednom řádku; odpočet pracuje s pražskou časovou zónou.</a:t>
+              <a:t>Na wireframe navazuje kompletní současná implementace. Obsahuje výraznější vlastní identitu, tmavou celoplošnou hlavičku a skutečnou historickou fotografii Výstaviště. Identitu doplňuje typografické logo bez zvukových sloupců Prague Pulse Fest. Inspirací je obecný festivalový vizuální styl, nikoli převzetí loga nebo grafiky jiné akce. Materiály byly připraveny ze současné verze, protože skutečný historický export ze cvičení nebyl poskytnut. Při prezentaci ukážeme mobilní a desktopové zobrazení a dvě nejdůležitější cesty. Není třeba instalovat runtime nebo spouštět build. Název vracíme na Prague Pulse Fest a termín na výslovnou volbu zadavatele posouváme na 1.–3. srpna 2027. Hlavička má na notebooku hledání a navigaci v jednom řádku; odpočet pracuje s pražskou časovou zónou.</a:t>
             </a:r>
           </a:p>
         </p:txBody>
@@ -577,7 +577,7 @@
           <a:lstStyle/>
           <a:p>
             <a:r>
-              <a:t>Implementace pokrývá všechny povinné obsahové části. Účinkující mají detail a vazbu na vystoupení. Program a scény jsou propojené, vyhledávání vede k odpovídajícímu objektu. Přepínač češtiny a angličtiny pomáhá zahraničním návštěvníkům. Třídenní tarify vysvětlují, co je zahrnuto; druhou cestou je výběr konkrétních míst. Účet je dobrovolný a historie je lokální. Na úvodu nemají technické podrobnosti překrývat obsah, ale omezení objednávky musí být srozumitelné tam, kde na nich záleží.</a:t>
+              <a:t>Implementace pokrývá všechny povinné obsahové části. Účinkující mají detail a vazbu na vystoupení. Program a scény jsou propojené, vyhledávání vede k odpovídajícímu objektu. Přepínač češtiny a angličtiny pomáhá zahraničním návštěvníkům. Třídenní tarify vysvětlují, co je zahrnuto; druhou cestou je výběr konkrétních míst. Účet je dobrovolný a historie je lokální. Na úvodu nemají technické podrobnosti překrývat obsah, ale omezení objednávky musí být srozumitelné tam, kde na nich záleží. Line-up je navržený, nikoli potvrzený; Noisia je archivní poslechový blok. Karty používají 41 skutečných licencovaných fotografií a 19 typografických náhrad. Síťová blokace byla vyřešena, zdroje, autoři a licence jsou evidované. Úvodní fotografie Výstaviště pochází z roku 2018 a není prezentovaná jako stav roku 2027.</a:t>
             </a:r>
           </a:p>
         </p:txBody>
@@ -717,7 +717,7 @@
           <a:lstStyle/>
           <a:p>
             <a:r>
-              <a:t>Zopakujeme S1 a S2 ve finálním rozhraní. Nejprve filtrujeme program a ověříme uložení osobního výběru. Potom hledáme Atlas Motel a přejdeme z detailu k jeho koncertu. Při ukázce sledujeme názvy, datum a scénu; efektní animace nesmí nahradit správný obsah. Krátce ukážeme klávesnici a zavření dialogu. Přístupnost není pouze kontrast: důležité je správné pořadí, popisky, zachování focusu a srozumitelná změna stavu. Plnou shodu s WCAG bez odpovídajícího auditu netvrdíme.</a:t>
+              <a:t>Zopakujeme S1 a S2 ve finálním rozhraní. Nejprve filtrujeme program a ověříme uložení osobního výběru. Potom hledáme DARKZY a přejdeme z detailu k jeho koncertu. Při ukázce sledujeme názvy, datum a scénu; efektní animace nesmí nahradit správný obsah. Krátce ukážeme klávesnici a zavření dialogu. Přístupnost není pouze kontrast: důležité je správné pořadí, popisky, zachování focusu a srozumitelná změna stavu. Plnou shodu s WCAG bez odpovídajícího auditu netvrdíme.</a:t>
             </a:r>
           </a:p>
         </p:txBody>
@@ -787,7 +787,7 @@
           <a:lstStyle/>
           <a:p>
             <a:r>
-              <a:t>Datová základna v XML je autoritativní. Přibalený JavaScriptový export umožňuje zobrazit program bez síťového načítání, což je důležité pro přímé otevření z disku. Generátor je pouze vývojová pomůcka. Ceny tarifů i hlavní údaje musí odpovídat XML. Objednávkový tok vytváří skutečný PDF soubor s identifikací objednávky, ale neposílá e-mail a neprovádí skutečnou platbu. Hesla, objednávky a obsazenost nemají serverové zázemí; místní účet není bezpečné sdílené přihlašování. Nové objednávky mají ročník 2027, historické bez ročníku zůstávají 2026 a neblokují nový rok. Panel soukromí dovoluje externí mapy samostatně; po povolení se mapa vloží automaticky a odvolání ji odstraní. Analytika ani reklamní sledování nejsou použité.</a:t>
+              <a:t>Datová základna v XML je autoritativní. Přibalený JavaScriptový export umožňuje zobrazit program bez síťového načítání, což je důležité pro přímé otevření z disku. Generátor je pouze vývojová pomůcka. Ceny tarifů i hlavní údaje musí odpovídat XML. Objednávkový tok vytváří skutečný PDF soubor s identifikací objednávky, ale neposílá e-mail a neprovádí skutečnou platbu. Hesla, objednávky a obsazenost nemají serverové zázemí; místní účet není bezpečné sdílené přihlašování. Nové objednávky mají ročník 2027, historické bez ročníku zůstávají 2026 a neblokují nový rok. Panel soukromí dovoluje externí mapy samostatně; po povolení se mapa vloží automaticky a odvolání ji odstraní. Analytika ani reklamní sledování nejsou použité. V košíku je jméno, příjmení, e-mail a telefon. Promo PULSE10 odečítá deset procent a PRAHA200 dvě stě korun, vždy nejvýše cenu vstupenek. Částky se při dokončení znovu počítají z tarifů. Volba karty, převodu, hotovosti, Apple Pay, Google Pay, Benefit Plus nebo faktury je vždy pouze simulace.</a:t>
             </a:r>
           </a:p>
         </p:txBody>
@@ -857,7 +857,7 @@
           <a:lstStyle/>
           <a:p>
             <a:r>
-              <a:t>AI pomohla s rozvržením, texty, originální grafikou, implementací a testovacími skripty. Testy ale musí běžet proti skutečné výsledné verzi. Přiložený validační záznam uvádí konkrétní výsledek, rozsah a přeskočené kontroly. Datové minimum a reference kontrolujeme odděleně od prohlížeče. PDF posuzujeme jako soubor a ne pouze potvrzení na obrazovce. Historické odevzdání, testy s reálnými návštěvníky ani externí cross-review nejsou doloženy. Tým musí umět vysvětlit, co přijal a které limity zůstávají.</a:t>
+              <a:t>AI pomohla s rozvržením, texty, originální grafikou, implementací a testovacími skripty. Testy ale musí běžet proti skutečné výsledné verzi. Přiložený validační záznam uvádí konkrétní výsledek, rozsah a přeskočené kontroly. Datové minimum a reference kontrolujeme odděleně od prohlížeče. PDF posuzujeme jako soubor a ne pouze potvrzení na obrazovce. Historické odevzdání, testy s reálnými návštěvníky ani externí cross-review nejsou doloženy. Tým musí umět vysvětlit, co přijal a které limity zůstávají. Dne 18. října 2026 jsme přímo přečetli Google SEO Starter Guide, Google AI features and your website a WAI Page Structure Tutorial. Používáme konkrétní titulky, vnitřní odkazy, viditelný text, pravdivé JSON-LD a logické landmarky a nadpisy. Zvláštní AI schéma ani speciální textový soubor nejsou vyžadované.</a:t>
             </a:r>
           </a:p>
         </p:txBody>
@@ -4077,50 +4077,7 @@
       </p:sp>
       <p:sp>
         <p:nvSpPr>
-          <p:cNvPr id="7" name="Rectangle 6"/>
-          <p:cNvSpPr/>
-          <p:nvPr/>
-        </p:nvSpPr>
-        <p:spPr>
-          <a:xfrm>
-            <a:off x="2266950" y="463550"/>
-            <a:ext cx="115570" cy="561340"/>
-          </a:xfrm>
-          <a:prstGeom prst="rect">
-            <a:avLst/>
-          </a:prstGeom>
-          <a:solidFill>
-            <a:srgbClr val="F4F0E7"/>
-          </a:solidFill>
-          <a:ln>
-            <a:noFill/>
-          </a:ln>
-        </p:spPr>
-        <p:style>
-          <a:lnRef idx="1">
-            <a:schemeClr val="accent1"/>
-          </a:lnRef>
-          <a:fillRef idx="3">
-            <a:schemeClr val="accent1"/>
-          </a:fillRef>
-          <a:effectRef idx="2">
-            <a:schemeClr val="accent1"/>
-          </a:effectRef>
-          <a:fontRef idx="minor">
-            <a:schemeClr val="lt1"/>
-          </a:fontRef>
-        </p:style>
-        <p:txBody>
-          <a:bodyPr rtlCol="0" anchor="ctr"/>
-          <a:lstStyle/>
-          <a:p>
-            <a:pPr algn="ctr"/>
-          </a:p>
-        </p:txBody>
-      </p:sp>
-      <p:sp>
-        <p:nvSpPr>
-          <p:cNvPr id="8" name="TextBox 7"/>
+          <p:cNvPr id="7" name="TextBox 6"/>
           <p:cNvSpPr txBox="1"/>
           <p:nvPr/>
         </p:nvSpPr>
@@ -4162,7 +4119,7 @@
       </p:sp>
       <p:sp>
         <p:nvSpPr>
-          <p:cNvPr id="9" name="TextBox 8"/>
+          <p:cNvPr id="8" name="TextBox 7"/>
           <p:cNvSpPr txBox="1"/>
           <p:nvPr/>
         </p:nvSpPr>
@@ -4223,7 +4180,7 @@
       </p:sp>
       <p:sp>
         <p:nvSpPr>
-          <p:cNvPr id="10" name="TextBox 9"/>
+          <p:cNvPr id="9" name="TextBox 8"/>
           <p:cNvSpPr txBox="1"/>
           <p:nvPr/>
         </p:nvSpPr>
@@ -4284,7 +4241,7 @@
       </p:sp>
       <p:sp>
         <p:nvSpPr>
-          <p:cNvPr id="11" name="TextBox 10"/>
+          <p:cNvPr id="10" name="TextBox 9"/>
           <p:cNvSpPr txBox="1"/>
           <p:nvPr/>
         </p:nvSpPr>
@@ -4326,7 +4283,7 @@
       </p:sp>
       <p:sp>
         <p:nvSpPr>
-          <p:cNvPr id="12" name="TextBox 11"/>
+          <p:cNvPr id="11" name="TextBox 10"/>
           <p:cNvSpPr txBox="1"/>
           <p:nvPr/>
         </p:nvSpPr>
@@ -4368,7 +4325,7 @@
       </p:sp>
       <p:sp>
         <p:nvSpPr>
-          <p:cNvPr id="13" name="TextBox 12"/>
+          <p:cNvPr id="12" name="TextBox 11"/>
           <p:cNvSpPr txBox="1"/>
           <p:nvPr/>
         </p:nvSpPr>
@@ -4410,7 +4367,7 @@
       </p:sp>
       <p:sp>
         <p:nvSpPr>
-          <p:cNvPr id="14" name="TextBox 13"/>
+          <p:cNvPr id="13" name="TextBox 12"/>
           <p:cNvSpPr txBox="1"/>
           <p:nvPr/>
         </p:nvSpPr>
@@ -4471,7 +4428,7 @@
       </p:sp>
       <p:sp>
         <p:nvSpPr>
-          <p:cNvPr id="15" name="TextBox 14"/>
+          <p:cNvPr id="14" name="TextBox 13"/>
           <p:cNvSpPr txBox="1"/>
           <p:nvPr/>
         </p:nvSpPr>
@@ -4532,7 +4489,7 @@
       </p:sp>
       <p:sp>
         <p:nvSpPr>
-          <p:cNvPr id="16" name="TextBox 15"/>
+          <p:cNvPr id="15" name="TextBox 14"/>
           <p:cNvSpPr txBox="1"/>
           <p:nvPr/>
         </p:nvSpPr>
@@ -4574,7 +4531,7 @@
       </p:sp>
       <p:sp>
         <p:nvSpPr>
-          <p:cNvPr id="17" name="TextBox 16"/>
+          <p:cNvPr id="16" name="TextBox 15"/>
           <p:cNvSpPr txBox="1"/>
           <p:nvPr/>
         </p:nvSpPr>
@@ -4803,20 +4760,62 @@
       </p:sp>
       <p:sp>
         <p:nvSpPr>
-          <p:cNvPr id="6" name="Rectangle 5"/>
+          <p:cNvPr id="6" name="TextBox 5"/>
+          <p:cNvSpPr txBox="1"/>
+          <p:nvPr/>
+        </p:nvSpPr>
+        <p:spPr>
+          <a:xfrm>
+            <a:off x="5588000" y="533400"/>
+            <a:ext cx="6070600" cy="220979"/>
+          </a:xfrm>
+          <a:prstGeom prst="rect">
+            <a:avLst/>
+          </a:prstGeom>
+          <a:noFill/>
+        </p:spPr>
+        <p:txBody>
+          <a:bodyPr wrap="none" lIns="0" rIns="0" tIns="0" bIns="0">
+            <a:spAutoFit/>
+          </a:bodyPr>
+          <a:lstStyle/>
+          <a:p>
+            <a:pPr>
+              <a:lnSpc>
+                <a:spcPts val="1240"/>
+              </a:lnSpc>
+              <a:spcAft>
+                <a:spcPts val="0"/>
+              </a:spcAft>
+              <a:defRPr sz="1000" b="1">
+                <a:solidFill>
+                  <a:srgbClr val="68635B"/>
+                </a:solidFill>
+                <a:latin typeface="Arial"/>
+              </a:defRPr>
+            </a:pPr>
+            <a:r>
+              <a:t>OBSAH A FUNKCE</a:t>
+            </a:r>
+          </a:p>
+        </p:txBody>
+      </p:sp>
+      <p:sp>
+        <p:nvSpPr>
+          <p:cNvPr id="7" name="Rectangle 6"/>
           <p:cNvSpPr/>
           <p:nvPr/>
         </p:nvSpPr>
         <p:spPr>
           <a:xfrm>
-            <a:off x="1866900" y="368300"/>
-            <a:ext cx="88900" cy="431800"/>
+            <a:off x="533400" y="1155700"/>
+            <a:ext cx="11125200" cy="25400"/>
           </a:xfrm>
           <a:prstGeom prst="rect">
             <a:avLst/>
           </a:prstGeom>
           <a:solidFill>
-            <a:srgbClr val="F45E2B"/>
+            <a:srgbClr val="181817"/>
           </a:solidFill>
           <a:ln>
             <a:noFill/>
@@ -4846,14 +4845,14 @@
       </p:sp>
       <p:sp>
         <p:nvSpPr>
-          <p:cNvPr id="7" name="TextBox 6"/>
+          <p:cNvPr id="8" name="TextBox 7"/>
           <p:cNvSpPr txBox="1"/>
           <p:nvPr/>
         </p:nvSpPr>
         <p:spPr>
           <a:xfrm>
-            <a:off x="5588000" y="533400"/>
-            <a:ext cx="6070600" cy="220979"/>
+            <a:off x="508000" y="1422400"/>
+            <a:ext cx="11176000" cy="1079500"/>
           </a:xfrm>
           <a:prstGeom prst="rect">
             <a:avLst/>
@@ -4868,34 +4867,34 @@
           <a:p>
             <a:pPr>
               <a:lnSpc>
-                <a:spcPts val="1240"/>
-              </a:lnSpc>
-              <a:spcAft>
-                <a:spcPts val="0"/>
-              </a:spcAft>
-              <a:defRPr sz="1000" b="1">
-                <a:solidFill>
-                  <a:srgbClr val="68635B"/>
-                </a:solidFill>
-                <a:latin typeface="Arial"/>
-              </a:defRPr>
-            </a:pPr>
-            <a:r>
-              <a:t>OBSAH A FUNKCE</a:t>
-            </a:r>
-          </a:p>
-        </p:txBody>
-      </p:sp>
-      <p:sp>
-        <p:nvSpPr>
-          <p:cNvPr id="8" name="Rectangle 7"/>
+                <a:spcPts val="3740"/>
+              </a:lnSpc>
+              <a:spcAft>
+                <a:spcPts val="0"/>
+              </a:spcAft>
+              <a:defRPr sz="3400" b="1">
+                <a:solidFill>
+                  <a:srgbClr val="181817"/>
+                </a:solidFill>
+                <a:latin typeface="Arial"/>
+              </a:defRPr>
+            </a:pPr>
+            <a:r>
+              <a:t>Hlavní části jsou propojené.</a:t>
+            </a:r>
+          </a:p>
+        </p:txBody>
+      </p:sp>
+      <p:sp>
+        <p:nvSpPr>
+          <p:cNvPr id="9" name="Rectangle 8"/>
           <p:cNvSpPr/>
           <p:nvPr/>
         </p:nvSpPr>
         <p:spPr>
           <a:xfrm>
-            <a:off x="533400" y="1155700"/>
-            <a:ext cx="11125200" cy="25400"/>
+            <a:off x="533400" y="2768600"/>
+            <a:ext cx="3556000" cy="2603500"/>
           </a:xfrm>
           <a:prstGeom prst="rect">
             <a:avLst/>
@@ -4931,48 +4930,6 @@
       </p:sp>
       <p:sp>
         <p:nvSpPr>
-          <p:cNvPr id="9" name="TextBox 8"/>
-          <p:cNvSpPr txBox="1"/>
-          <p:nvPr/>
-        </p:nvSpPr>
-        <p:spPr>
-          <a:xfrm>
-            <a:off x="508000" y="1422400"/>
-            <a:ext cx="11176000" cy="1079500"/>
-          </a:xfrm>
-          <a:prstGeom prst="rect">
-            <a:avLst/>
-          </a:prstGeom>
-          <a:noFill/>
-        </p:spPr>
-        <p:txBody>
-          <a:bodyPr wrap="none" lIns="0" rIns="0" tIns="0" bIns="0">
-            <a:spAutoFit/>
-          </a:bodyPr>
-          <a:lstStyle/>
-          <a:p>
-            <a:pPr>
-              <a:lnSpc>
-                <a:spcPts val="3740"/>
-              </a:lnSpc>
-              <a:spcAft>
-                <a:spcPts val="0"/>
-              </a:spcAft>
-              <a:defRPr sz="3400" b="1">
-                <a:solidFill>
-                  <a:srgbClr val="181817"/>
-                </a:solidFill>
-                <a:latin typeface="Arial"/>
-              </a:defRPr>
-            </a:pPr>
-            <a:r>
-              <a:t>Hlavní části jsou propojené.</a:t>
-            </a:r>
-          </a:p>
-        </p:txBody>
-      </p:sp>
-      <p:sp>
-        <p:nvSpPr>
           <p:cNvPr id="10" name="Rectangle 9"/>
           <p:cNvSpPr/>
           <p:nvPr/>
@@ -4980,13 +4937,13 @@
         <p:spPr>
           <a:xfrm>
             <a:off x="533400" y="2768600"/>
-            <a:ext cx="3556000" cy="2603500"/>
+            <a:ext cx="3556000" cy="76200"/>
           </a:xfrm>
           <a:prstGeom prst="rect">
             <a:avLst/>
           </a:prstGeom>
           <a:solidFill>
-            <a:srgbClr val="181817"/>
+            <a:srgbClr val="F45E2B"/>
           </a:solidFill>
           <a:ln>
             <a:noFill/>
@@ -5016,20 +4973,196 @@
       </p:sp>
       <p:sp>
         <p:nvSpPr>
-          <p:cNvPr id="11" name="Rectangle 10"/>
+          <p:cNvPr id="11" name="TextBox 10"/>
+          <p:cNvSpPr txBox="1"/>
+          <p:nvPr/>
+        </p:nvSpPr>
+        <p:spPr>
+          <a:xfrm>
+            <a:off x="749300" y="3035300"/>
+            <a:ext cx="3124200" cy="685800"/>
+          </a:xfrm>
+          <a:prstGeom prst="rect">
+            <a:avLst/>
+          </a:prstGeom>
+          <a:noFill/>
+        </p:spPr>
+        <p:txBody>
+          <a:bodyPr wrap="none" lIns="0" rIns="0" tIns="0" bIns="0">
+            <a:spAutoFit/>
+          </a:bodyPr>
+          <a:lstStyle/>
+          <a:p>
+            <a:pPr>
+              <a:lnSpc>
+                <a:spcPts val="2200"/>
+              </a:lnSpc>
+              <a:spcAft>
+                <a:spcPts val="0"/>
+              </a:spcAft>
+              <a:defRPr sz="2000" b="1">
+                <a:solidFill>
+                  <a:srgbClr val="F4F0E7"/>
+                </a:solidFill>
+                <a:latin typeface="Arial"/>
+              </a:defRPr>
+            </a:pPr>
+            <a:r>
+              <a:t>Objevovat</a:t>
+            </a:r>
+          </a:p>
+        </p:txBody>
+      </p:sp>
+      <p:sp>
+        <p:nvSpPr>
+          <p:cNvPr id="12" name="TextBox 11"/>
+          <p:cNvSpPr txBox="1"/>
+          <p:nvPr/>
+        </p:nvSpPr>
+        <p:spPr>
+          <a:xfrm>
+            <a:off x="749300" y="3733800"/>
+            <a:ext cx="3124200" cy="1511300"/>
+          </a:xfrm>
+          <a:prstGeom prst="rect">
+            <a:avLst/>
+          </a:prstGeom>
+          <a:noFill/>
+        </p:spPr>
+        <p:txBody>
+          <a:bodyPr wrap="none" lIns="0" rIns="0" tIns="0" bIns="0">
+            <a:spAutoFit/>
+          </a:bodyPr>
+          <a:lstStyle/>
+          <a:p>
+            <a:pPr>
+              <a:lnSpc>
+                <a:spcPts val="1689"/>
+              </a:lnSpc>
+              <a:spcAft>
+                <a:spcPts val="0"/>
+              </a:spcAft>
+              <a:defRPr sz="1420" b="0">
+                <a:solidFill>
+                  <a:srgbClr val="F4F0E7"/>
+                </a:solidFill>
+                <a:latin typeface="Arial"/>
+              </a:defRPr>
+            </a:pPr>
+            <a:r>
+              <a:t>Úvod, novinky, 60 skutečných</a:t>
+            </a:r>
+          </a:p>
+          <a:p>
+            <a:pPr>
+              <a:lnSpc>
+                <a:spcPts val="1689"/>
+              </a:lnSpc>
+              <a:spcAft>
+                <a:spcPts val="0"/>
+              </a:spcAft>
+              <a:defRPr sz="1420" b="0">
+                <a:solidFill>
+                  <a:srgbClr val="F4F0E7"/>
+                </a:solidFill>
+                <a:latin typeface="Arial"/>
+              </a:defRPr>
+            </a:pPr>
+            <a:r>
+              <a:t>interpretů, biografické detaily a</a:t>
+            </a:r>
+          </a:p>
+          <a:p>
+            <a:pPr>
+              <a:lnSpc>
+                <a:spcPts val="1689"/>
+              </a:lnSpc>
+              <a:spcAft>
+                <a:spcPts val="0"/>
+              </a:spcAft>
+              <a:defRPr sz="1420" b="0">
+                <a:solidFill>
+                  <a:srgbClr val="F4F0E7"/>
+                </a:solidFill>
+                <a:latin typeface="Arial"/>
+              </a:defRPr>
+            </a:pPr>
+            <a:r>
+              <a:t>hledání.</a:t>
+            </a:r>
+          </a:p>
+          <a:p>
+            <a:pPr>
+              <a:lnSpc>
+                <a:spcPts val="1689"/>
+              </a:lnSpc>
+              <a:spcAft>
+                <a:spcPts val="0"/>
+              </a:spcAft>
+              <a:defRPr sz="1420" b="0">
+                <a:solidFill>
+                  <a:srgbClr val="F4F0E7"/>
+                </a:solidFill>
+                <a:latin typeface="Arial"/>
+              </a:defRPr>
+            </a:pPr>
+          </a:p>
+          <a:p>
+            <a:pPr>
+              <a:lnSpc>
+                <a:spcPts val="1689"/>
+              </a:lnSpc>
+              <a:spcAft>
+                <a:spcPts val="0"/>
+              </a:spcAft>
+              <a:defRPr sz="1420" b="0">
+                <a:solidFill>
+                  <a:srgbClr val="F4F0E7"/>
+                </a:solidFill>
+                <a:latin typeface="Arial"/>
+              </a:defRPr>
+            </a:pPr>
+            <a:r>
+              <a:t>CZ / EN pro zahraniční</a:t>
+            </a:r>
+          </a:p>
+          <a:p>
+            <a:pPr>
+              <a:lnSpc>
+                <a:spcPts val="1689"/>
+              </a:lnSpc>
+              <a:spcAft>
+                <a:spcPts val="0"/>
+              </a:spcAft>
+              <a:defRPr sz="1420" b="0">
+                <a:solidFill>
+                  <a:srgbClr val="F4F0E7"/>
+                </a:solidFill>
+                <a:latin typeface="Arial"/>
+              </a:defRPr>
+            </a:pPr>
+            <a:r>
+              <a:t>návštěvníky.</a:t>
+            </a:r>
+          </a:p>
+        </p:txBody>
+      </p:sp>
+      <p:sp>
+        <p:nvSpPr>
+          <p:cNvPr id="13" name="Rectangle 12"/>
           <p:cNvSpPr/>
           <p:nvPr/>
         </p:nvSpPr>
         <p:spPr>
           <a:xfrm>
-            <a:off x="533400" y="2768600"/>
-            <a:ext cx="3556000" cy="76200"/>
+            <a:off x="4318000" y="2768600"/>
+            <a:ext cx="3556000" cy="2603500"/>
           </a:xfrm>
           <a:prstGeom prst="rect">
             <a:avLst/>
           </a:prstGeom>
           <a:solidFill>
-            <a:srgbClr val="F45E2B"/>
+            <a:srgbClr val="E7E0D5"/>
           </a:solidFill>
           <a:ln>
             <a:noFill/>
@@ -5059,163 +5192,6 @@
       </p:sp>
       <p:sp>
         <p:nvSpPr>
-          <p:cNvPr id="12" name="TextBox 11"/>
-          <p:cNvSpPr txBox="1"/>
-          <p:nvPr/>
-        </p:nvSpPr>
-        <p:spPr>
-          <a:xfrm>
-            <a:off x="749300" y="3035300"/>
-            <a:ext cx="3124200" cy="685800"/>
-          </a:xfrm>
-          <a:prstGeom prst="rect">
-            <a:avLst/>
-          </a:prstGeom>
-          <a:noFill/>
-        </p:spPr>
-        <p:txBody>
-          <a:bodyPr wrap="none" lIns="0" rIns="0" tIns="0" bIns="0">
-            <a:spAutoFit/>
-          </a:bodyPr>
-          <a:lstStyle/>
-          <a:p>
-            <a:pPr>
-              <a:lnSpc>
-                <a:spcPts val="2200"/>
-              </a:lnSpc>
-              <a:spcAft>
-                <a:spcPts val="0"/>
-              </a:spcAft>
-              <a:defRPr sz="2000" b="1">
-                <a:solidFill>
-                  <a:srgbClr val="F4F0E7"/>
-                </a:solidFill>
-                <a:latin typeface="Arial"/>
-              </a:defRPr>
-            </a:pPr>
-            <a:r>
-              <a:t>Objevovat</a:t>
-            </a:r>
-          </a:p>
-        </p:txBody>
-      </p:sp>
-      <p:sp>
-        <p:nvSpPr>
-          <p:cNvPr id="13" name="TextBox 12"/>
-          <p:cNvSpPr txBox="1"/>
-          <p:nvPr/>
-        </p:nvSpPr>
-        <p:spPr>
-          <a:xfrm>
-            <a:off x="749300" y="3733800"/>
-            <a:ext cx="3124200" cy="1511300"/>
-          </a:xfrm>
-          <a:prstGeom prst="rect">
-            <a:avLst/>
-          </a:prstGeom>
-          <a:noFill/>
-        </p:spPr>
-        <p:txBody>
-          <a:bodyPr wrap="none" lIns="0" rIns="0" tIns="0" bIns="0">
-            <a:spAutoFit/>
-          </a:bodyPr>
-          <a:lstStyle/>
-          <a:p>
-            <a:pPr>
-              <a:lnSpc>
-                <a:spcPts val="1689"/>
-              </a:lnSpc>
-              <a:spcAft>
-                <a:spcPts val="0"/>
-              </a:spcAft>
-              <a:defRPr sz="1420" b="0">
-                <a:solidFill>
-                  <a:srgbClr val="F4F0E7"/>
-                </a:solidFill>
-                <a:latin typeface="Arial"/>
-              </a:defRPr>
-            </a:pPr>
-            <a:r>
-              <a:t>Úvod, 60 účinkujících, detaily a</a:t>
-            </a:r>
-          </a:p>
-          <a:p>
-            <a:pPr>
-              <a:lnSpc>
-                <a:spcPts val="1689"/>
-              </a:lnSpc>
-              <a:spcAft>
-                <a:spcPts val="0"/>
-              </a:spcAft>
-              <a:defRPr sz="1420" b="0">
-                <a:solidFill>
-                  <a:srgbClr val="F4F0E7"/>
-                </a:solidFill>
-                <a:latin typeface="Arial"/>
-              </a:defRPr>
-            </a:pPr>
-            <a:r>
-              <a:t>obsahové vyhledávání.</a:t>
-            </a:r>
-          </a:p>
-          <a:p>
-            <a:pPr>
-              <a:lnSpc>
-                <a:spcPts val="1689"/>
-              </a:lnSpc>
-              <a:spcAft>
-                <a:spcPts val="0"/>
-              </a:spcAft>
-              <a:defRPr sz="1420" b="0">
-                <a:solidFill>
-                  <a:srgbClr val="F4F0E7"/>
-                </a:solidFill>
-                <a:latin typeface="Arial"/>
-              </a:defRPr>
-            </a:pPr>
-          </a:p>
-          <a:p>
-            <a:pPr>
-              <a:lnSpc>
-                <a:spcPts val="1689"/>
-              </a:lnSpc>
-              <a:spcAft>
-                <a:spcPts val="0"/>
-              </a:spcAft>
-              <a:defRPr sz="1420" b="0">
-                <a:solidFill>
-                  <a:srgbClr val="F4F0E7"/>
-                </a:solidFill>
-                <a:latin typeface="Arial"/>
-              </a:defRPr>
-            </a:pPr>
-            <a:r>
-              <a:t>CZ / EN pro zahraniční</a:t>
-            </a:r>
-          </a:p>
-          <a:p>
-            <a:pPr>
-              <a:lnSpc>
-                <a:spcPts val="1689"/>
-              </a:lnSpc>
-              <a:spcAft>
-                <a:spcPts val="0"/>
-              </a:spcAft>
-              <a:defRPr sz="1420" b="0">
-                <a:solidFill>
-                  <a:srgbClr val="F4F0E7"/>
-                </a:solidFill>
-                <a:latin typeface="Arial"/>
-              </a:defRPr>
-            </a:pPr>
-            <a:r>
-              <a:t>návštěvníky.</a:t>
-            </a:r>
-          </a:p>
-        </p:txBody>
-      </p:sp>
-      <p:sp>
-        <p:nvSpPr>
           <p:cNvPr id="14" name="Rectangle 13"/>
           <p:cNvSpPr/>
           <p:nvPr/>
@@ -5223,13 +5199,13 @@
         <p:spPr>
           <a:xfrm>
             <a:off x="4318000" y="2768600"/>
-            <a:ext cx="3556000" cy="2603500"/>
+            <a:ext cx="3556000" cy="76200"/>
           </a:xfrm>
           <a:prstGeom prst="rect">
             <a:avLst/>
           </a:prstGeom>
           <a:solidFill>
-            <a:srgbClr val="E7E0D5"/>
+            <a:srgbClr val="F45E2B"/>
           </a:solidFill>
           <a:ln>
             <a:noFill/>
@@ -5259,20 +5235,158 @@
       </p:sp>
       <p:sp>
         <p:nvSpPr>
-          <p:cNvPr id="15" name="Rectangle 14"/>
+          <p:cNvPr id="15" name="TextBox 14"/>
+          <p:cNvSpPr txBox="1"/>
+          <p:nvPr/>
+        </p:nvSpPr>
+        <p:spPr>
+          <a:xfrm>
+            <a:off x="4533900" y="3035300"/>
+            <a:ext cx="3124200" cy="685800"/>
+          </a:xfrm>
+          <a:prstGeom prst="rect">
+            <a:avLst/>
+          </a:prstGeom>
+          <a:noFill/>
+        </p:spPr>
+        <p:txBody>
+          <a:bodyPr wrap="none" lIns="0" rIns="0" tIns="0" bIns="0">
+            <a:spAutoFit/>
+          </a:bodyPr>
+          <a:lstStyle/>
+          <a:p>
+            <a:pPr>
+              <a:lnSpc>
+                <a:spcPts val="2200"/>
+              </a:lnSpc>
+              <a:spcAft>
+                <a:spcPts val="0"/>
+              </a:spcAft>
+              <a:defRPr sz="2000" b="1">
+                <a:solidFill>
+                  <a:srgbClr val="181817"/>
+                </a:solidFill>
+                <a:latin typeface="Arial"/>
+              </a:defRPr>
+            </a:pPr>
+            <a:r>
+              <a:t>Plánovat</a:t>
+            </a:r>
+          </a:p>
+        </p:txBody>
+      </p:sp>
+      <p:sp>
+        <p:nvSpPr>
+          <p:cNvPr id="16" name="TextBox 15"/>
+          <p:cNvSpPr txBox="1"/>
+          <p:nvPr/>
+        </p:nvSpPr>
+        <p:spPr>
+          <a:xfrm>
+            <a:off x="4533900" y="3733800"/>
+            <a:ext cx="3124200" cy="1511300"/>
+          </a:xfrm>
+          <a:prstGeom prst="rect">
+            <a:avLst/>
+          </a:prstGeom>
+          <a:noFill/>
+        </p:spPr>
+        <p:txBody>
+          <a:bodyPr wrap="none" lIns="0" rIns="0" tIns="0" bIns="0">
+            <a:spAutoFit/>
+          </a:bodyPr>
+          <a:lstStyle/>
+          <a:p>
+            <a:pPr>
+              <a:lnSpc>
+                <a:spcPts val="1689"/>
+              </a:lnSpc>
+              <a:spcAft>
+                <a:spcPts val="0"/>
+              </a:spcAft>
+              <a:defRPr sz="1420" b="0">
+                <a:solidFill>
+                  <a:srgbClr val="181817"/>
+                </a:solidFill>
+                <a:latin typeface="Arial"/>
+              </a:defRPr>
+            </a:pPr>
+            <a:r>
+              <a:t>Program, scény, osobní výběr a</a:t>
+            </a:r>
+          </a:p>
+          <a:p>
+            <a:pPr>
+              <a:lnSpc>
+                <a:spcPts val="1689"/>
+              </a:lnSpc>
+              <a:spcAft>
+                <a:spcPts val="0"/>
+              </a:spcAft>
+              <a:defRPr sz="1420" b="0">
+                <a:solidFill>
+                  <a:srgbClr val="181817"/>
+                </a:solidFill>
+                <a:latin typeface="Arial"/>
+              </a:defRPr>
+            </a:pPr>
+            <a:r>
+              <a:t>praktické informace.</a:t>
+            </a:r>
+          </a:p>
+          <a:p>
+            <a:pPr>
+              <a:lnSpc>
+                <a:spcPts val="1689"/>
+              </a:lnSpc>
+              <a:spcAft>
+                <a:spcPts val="0"/>
+              </a:spcAft>
+              <a:defRPr sz="1420" b="0">
+                <a:solidFill>
+                  <a:srgbClr val="181817"/>
+                </a:solidFill>
+                <a:latin typeface="Arial"/>
+              </a:defRPr>
+            </a:pPr>
+          </a:p>
+          <a:p>
+            <a:pPr>
+              <a:lnSpc>
+                <a:spcPts val="1689"/>
+              </a:lnSpc>
+              <a:spcAft>
+                <a:spcPts val="0"/>
+              </a:spcAft>
+              <a:defRPr sz="1420" b="0">
+                <a:solidFill>
+                  <a:srgbClr val="181817"/>
+                </a:solidFill>
+                <a:latin typeface="Arial"/>
+              </a:defRPr>
+            </a:pPr>
+            <a:r>
+              <a:t>Mapa doplňuje textovou orientaci.</a:t>
+            </a:r>
+          </a:p>
+        </p:txBody>
+      </p:sp>
+      <p:sp>
+        <p:nvSpPr>
+          <p:cNvPr id="17" name="Rectangle 16"/>
           <p:cNvSpPr/>
           <p:nvPr/>
         </p:nvSpPr>
         <p:spPr>
           <a:xfrm>
-            <a:off x="4318000" y="2768600"/>
-            <a:ext cx="3556000" cy="76200"/>
+            <a:off x="8102600" y="2768600"/>
+            <a:ext cx="3556000" cy="2603500"/>
           </a:xfrm>
           <a:prstGeom prst="rect">
             <a:avLst/>
           </a:prstGeom>
           <a:solidFill>
-            <a:srgbClr val="F45E2B"/>
+            <a:srgbClr val="E7E0D5"/>
           </a:solidFill>
           <a:ln>
             <a:noFill/>
@@ -5302,144 +5416,6 @@
       </p:sp>
       <p:sp>
         <p:nvSpPr>
-          <p:cNvPr id="16" name="TextBox 15"/>
-          <p:cNvSpPr txBox="1"/>
-          <p:nvPr/>
-        </p:nvSpPr>
-        <p:spPr>
-          <a:xfrm>
-            <a:off x="4533900" y="3035300"/>
-            <a:ext cx="3124200" cy="685800"/>
-          </a:xfrm>
-          <a:prstGeom prst="rect">
-            <a:avLst/>
-          </a:prstGeom>
-          <a:noFill/>
-        </p:spPr>
-        <p:txBody>
-          <a:bodyPr wrap="none" lIns="0" rIns="0" tIns="0" bIns="0">
-            <a:spAutoFit/>
-          </a:bodyPr>
-          <a:lstStyle/>
-          <a:p>
-            <a:pPr>
-              <a:lnSpc>
-                <a:spcPts val="2200"/>
-              </a:lnSpc>
-              <a:spcAft>
-                <a:spcPts val="0"/>
-              </a:spcAft>
-              <a:defRPr sz="2000" b="1">
-                <a:solidFill>
-                  <a:srgbClr val="181817"/>
-                </a:solidFill>
-                <a:latin typeface="Arial"/>
-              </a:defRPr>
-            </a:pPr>
-            <a:r>
-              <a:t>Plánovat</a:t>
-            </a:r>
-          </a:p>
-        </p:txBody>
-      </p:sp>
-      <p:sp>
-        <p:nvSpPr>
-          <p:cNvPr id="17" name="TextBox 16"/>
-          <p:cNvSpPr txBox="1"/>
-          <p:nvPr/>
-        </p:nvSpPr>
-        <p:spPr>
-          <a:xfrm>
-            <a:off x="4533900" y="3733800"/>
-            <a:ext cx="3124200" cy="1511300"/>
-          </a:xfrm>
-          <a:prstGeom prst="rect">
-            <a:avLst/>
-          </a:prstGeom>
-          <a:noFill/>
-        </p:spPr>
-        <p:txBody>
-          <a:bodyPr wrap="none" lIns="0" rIns="0" tIns="0" bIns="0">
-            <a:spAutoFit/>
-          </a:bodyPr>
-          <a:lstStyle/>
-          <a:p>
-            <a:pPr>
-              <a:lnSpc>
-                <a:spcPts val="1689"/>
-              </a:lnSpc>
-              <a:spcAft>
-                <a:spcPts val="0"/>
-              </a:spcAft>
-              <a:defRPr sz="1420" b="0">
-                <a:solidFill>
-                  <a:srgbClr val="181817"/>
-                </a:solidFill>
-                <a:latin typeface="Arial"/>
-              </a:defRPr>
-            </a:pPr>
-            <a:r>
-              <a:t>Program, scény, osobní výběr a</a:t>
-            </a:r>
-          </a:p>
-          <a:p>
-            <a:pPr>
-              <a:lnSpc>
-                <a:spcPts val="1689"/>
-              </a:lnSpc>
-              <a:spcAft>
-                <a:spcPts val="0"/>
-              </a:spcAft>
-              <a:defRPr sz="1420" b="0">
-                <a:solidFill>
-                  <a:srgbClr val="181817"/>
-                </a:solidFill>
-                <a:latin typeface="Arial"/>
-              </a:defRPr>
-            </a:pPr>
-            <a:r>
-              <a:t>praktické informace.</a:t>
-            </a:r>
-          </a:p>
-          <a:p>
-            <a:pPr>
-              <a:lnSpc>
-                <a:spcPts val="1689"/>
-              </a:lnSpc>
-              <a:spcAft>
-                <a:spcPts val="0"/>
-              </a:spcAft>
-              <a:defRPr sz="1420" b="0">
-                <a:solidFill>
-                  <a:srgbClr val="181817"/>
-                </a:solidFill>
-                <a:latin typeface="Arial"/>
-              </a:defRPr>
-            </a:pPr>
-          </a:p>
-          <a:p>
-            <a:pPr>
-              <a:lnSpc>
-                <a:spcPts val="1689"/>
-              </a:lnSpc>
-              <a:spcAft>
-                <a:spcPts val="0"/>
-              </a:spcAft>
-              <a:defRPr sz="1420" b="0">
-                <a:solidFill>
-                  <a:srgbClr val="181817"/>
-                </a:solidFill>
-                <a:latin typeface="Arial"/>
-              </a:defRPr>
-            </a:pPr>
-            <a:r>
-              <a:t>Mapa doplňuje textovou orientaci.</a:t>
-            </a:r>
-          </a:p>
-        </p:txBody>
-      </p:sp>
-      <p:sp>
-        <p:nvSpPr>
           <p:cNvPr id="18" name="Rectangle 17"/>
           <p:cNvSpPr/>
           <p:nvPr/>
@@ -5447,13 +5423,13 @@
         <p:spPr>
           <a:xfrm>
             <a:off x="8102600" y="2768600"/>
-            <a:ext cx="3556000" cy="2603500"/>
+            <a:ext cx="3556000" cy="76200"/>
           </a:xfrm>
           <a:prstGeom prst="rect">
             <a:avLst/>
           </a:prstGeom>
           <a:solidFill>
-            <a:srgbClr val="E7E0D5"/>
+            <a:srgbClr val="F45E2B"/>
           </a:solidFill>
           <a:ln>
             <a:noFill/>
@@ -5483,50 +5459,7 @@
       </p:sp>
       <p:sp>
         <p:nvSpPr>
-          <p:cNvPr id="19" name="Rectangle 18"/>
-          <p:cNvSpPr/>
-          <p:nvPr/>
-        </p:nvSpPr>
-        <p:spPr>
-          <a:xfrm>
-            <a:off x="8102600" y="2768600"/>
-            <a:ext cx="3556000" cy="76200"/>
-          </a:xfrm>
-          <a:prstGeom prst="rect">
-            <a:avLst/>
-          </a:prstGeom>
-          <a:solidFill>
-            <a:srgbClr val="F45E2B"/>
-          </a:solidFill>
-          <a:ln>
-            <a:noFill/>
-          </a:ln>
-        </p:spPr>
-        <p:style>
-          <a:lnRef idx="1">
-            <a:schemeClr val="accent1"/>
-          </a:lnRef>
-          <a:fillRef idx="3">
-            <a:schemeClr val="accent1"/>
-          </a:fillRef>
-          <a:effectRef idx="2">
-            <a:schemeClr val="accent1"/>
-          </a:effectRef>
-          <a:fontRef idx="minor">
-            <a:schemeClr val="lt1"/>
-          </a:fontRef>
-        </p:style>
-        <p:txBody>
-          <a:bodyPr rtlCol="0" anchor="ctr"/>
-          <a:lstStyle/>
-          <a:p>
-            <a:pPr algn="ctr"/>
-          </a:p>
-        </p:txBody>
-      </p:sp>
-      <p:sp>
-        <p:nvSpPr>
-          <p:cNvPr id="20" name="TextBox 19"/>
+          <p:cNvPr id="19" name="TextBox 18"/>
           <p:cNvSpPr txBox="1"/>
           <p:nvPr/>
         </p:nvSpPr>
@@ -5568,7 +5501,7 @@
       </p:sp>
       <p:sp>
         <p:nvSpPr>
-          <p:cNvPr id="21" name="TextBox 20"/>
+          <p:cNvPr id="20" name="TextBox 19"/>
           <p:cNvSpPr txBox="1"/>
           <p:nvPr/>
         </p:nvSpPr>
@@ -5603,7 +5536,7 @@
               </a:defRPr>
             </a:pPr>
             <a:r>
-              <a:t>Třídenní tarify, místa, košík a PDF.</a:t>
+              <a:t>Konečné ceny, množství 1–8,</a:t>
             </a:r>
           </a:p>
           <a:p>
@@ -5621,6 +5554,9 @@
                 <a:latin typeface="Arial"/>
               </a:defRPr>
             </a:pPr>
+            <a:r>
+              <a:t>místa, promo kód a PDF.</a:t>
+            </a:r>
           </a:p>
           <a:p>
             <a:pPr>
@@ -5637,9 +5573,6 @@
                 <a:latin typeface="Arial"/>
               </a:defRPr>
             </a:pPr>
-            <a:r>
-              <a:t>Lokální účet a historie</a:t>
-            </a:r>
           </a:p>
           <a:p>
             <a:pPr>
@@ -5657,14 +5590,33 @@
               </a:defRPr>
             </a:pPr>
             <a:r>
-              <a:t>objednávek.</a:t>
-            </a:r>
-          </a:p>
-        </p:txBody>
-      </p:sp>
-      <p:sp>
-        <p:nvSpPr>
-          <p:cNvPr id="22" name="TextBox 21"/>
+              <a:t>Sedm zkušebních platebních</a:t>
+            </a:r>
+          </a:p>
+          <a:p>
+            <a:pPr>
+              <a:lnSpc>
+                <a:spcPts val="1689"/>
+              </a:lnSpc>
+              <a:spcAft>
+                <a:spcPts val="0"/>
+              </a:spcAft>
+              <a:defRPr sz="1420" b="0">
+                <a:solidFill>
+                  <a:srgbClr val="181817"/>
+                </a:solidFill>
+                <a:latin typeface="Arial"/>
+              </a:defRPr>
+            </a:pPr>
+            <a:r>
+              <a:t>metod.</a:t>
+            </a:r>
+          </a:p>
+        </p:txBody>
+      </p:sp>
+      <p:sp>
+        <p:nvSpPr>
+          <p:cNvPr id="21" name="TextBox 20"/>
           <p:cNvSpPr txBox="1"/>
           <p:nvPr/>
         </p:nvSpPr>
@@ -5706,7 +5658,7 @@
       </p:sp>
       <p:sp>
         <p:nvSpPr>
-          <p:cNvPr id="23" name="TextBox 22"/>
+          <p:cNvPr id="22" name="TextBox 21"/>
           <p:cNvSpPr txBox="1"/>
           <p:nvPr/>
         </p:nvSpPr>
@@ -5935,20 +5887,62 @@
       </p:sp>
       <p:sp>
         <p:nvSpPr>
-          <p:cNvPr id="6" name="Rectangle 5"/>
+          <p:cNvPr id="6" name="TextBox 5"/>
+          <p:cNvSpPr txBox="1"/>
+          <p:nvPr/>
+        </p:nvSpPr>
+        <p:spPr>
+          <a:xfrm>
+            <a:off x="5588000" y="533400"/>
+            <a:ext cx="6070600" cy="220979"/>
+          </a:xfrm>
+          <a:prstGeom prst="rect">
+            <a:avLst/>
+          </a:prstGeom>
+          <a:noFill/>
+        </p:spPr>
+        <p:txBody>
+          <a:bodyPr wrap="none" lIns="0" rIns="0" tIns="0" bIns="0">
+            <a:spAutoFit/>
+          </a:bodyPr>
+          <a:lstStyle/>
+          <a:p>
+            <a:pPr>
+              <a:lnSpc>
+                <a:spcPts val="1240"/>
+              </a:lnSpc>
+              <a:spcAft>
+                <a:spcPts val="0"/>
+              </a:spcAft>
+              <a:defRPr sz="1000" b="1">
+                <a:solidFill>
+                  <a:srgbClr val="68635B"/>
+                </a:solidFill>
+                <a:latin typeface="Arial"/>
+              </a:defRPr>
+            </a:pPr>
+            <a:r>
+              <a:t>MOBILNÍ A DESKTOPOVÉ ZOBRAZENÍ</a:t>
+            </a:r>
+          </a:p>
+        </p:txBody>
+      </p:sp>
+      <p:sp>
+        <p:nvSpPr>
+          <p:cNvPr id="7" name="Rectangle 6"/>
           <p:cNvSpPr/>
           <p:nvPr/>
         </p:nvSpPr>
         <p:spPr>
           <a:xfrm>
-            <a:off x="1866900" y="368300"/>
-            <a:ext cx="88900" cy="431800"/>
+            <a:off x="533400" y="1155700"/>
+            <a:ext cx="11125200" cy="25400"/>
           </a:xfrm>
           <a:prstGeom prst="rect">
             <a:avLst/>
           </a:prstGeom>
           <a:solidFill>
-            <a:srgbClr val="F45E2B"/>
+            <a:srgbClr val="181817"/>
           </a:solidFill>
           <a:ln>
             <a:noFill/>
@@ -5978,14 +5972,14 @@
       </p:sp>
       <p:sp>
         <p:nvSpPr>
-          <p:cNvPr id="7" name="TextBox 6"/>
+          <p:cNvPr id="8" name="TextBox 7"/>
           <p:cNvSpPr txBox="1"/>
           <p:nvPr/>
         </p:nvSpPr>
         <p:spPr>
           <a:xfrm>
-            <a:off x="5588000" y="533400"/>
-            <a:ext cx="6070600" cy="220979"/>
+            <a:off x="508000" y="1422400"/>
+            <a:ext cx="11176000" cy="1079500"/>
           </a:xfrm>
           <a:prstGeom prst="rect">
             <a:avLst/>
@@ -6000,34 +5994,34 @@
           <a:p>
             <a:pPr>
               <a:lnSpc>
-                <a:spcPts val="1240"/>
-              </a:lnSpc>
-              <a:spcAft>
-                <a:spcPts val="0"/>
-              </a:spcAft>
-              <a:defRPr sz="1000" b="1">
-                <a:solidFill>
-                  <a:srgbClr val="68635B"/>
-                </a:solidFill>
-                <a:latin typeface="Arial"/>
-              </a:defRPr>
-            </a:pPr>
-            <a:r>
-              <a:t>MOBILNÍ A DESKTOPOVÉ ZOBRAZENÍ</a:t>
-            </a:r>
-          </a:p>
-        </p:txBody>
-      </p:sp>
-      <p:sp>
-        <p:nvSpPr>
-          <p:cNvPr id="8" name="Rectangle 7"/>
+                <a:spcPts val="3740"/>
+              </a:lnSpc>
+              <a:spcAft>
+                <a:spcPts val="0"/>
+              </a:spcAft>
+              <a:defRPr sz="3400" b="1">
+                <a:solidFill>
+                  <a:srgbClr val="181817"/>
+                </a:solidFill>
+                <a:latin typeface="Arial"/>
+              </a:defRPr>
+            </a:pPr>
+            <a:r>
+              <a:t>Flexbox i Grid mají své místo.</a:t>
+            </a:r>
+          </a:p>
+        </p:txBody>
+      </p:sp>
+      <p:sp>
+        <p:nvSpPr>
+          <p:cNvPr id="9" name="Rectangle 8"/>
           <p:cNvSpPr/>
           <p:nvPr/>
         </p:nvSpPr>
         <p:spPr>
           <a:xfrm>
-            <a:off x="533400" y="1155700"/>
-            <a:ext cx="11125200" cy="25400"/>
+            <a:off x="533400" y="2768600"/>
+            <a:ext cx="5448300" cy="2603500"/>
           </a:xfrm>
           <a:prstGeom prst="rect">
             <a:avLst/>
@@ -6063,48 +6057,6 @@
       </p:sp>
       <p:sp>
         <p:nvSpPr>
-          <p:cNvPr id="9" name="TextBox 8"/>
-          <p:cNvSpPr txBox="1"/>
-          <p:nvPr/>
-        </p:nvSpPr>
-        <p:spPr>
-          <a:xfrm>
-            <a:off x="508000" y="1422400"/>
-            <a:ext cx="11176000" cy="1079500"/>
-          </a:xfrm>
-          <a:prstGeom prst="rect">
-            <a:avLst/>
-          </a:prstGeom>
-          <a:noFill/>
-        </p:spPr>
-        <p:txBody>
-          <a:bodyPr wrap="none" lIns="0" rIns="0" tIns="0" bIns="0">
-            <a:spAutoFit/>
-          </a:bodyPr>
-          <a:lstStyle/>
-          <a:p>
-            <a:pPr>
-              <a:lnSpc>
-                <a:spcPts val="3740"/>
-              </a:lnSpc>
-              <a:spcAft>
-                <a:spcPts val="0"/>
-              </a:spcAft>
-              <a:defRPr sz="3400" b="1">
-                <a:solidFill>
-                  <a:srgbClr val="181817"/>
-                </a:solidFill>
-                <a:latin typeface="Arial"/>
-              </a:defRPr>
-            </a:pPr>
-            <a:r>
-              <a:t>Flexbox i Grid mají své místo.</a:t>
-            </a:r>
-          </a:p>
-        </p:txBody>
-      </p:sp>
-      <p:sp>
-        <p:nvSpPr>
           <p:cNvPr id="10" name="Rectangle 9"/>
           <p:cNvSpPr/>
           <p:nvPr/>
@@ -6112,13 +6064,13 @@
         <p:spPr>
           <a:xfrm>
             <a:off x="533400" y="2768600"/>
-            <a:ext cx="5448300" cy="2603500"/>
+            <a:ext cx="5448300" cy="76200"/>
           </a:xfrm>
           <a:prstGeom prst="rect">
             <a:avLst/>
           </a:prstGeom>
           <a:solidFill>
-            <a:srgbClr val="181817"/>
+            <a:srgbClr val="F45E2B"/>
           </a:solidFill>
           <a:ln>
             <a:noFill/>
@@ -6148,20 +6100,139 @@
       </p:sp>
       <p:sp>
         <p:nvSpPr>
-          <p:cNvPr id="11" name="Rectangle 10"/>
+          <p:cNvPr id="11" name="TextBox 10"/>
+          <p:cNvSpPr txBox="1"/>
+          <p:nvPr/>
+        </p:nvSpPr>
+        <p:spPr>
+          <a:xfrm>
+            <a:off x="749300" y="3035300"/>
+            <a:ext cx="5016500" cy="685800"/>
+          </a:xfrm>
+          <a:prstGeom prst="rect">
+            <a:avLst/>
+          </a:prstGeom>
+          <a:noFill/>
+        </p:spPr>
+        <p:txBody>
+          <a:bodyPr wrap="none" lIns="0" rIns="0" tIns="0" bIns="0">
+            <a:spAutoFit/>
+          </a:bodyPr>
+          <a:lstStyle/>
+          <a:p>
+            <a:pPr>
+              <a:lnSpc>
+                <a:spcPts val="2200"/>
+              </a:lnSpc>
+              <a:spcAft>
+                <a:spcPts val="0"/>
+              </a:spcAft>
+              <a:defRPr sz="2000" b="1">
+                <a:solidFill>
+                  <a:srgbClr val="F4F0E7"/>
+                </a:solidFill>
+                <a:latin typeface="Arial"/>
+              </a:defRPr>
+            </a:pPr>
+            <a:r>
+              <a:t>Flexbox</a:t>
+            </a:r>
+          </a:p>
+        </p:txBody>
+      </p:sp>
+      <p:sp>
+        <p:nvSpPr>
+          <p:cNvPr id="12" name="TextBox 11"/>
+          <p:cNvSpPr txBox="1"/>
+          <p:nvPr/>
+        </p:nvSpPr>
+        <p:spPr>
+          <a:xfrm>
+            <a:off x="749300" y="3733800"/>
+            <a:ext cx="5016500" cy="1511300"/>
+          </a:xfrm>
+          <a:prstGeom prst="rect">
+            <a:avLst/>
+          </a:prstGeom>
+          <a:noFill/>
+        </p:spPr>
+        <p:txBody>
+          <a:bodyPr wrap="none" lIns="0" rIns="0" tIns="0" bIns="0">
+            <a:spAutoFit/>
+          </a:bodyPr>
+          <a:lstStyle/>
+          <a:p>
+            <a:pPr>
+              <a:lnSpc>
+                <a:spcPts val="1689"/>
+              </a:lnSpc>
+              <a:spcAft>
+                <a:spcPts val="0"/>
+              </a:spcAft>
+              <a:defRPr sz="1420" b="0">
+                <a:solidFill>
+                  <a:srgbClr val="F4F0E7"/>
+                </a:solidFill>
+                <a:latin typeface="Arial"/>
+              </a:defRPr>
+            </a:pPr>
+            <a:r>
+              <a:t>Navigace, akce, přepínače a řádky formulářů.</a:t>
+            </a:r>
+          </a:p>
+          <a:p>
+            <a:pPr>
+              <a:lnSpc>
+                <a:spcPts val="1689"/>
+              </a:lnSpc>
+              <a:spcAft>
+                <a:spcPts val="0"/>
+              </a:spcAft>
+              <a:defRPr sz="1420" b="0">
+                <a:solidFill>
+                  <a:srgbClr val="F4F0E7"/>
+                </a:solidFill>
+                <a:latin typeface="Arial"/>
+              </a:defRPr>
+            </a:pPr>
+          </a:p>
+          <a:p>
+            <a:pPr>
+              <a:lnSpc>
+                <a:spcPts val="1689"/>
+              </a:lnSpc>
+              <a:spcAft>
+                <a:spcPts val="0"/>
+              </a:spcAft>
+              <a:defRPr sz="1420" b="0">
+                <a:solidFill>
+                  <a:srgbClr val="F4F0E7"/>
+                </a:solidFill>
+                <a:latin typeface="Arial"/>
+              </a:defRPr>
+            </a:pPr>
+            <a:r>
+              <a:t>Zalamování podle dostupného prostoru.</a:t>
+            </a:r>
+          </a:p>
+        </p:txBody>
+      </p:sp>
+      <p:sp>
+        <p:nvSpPr>
+          <p:cNvPr id="13" name="Rectangle 12"/>
           <p:cNvSpPr/>
           <p:nvPr/>
         </p:nvSpPr>
         <p:spPr>
           <a:xfrm>
-            <a:off x="533400" y="2768600"/>
-            <a:ext cx="5448300" cy="76200"/>
+            <a:off x="6210300" y="2768600"/>
+            <a:ext cx="5448300" cy="2603500"/>
           </a:xfrm>
           <a:prstGeom prst="rect">
             <a:avLst/>
           </a:prstGeom>
           <a:solidFill>
-            <a:srgbClr val="F45E2B"/>
+            <a:srgbClr val="E7E0D5"/>
           </a:solidFill>
           <a:ln>
             <a:noFill/>
@@ -6191,125 +6262,6 @@
       </p:sp>
       <p:sp>
         <p:nvSpPr>
-          <p:cNvPr id="12" name="TextBox 11"/>
-          <p:cNvSpPr txBox="1"/>
-          <p:nvPr/>
-        </p:nvSpPr>
-        <p:spPr>
-          <a:xfrm>
-            <a:off x="749300" y="3035300"/>
-            <a:ext cx="5016500" cy="685800"/>
-          </a:xfrm>
-          <a:prstGeom prst="rect">
-            <a:avLst/>
-          </a:prstGeom>
-          <a:noFill/>
-        </p:spPr>
-        <p:txBody>
-          <a:bodyPr wrap="none" lIns="0" rIns="0" tIns="0" bIns="0">
-            <a:spAutoFit/>
-          </a:bodyPr>
-          <a:lstStyle/>
-          <a:p>
-            <a:pPr>
-              <a:lnSpc>
-                <a:spcPts val="2200"/>
-              </a:lnSpc>
-              <a:spcAft>
-                <a:spcPts val="0"/>
-              </a:spcAft>
-              <a:defRPr sz="2000" b="1">
-                <a:solidFill>
-                  <a:srgbClr val="F4F0E7"/>
-                </a:solidFill>
-                <a:latin typeface="Arial"/>
-              </a:defRPr>
-            </a:pPr>
-            <a:r>
-              <a:t>Flexbox</a:t>
-            </a:r>
-          </a:p>
-        </p:txBody>
-      </p:sp>
-      <p:sp>
-        <p:nvSpPr>
-          <p:cNvPr id="13" name="TextBox 12"/>
-          <p:cNvSpPr txBox="1"/>
-          <p:nvPr/>
-        </p:nvSpPr>
-        <p:spPr>
-          <a:xfrm>
-            <a:off x="749300" y="3733800"/>
-            <a:ext cx="5016500" cy="1511300"/>
-          </a:xfrm>
-          <a:prstGeom prst="rect">
-            <a:avLst/>
-          </a:prstGeom>
-          <a:noFill/>
-        </p:spPr>
-        <p:txBody>
-          <a:bodyPr wrap="none" lIns="0" rIns="0" tIns="0" bIns="0">
-            <a:spAutoFit/>
-          </a:bodyPr>
-          <a:lstStyle/>
-          <a:p>
-            <a:pPr>
-              <a:lnSpc>
-                <a:spcPts val="1689"/>
-              </a:lnSpc>
-              <a:spcAft>
-                <a:spcPts val="0"/>
-              </a:spcAft>
-              <a:defRPr sz="1420" b="0">
-                <a:solidFill>
-                  <a:srgbClr val="F4F0E7"/>
-                </a:solidFill>
-                <a:latin typeface="Arial"/>
-              </a:defRPr>
-            </a:pPr>
-            <a:r>
-              <a:t>Navigace, akce, přepínače a řádky formulářů.</a:t>
-            </a:r>
-          </a:p>
-          <a:p>
-            <a:pPr>
-              <a:lnSpc>
-                <a:spcPts val="1689"/>
-              </a:lnSpc>
-              <a:spcAft>
-                <a:spcPts val="0"/>
-              </a:spcAft>
-              <a:defRPr sz="1420" b="0">
-                <a:solidFill>
-                  <a:srgbClr val="F4F0E7"/>
-                </a:solidFill>
-                <a:latin typeface="Arial"/>
-              </a:defRPr>
-            </a:pPr>
-          </a:p>
-          <a:p>
-            <a:pPr>
-              <a:lnSpc>
-                <a:spcPts val="1689"/>
-              </a:lnSpc>
-              <a:spcAft>
-                <a:spcPts val="0"/>
-              </a:spcAft>
-              <a:defRPr sz="1420" b="0">
-                <a:solidFill>
-                  <a:srgbClr val="F4F0E7"/>
-                </a:solidFill>
-                <a:latin typeface="Arial"/>
-              </a:defRPr>
-            </a:pPr>
-            <a:r>
-              <a:t>Zalamování podle dostupného prostoru.</a:t>
-            </a:r>
-          </a:p>
-        </p:txBody>
-      </p:sp>
-      <p:sp>
-        <p:nvSpPr>
           <p:cNvPr id="14" name="Rectangle 13"/>
           <p:cNvSpPr/>
           <p:nvPr/>
@@ -6317,13 +6269,13 @@
         <p:spPr>
           <a:xfrm>
             <a:off x="6210300" y="2768600"/>
-            <a:ext cx="5448300" cy="2603500"/>
+            <a:ext cx="5448300" cy="76200"/>
           </a:xfrm>
           <a:prstGeom prst="rect">
             <a:avLst/>
           </a:prstGeom>
           <a:solidFill>
-            <a:srgbClr val="E7E0D5"/>
+            <a:srgbClr val="F45E2B"/>
           </a:solidFill>
           <a:ln>
             <a:noFill/>
@@ -6353,50 +6305,7 @@
       </p:sp>
       <p:sp>
         <p:nvSpPr>
-          <p:cNvPr id="15" name="Rectangle 14"/>
-          <p:cNvSpPr/>
-          <p:nvPr/>
-        </p:nvSpPr>
-        <p:spPr>
-          <a:xfrm>
-            <a:off x="6210300" y="2768600"/>
-            <a:ext cx="5448300" cy="76200"/>
-          </a:xfrm>
-          <a:prstGeom prst="rect">
-            <a:avLst/>
-          </a:prstGeom>
-          <a:solidFill>
-            <a:srgbClr val="F45E2B"/>
-          </a:solidFill>
-          <a:ln>
-            <a:noFill/>
-          </a:ln>
-        </p:spPr>
-        <p:style>
-          <a:lnRef idx="1">
-            <a:schemeClr val="accent1"/>
-          </a:lnRef>
-          <a:fillRef idx="3">
-            <a:schemeClr val="accent1"/>
-          </a:fillRef>
-          <a:effectRef idx="2">
-            <a:schemeClr val="accent1"/>
-          </a:effectRef>
-          <a:fontRef idx="minor">
-            <a:schemeClr val="lt1"/>
-          </a:fontRef>
-        </p:style>
-        <p:txBody>
-          <a:bodyPr rtlCol="0" anchor="ctr"/>
-          <a:lstStyle/>
-          <a:p>
-            <a:pPr algn="ctr"/>
-          </a:p>
-        </p:txBody>
-      </p:sp>
-      <p:sp>
-        <p:nvSpPr>
-          <p:cNvPr id="16" name="TextBox 15"/>
+          <p:cNvPr id="15" name="TextBox 14"/>
           <p:cNvSpPr txBox="1"/>
           <p:nvPr/>
         </p:nvSpPr>
@@ -6438,7 +6347,7 @@
       </p:sp>
       <p:sp>
         <p:nvSpPr>
-          <p:cNvPr id="17" name="TextBox 16"/>
+          <p:cNvPr id="16" name="TextBox 15"/>
           <p:cNvSpPr txBox="1"/>
           <p:nvPr/>
         </p:nvSpPr>
@@ -6515,7 +6424,7 @@
       </p:sp>
       <p:sp>
         <p:nvSpPr>
-          <p:cNvPr id="18" name="TextBox 17"/>
+          <p:cNvPr id="17" name="TextBox 16"/>
           <p:cNvSpPr txBox="1"/>
           <p:nvPr/>
         </p:nvSpPr>
@@ -6557,7 +6466,7 @@
       </p:sp>
       <p:sp>
         <p:nvSpPr>
-          <p:cNvPr id="19" name="TextBox 18"/>
+          <p:cNvPr id="18" name="TextBox 17"/>
           <p:cNvSpPr txBox="1"/>
           <p:nvPr/>
         </p:nvSpPr>
@@ -6599,7 +6508,7 @@
       </p:sp>
       <p:sp>
         <p:nvSpPr>
-          <p:cNvPr id="20" name="TextBox 19"/>
+          <p:cNvPr id="19" name="TextBox 18"/>
           <p:cNvSpPr txBox="1"/>
           <p:nvPr/>
         </p:nvSpPr>
@@ -6828,20 +6737,62 @@
       </p:sp>
       <p:sp>
         <p:nvSpPr>
-          <p:cNvPr id="6" name="Rectangle 5"/>
+          <p:cNvPr id="6" name="TextBox 5"/>
+          <p:cNvSpPr txBox="1"/>
+          <p:nvPr/>
+        </p:nvSpPr>
+        <p:spPr>
+          <a:xfrm>
+            <a:off x="5588000" y="533400"/>
+            <a:ext cx="6070600" cy="220979"/>
+          </a:xfrm>
+          <a:prstGeom prst="rect">
+            <a:avLst/>
+          </a:prstGeom>
+          <a:noFill/>
+        </p:spPr>
+        <p:txBody>
+          <a:bodyPr wrap="none" lIns="0" rIns="0" tIns="0" bIns="0">
+            <a:spAutoFit/>
+          </a:bodyPr>
+          <a:lstStyle/>
+          <a:p>
+            <a:pPr>
+              <a:lnSpc>
+                <a:spcPts val="1240"/>
+              </a:lnSpc>
+              <a:spcAft>
+                <a:spcPts val="0"/>
+              </a:spcAft>
+              <a:defRPr sz="1000" b="1">
+                <a:solidFill>
+                  <a:srgbClr val="68635B"/>
+                </a:solidFill>
+                <a:latin typeface="Arial"/>
+              </a:defRPr>
+            </a:pPr>
+            <a:r>
+              <a:t>UKÁZKA IMPLEMENTACE</a:t>
+            </a:r>
+          </a:p>
+        </p:txBody>
+      </p:sp>
+      <p:sp>
+        <p:nvSpPr>
+          <p:cNvPr id="7" name="Rectangle 6"/>
           <p:cNvSpPr/>
           <p:nvPr/>
         </p:nvSpPr>
         <p:spPr>
           <a:xfrm>
-            <a:off x="1866900" y="368300"/>
-            <a:ext cx="88900" cy="431800"/>
+            <a:off x="533400" y="1155700"/>
+            <a:ext cx="11125200" cy="25400"/>
           </a:xfrm>
           <a:prstGeom prst="rect">
             <a:avLst/>
           </a:prstGeom>
           <a:solidFill>
-            <a:srgbClr val="F45E2B"/>
+            <a:srgbClr val="181817"/>
           </a:solidFill>
           <a:ln>
             <a:noFill/>
@@ -6871,14 +6822,14 @@
       </p:sp>
       <p:sp>
         <p:nvSpPr>
-          <p:cNvPr id="7" name="TextBox 6"/>
+          <p:cNvPr id="8" name="TextBox 7"/>
           <p:cNvSpPr txBox="1"/>
           <p:nvPr/>
         </p:nvSpPr>
         <p:spPr>
           <a:xfrm>
-            <a:off x="5588000" y="533400"/>
-            <a:ext cx="6070600" cy="220979"/>
+            <a:off x="508000" y="1422400"/>
+            <a:ext cx="11176000" cy="1079500"/>
           </a:xfrm>
           <a:prstGeom prst="rect">
             <a:avLst/>
@@ -6893,34 +6844,34 @@
           <a:p>
             <a:pPr>
               <a:lnSpc>
-                <a:spcPts val="1240"/>
-              </a:lnSpc>
-              <a:spcAft>
-                <a:spcPts val="0"/>
-              </a:spcAft>
-              <a:defRPr sz="1000" b="1">
-                <a:solidFill>
-                  <a:srgbClr val="68635B"/>
-                </a:solidFill>
-                <a:latin typeface="Arial"/>
-              </a:defRPr>
-            </a:pPr>
-            <a:r>
-              <a:t>UKÁZKA IMPLEMENTACE</a:t>
-            </a:r>
-          </a:p>
-        </p:txBody>
-      </p:sp>
-      <p:sp>
-        <p:nvSpPr>
-          <p:cNvPr id="8" name="Rectangle 7"/>
+                <a:spcPts val="3740"/>
+              </a:lnSpc>
+              <a:spcAft>
+                <a:spcPts val="0"/>
+              </a:spcAft>
+              <a:defRPr sz="3400" b="1">
+                <a:solidFill>
+                  <a:srgbClr val="181817"/>
+                </a:solidFill>
+                <a:latin typeface="Arial"/>
+              </a:defRPr>
+            </a:pPr>
+            <a:r>
+              <a:t>Dva scénáře předvést, ne popsat.</a:t>
+            </a:r>
+          </a:p>
+        </p:txBody>
+      </p:sp>
+      <p:sp>
+        <p:nvSpPr>
+          <p:cNvPr id="9" name="Rectangle 8"/>
           <p:cNvSpPr/>
           <p:nvPr/>
         </p:nvSpPr>
         <p:spPr>
           <a:xfrm>
-            <a:off x="533400" y="1155700"/>
-            <a:ext cx="11125200" cy="25400"/>
+            <a:off x="533400" y="2946400"/>
+            <a:ext cx="2552700" cy="1765300"/>
           </a:xfrm>
           <a:prstGeom prst="rect">
             <a:avLst/>
@@ -6956,14 +6907,14 @@
       </p:sp>
       <p:sp>
         <p:nvSpPr>
-          <p:cNvPr id="9" name="TextBox 8"/>
+          <p:cNvPr id="10" name="TextBox 9"/>
           <p:cNvSpPr txBox="1"/>
           <p:nvPr/>
         </p:nvSpPr>
         <p:spPr>
           <a:xfrm>
-            <a:off x="508000" y="1422400"/>
-            <a:ext cx="11176000" cy="1079500"/>
+            <a:off x="723900" y="3162300"/>
+            <a:ext cx="2133600" cy="236728"/>
           </a:xfrm>
           <a:prstGeom prst="rect">
             <a:avLst/>
@@ -6978,12 +6929,138 @@
           <a:p>
             <a:pPr>
               <a:lnSpc>
-                <a:spcPts val="3740"/>
-              </a:lnSpc>
-              <a:spcAft>
-                <a:spcPts val="0"/>
-              </a:spcAft>
-              <a:defRPr sz="3400" b="1">
+                <a:spcPts val="1364"/>
+              </a:lnSpc>
+              <a:spcAft>
+                <a:spcPts val="0"/>
+              </a:spcAft>
+              <a:defRPr sz="1100" b="1">
+                <a:solidFill>
+                  <a:srgbClr val="F45E2B"/>
+                </a:solidFill>
+                <a:latin typeface="Arial"/>
+              </a:defRPr>
+            </a:pPr>
+            <a:r>
+              <a:t>01</a:t>
+            </a:r>
+          </a:p>
+        </p:txBody>
+      </p:sp>
+      <p:sp>
+        <p:nvSpPr>
+          <p:cNvPr id="11" name="TextBox 10"/>
+          <p:cNvSpPr txBox="1"/>
+          <p:nvPr/>
+        </p:nvSpPr>
+        <p:spPr>
+          <a:xfrm>
+            <a:off x="723900" y="3568700"/>
+            <a:ext cx="2133600" cy="444500"/>
+          </a:xfrm>
+          <a:prstGeom prst="rect">
+            <a:avLst/>
+          </a:prstGeom>
+          <a:noFill/>
+        </p:spPr>
+        <p:txBody>
+          <a:bodyPr wrap="none" lIns="0" rIns="0" tIns="0" bIns="0">
+            <a:spAutoFit/>
+          </a:bodyPr>
+          <a:lstStyle/>
+          <a:p>
+            <a:pPr>
+              <a:lnSpc>
+                <a:spcPts val="2728"/>
+              </a:lnSpc>
+              <a:spcAft>
+                <a:spcPts val="0"/>
+              </a:spcAft>
+              <a:defRPr sz="2200" b="1">
+                <a:solidFill>
+                  <a:srgbClr val="F4F0E7"/>
+                </a:solidFill>
+                <a:latin typeface="Arial"/>
+              </a:defRPr>
+            </a:pPr>
+            <a:r>
+              <a:t>S1</a:t>
+            </a:r>
+          </a:p>
+        </p:txBody>
+      </p:sp>
+      <p:sp>
+        <p:nvSpPr>
+          <p:cNvPr id="12" name="TextBox 11"/>
+          <p:cNvSpPr txBox="1"/>
+          <p:nvPr/>
+        </p:nvSpPr>
+        <p:spPr>
+          <a:xfrm>
+            <a:off x="723900" y="4140200"/>
+            <a:ext cx="2133600" cy="406400"/>
+          </a:xfrm>
+          <a:prstGeom prst="rect">
+            <a:avLst/>
+          </a:prstGeom>
+          <a:noFill/>
+        </p:spPr>
+        <p:txBody>
+          <a:bodyPr wrap="none" lIns="0" rIns="0" tIns="0" bIns="0">
+            <a:spAutoFit/>
+          </a:bodyPr>
+          <a:lstStyle/>
+          <a:p>
+            <a:pPr>
+              <a:lnSpc>
+                <a:spcPts val="1488"/>
+              </a:lnSpc>
+              <a:spcAft>
+                <a:spcPts val="0"/>
+              </a:spcAft>
+              <a:defRPr sz="1200" b="0">
+                <a:solidFill>
+                  <a:srgbClr val="F4F0E7"/>
+                </a:solidFill>
+                <a:latin typeface="Arial"/>
+              </a:defRPr>
+            </a:pPr>
+            <a:r>
+              <a:t>Den + scéna</a:t>
+            </a:r>
+          </a:p>
+        </p:txBody>
+      </p:sp>
+      <p:sp>
+        <p:nvSpPr>
+          <p:cNvPr id="13" name="TextBox 12"/>
+          <p:cNvSpPr txBox="1"/>
+          <p:nvPr/>
+        </p:nvSpPr>
+        <p:spPr>
+          <a:xfrm>
+            <a:off x="3098800" y="3657600"/>
+            <a:ext cx="292100" cy="394208"/>
+          </a:xfrm>
+          <a:prstGeom prst="rect">
+            <a:avLst/>
+          </a:prstGeom>
+          <a:noFill/>
+        </p:spPr>
+        <p:txBody>
+          <a:bodyPr wrap="none" lIns="0" rIns="0" tIns="0" bIns="0">
+            <a:spAutoFit/>
+          </a:bodyPr>
+          <a:lstStyle/>
+          <a:p>
+            <a:pPr>
+              <a:lnSpc>
+                <a:spcPts val="2604"/>
+              </a:lnSpc>
+              <a:spcAft>
+                <a:spcPts val="0"/>
+              </a:spcAft>
+              <a:defRPr sz="2100" b="1">
                 <a:solidFill>
                   <a:srgbClr val="181817"/>
                 </a:solidFill>
@@ -6991,27 +7068,27 @@
               </a:defRPr>
             </a:pPr>
             <a:r>
-              <a:t>Dva scénáře předvést, ne popsat.</a:t>
-            </a:r>
-          </a:p>
-        </p:txBody>
-      </p:sp>
-      <p:sp>
-        <p:nvSpPr>
-          <p:cNvPr id="10" name="Rectangle 9"/>
+              <a:t>›</a:t>
+            </a:r>
+          </a:p>
+        </p:txBody>
+      </p:sp>
+      <p:sp>
+        <p:nvSpPr>
+          <p:cNvPr id="14" name="Rectangle 13"/>
           <p:cNvSpPr/>
           <p:nvPr/>
         </p:nvSpPr>
         <p:spPr>
           <a:xfrm>
-            <a:off x="533400" y="2946400"/>
+            <a:off x="3390900" y="2946400"/>
             <a:ext cx="2552700" cy="1765300"/>
           </a:xfrm>
           <a:prstGeom prst="rect">
             <a:avLst/>
           </a:prstGeom>
           <a:solidFill>
-            <a:srgbClr val="181817"/>
+            <a:srgbClr val="E7E0D5"/>
           </a:solidFill>
           <a:ln>
             <a:noFill/>
@@ -7041,13 +7118,13 @@
       </p:sp>
       <p:sp>
         <p:nvSpPr>
-          <p:cNvPr id="11" name="TextBox 10"/>
+          <p:cNvPr id="15" name="TextBox 14"/>
           <p:cNvSpPr txBox="1"/>
           <p:nvPr/>
         </p:nvSpPr>
         <p:spPr>
           <a:xfrm>
-            <a:off x="723900" y="3162300"/>
+            <a:off x="3581400" y="3162300"/>
             <a:ext cx="2133600" cy="236728"/>
           </a:xfrm>
           <a:prstGeom prst="rect">
@@ -7076,20 +7153,20 @@
               </a:defRPr>
             </a:pPr>
             <a:r>
-              <a:t>01</a:t>
-            </a:r>
-          </a:p>
-        </p:txBody>
-      </p:sp>
-      <p:sp>
-        <p:nvSpPr>
-          <p:cNvPr id="12" name="TextBox 11"/>
+              <a:t>02</a:t>
+            </a:r>
+          </a:p>
+        </p:txBody>
+      </p:sp>
+      <p:sp>
+        <p:nvSpPr>
+          <p:cNvPr id="16" name="TextBox 15"/>
           <p:cNvSpPr txBox="1"/>
           <p:nvPr/>
         </p:nvSpPr>
         <p:spPr>
           <a:xfrm>
-            <a:off x="723900" y="3568700"/>
+            <a:off x="3581400" y="3568700"/>
             <a:ext cx="2133600" cy="444500"/>
           </a:xfrm>
           <a:prstGeom prst="rect">
@@ -7112,26 +7189,26 @@
               </a:spcAft>
               <a:defRPr sz="2200" b="1">
                 <a:solidFill>
-                  <a:srgbClr val="F4F0E7"/>
-                </a:solidFill>
-                <a:latin typeface="Arial"/>
-              </a:defRPr>
-            </a:pPr>
-            <a:r>
-              <a:t>S1</a:t>
-            </a:r>
-          </a:p>
-        </p:txBody>
-      </p:sp>
-      <p:sp>
-        <p:nvSpPr>
-          <p:cNvPr id="13" name="TextBox 12"/>
+                  <a:srgbClr val="181817"/>
+                </a:solidFill>
+                <a:latin typeface="Arial"/>
+              </a:defRPr>
+            </a:pPr>
+            <a:r>
+              <a:t>Výběr</a:t>
+            </a:r>
+          </a:p>
+        </p:txBody>
+      </p:sp>
+      <p:sp>
+        <p:nvSpPr>
+          <p:cNvPr id="17" name="TextBox 16"/>
           <p:cNvSpPr txBox="1"/>
           <p:nvPr/>
         </p:nvSpPr>
         <p:spPr>
           <a:xfrm>
-            <a:off x="723900" y="4140200"/>
+            <a:off x="3581400" y="4140200"/>
             <a:ext cx="2133600" cy="406400"/>
           </a:xfrm>
           <a:prstGeom prst="rect">
@@ -7154,26 +7231,26 @@
               </a:spcAft>
               <a:defRPr sz="1200" b="0">
                 <a:solidFill>
-                  <a:srgbClr val="F4F0E7"/>
-                </a:solidFill>
-                <a:latin typeface="Arial"/>
-              </a:defRPr>
-            </a:pPr>
-            <a:r>
-              <a:t>Den + scéna</a:t>
-            </a:r>
-          </a:p>
-        </p:txBody>
-      </p:sp>
-      <p:sp>
-        <p:nvSpPr>
-          <p:cNvPr id="14" name="TextBox 13"/>
+                  <a:srgbClr val="181817"/>
+                </a:solidFill>
+                <a:latin typeface="Arial"/>
+              </a:defRPr>
+            </a:pPr>
+            <a:r>
+              <a:t>Uložit koncert</a:t>
+            </a:r>
+          </a:p>
+        </p:txBody>
+      </p:sp>
+      <p:sp>
+        <p:nvSpPr>
+          <p:cNvPr id="18" name="TextBox 17"/>
           <p:cNvSpPr txBox="1"/>
           <p:nvPr/>
         </p:nvSpPr>
         <p:spPr>
           <a:xfrm>
-            <a:off x="3098800" y="3657600"/>
+            <a:off x="5956300" y="3657600"/>
             <a:ext cx="292100" cy="394208"/>
           </a:xfrm>
           <a:prstGeom prst="rect">
@@ -7209,13 +7286,13 @@
       </p:sp>
       <p:sp>
         <p:nvSpPr>
-          <p:cNvPr id="15" name="Rectangle 14"/>
+          <p:cNvPr id="19" name="Rectangle 18"/>
           <p:cNvSpPr/>
           <p:nvPr/>
         </p:nvSpPr>
         <p:spPr>
           <a:xfrm>
-            <a:off x="3390900" y="2946400"/>
+            <a:off x="6248400" y="2946400"/>
             <a:ext cx="2552700" cy="1765300"/>
           </a:xfrm>
           <a:prstGeom prst="rect">
@@ -7252,13 +7329,13 @@
       </p:sp>
       <p:sp>
         <p:nvSpPr>
-          <p:cNvPr id="16" name="TextBox 15"/>
+          <p:cNvPr id="20" name="TextBox 19"/>
           <p:cNvSpPr txBox="1"/>
           <p:nvPr/>
         </p:nvSpPr>
         <p:spPr>
           <a:xfrm>
-            <a:off x="3581400" y="3162300"/>
+            <a:off x="6438900" y="3162300"/>
             <a:ext cx="2133600" cy="236728"/>
           </a:xfrm>
           <a:prstGeom prst="rect">
@@ -7287,20 +7364,20 @@
               </a:defRPr>
             </a:pPr>
             <a:r>
-              <a:t>02</a:t>
-            </a:r>
-          </a:p>
-        </p:txBody>
-      </p:sp>
-      <p:sp>
-        <p:nvSpPr>
-          <p:cNvPr id="17" name="TextBox 16"/>
+              <a:t>03</a:t>
+            </a:r>
+          </a:p>
+        </p:txBody>
+      </p:sp>
+      <p:sp>
+        <p:nvSpPr>
+          <p:cNvPr id="21" name="TextBox 20"/>
           <p:cNvSpPr txBox="1"/>
           <p:nvPr/>
         </p:nvSpPr>
         <p:spPr>
           <a:xfrm>
-            <a:off x="3581400" y="3568700"/>
+            <a:off x="6438900" y="3568700"/>
             <a:ext cx="2133600" cy="444500"/>
           </a:xfrm>
           <a:prstGeom prst="rect">
@@ -7329,20 +7406,20 @@
               </a:defRPr>
             </a:pPr>
             <a:r>
-              <a:t>Výběr</a:t>
-            </a:r>
-          </a:p>
-        </p:txBody>
-      </p:sp>
-      <p:sp>
-        <p:nvSpPr>
-          <p:cNvPr id="18" name="TextBox 17"/>
+              <a:t>S2</a:t>
+            </a:r>
+          </a:p>
+        </p:txBody>
+      </p:sp>
+      <p:sp>
+        <p:nvSpPr>
+          <p:cNvPr id="22" name="TextBox 21"/>
           <p:cNvSpPr txBox="1"/>
           <p:nvPr/>
         </p:nvSpPr>
         <p:spPr>
           <a:xfrm>
-            <a:off x="3581400" y="4140200"/>
+            <a:off x="6438900" y="4140200"/>
             <a:ext cx="2133600" cy="406400"/>
           </a:xfrm>
           <a:prstGeom prst="rect">
@@ -7371,20 +7448,20 @@
               </a:defRPr>
             </a:pPr>
             <a:r>
-              <a:t>Uložit koncert</a:t>
-            </a:r>
-          </a:p>
-        </p:txBody>
-      </p:sp>
-      <p:sp>
-        <p:nvSpPr>
-          <p:cNvPr id="19" name="TextBox 18"/>
+              <a:t>Vyhledat DARKZY</a:t>
+            </a:r>
+          </a:p>
+        </p:txBody>
+      </p:sp>
+      <p:sp>
+        <p:nvSpPr>
+          <p:cNvPr id="23" name="TextBox 22"/>
           <p:cNvSpPr txBox="1"/>
           <p:nvPr/>
         </p:nvSpPr>
         <p:spPr>
           <a:xfrm>
-            <a:off x="5956300" y="3657600"/>
+            <a:off x="8813800" y="3657600"/>
             <a:ext cx="292100" cy="394208"/>
           </a:xfrm>
           <a:prstGeom prst="rect">
@@ -7420,13 +7497,13 @@
       </p:sp>
       <p:sp>
         <p:nvSpPr>
-          <p:cNvPr id="20" name="Rectangle 19"/>
+          <p:cNvPr id="24" name="Rectangle 23"/>
           <p:cNvSpPr/>
           <p:nvPr/>
         </p:nvSpPr>
         <p:spPr>
           <a:xfrm>
-            <a:off x="6248400" y="2946400"/>
+            <a:off x="9105900" y="2946400"/>
             <a:ext cx="2552700" cy="1765300"/>
           </a:xfrm>
           <a:prstGeom prst="rect">
@@ -7463,13 +7540,13 @@
       </p:sp>
       <p:sp>
         <p:nvSpPr>
-          <p:cNvPr id="21" name="TextBox 20"/>
+          <p:cNvPr id="25" name="TextBox 24"/>
           <p:cNvSpPr txBox="1"/>
           <p:nvPr/>
         </p:nvSpPr>
         <p:spPr>
           <a:xfrm>
-            <a:off x="6438900" y="3162300"/>
+            <a:off x="9296400" y="3162300"/>
             <a:ext cx="2133600" cy="236728"/>
           </a:xfrm>
           <a:prstGeom prst="rect">
@@ -7498,20 +7575,20 @@
               </a:defRPr>
             </a:pPr>
             <a:r>
-              <a:t>03</a:t>
-            </a:r>
-          </a:p>
-        </p:txBody>
-      </p:sp>
-      <p:sp>
-        <p:nvSpPr>
-          <p:cNvPr id="22" name="TextBox 21"/>
+              <a:t>04</a:t>
+            </a:r>
+          </a:p>
+        </p:txBody>
+      </p:sp>
+      <p:sp>
+        <p:nvSpPr>
+          <p:cNvPr id="26" name="TextBox 25"/>
           <p:cNvSpPr txBox="1"/>
           <p:nvPr/>
         </p:nvSpPr>
         <p:spPr>
           <a:xfrm>
-            <a:off x="6438900" y="3568700"/>
+            <a:off x="9296400" y="3568700"/>
             <a:ext cx="2133600" cy="444500"/>
           </a:xfrm>
           <a:prstGeom prst="rect">
@@ -7540,20 +7617,20 @@
               </a:defRPr>
             </a:pPr>
             <a:r>
-              <a:t>S2</a:t>
-            </a:r>
-          </a:p>
-        </p:txBody>
-      </p:sp>
-      <p:sp>
-        <p:nvSpPr>
-          <p:cNvPr id="23" name="TextBox 22"/>
+              <a:t>Detail</a:t>
+            </a:r>
+          </a:p>
+        </p:txBody>
+      </p:sp>
+      <p:sp>
+        <p:nvSpPr>
+          <p:cNvPr id="27" name="TextBox 26"/>
           <p:cNvSpPr txBox="1"/>
           <p:nvPr/>
         </p:nvSpPr>
         <p:spPr>
           <a:xfrm>
-            <a:off x="6438900" y="4140200"/>
+            <a:off x="9296400" y="4140200"/>
             <a:ext cx="2133600" cy="406400"/>
           </a:xfrm>
           <a:prstGeom prst="rect">
@@ -7582,21 +7659,21 @@
               </a:defRPr>
             </a:pPr>
             <a:r>
-              <a:t>Vyhledat Atlas</a:t>
-            </a:r>
-          </a:p>
-        </p:txBody>
-      </p:sp>
-      <p:sp>
-        <p:nvSpPr>
-          <p:cNvPr id="24" name="TextBox 23"/>
+              <a:t>Otevřít koncert</a:t>
+            </a:r>
+          </a:p>
+        </p:txBody>
+      </p:sp>
+      <p:sp>
+        <p:nvSpPr>
+          <p:cNvPr id="28" name="TextBox 27"/>
           <p:cNvSpPr txBox="1"/>
           <p:nvPr/>
         </p:nvSpPr>
         <p:spPr>
           <a:xfrm>
-            <a:off x="8813800" y="3657600"/>
-            <a:ext cx="292100" cy="394208"/>
+            <a:off x="533400" y="5207000"/>
+            <a:ext cx="11125200" cy="1016000"/>
           </a:xfrm>
           <a:prstGeom prst="rect">
             <a:avLst/>
@@ -7611,12 +7688,12 @@
           <a:p>
             <a:pPr>
               <a:lnSpc>
-                <a:spcPts val="2604"/>
-              </a:lnSpc>
-              <a:spcAft>
-                <a:spcPts val="0"/>
-              </a:spcAft>
-              <a:defRPr sz="2100" b="1">
+                <a:spcPts val="2108"/>
+              </a:lnSpc>
+              <a:spcAft>
+                <a:spcPts val="0"/>
+              </a:spcAft>
+              <a:defRPr sz="1700" b="0">
                 <a:solidFill>
                   <a:srgbClr val="181817"/>
                 </a:solidFill>
@@ -7624,64 +7701,40 @@
               </a:defRPr>
             </a:pPr>
             <a:r>
-              <a:t>›</a:t>
-            </a:r>
-          </a:p>
-        </p:txBody>
-      </p:sp>
-      <p:sp>
-        <p:nvSpPr>
-          <p:cNvPr id="25" name="Rectangle 24"/>
-          <p:cNvSpPr/>
-          <p:nvPr/>
-        </p:nvSpPr>
-        <p:spPr>
-          <a:xfrm>
-            <a:off x="9105900" y="2946400"/>
-            <a:ext cx="2552700" cy="1765300"/>
-          </a:xfrm>
-          <a:prstGeom prst="rect">
-            <a:avLst/>
-          </a:prstGeom>
-          <a:solidFill>
-            <a:srgbClr val="E7E0D5"/>
-          </a:solidFill>
-          <a:ln>
-            <a:noFill/>
-          </a:ln>
-        </p:spPr>
-        <p:style>
-          <a:lnRef idx="1">
-            <a:schemeClr val="accent1"/>
-          </a:lnRef>
-          <a:fillRef idx="3">
-            <a:schemeClr val="accent1"/>
-          </a:fillRef>
-          <a:effectRef idx="2">
-            <a:schemeClr val="accent1"/>
-          </a:effectRef>
-          <a:fontRef idx="minor">
-            <a:schemeClr val="lt1"/>
-          </a:fontRef>
-        </p:style>
-        <p:txBody>
-          <a:bodyPr rtlCol="0" anchor="ctr"/>
-          <a:lstStyle/>
-          <a:p>
-            <a:pPr algn="ctr"/>
-          </a:p>
-        </p:txBody>
-      </p:sp>
-      <p:sp>
-        <p:nvSpPr>
-          <p:cNvPr id="26" name="TextBox 25"/>
+              <a:t>Klávesnice: viditelný focus, dialog a návrat.</a:t>
+            </a:r>
+          </a:p>
+          <a:p>
+            <a:pPr>
+              <a:lnSpc>
+                <a:spcPts val="2108"/>
+              </a:lnSpc>
+              <a:spcAft>
+                <a:spcPts val="0"/>
+              </a:spcAft>
+              <a:defRPr sz="1700" b="0">
+                <a:solidFill>
+                  <a:srgbClr val="181817"/>
+                </a:solidFill>
+                <a:latin typeface="Arial"/>
+              </a:defRPr>
+            </a:pPr>
+            <a:r>
+              <a:t>Obsah: stejná data v seznamu i detailu.</a:t>
+            </a:r>
+          </a:p>
+        </p:txBody>
+      </p:sp>
+      <p:sp>
+        <p:nvSpPr>
+          <p:cNvPr id="29" name="TextBox 28"/>
           <p:cNvSpPr txBox="1"/>
           <p:nvPr/>
         </p:nvSpPr>
         <p:spPr>
           <a:xfrm>
-            <a:off x="9296400" y="3162300"/>
-            <a:ext cx="2133600" cy="236728"/>
+            <a:off x="533400" y="6413500"/>
+            <a:ext cx="10033000" cy="181610"/>
           </a:xfrm>
           <a:prstGeom prst="rect">
             <a:avLst/>
@@ -7696,165 +7749,20 @@
           <a:p>
             <a:pPr>
               <a:lnSpc>
-                <a:spcPts val="1364"/>
-              </a:lnSpc>
-              <a:spcAft>
-                <a:spcPts val="0"/>
-              </a:spcAft>
-              <a:defRPr sz="1100" b="1">
-                <a:solidFill>
-                  <a:srgbClr val="F45E2B"/>
-                </a:solidFill>
-                <a:latin typeface="Arial"/>
-              </a:defRPr>
-            </a:pPr>
-            <a:r>
-              <a:t>04</a:t>
-            </a:r>
-          </a:p>
-        </p:txBody>
-      </p:sp>
-      <p:sp>
-        <p:nvSpPr>
-          <p:cNvPr id="27" name="TextBox 26"/>
-          <p:cNvSpPr txBox="1"/>
-          <p:nvPr/>
-        </p:nvSpPr>
-        <p:spPr>
-          <a:xfrm>
-            <a:off x="9296400" y="3568700"/>
-            <a:ext cx="2133600" cy="444500"/>
-          </a:xfrm>
-          <a:prstGeom prst="rect">
-            <a:avLst/>
-          </a:prstGeom>
-          <a:noFill/>
-        </p:spPr>
-        <p:txBody>
-          <a:bodyPr wrap="none" lIns="0" rIns="0" tIns="0" bIns="0">
-            <a:spAutoFit/>
-          </a:bodyPr>
-          <a:lstStyle/>
-          <a:p>
-            <a:pPr>
-              <a:lnSpc>
-                <a:spcPts val="2728"/>
-              </a:lnSpc>
-              <a:spcAft>
-                <a:spcPts val="0"/>
-              </a:spcAft>
-              <a:defRPr sz="2200" b="1">
-                <a:solidFill>
-                  <a:srgbClr val="181817"/>
-                </a:solidFill>
-                <a:latin typeface="Arial"/>
-              </a:defRPr>
-            </a:pPr>
-            <a:r>
-              <a:t>Detail</a:t>
-            </a:r>
-          </a:p>
-        </p:txBody>
-      </p:sp>
-      <p:sp>
-        <p:nvSpPr>
-          <p:cNvPr id="28" name="TextBox 27"/>
-          <p:cNvSpPr txBox="1"/>
-          <p:nvPr/>
-        </p:nvSpPr>
-        <p:spPr>
-          <a:xfrm>
-            <a:off x="9296400" y="4140200"/>
-            <a:ext cx="2133600" cy="406400"/>
-          </a:xfrm>
-          <a:prstGeom prst="rect">
-            <a:avLst/>
-          </a:prstGeom>
-          <a:noFill/>
-        </p:spPr>
-        <p:txBody>
-          <a:bodyPr wrap="none" lIns="0" rIns="0" tIns="0" bIns="0">
-            <a:spAutoFit/>
-          </a:bodyPr>
-          <a:lstStyle/>
-          <a:p>
-            <a:pPr>
-              <a:lnSpc>
-                <a:spcPts val="1488"/>
-              </a:lnSpc>
-              <a:spcAft>
-                <a:spcPts val="0"/>
-              </a:spcAft>
-              <a:defRPr sz="1200" b="0">
-                <a:solidFill>
-                  <a:srgbClr val="181817"/>
-                </a:solidFill>
-                <a:latin typeface="Arial"/>
-              </a:defRPr>
-            </a:pPr>
-            <a:r>
-              <a:t>Otevřít koncert</a:t>
-            </a:r>
-          </a:p>
-        </p:txBody>
-      </p:sp>
-      <p:sp>
-        <p:nvSpPr>
-          <p:cNvPr id="29" name="TextBox 28"/>
-          <p:cNvSpPr txBox="1"/>
-          <p:nvPr/>
-        </p:nvSpPr>
-        <p:spPr>
-          <a:xfrm>
-            <a:off x="533400" y="5207000"/>
-            <a:ext cx="11125200" cy="1016000"/>
-          </a:xfrm>
-          <a:prstGeom prst="rect">
-            <a:avLst/>
-          </a:prstGeom>
-          <a:noFill/>
-        </p:spPr>
-        <p:txBody>
-          <a:bodyPr wrap="none" lIns="0" rIns="0" tIns="0" bIns="0">
-            <a:spAutoFit/>
-          </a:bodyPr>
-          <a:lstStyle/>
-          <a:p>
-            <a:pPr>
-              <a:lnSpc>
-                <a:spcPts val="2108"/>
-              </a:lnSpc>
-              <a:spcAft>
-                <a:spcPts val="0"/>
-              </a:spcAft>
-              <a:defRPr sz="1700" b="0">
-                <a:solidFill>
-                  <a:srgbClr val="181817"/>
-                </a:solidFill>
-                <a:latin typeface="Arial"/>
-              </a:defRPr>
-            </a:pPr>
-            <a:r>
-              <a:t>Klávesnice: viditelný focus, dialog a návrat.</a:t>
-            </a:r>
-          </a:p>
-          <a:p>
-            <a:pPr>
-              <a:lnSpc>
-                <a:spcPts val="2108"/>
-              </a:lnSpc>
-              <a:spcAft>
-                <a:spcPts val="0"/>
-              </a:spcAft>
-              <a:defRPr sz="1700" b="0">
-                <a:solidFill>
-                  <a:srgbClr val="181817"/>
-                </a:solidFill>
-                <a:latin typeface="Arial"/>
-              </a:defRPr>
-            </a:pPr>
-            <a:r>
-              <a:t>Obsah: stejná data v seznamu i detailu.</a:t>
+                <a:spcPts val="930"/>
+              </a:lnSpc>
+              <a:spcAft>
+                <a:spcPts val="0"/>
+              </a:spcAft>
+              <a:defRPr sz="750" b="0">
+                <a:solidFill>
+                  <a:srgbClr val="68635B"/>
+                </a:solidFill>
+                <a:latin typeface="Arial"/>
+              </a:defRPr>
+            </a:pPr>
+            <a:r>
+              <a:t>DODATEČNĚ PŘIPRAVENÝ PODKLAD K MILNÍKU</a:t>
             </a:r>
           </a:p>
         </p:txBody>
@@ -7862,48 +7770,6 @@
       <p:sp>
         <p:nvSpPr>
           <p:cNvPr id="30" name="TextBox 29"/>
-          <p:cNvSpPr txBox="1"/>
-          <p:nvPr/>
-        </p:nvSpPr>
-        <p:spPr>
-          <a:xfrm>
-            <a:off x="533400" y="6413500"/>
-            <a:ext cx="10033000" cy="181610"/>
-          </a:xfrm>
-          <a:prstGeom prst="rect">
-            <a:avLst/>
-          </a:prstGeom>
-          <a:noFill/>
-        </p:spPr>
-        <p:txBody>
-          <a:bodyPr wrap="none" lIns="0" rIns="0" tIns="0" bIns="0">
-            <a:spAutoFit/>
-          </a:bodyPr>
-          <a:lstStyle/>
-          <a:p>
-            <a:pPr>
-              <a:lnSpc>
-                <a:spcPts val="930"/>
-              </a:lnSpc>
-              <a:spcAft>
-                <a:spcPts val="0"/>
-              </a:spcAft>
-              <a:defRPr sz="750" b="0">
-                <a:solidFill>
-                  <a:srgbClr val="68635B"/>
-                </a:solidFill>
-                <a:latin typeface="Arial"/>
-              </a:defRPr>
-            </a:pPr>
-            <a:r>
-              <a:t>DODATEČNĚ PŘIPRAVENÝ PODKLAD K MILNÍKU</a:t>
-            </a:r>
-          </a:p>
-        </p:txBody>
-      </p:sp>
-      <p:sp>
-        <p:nvSpPr>
-          <p:cNvPr id="31" name="TextBox 30"/>
           <p:cNvSpPr txBox="1"/>
           <p:nvPr/>
         </p:nvSpPr>
@@ -8132,20 +7998,62 @@
       </p:sp>
       <p:sp>
         <p:nvSpPr>
-          <p:cNvPr id="6" name="Rectangle 5"/>
+          <p:cNvPr id="6" name="TextBox 5"/>
+          <p:cNvSpPr txBox="1"/>
+          <p:nvPr/>
+        </p:nvSpPr>
+        <p:spPr>
+          <a:xfrm>
+            <a:off x="5588000" y="533400"/>
+            <a:ext cx="6070600" cy="220979"/>
+          </a:xfrm>
+          <a:prstGeom prst="rect">
+            <a:avLst/>
+          </a:prstGeom>
+          <a:noFill/>
+        </p:spPr>
+        <p:txBody>
+          <a:bodyPr wrap="none" lIns="0" rIns="0" tIns="0" bIns="0">
+            <a:spAutoFit/>
+          </a:bodyPr>
+          <a:lstStyle/>
+          <a:p>
+            <a:pPr>
+              <a:lnSpc>
+                <a:spcPts val="1240"/>
+              </a:lnSpc>
+              <a:spcAft>
+                <a:spcPts val="0"/>
+              </a:spcAft>
+              <a:defRPr sz="1000" b="1">
+                <a:solidFill>
+                  <a:srgbClr val="68635B"/>
+                </a:solidFill>
+                <a:latin typeface="Arial"/>
+              </a:defRPr>
+            </a:pPr>
+            <a:r>
+              <a:t>XML → PŘIBALENÝ EXPORT → ROZHRANÍ</a:t>
+            </a:r>
+          </a:p>
+        </p:txBody>
+      </p:sp>
+      <p:sp>
+        <p:nvSpPr>
+          <p:cNvPr id="7" name="Rectangle 6"/>
           <p:cNvSpPr/>
           <p:nvPr/>
         </p:nvSpPr>
         <p:spPr>
           <a:xfrm>
-            <a:off x="1866900" y="368300"/>
-            <a:ext cx="88900" cy="431800"/>
+            <a:off x="533400" y="1155700"/>
+            <a:ext cx="11125200" cy="25400"/>
           </a:xfrm>
           <a:prstGeom prst="rect">
             <a:avLst/>
           </a:prstGeom>
           <a:solidFill>
-            <a:srgbClr val="F45E2B"/>
+            <a:srgbClr val="181817"/>
           </a:solidFill>
           <a:ln>
             <a:noFill/>
@@ -8175,14 +8083,14 @@
       </p:sp>
       <p:sp>
         <p:nvSpPr>
-          <p:cNvPr id="7" name="TextBox 6"/>
+          <p:cNvPr id="8" name="TextBox 7"/>
           <p:cNvSpPr txBox="1"/>
           <p:nvPr/>
         </p:nvSpPr>
         <p:spPr>
           <a:xfrm>
-            <a:off x="5588000" y="533400"/>
-            <a:ext cx="6070600" cy="220979"/>
+            <a:off x="508000" y="1422400"/>
+            <a:ext cx="11176000" cy="1079500"/>
           </a:xfrm>
           <a:prstGeom prst="rect">
             <a:avLst/>
@@ -8197,34 +8105,34 @@
           <a:p>
             <a:pPr>
               <a:lnSpc>
-                <a:spcPts val="1240"/>
-              </a:lnSpc>
-              <a:spcAft>
-                <a:spcPts val="0"/>
-              </a:spcAft>
-              <a:defRPr sz="1000" b="1">
-                <a:solidFill>
-                  <a:srgbClr val="68635B"/>
-                </a:solidFill>
-                <a:latin typeface="Arial"/>
-              </a:defRPr>
-            </a:pPr>
-            <a:r>
-              <a:t>XML → PŘIBALENÝ EXPORT → ROZHRANÍ</a:t>
-            </a:r>
-          </a:p>
-        </p:txBody>
-      </p:sp>
-      <p:sp>
-        <p:nvSpPr>
-          <p:cNvPr id="8" name="Rectangle 7"/>
+                <a:spcPts val="3740"/>
+              </a:lnSpc>
+              <a:spcAft>
+                <a:spcPts val="0"/>
+              </a:spcAft>
+              <a:defRPr sz="3400" b="1">
+                <a:solidFill>
+                  <a:srgbClr val="181817"/>
+                </a:solidFill>
+                <a:latin typeface="Arial"/>
+              </a:defRPr>
+            </a:pPr>
+            <a:r>
+              <a:t>Zdroj dat zůstává jeden.</a:t>
+            </a:r>
+          </a:p>
+        </p:txBody>
+      </p:sp>
+      <p:sp>
+        <p:nvSpPr>
+          <p:cNvPr id="9" name="Rectangle 8"/>
           <p:cNvSpPr/>
           <p:nvPr/>
         </p:nvSpPr>
         <p:spPr>
           <a:xfrm>
-            <a:off x="533400" y="1155700"/>
-            <a:ext cx="11125200" cy="25400"/>
+            <a:off x="533400" y="2768600"/>
+            <a:ext cx="5448300" cy="2603500"/>
           </a:xfrm>
           <a:prstGeom prst="rect">
             <a:avLst/>
@@ -8260,48 +8168,6 @@
       </p:sp>
       <p:sp>
         <p:nvSpPr>
-          <p:cNvPr id="9" name="TextBox 8"/>
-          <p:cNvSpPr txBox="1"/>
-          <p:nvPr/>
-        </p:nvSpPr>
-        <p:spPr>
-          <a:xfrm>
-            <a:off x="508000" y="1422400"/>
-            <a:ext cx="11176000" cy="1079500"/>
-          </a:xfrm>
-          <a:prstGeom prst="rect">
-            <a:avLst/>
-          </a:prstGeom>
-          <a:noFill/>
-        </p:spPr>
-        <p:txBody>
-          <a:bodyPr wrap="none" lIns="0" rIns="0" tIns="0" bIns="0">
-            <a:spAutoFit/>
-          </a:bodyPr>
-          <a:lstStyle/>
-          <a:p>
-            <a:pPr>
-              <a:lnSpc>
-                <a:spcPts val="3740"/>
-              </a:lnSpc>
-              <a:spcAft>
-                <a:spcPts val="0"/>
-              </a:spcAft>
-              <a:defRPr sz="3400" b="1">
-                <a:solidFill>
-                  <a:srgbClr val="181817"/>
-                </a:solidFill>
-                <a:latin typeface="Arial"/>
-              </a:defRPr>
-            </a:pPr>
-            <a:r>
-              <a:t>Zdroj dat zůstává jeden.</a:t>
-            </a:r>
-          </a:p>
-        </p:txBody>
-      </p:sp>
-      <p:sp>
-        <p:nvSpPr>
           <p:cNvPr id="10" name="Rectangle 9"/>
           <p:cNvSpPr/>
           <p:nvPr/>
@@ -8309,13 +8175,13 @@
         <p:spPr>
           <a:xfrm>
             <a:off x="533400" y="2768600"/>
-            <a:ext cx="5448300" cy="2603500"/>
+            <a:ext cx="5448300" cy="76200"/>
           </a:xfrm>
           <a:prstGeom prst="rect">
             <a:avLst/>
           </a:prstGeom>
           <a:solidFill>
-            <a:srgbClr val="181817"/>
+            <a:srgbClr val="F45E2B"/>
           </a:solidFill>
           <a:ln>
             <a:noFill/>
@@ -8345,20 +8211,139 @@
       </p:sp>
       <p:sp>
         <p:nvSpPr>
-          <p:cNvPr id="11" name="Rectangle 10"/>
+          <p:cNvPr id="11" name="TextBox 10"/>
+          <p:cNvSpPr txBox="1"/>
+          <p:nvPr/>
+        </p:nvSpPr>
+        <p:spPr>
+          <a:xfrm>
+            <a:off x="749300" y="3035300"/>
+            <a:ext cx="5016500" cy="685800"/>
+          </a:xfrm>
+          <a:prstGeom prst="rect">
+            <a:avLst/>
+          </a:prstGeom>
+          <a:noFill/>
+        </p:spPr>
+        <p:txBody>
+          <a:bodyPr wrap="none" lIns="0" rIns="0" tIns="0" bIns="0">
+            <a:spAutoFit/>
+          </a:bodyPr>
+          <a:lstStyle/>
+          <a:p>
+            <a:pPr>
+              <a:lnSpc>
+                <a:spcPts val="2200"/>
+              </a:lnSpc>
+              <a:spcAft>
+                <a:spcPts val="0"/>
+              </a:spcAft>
+              <a:defRPr sz="2000" b="1">
+                <a:solidFill>
+                  <a:srgbClr val="F4F0E7"/>
+                </a:solidFill>
+                <a:latin typeface="Arial"/>
+              </a:defRPr>
+            </a:pPr>
+            <a:r>
+              <a:t>Konzistence</a:t>
+            </a:r>
+          </a:p>
+        </p:txBody>
+      </p:sp>
+      <p:sp>
+        <p:nvSpPr>
+          <p:cNvPr id="12" name="TextBox 11"/>
+          <p:cNvSpPr txBox="1"/>
+          <p:nvPr/>
+        </p:nvSpPr>
+        <p:spPr>
+          <a:xfrm>
+            <a:off x="749300" y="3733800"/>
+            <a:ext cx="5016500" cy="1511300"/>
+          </a:xfrm>
+          <a:prstGeom prst="rect">
+            <a:avLst/>
+          </a:prstGeom>
+          <a:noFill/>
+        </p:spPr>
+        <p:txBody>
+          <a:bodyPr wrap="none" lIns="0" rIns="0" tIns="0" bIns="0">
+            <a:spAutoFit/>
+          </a:bodyPr>
+          <a:lstStyle/>
+          <a:p>
+            <a:pPr>
+              <a:lnSpc>
+                <a:spcPts val="1689"/>
+              </a:lnSpc>
+              <a:spcAft>
+                <a:spcPts val="0"/>
+              </a:spcAft>
+              <a:defRPr sz="1420" b="0">
+                <a:solidFill>
+                  <a:srgbClr val="F4F0E7"/>
+                </a:solidFill>
+                <a:latin typeface="Arial"/>
+              </a:defRPr>
+            </a:pPr>
+            <a:r>
+              <a:t>Názvy, časy, scény a tarify vycházejí z XML.</a:t>
+            </a:r>
+          </a:p>
+          <a:p>
+            <a:pPr>
+              <a:lnSpc>
+                <a:spcPts val="1689"/>
+              </a:lnSpc>
+              <a:spcAft>
+                <a:spcPts val="0"/>
+              </a:spcAft>
+              <a:defRPr sz="1420" b="0">
+                <a:solidFill>
+                  <a:srgbClr val="F4F0E7"/>
+                </a:solidFill>
+                <a:latin typeface="Arial"/>
+              </a:defRPr>
+            </a:pPr>
+          </a:p>
+          <a:p>
+            <a:pPr>
+              <a:lnSpc>
+                <a:spcPts val="1689"/>
+              </a:lnSpc>
+              <a:spcAft>
+                <a:spcPts val="0"/>
+              </a:spcAft>
+              <a:defRPr sz="1420" b="0">
+                <a:solidFill>
+                  <a:srgbClr val="F4F0E7"/>
+                </a:solidFill>
+                <a:latin typeface="Arial"/>
+              </a:defRPr>
+            </a:pPr>
+            <a:r>
+              <a:t>Vývojový generátor není nutný pro běh.</a:t>
+            </a:r>
+          </a:p>
+        </p:txBody>
+      </p:sp>
+      <p:sp>
+        <p:nvSpPr>
+          <p:cNvPr id="13" name="Rectangle 12"/>
           <p:cNvSpPr/>
           <p:nvPr/>
         </p:nvSpPr>
         <p:spPr>
           <a:xfrm>
-            <a:off x="533400" y="2768600"/>
-            <a:ext cx="5448300" cy="76200"/>
+            <a:off x="6210300" y="2768600"/>
+            <a:ext cx="5448300" cy="2603500"/>
           </a:xfrm>
           <a:prstGeom prst="rect">
             <a:avLst/>
           </a:prstGeom>
           <a:solidFill>
-            <a:srgbClr val="F45E2B"/>
+            <a:srgbClr val="E7E0D5"/>
           </a:solidFill>
           <a:ln>
             <a:noFill/>
@@ -8388,125 +8373,6 @@
       </p:sp>
       <p:sp>
         <p:nvSpPr>
-          <p:cNvPr id="12" name="TextBox 11"/>
-          <p:cNvSpPr txBox="1"/>
-          <p:nvPr/>
-        </p:nvSpPr>
-        <p:spPr>
-          <a:xfrm>
-            <a:off x="749300" y="3035300"/>
-            <a:ext cx="5016500" cy="685800"/>
-          </a:xfrm>
-          <a:prstGeom prst="rect">
-            <a:avLst/>
-          </a:prstGeom>
-          <a:noFill/>
-        </p:spPr>
-        <p:txBody>
-          <a:bodyPr wrap="none" lIns="0" rIns="0" tIns="0" bIns="0">
-            <a:spAutoFit/>
-          </a:bodyPr>
-          <a:lstStyle/>
-          <a:p>
-            <a:pPr>
-              <a:lnSpc>
-                <a:spcPts val="2200"/>
-              </a:lnSpc>
-              <a:spcAft>
-                <a:spcPts val="0"/>
-              </a:spcAft>
-              <a:defRPr sz="2000" b="1">
-                <a:solidFill>
-                  <a:srgbClr val="F4F0E7"/>
-                </a:solidFill>
-                <a:latin typeface="Arial"/>
-              </a:defRPr>
-            </a:pPr>
-            <a:r>
-              <a:t>Konzistence</a:t>
-            </a:r>
-          </a:p>
-        </p:txBody>
-      </p:sp>
-      <p:sp>
-        <p:nvSpPr>
-          <p:cNvPr id="13" name="TextBox 12"/>
-          <p:cNvSpPr txBox="1"/>
-          <p:nvPr/>
-        </p:nvSpPr>
-        <p:spPr>
-          <a:xfrm>
-            <a:off x="749300" y="3733800"/>
-            <a:ext cx="5016500" cy="1511300"/>
-          </a:xfrm>
-          <a:prstGeom prst="rect">
-            <a:avLst/>
-          </a:prstGeom>
-          <a:noFill/>
-        </p:spPr>
-        <p:txBody>
-          <a:bodyPr wrap="none" lIns="0" rIns="0" tIns="0" bIns="0">
-            <a:spAutoFit/>
-          </a:bodyPr>
-          <a:lstStyle/>
-          <a:p>
-            <a:pPr>
-              <a:lnSpc>
-                <a:spcPts val="1689"/>
-              </a:lnSpc>
-              <a:spcAft>
-                <a:spcPts val="0"/>
-              </a:spcAft>
-              <a:defRPr sz="1420" b="0">
-                <a:solidFill>
-                  <a:srgbClr val="F4F0E7"/>
-                </a:solidFill>
-                <a:latin typeface="Arial"/>
-              </a:defRPr>
-            </a:pPr>
-            <a:r>
-              <a:t>Názvy, časy, scény a tarify vycházejí z XML.</a:t>
-            </a:r>
-          </a:p>
-          <a:p>
-            <a:pPr>
-              <a:lnSpc>
-                <a:spcPts val="1689"/>
-              </a:lnSpc>
-              <a:spcAft>
-                <a:spcPts val="0"/>
-              </a:spcAft>
-              <a:defRPr sz="1420" b="0">
-                <a:solidFill>
-                  <a:srgbClr val="F4F0E7"/>
-                </a:solidFill>
-                <a:latin typeface="Arial"/>
-              </a:defRPr>
-            </a:pPr>
-          </a:p>
-          <a:p>
-            <a:pPr>
-              <a:lnSpc>
-                <a:spcPts val="1689"/>
-              </a:lnSpc>
-              <a:spcAft>
-                <a:spcPts val="0"/>
-              </a:spcAft>
-              <a:defRPr sz="1420" b="0">
-                <a:solidFill>
-                  <a:srgbClr val="F4F0E7"/>
-                </a:solidFill>
-                <a:latin typeface="Arial"/>
-              </a:defRPr>
-            </a:pPr>
-            <a:r>
-              <a:t>Vývojový generátor není nutný pro běh.</a:t>
-            </a:r>
-          </a:p>
-        </p:txBody>
-      </p:sp>
-      <p:sp>
-        <p:nvSpPr>
           <p:cNvPr id="14" name="Rectangle 13"/>
           <p:cNvSpPr/>
           <p:nvPr/>
@@ -8514,13 +8380,13 @@
         <p:spPr>
           <a:xfrm>
             <a:off x="6210300" y="2768600"/>
-            <a:ext cx="5448300" cy="2603500"/>
+            <a:ext cx="5448300" cy="76200"/>
           </a:xfrm>
           <a:prstGeom prst="rect">
             <a:avLst/>
           </a:prstGeom>
           <a:solidFill>
-            <a:srgbClr val="E7E0D5"/>
+            <a:srgbClr val="F45E2B"/>
           </a:solidFill>
           <a:ln>
             <a:noFill/>
@@ -8550,50 +8416,7 @@
       </p:sp>
       <p:sp>
         <p:nvSpPr>
-          <p:cNvPr id="15" name="Rectangle 14"/>
-          <p:cNvSpPr/>
-          <p:nvPr/>
-        </p:nvSpPr>
-        <p:spPr>
-          <a:xfrm>
-            <a:off x="6210300" y="2768600"/>
-            <a:ext cx="5448300" cy="76200"/>
-          </a:xfrm>
-          <a:prstGeom prst="rect">
-            <a:avLst/>
-          </a:prstGeom>
-          <a:solidFill>
-            <a:srgbClr val="F45E2B"/>
-          </a:solidFill>
-          <a:ln>
-            <a:noFill/>
-          </a:ln>
-        </p:spPr>
-        <p:style>
-          <a:lnRef idx="1">
-            <a:schemeClr val="accent1"/>
-          </a:lnRef>
-          <a:fillRef idx="3">
-            <a:schemeClr val="accent1"/>
-          </a:fillRef>
-          <a:effectRef idx="2">
-            <a:schemeClr val="accent1"/>
-          </a:effectRef>
-          <a:fontRef idx="minor">
-            <a:schemeClr val="lt1"/>
-          </a:fontRef>
-        </p:style>
-        <p:txBody>
-          <a:bodyPr rtlCol="0" anchor="ctr"/>
-          <a:lstStyle/>
-          <a:p>
-            <a:pPr algn="ctr"/>
-          </a:p>
-        </p:txBody>
-      </p:sp>
-      <p:sp>
-        <p:nvSpPr>
-          <p:cNvPr id="16" name="TextBox 15"/>
+          <p:cNvPr id="15" name="TextBox 14"/>
           <p:cNvSpPr txBox="1"/>
           <p:nvPr/>
         </p:nvSpPr>
@@ -8635,7 +8458,7 @@
       </p:sp>
       <p:sp>
         <p:nvSpPr>
-          <p:cNvPr id="17" name="TextBox 16"/>
+          <p:cNvPr id="16" name="TextBox 15"/>
           <p:cNvSpPr txBox="1"/>
           <p:nvPr/>
         </p:nvSpPr>
@@ -8712,7 +8535,7 @@
       </p:sp>
       <p:sp>
         <p:nvSpPr>
-          <p:cNvPr id="18" name="TextBox 17"/>
+          <p:cNvPr id="17" name="TextBox 16"/>
           <p:cNvSpPr txBox="1"/>
           <p:nvPr/>
         </p:nvSpPr>
@@ -8754,7 +8577,7 @@
       </p:sp>
       <p:sp>
         <p:nvSpPr>
-          <p:cNvPr id="19" name="TextBox 18"/>
+          <p:cNvPr id="18" name="TextBox 17"/>
           <p:cNvSpPr txBox="1"/>
           <p:nvPr/>
         </p:nvSpPr>
@@ -8796,7 +8619,7 @@
       </p:sp>
       <p:sp>
         <p:nvSpPr>
-          <p:cNvPr id="20" name="TextBox 19"/>
+          <p:cNvPr id="19" name="TextBox 18"/>
           <p:cNvSpPr txBox="1"/>
           <p:nvPr/>
         </p:nvSpPr>
@@ -9025,20 +8848,62 @@
       </p:sp>
       <p:sp>
         <p:nvSpPr>
-          <p:cNvPr id="6" name="Rectangle 5"/>
+          <p:cNvPr id="6" name="TextBox 5"/>
+          <p:cNvSpPr txBox="1"/>
+          <p:nvPr/>
+        </p:nvSpPr>
+        <p:spPr>
+          <a:xfrm>
+            <a:off x="5588000" y="533400"/>
+            <a:ext cx="6070600" cy="220979"/>
+          </a:xfrm>
+          <a:prstGeom prst="rect">
+            <a:avLst/>
+          </a:prstGeom>
+          <a:noFill/>
+        </p:spPr>
+        <p:txBody>
+          <a:bodyPr wrap="none" lIns="0" rIns="0" tIns="0" bIns="0">
+            <a:spAutoFit/>
+          </a:bodyPr>
+          <a:lstStyle/>
+          <a:p>
+            <a:pPr>
+              <a:lnSpc>
+                <a:spcPts val="1240"/>
+              </a:lnSpc>
+              <a:spcAft>
+                <a:spcPts val="0"/>
+              </a:spcAft>
+              <a:defRPr sz="1000" b="1">
+                <a:solidFill>
+                  <a:srgbClr val="68635B"/>
+                </a:solidFill>
+                <a:latin typeface="Arial"/>
+              </a:defRPr>
+            </a:pPr>
+            <a:r>
+              <a:t>OVĚŘENÍ AI A VLASTNÍHO ŘEŠENÍ</a:t>
+            </a:r>
+          </a:p>
+        </p:txBody>
+      </p:sp>
+      <p:sp>
+        <p:nvSpPr>
+          <p:cNvPr id="7" name="Rectangle 6"/>
           <p:cNvSpPr/>
           <p:nvPr/>
         </p:nvSpPr>
         <p:spPr>
           <a:xfrm>
-            <a:off x="1866900" y="368300"/>
-            <a:ext cx="88900" cy="431800"/>
+            <a:off x="533400" y="1155700"/>
+            <a:ext cx="11125200" cy="25400"/>
           </a:xfrm>
           <a:prstGeom prst="rect">
             <a:avLst/>
           </a:prstGeom>
           <a:solidFill>
-            <a:srgbClr val="F45E2B"/>
+            <a:srgbClr val="181817"/>
           </a:solidFill>
           <a:ln>
             <a:noFill/>
@@ -9068,14 +8933,14 @@
       </p:sp>
       <p:sp>
         <p:nvSpPr>
-          <p:cNvPr id="7" name="TextBox 6"/>
+          <p:cNvPr id="8" name="TextBox 7"/>
           <p:cNvSpPr txBox="1"/>
           <p:nvPr/>
         </p:nvSpPr>
         <p:spPr>
           <a:xfrm>
-            <a:off x="5588000" y="533400"/>
-            <a:ext cx="6070600" cy="220979"/>
+            <a:off x="508000" y="1422400"/>
+            <a:ext cx="11176000" cy="1079500"/>
           </a:xfrm>
           <a:prstGeom prst="rect">
             <a:avLst/>
@@ -9090,34 +8955,34 @@
           <a:p>
             <a:pPr>
               <a:lnSpc>
-                <a:spcPts val="1240"/>
-              </a:lnSpc>
-              <a:spcAft>
-                <a:spcPts val="0"/>
-              </a:spcAft>
-              <a:defRPr sz="1000" b="1">
-                <a:solidFill>
-                  <a:srgbClr val="68635B"/>
-                </a:solidFill>
-                <a:latin typeface="Arial"/>
-              </a:defRPr>
-            </a:pPr>
-            <a:r>
-              <a:t>OVĚŘENÍ AI A VLASTNÍHO ŘEŠENÍ</a:t>
-            </a:r>
-          </a:p>
-        </p:txBody>
-      </p:sp>
-      <p:sp>
-        <p:nvSpPr>
-          <p:cNvPr id="8" name="Rectangle 7"/>
+                <a:spcPts val="3740"/>
+              </a:lnSpc>
+              <a:spcAft>
+                <a:spcPts val="0"/>
+              </a:spcAft>
+              <a:defRPr sz="3400" b="1">
+                <a:solidFill>
+                  <a:srgbClr val="181817"/>
+                </a:solidFill>
+                <a:latin typeface="Arial"/>
+              </a:defRPr>
+            </a:pPr>
+            <a:r>
+              <a:t>Kontrola má konkrétní výstup.</a:t>
+            </a:r>
+          </a:p>
+        </p:txBody>
+      </p:sp>
+      <p:sp>
+        <p:nvSpPr>
+          <p:cNvPr id="9" name="Rectangle 8"/>
           <p:cNvSpPr/>
           <p:nvPr/>
         </p:nvSpPr>
         <p:spPr>
           <a:xfrm>
-            <a:off x="533400" y="1155700"/>
-            <a:ext cx="11125200" cy="25400"/>
+            <a:off x="533400" y="2768600"/>
+            <a:ext cx="5448300" cy="2603500"/>
           </a:xfrm>
           <a:prstGeom prst="rect">
             <a:avLst/>
@@ -9153,48 +9018,6 @@
       </p:sp>
       <p:sp>
         <p:nvSpPr>
-          <p:cNvPr id="9" name="TextBox 8"/>
-          <p:cNvSpPr txBox="1"/>
-          <p:nvPr/>
-        </p:nvSpPr>
-        <p:spPr>
-          <a:xfrm>
-            <a:off x="508000" y="1422400"/>
-            <a:ext cx="11176000" cy="1079500"/>
-          </a:xfrm>
-          <a:prstGeom prst="rect">
-            <a:avLst/>
-          </a:prstGeom>
-          <a:noFill/>
-        </p:spPr>
-        <p:txBody>
-          <a:bodyPr wrap="none" lIns="0" rIns="0" tIns="0" bIns="0">
-            <a:spAutoFit/>
-          </a:bodyPr>
-          <a:lstStyle/>
-          <a:p>
-            <a:pPr>
-              <a:lnSpc>
-                <a:spcPts val="3740"/>
-              </a:lnSpc>
-              <a:spcAft>
-                <a:spcPts val="0"/>
-              </a:spcAft>
-              <a:defRPr sz="3400" b="1">
-                <a:solidFill>
-                  <a:srgbClr val="181817"/>
-                </a:solidFill>
-                <a:latin typeface="Arial"/>
-              </a:defRPr>
-            </a:pPr>
-            <a:r>
-              <a:t>Kontrola má konkrétní výstup.</a:t>
-            </a:r>
-          </a:p>
-        </p:txBody>
-      </p:sp>
-      <p:sp>
-        <p:nvSpPr>
           <p:cNvPr id="10" name="Rectangle 9"/>
           <p:cNvSpPr/>
           <p:nvPr/>
@@ -9202,13 +9025,13 @@
         <p:spPr>
           <a:xfrm>
             <a:off x="533400" y="2768600"/>
-            <a:ext cx="5448300" cy="2603500"/>
+            <a:ext cx="5448300" cy="76200"/>
           </a:xfrm>
           <a:prstGeom prst="rect">
             <a:avLst/>
           </a:prstGeom>
           <a:solidFill>
-            <a:srgbClr val="181817"/>
+            <a:srgbClr val="F45E2B"/>
           </a:solidFill>
           <a:ln>
             <a:noFill/>
@@ -9238,20 +9061,139 @@
       </p:sp>
       <p:sp>
         <p:nvSpPr>
-          <p:cNvPr id="11" name="Rectangle 10"/>
+          <p:cNvPr id="11" name="TextBox 10"/>
+          <p:cNvSpPr txBox="1"/>
+          <p:nvPr/>
+        </p:nvSpPr>
+        <p:spPr>
+          <a:xfrm>
+            <a:off x="749300" y="3035300"/>
+            <a:ext cx="5016500" cy="685800"/>
+          </a:xfrm>
+          <a:prstGeom prst="rect">
+            <a:avLst/>
+          </a:prstGeom>
+          <a:noFill/>
+        </p:spPr>
+        <p:txBody>
+          <a:bodyPr wrap="none" lIns="0" rIns="0" tIns="0" bIns="0">
+            <a:spAutoFit/>
+          </a:bodyPr>
+          <a:lstStyle/>
+          <a:p>
+            <a:pPr>
+              <a:lnSpc>
+                <a:spcPts val="2200"/>
+              </a:lnSpc>
+              <a:spcAft>
+                <a:spcPts val="0"/>
+              </a:spcAft>
+              <a:defRPr sz="2000" b="1">
+                <a:solidFill>
+                  <a:srgbClr val="F4F0E7"/>
+                </a:solidFill>
+                <a:latin typeface="Arial"/>
+              </a:defRPr>
+            </a:pPr>
+            <a:r>
+              <a:t>Technické důkazy</a:t>
+            </a:r>
+          </a:p>
+        </p:txBody>
+      </p:sp>
+      <p:sp>
+        <p:nvSpPr>
+          <p:cNvPr id="12" name="TextBox 11"/>
+          <p:cNvSpPr txBox="1"/>
+          <p:nvPr/>
+        </p:nvSpPr>
+        <p:spPr>
+          <a:xfrm>
+            <a:off x="749300" y="3733800"/>
+            <a:ext cx="5016500" cy="1511300"/>
+          </a:xfrm>
+          <a:prstGeom prst="rect">
+            <a:avLst/>
+          </a:prstGeom>
+          <a:noFill/>
+        </p:spPr>
+        <p:txBody>
+          <a:bodyPr wrap="none" lIns="0" rIns="0" tIns="0" bIns="0">
+            <a:spAutoFit/>
+          </a:bodyPr>
+          <a:lstStyle/>
+          <a:p>
+            <a:pPr>
+              <a:lnSpc>
+                <a:spcPts val="1689"/>
+              </a:lnSpc>
+              <a:spcAft>
+                <a:spcPts val="0"/>
+              </a:spcAft>
+              <a:defRPr sz="1420" b="0">
+                <a:solidFill>
+                  <a:srgbClr val="F4F0E7"/>
+                </a:solidFill>
+                <a:latin typeface="Arial"/>
+              </a:defRPr>
+            </a:pPr>
+            <a:r>
+              <a:t>Datový validátor a browserové průchody.</a:t>
+            </a:r>
+          </a:p>
+          <a:p>
+            <a:pPr>
+              <a:lnSpc>
+                <a:spcPts val="1689"/>
+              </a:lnSpc>
+              <a:spcAft>
+                <a:spcPts val="0"/>
+              </a:spcAft>
+              <a:defRPr sz="1420" b="0">
+                <a:solidFill>
+                  <a:srgbClr val="F4F0E7"/>
+                </a:solidFill>
+                <a:latin typeface="Arial"/>
+              </a:defRPr>
+            </a:pPr>
+          </a:p>
+          <a:p>
+            <a:pPr>
+              <a:lnSpc>
+                <a:spcPts val="1689"/>
+              </a:lnSpc>
+              <a:spcAft>
+                <a:spcPts val="0"/>
+              </a:spcAft>
+              <a:defRPr sz="1420" b="0">
+                <a:solidFill>
+                  <a:srgbClr val="F4F0E7"/>
+                </a:solidFill>
+                <a:latin typeface="Arial"/>
+              </a:defRPr>
+            </a:pPr>
+            <a:r>
+              <a:t>Aktuální výsledky: validation_report.md.</a:t>
+            </a:r>
+          </a:p>
+        </p:txBody>
+      </p:sp>
+      <p:sp>
+        <p:nvSpPr>
+          <p:cNvPr id="13" name="Rectangle 12"/>
           <p:cNvSpPr/>
           <p:nvPr/>
         </p:nvSpPr>
         <p:spPr>
           <a:xfrm>
-            <a:off x="533400" y="2768600"/>
-            <a:ext cx="5448300" cy="76200"/>
+            <a:off x="6210300" y="2768600"/>
+            <a:ext cx="5448300" cy="2603500"/>
           </a:xfrm>
           <a:prstGeom prst="rect">
             <a:avLst/>
           </a:prstGeom>
           <a:solidFill>
-            <a:srgbClr val="F45E2B"/>
+            <a:srgbClr val="E7E0D5"/>
           </a:solidFill>
           <a:ln>
             <a:noFill/>
@@ -9281,125 +9223,6 @@
       </p:sp>
       <p:sp>
         <p:nvSpPr>
-          <p:cNvPr id="12" name="TextBox 11"/>
-          <p:cNvSpPr txBox="1"/>
-          <p:nvPr/>
-        </p:nvSpPr>
-        <p:spPr>
-          <a:xfrm>
-            <a:off x="749300" y="3035300"/>
-            <a:ext cx="5016500" cy="685800"/>
-          </a:xfrm>
-          <a:prstGeom prst="rect">
-            <a:avLst/>
-          </a:prstGeom>
-          <a:noFill/>
-        </p:spPr>
-        <p:txBody>
-          <a:bodyPr wrap="none" lIns="0" rIns="0" tIns="0" bIns="0">
-            <a:spAutoFit/>
-          </a:bodyPr>
-          <a:lstStyle/>
-          <a:p>
-            <a:pPr>
-              <a:lnSpc>
-                <a:spcPts val="2200"/>
-              </a:lnSpc>
-              <a:spcAft>
-                <a:spcPts val="0"/>
-              </a:spcAft>
-              <a:defRPr sz="2000" b="1">
-                <a:solidFill>
-                  <a:srgbClr val="F4F0E7"/>
-                </a:solidFill>
-                <a:latin typeface="Arial"/>
-              </a:defRPr>
-            </a:pPr>
-            <a:r>
-              <a:t>Technické důkazy</a:t>
-            </a:r>
-          </a:p>
-        </p:txBody>
-      </p:sp>
-      <p:sp>
-        <p:nvSpPr>
-          <p:cNvPr id="13" name="TextBox 12"/>
-          <p:cNvSpPr txBox="1"/>
-          <p:nvPr/>
-        </p:nvSpPr>
-        <p:spPr>
-          <a:xfrm>
-            <a:off x="749300" y="3733800"/>
-            <a:ext cx="5016500" cy="1511300"/>
-          </a:xfrm>
-          <a:prstGeom prst="rect">
-            <a:avLst/>
-          </a:prstGeom>
-          <a:noFill/>
-        </p:spPr>
-        <p:txBody>
-          <a:bodyPr wrap="none" lIns="0" rIns="0" tIns="0" bIns="0">
-            <a:spAutoFit/>
-          </a:bodyPr>
-          <a:lstStyle/>
-          <a:p>
-            <a:pPr>
-              <a:lnSpc>
-                <a:spcPts val="1689"/>
-              </a:lnSpc>
-              <a:spcAft>
-                <a:spcPts val="0"/>
-              </a:spcAft>
-              <a:defRPr sz="1420" b="0">
-                <a:solidFill>
-                  <a:srgbClr val="F4F0E7"/>
-                </a:solidFill>
-                <a:latin typeface="Arial"/>
-              </a:defRPr>
-            </a:pPr>
-            <a:r>
-              <a:t>Datový validátor a browserové průchody.</a:t>
-            </a:r>
-          </a:p>
-          <a:p>
-            <a:pPr>
-              <a:lnSpc>
-                <a:spcPts val="1689"/>
-              </a:lnSpc>
-              <a:spcAft>
-                <a:spcPts val="0"/>
-              </a:spcAft>
-              <a:defRPr sz="1420" b="0">
-                <a:solidFill>
-                  <a:srgbClr val="F4F0E7"/>
-                </a:solidFill>
-                <a:latin typeface="Arial"/>
-              </a:defRPr>
-            </a:pPr>
-          </a:p>
-          <a:p>
-            <a:pPr>
-              <a:lnSpc>
-                <a:spcPts val="1689"/>
-              </a:lnSpc>
-              <a:spcAft>
-                <a:spcPts val="0"/>
-              </a:spcAft>
-              <a:defRPr sz="1420" b="0">
-                <a:solidFill>
-                  <a:srgbClr val="F4F0E7"/>
-                </a:solidFill>
-                <a:latin typeface="Arial"/>
-              </a:defRPr>
-            </a:pPr>
-            <a:r>
-              <a:t>Aktuální výsledky: validation_report.md.</a:t>
-            </a:r>
-          </a:p>
-        </p:txBody>
-      </p:sp>
-      <p:sp>
-        <p:nvSpPr>
           <p:cNvPr id="14" name="Rectangle 13"/>
           <p:cNvSpPr/>
           <p:nvPr/>
@@ -9407,13 +9230,13 @@
         <p:spPr>
           <a:xfrm>
             <a:off x="6210300" y="2768600"/>
-            <a:ext cx="5448300" cy="2603500"/>
+            <a:ext cx="5448300" cy="76200"/>
           </a:xfrm>
           <a:prstGeom prst="rect">
             <a:avLst/>
           </a:prstGeom>
           <a:solidFill>
-            <a:srgbClr val="E7E0D5"/>
+            <a:srgbClr val="F45E2B"/>
           </a:solidFill>
           <a:ln>
             <a:noFill/>
@@ -9443,50 +9266,7 @@
       </p:sp>
       <p:sp>
         <p:nvSpPr>
-          <p:cNvPr id="15" name="Rectangle 14"/>
-          <p:cNvSpPr/>
-          <p:nvPr/>
-        </p:nvSpPr>
-        <p:spPr>
-          <a:xfrm>
-            <a:off x="6210300" y="2768600"/>
-            <a:ext cx="5448300" cy="76200"/>
-          </a:xfrm>
-          <a:prstGeom prst="rect">
-            <a:avLst/>
-          </a:prstGeom>
-          <a:solidFill>
-            <a:srgbClr val="F45E2B"/>
-          </a:solidFill>
-          <a:ln>
-            <a:noFill/>
-          </a:ln>
-        </p:spPr>
-        <p:style>
-          <a:lnRef idx="1">
-            <a:schemeClr val="accent1"/>
-          </a:lnRef>
-          <a:fillRef idx="3">
-            <a:schemeClr val="accent1"/>
-          </a:fillRef>
-          <a:effectRef idx="2">
-            <a:schemeClr val="accent1"/>
-          </a:effectRef>
-          <a:fontRef idx="minor">
-            <a:schemeClr val="lt1"/>
-          </a:fontRef>
-        </p:style>
-        <p:txBody>
-          <a:bodyPr rtlCol="0" anchor="ctr"/>
-          <a:lstStyle/>
-          <a:p>
-            <a:pPr algn="ctr"/>
-          </a:p>
-        </p:txBody>
-      </p:sp>
-      <p:sp>
-        <p:nvSpPr>
-          <p:cNvPr id="16" name="TextBox 15"/>
+          <p:cNvPr id="15" name="TextBox 14"/>
           <p:cNvSpPr txBox="1"/>
           <p:nvPr/>
         </p:nvSpPr>
@@ -9528,7 +9308,7 @@
       </p:sp>
       <p:sp>
         <p:nvSpPr>
-          <p:cNvPr id="17" name="TextBox 16"/>
+          <p:cNvPr id="16" name="TextBox 15"/>
           <p:cNvSpPr txBox="1"/>
           <p:nvPr/>
         </p:nvSpPr>
@@ -9605,7 +9385,7 @@
       </p:sp>
       <p:sp>
         <p:nvSpPr>
-          <p:cNvPr id="18" name="TextBox 17"/>
+          <p:cNvPr id="17" name="TextBox 16"/>
           <p:cNvSpPr txBox="1"/>
           <p:nvPr/>
         </p:nvSpPr>
@@ -9647,7 +9427,7 @@
       </p:sp>
       <p:sp>
         <p:nvSpPr>
-          <p:cNvPr id="19" name="TextBox 18"/>
+          <p:cNvPr id="18" name="TextBox 17"/>
           <p:cNvSpPr txBox="1"/>
           <p:nvPr/>
         </p:nvSpPr>
@@ -9689,7 +9469,7 @@
       </p:sp>
       <p:sp>
         <p:nvSpPr>
-          <p:cNvPr id="20" name="TextBox 19"/>
+          <p:cNvPr id="19" name="TextBox 18"/>
           <p:cNvSpPr txBox="1"/>
           <p:nvPr/>
         </p:nvSpPr>

--- a/odevzdani/cviceni-04-implementace/prezentace.pptx
+++ b/odevzdani/cviceni-04-implementace/prezentace.pptx
@@ -577,7 +577,7 @@
           <a:lstStyle/>
           <a:p>
             <a:r>
-              <a:t>Implementace pokrývá všechny povinné obsahové části. Účinkující mají detail a vazbu na vystoupení. Program a scény jsou propojené, vyhledávání vede k odpovídajícímu objektu. Přepínač češtiny a angličtiny pomáhá zahraničním návštěvníkům. Třídenní tarify vysvětlují, co je zahrnuto; druhou cestou je výběr konkrétních míst. Účet je dobrovolný a historie je lokální. Na úvodu nemají technické podrobnosti překrývat obsah, ale omezení objednávky musí být srozumitelné tam, kde na nich záleží. Line-up je navržený, nikoli potvrzený; Noisia je archivní poslechový blok. Karty používají 41 skutečných licencovaných fotografií a 19 typografických náhrad. Síťová blokace byla vyřešena, zdroje, autoři a licence jsou evidované. Úvodní fotografie Výstaviště pochází z roku 2018 a není prezentovaná jako stav roku 2027.</a:t>
+              <a:t>Implementace pokrývá třináct HTML vstupů a všechny povinné části. Program rozlišuje hlavní mezinárodní jména, českou scénu a klubovou elektroniku. Detaily mají biografii, konkrétní subžánr a hudební odkazy; ověřený profil se odlišuje od vyhledávání. Návštěvník si vybere jeden, dva libovolné nebo tři dny. VIP a Regular si ručně označí v mapě, stání vybírá počtem. Kemp se přidává v košíku. Soukromí, Podmínky a Kredity mají vlastní stránky, praktické Info se soustředí na návštěvu.</a:t>
             </a:r>
           </a:p>
         </p:txBody>
@@ -787,7 +787,7 @@
           <a:lstStyle/>
           <a:p>
             <a:r>
-              <a:t>Datová základna v XML je autoritativní. Přibalený JavaScriptový export umožňuje zobrazit program bez síťového načítání, což je důležité pro přímé otevření z disku. Generátor je pouze vývojová pomůcka. Ceny tarifů i hlavní údaje musí odpovídat XML. Objednávkový tok vytváří skutečný PDF soubor s identifikací objednávky, ale neposílá e-mail a neprovádí skutečnou platbu. Hesla, objednávky a obsazenost nemají serverové zázemí; místní účet není bezpečné sdílené přihlašování. Nové objednávky mají ročník 2027, historické bez ročníku zůstávají 2026 a neblokují nový rok. Panel soukromí dovoluje externí mapy samostatně; po povolení se mapa vloží automaticky a odvolání ji odstraní. Analytika ani reklamní sledování nejsou použité. V košíku je jméno, příjmení, e-mail a telefon. Promo PULSE10 odečítá deset procent a PRAHA200 dvě stě korun, vždy nejvýše cenu vstupenek. Částky se při dokončení znovu počítají z tarifů. Volba karty, převodu, hotovosti, Apple Pay, Google Pay, Benefit Plus nebo faktury je vždy pouze simulace.</a:t>
+              <a:t>Ceny a model daně vycházejí z XML. Dva dny stojí součet dvou jednodenních tarifů, tři dny mají zvýhodněný balíček. Příklad: dvě dvoudenní VIP jsou 2360 korun, PULSE10 odečte 236 a stan pro dvě osoby přidá 650. Výsledek je 2774 korun; kemp se nezlevňuje. V ceně je modelová dvanáctiprocentní DPH, nikoli příplatek. Výpočet je školní model, ne právní potvrzení sazby roku 2027. PDF vypíše skutečné vybrané dny a pro kemp přidá samostatný voucher.</a:t>
             </a:r>
           </a:p>
         </p:txBody>
@@ -857,7 +857,7 @@
           <a:lstStyle/>
           <a:p>
             <a:r>
-              <a:t>AI pomohla s rozvržením, texty, originální grafikou, implementací a testovacími skripty. Testy ale musí běžet proti skutečné výsledné verzi. Přiložený validační záznam uvádí konkrétní výsledek, rozsah a přeskočené kontroly. Datové minimum a reference kontrolujeme odděleně od prohlížeče. PDF posuzujeme jako soubor a ne pouze potvrzení na obrazovce. Historické odevzdání, testy s reálnými návštěvníky ani externí cross-review nejsou doloženy. Tým musí umět vysvětlit, co přijal a které limity zůstávají. Dne 18. října 2026 jsme přímo přečetli Google SEO Starter Guide, Google AI features and your website a WAI Page Structure Tutorial. Používáme konkrétní titulky, vnitřní odkazy, viditelný text, pravdivé JSON-LD a logické landmarky a nadpisy. Zvláštní AI schéma ani speciální textový soubor nejsou vyžadované.</a:t>
+              <a:t>AI pomohla s rozvržením, texty, originální grafikou, implementací a testovacími skripty. Testy ale musí běžet proti skutečné výsledné verzi. Přiložený validační záznam uvádí konkrétní výsledek, rozsah a přeskočené kontroly. Datové minimum a reference kontrolujeme odděleně od prohlížeče. PDF posuzujeme jako soubor a ne pouze potvrzení na obrazovce. Historické odevzdání, testy s reálnými návštěvníky ani externí cross-review nejsou doloženy. Tým musí umět vysvětlit, co přijal a které limity zůstávají. Dne 18. října 2026 jsme přímo přečetli Google SEO Starter Guide, Google AI features and your website a WAI Page Structure Tutorial. Používáme konkrétní titulky, vnitřní odkazy, viditelný text, pravdivé JSON-LD a logické landmarky a nadpisy. Zvláštní AI schéma ani speciální textový soubor nejsou vyžadované. Nové fotografie jsou částečně CC BY-NC-SA: dva snímky lze použít v tomto nekomerčním školním rozsahu, nikoli automaticky pro komerční festival.</a:t>
             </a:r>
           </a:p>
         </p:txBody>
@@ -5312,7 +5312,7 @@
               </a:defRPr>
             </a:pPr>
             <a:r>
-              <a:t>Program, scény, osobní výběr a</a:t>
+              <a:t>Mezinárodní / česká / klubová</a:t>
             </a:r>
           </a:p>
           <a:p>
@@ -5331,7 +5331,7 @@
               </a:defRPr>
             </a:pPr>
             <a:r>
-              <a:t>praktické informace.</a:t>
+              <a:t>scéna.</a:t>
             </a:r>
           </a:p>
           <a:p>
@@ -5366,7 +5366,26 @@
               </a:defRPr>
             </a:pPr>
             <a:r>
-              <a:t>Mapa doplňuje textovou orientaci.</a:t>
+              <a:t>Osobní program, doprava a offline</a:t>
+            </a:r>
+          </a:p>
+          <a:p>
+            <a:pPr>
+              <a:lnSpc>
+                <a:spcPts val="1689"/>
+              </a:lnSpc>
+              <a:spcAft>
+                <a:spcPts val="0"/>
+              </a:spcAft>
+              <a:defRPr sz="1420" b="0">
+                <a:solidFill>
+                  <a:srgbClr val="181817"/>
+                </a:solidFill>
+                <a:latin typeface="Arial"/>
+              </a:defRPr>
+            </a:pPr>
+            <a:r>
+              <a:t>plánek.</a:t>
             </a:r>
           </a:p>
         </p:txBody>
@@ -5536,7 +5555,7 @@
               </a:defRPr>
             </a:pPr>
             <a:r>
-              <a:t>Konečné ceny, množství 1–8,</a:t>
+              <a:t>Jeden, dva nebo tři dny. Vlastní</a:t>
             </a:r>
           </a:p>
           <a:p>
@@ -5555,7 +5574,7 @@
               </a:defRPr>
             </a:pPr>
             <a:r>
-              <a:t>místa, promo kód a PDF.</a:t>
+              <a:t>sedadlo nebo stání.</a:t>
             </a:r>
           </a:p>
           <a:p>
@@ -5590,7 +5609,7 @@
               </a:defRPr>
             </a:pPr>
             <a:r>
-              <a:t>Sedm zkušebních platebních</a:t>
+              <a:t>Kemp, promo a daňový rozpis v</a:t>
             </a:r>
           </a:p>
           <a:p>
@@ -5609,7 +5628,7 @@
               </a:defRPr>
             </a:pPr>
             <a:r>
-              <a:t>metod.</a:t>
+              <a:t>PDF.</a:t>
             </a:r>
           </a:p>
         </p:txBody>
@@ -8246,7 +8265,7 @@
               </a:defRPr>
             </a:pPr>
             <a:r>
-              <a:t>Konzistence</a:t>
+              <a:t>XML jako zdroj</a:t>
             </a:r>
           </a:p>
         </p:txBody>
@@ -8288,7 +8307,7 @@
               </a:defRPr>
             </a:pPr>
             <a:r>
-              <a:t>Názvy, časy, scény a tarify vycházejí z XML.</a:t>
+              <a:t>60 jmen, 60 akcí, tarify, kemp a modelová sazba DPH.</a:t>
             </a:r>
           </a:p>
           <a:p>
@@ -8323,7 +8342,7 @@
               </a:defRPr>
             </a:pPr>
             <a:r>
-              <a:t>Vývojový generátor není nutný pro běh.</a:t>
+              <a:t>Dvě vybraná data zůstávají přesná i v PDF.</a:t>
             </a:r>
           </a:p>
         </p:txBody>
@@ -8451,7 +8470,7 @@
               </a:defRPr>
             </a:pPr>
             <a:r>
-              <a:t>Bez instalace</a:t>
+              <a:t>Přehledný součet</a:t>
             </a:r>
           </a:p>
         </p:txBody>
@@ -8493,7 +8512,7 @@
               </a:defRPr>
             </a:pPr>
             <a:r>
-              <a:t>HTML, CSS, JavaScript a lokální zdroje.</a:t>
+              <a:t>Promo jen na vstupenky, kemp samostatně.</a:t>
             </a:r>
           </a:p>
           <a:p>
@@ -8528,7 +8547,7 @@
               </a:defRPr>
             </a:pPr>
             <a:r>
-              <a:t>Bez serveru, databáze, balíčků a produkčních plateb.</a:t>
+              <a:t>Ceny obsahují 12% DPH; poplatek objednávky 0 Kč.</a:t>
             </a:r>
           </a:p>
         </p:txBody>
@@ -8570,7 +8589,7 @@
               </a:defRPr>
             </a:pPr>
             <a:r>
-              <a:t>PDF je skutečný dokument; přenos e-mailu součástí klientské verze není.</a:t>
+              <a:t>2× dvoudenní VIP + PULSE10 + stan pro 2 = 2 774 Kč včetně modelové DPH.</a:t>
             </a:r>
           </a:p>
         </p:txBody>

--- a/odevzdani/cviceni-04-implementace/prezentace.pptx
+++ b/odevzdani/cviceni-04-implementace/prezentace.pptx
@@ -507,7 +507,7 @@
           <a:lstStyle/>
           <a:p>
             <a:r>
-              <a:t>Na wireframe navazuje kompletní současná implementace. Obsahuje výraznější vlastní identitu, tmavou celoplošnou hlavičku a skutečnou historickou fotografii Výstaviště. Identitu doplňuje typografické logo bez zvukových sloupců Prague Pulse Fest. Inspirací je obecný festivalový vizuální styl, nikoli převzetí loga nebo grafiky jiné akce. Materiály byly připraveny ze současné verze, protože skutečný historický export ze cvičení nebyl poskytnut. Při prezentaci ukážeme mobilní a desktopové zobrazení a dvě nejdůležitější cesty. Není třeba instalovat runtime nebo spouštět build. Název vracíme na Prague Pulse Fest a termín na výslovnou volbu zadavatele posouváme na 1.–3. srpna 2027. Hlavička má na notebooku hledání a navigaci v jednom řádku; odpočet pracuje s pražskou časovou zónou.</a:t>
+              <a:t>[30 s] Oproti wireframu ukazujeme současný hotový web s vlastní vizuální identitou, češtinou a angličtinou a rozšířenými funkcemi. Základem zůstává HTML, CSS a JavaScript bez backendu a instalačního kroku. Balíček obsahuje dnešní verzi webu, nikoli nedoložený historický stav ze cvičení. Při prezentaci se zaměříme na mobilní i desktopové zobrazení, funkční navigaci a dva stejné scénáře jako v prototypu.</a:t>
             </a:r>
           </a:p>
         </p:txBody>
@@ -577,7 +577,7 @@
           <a:lstStyle/>
           <a:p>
             <a:r>
-              <a:t>Implementace pokrývá třináct HTML vstupů a všechny povinné části. Program rozlišuje hlavní mezinárodní jména, českou scénu a klubovou elektroniku. Detaily mají biografii, konkrétní subžánr a hudební odkazy; ověřený profil se odlišuje od vyhledávání. Návštěvník si vybere jeden, dva libovolné nebo tři dny. VIP a Regular si ručně označí v mapě, stání vybírá počtem. Kemp se přidává v košíku. Soukromí, Podmínky a Kredity mají vlastní stránky, praktické Info se soustředí na návštěvu.</a:t>
+              <a:t>[35 s] Povinné obsahové části již neexistují jako oddělené ukázky. Z interpreta lze přejít ke koncertu a ze scény do filtrovaného programu. Hledání pokrývá všechna data včetně popisů. K jádru přibyly vstupenky na jeden, dva nebo tři dny, košík, kemp a PDF. Registrace i historie jsou lokální pro prohlížeč, účet není povinný. Nákup nyní nepředěláváme na vstupenky pro jednotlivé scény; toto rozhodnutí je ponechané k další samostatné úpravě.</a:t>
             </a:r>
           </a:p>
         </p:txBody>
@@ -647,7 +647,7 @@
           <a:lstStyle/>
           <a:p>
             <a:r>
-              <a:t>Ano, Flexbox se pro tento web hodí, zejména pro navigaci a řady ovládacích prvků. Pro více řad karet je vhodnější Grid. Pružné velikosti a clamp přizpůsobují typografii prostoru, místo pevného navrhování pro konkrétní telefon. Responzivitu však nedokazuje jediný screenshot prázdného úvodu. Kontrolujeme i dlouhé názvy, otevřené menu, formuláře, dialogy a neprázdný košík. Při prezentaci vedle sebe ukážeme úzký a široký viewport stejného scénáře, aby bylo vidět, že zůstává stejná logika.</a:t>
+              <a:t>[40 s včetně ukázky] Ukážeme stejnou stránku v úzké a široké podobě. Flexbox se hodí na navigaci a ovládací řádky, Grid na více řad obsahových karet. Pružná typografie a sloupce využívají dostupný prostor. Zkoušíme přetékání, čitelnost, formuláře a dosah na hlavní akce. Prázdný úvod nestačí: rozhraní musí fungovat i s dlouhými názvy, chybovým stavem, otevřeným dialogem nebo naplněným košíkem. Automatické ověření šířek doplňuje vizuální kontrola těchto stavů.</a:t>
             </a:r>
           </a:p>
         </p:txBody>
@@ -717,7 +717,7 @@
           <a:lstStyle/>
           <a:p>
             <a:r>
-              <a:t>Zopakujeme S1 a S2 ve finálním rozhraní. Nejprve filtrujeme program a ověříme uložení osobního výběru. Potom hledáme DARKZY a přejdeme z detailu k jeho koncertu. Při ukázce sledujeme názvy, datum a scénu; efektní animace nesmí nahradit správný obsah. Krátce ukážeme klávesnici a zavření dialogu. Přístupnost není pouze kontrast: důležité je správné pořadí, popisky, zachování focusu a srozumitelná změna stavu. Plnou shodu s WCAG bez odpovídajícího auditu netvrdíme.</a:t>
+              <a:t>[50 s včetně ukázky] Nejprve předvedeme filtr prvního dne a River Stage a uložíme koncert do osobního programu. Potom přes globální hledání najdeme DARKZY, otevřeme detail a přejdeme ke koncertu. Sledujeme správnost údajů a srozumitelnost cesty, ne pouze animace. Krátce ukážeme focus klávesnice, zavření dialogu a návrat k obsahu. Stejné ID propojuje seznam i detail, takže nevznikají rozdílné ručně napsané časy. Tyto scénáře budou moci zopakovat hodnotitelé v dalším milníku.</a:t>
             </a:r>
           </a:p>
         </p:txBody>
@@ -787,7 +787,7 @@
           <a:lstStyle/>
           <a:p>
             <a:r>
-              <a:t>Ceny a model daně vycházejí z XML. Dva dny stojí součet dvou jednodenních tarifů, tři dny mají zvýhodněný balíček. Příklad: dvě dvoudenní VIP jsou 2360 korun, PULSE10 odečte 236 a stan pro dvě osoby přidá 650. Výsledek je 2774 korun; kemp se nezlevňuje. V ceně je modelová dvanáctiprocentní DPH, nikoli příplatek. Výpočet je školní model, ne právní potvrzení sazby roku 2027. PDF vypíše skutečné vybrané dny a pro kemp přidá samostatný voucher.</a:t>
+              <a:t>[35 s] Přístupnost řešíme konkrétními prvky: sémantikou, popisky, focusy a chybovými zprávami. Technické SEO stojí na obsahu, jedinečných titulcích a srozumitelném propojení. JSON-LD je strojově čitelný popis festivalu vložený do stránky, nenahrazuje XML zdroj dat. Pro generativní vyhledávání nevytváříme smyšlená hodnocení ani údajně povinný speciální AI soubor. Dokumentace uvádí konkrétní zdroje Google Search Central a WAI a jejich uplatnění. Plnou shodu s WCAG bez auditu netvrdíme.</a:t>
             </a:r>
           </a:p>
         </p:txBody>
@@ -857,7 +857,7 @@
           <a:lstStyle/>
           <a:p>
             <a:r>
-              <a:t>AI pomohla s rozvržením, texty, originální grafikou, implementací a testovacími skripty. Testy ale musí běžet proti skutečné výsledné verzi. Přiložený validační záznam uvádí konkrétní výsledek, rozsah a přeskočené kontroly. Datové minimum a reference kontrolujeme odděleně od prohlížeče. PDF posuzujeme jako soubor a ne pouze potvrzení na obrazovce. Historické odevzdání, testy s reálnými návštěvníky ani externí cross-review nejsou doloženy. Tým musí umět vysvětlit, co přijal a které limity zůstávají. Dne 18. října 2026 jsme přímo přečetli Google SEO Starter Guide, Google AI features and your website a WAI Page Structure Tutorial. Používáme konkrétní titulky, vnitřní odkazy, viditelný text, pravdivé JSON-LD a logické landmarky a nadpisy. Zvláštní AI schéma ani speciální textový soubor nejsou vyžadované. Nové fotografie jsou částečně CC BY-NC-SA: dva snímky lze použít v tomto nekomerčním školním rozsahu, nikoli automaticky pro komerční festival.</a:t>
+              <a:t>[40 s] AI pomáhala s grafickým směrem, texty, kódem a testovacími skripty. Přijali jsme vlastní typografickou identitu, ale upravili navigaci a konkrétní obsah podle zpětné vazby. Nepřevzali jsme cizí logo ani serverové řešení. Validátor porovnává XML s přibalenými daty a browserové testy ověřují hledání, účty, ceny i obsazenost. PDF kontrolujeme jako skutečný soubor. Výsledky a limity uvádí validation_report.md. Skutečné fotografie mají kredity; oproti požadavku na AI obrázky jde o výslovně popsanou odchylku, nikoli AI generované portréty. Zaznamenané datové a browserové kontroly prošly; přesný rozsah je v reportu, ne v odhadu AI.</a:t>
             </a:r>
           </a:p>
         </p:txBody>
@@ -3878,7 +3878,7 @@
             <a:avLst/>
           </a:prstGeom>
           <a:solidFill>
-            <a:srgbClr val="181817"/>
+            <a:srgbClr val="FFFFFF"/>
           </a:solidFill>
           <a:ln>
             <a:noFill/>
@@ -3914,14 +3914,14 @@
         </p:nvSpPr>
         <p:spPr>
           <a:xfrm>
-            <a:off x="8851900" y="0"/>
-            <a:ext cx="3340100" cy="6858000"/>
+            <a:off x="711200" y="609600"/>
+            <a:ext cx="76200" cy="381000"/>
           </a:xfrm>
           <a:prstGeom prst="rect">
             <a:avLst/>
           </a:prstGeom>
           <a:solidFill>
-            <a:srgbClr val="F45E2B"/>
+            <a:srgbClr val="E55024"/>
           </a:solidFill>
           <a:ln>
             <a:noFill/>
@@ -3957,8 +3957,8 @@
         </p:nvSpPr>
         <p:spPr>
           <a:xfrm>
-            <a:off x="533400" y="381000"/>
-            <a:ext cx="2476500" cy="350113"/>
+            <a:off x="977900" y="647700"/>
+            <a:ext cx="10502900" cy="317500"/>
           </a:xfrm>
           <a:prstGeom prst="rect">
             <a:avLst/>
@@ -3967,26 +3967,26 @@
         </p:spPr>
         <p:txBody>
           <a:bodyPr wrap="none" lIns="0" rIns="0" tIns="0" bIns="0">
-            <a:spAutoFit/>
+            <a:noAutofit/>
           </a:bodyPr>
           <a:lstStyle/>
           <a:p>
             <a:pPr>
               <a:lnSpc>
-                <a:spcPts val="2256"/>
+                <a:spcPts val="2360"/>
               </a:lnSpc>
               <a:spcAft>
                 <a:spcPts val="0"/>
               </a:spcAft>
-              <a:defRPr sz="1820" b="1">
+              <a:defRPr sz="2000" b="1">
                 <a:solidFill>
-                  <a:srgbClr val="F4F0E7"/>
+                  <a:srgbClr val="191B20"/>
                 </a:solidFill>
                 <a:latin typeface="Arial"/>
               </a:defRPr>
             </a:pPr>
             <a:r>
-              <a:t>PRAGUE</a:t>
+              <a:t>PRAGUE PULSE FEST</a:t>
             </a:r>
           </a:p>
         </p:txBody>
@@ -3999,8 +3999,8 @@
         </p:nvSpPr>
         <p:spPr>
           <a:xfrm>
-            <a:off x="533400" y="628650"/>
-            <a:ext cx="2476500" cy="513892"/>
+            <a:off x="711200" y="1600200"/>
+            <a:ext cx="10769600" cy="241300"/>
           </a:xfrm>
           <a:prstGeom prst="rect">
             <a:avLst/>
@@ -4009,26 +4009,26 @@
         </p:spPr>
         <p:txBody>
           <a:bodyPr wrap="none" lIns="0" rIns="0" tIns="0" bIns="0">
-            <a:spAutoFit/>
+            <a:noAutofit/>
           </a:bodyPr>
           <a:lstStyle/>
           <a:p>
             <a:pPr>
               <a:lnSpc>
-                <a:spcPts val="3546"/>
+                <a:spcPts val="1652"/>
               </a:lnSpc>
               <a:spcAft>
                 <a:spcPts val="0"/>
               </a:spcAft>
-              <a:defRPr sz="2860" b="1">
+              <a:defRPr sz="1400" b="1">
                 <a:solidFill>
-                  <a:srgbClr val="F4F0E7"/>
+                  <a:srgbClr val="E55024"/>
                 </a:solidFill>
                 <a:latin typeface="Arial"/>
               </a:defRPr>
             </a:pPr>
             <a:r>
-              <a:t>PULSE</a:t>
+              <a:t>CVIČENÍ 04</a:t>
             </a:r>
           </a:p>
         </p:txBody>
@@ -4041,8 +4041,8 @@
         </p:nvSpPr>
         <p:spPr>
           <a:xfrm>
-            <a:off x="533400" y="1041400"/>
-            <a:ext cx="2641600" cy="196570"/>
+            <a:off x="685800" y="2146300"/>
+            <a:ext cx="10795000" cy="1816100"/>
           </a:xfrm>
           <a:prstGeom prst="rect">
             <a:avLst/>
@@ -4051,26 +4051,26 @@
         </p:spPr>
         <p:txBody>
           <a:bodyPr wrap="none" lIns="0" rIns="0" tIns="0" bIns="0">
-            <a:spAutoFit/>
+            <a:noAutofit/>
           </a:bodyPr>
           <a:lstStyle/>
           <a:p>
             <a:pPr>
               <a:lnSpc>
-                <a:spcPts val="1047"/>
+                <a:spcPts val="5376"/>
               </a:lnSpc>
               <a:spcAft>
                 <a:spcPts val="0"/>
               </a:spcAft>
-              <a:defRPr sz="845" b="1">
+              <a:defRPr sz="4800" b="1">
                 <a:solidFill>
-                  <a:srgbClr val="F4F0E7"/>
+                  <a:srgbClr val="191B20"/>
                 </a:solidFill>
                 <a:latin typeface="Arial"/>
               </a:defRPr>
             </a:pPr>
             <a:r>
-              <a:t>FEST / 2027</a:t>
+              <a:t>První funkční implementace</a:t>
             </a:r>
           </a:p>
         </p:txBody>
@@ -4083,8 +4083,8 @@
         </p:nvSpPr>
         <p:spPr>
           <a:xfrm>
-            <a:off x="533400" y="1536700"/>
-            <a:ext cx="7874000" cy="236728"/>
+            <a:off x="711200" y="4191000"/>
+            <a:ext cx="10769600" cy="1016000"/>
           </a:xfrm>
           <a:prstGeom prst="rect">
             <a:avLst/>
@@ -4093,162 +4093,186 @@
         </p:spPr>
         <p:txBody>
           <a:bodyPr wrap="none" lIns="0" rIns="0" tIns="0" bIns="0">
-            <a:spAutoFit/>
+            <a:noAutofit/>
           </a:bodyPr>
           <a:lstStyle/>
           <a:p>
             <a:pPr>
               <a:lnSpc>
-                <a:spcPts val="1364"/>
+                <a:spcPts val="2713"/>
               </a:lnSpc>
               <a:spcAft>
                 <a:spcPts val="0"/>
               </a:spcAft>
-              <a:defRPr sz="1100" b="1">
+              <a:defRPr sz="2300" b="0">
                 <a:solidFill>
-                  <a:srgbClr val="F4F0E7"/>
+                  <a:srgbClr val="626773"/>
                 </a:solidFill>
                 <a:latin typeface="Arial"/>
               </a:defRPr>
             </a:pPr>
             <a:r>
-              <a:t>CVIČENÍ 04 / IMPLEMENTACE</a:t>
-            </a:r>
-          </a:p>
-        </p:txBody>
-      </p:sp>
-      <p:sp>
-        <p:nvSpPr>
-          <p:cNvPr id="8" name="TextBox 7"/>
-          <p:cNvSpPr txBox="1"/>
-          <p:nvPr/>
-        </p:nvSpPr>
-        <p:spPr>
-          <a:xfrm>
-            <a:off x="482600" y="2133600"/>
-            <a:ext cx="8001000" cy="2095500"/>
-          </a:xfrm>
-          <a:prstGeom prst="rect">
-            <a:avLst/>
-          </a:prstGeom>
-          <a:noFill/>
-        </p:spPr>
-        <p:txBody>
-          <a:bodyPr wrap="none" lIns="0" rIns="0" tIns="0" bIns="0">
-            <a:spAutoFit/>
-          </a:bodyPr>
-          <a:lstStyle/>
+              <a:t>Prague Pulse Fest · 1.–3. srpna 2027</a:t>
+            </a:r>
+          </a:p>
           <a:p>
             <a:pPr>
               <a:lnSpc>
-                <a:spcPts val="5830"/>
+                <a:spcPts val="2713"/>
               </a:lnSpc>
               <a:spcAft>
                 <a:spcPts val="0"/>
               </a:spcAft>
-              <a:defRPr sz="5500" b="1">
+              <a:defRPr sz="2300" b="0">
                 <a:solidFill>
-                  <a:srgbClr val="F4F0E7"/>
+                  <a:srgbClr val="626773"/>
                 </a:solidFill>
                 <a:latin typeface="Arial"/>
               </a:defRPr>
             </a:pPr>
             <a:r>
-              <a:t>Festival má</a:t>
-            </a:r>
-          </a:p>
+              <a:t>Výstaviště Praha · fiktivní festival</a:t>
+            </a:r>
+          </a:p>
+        </p:txBody>
+      </p:sp>
+      <p:sp>
+        <p:nvSpPr>
+          <p:cNvPr id="8" name="TextBox 7"/>
+          <p:cNvSpPr txBox="1"/>
+          <p:nvPr/>
+        </p:nvSpPr>
+        <p:spPr>
+          <a:xfrm>
+            <a:off x="711200" y="5600700"/>
+            <a:ext cx="10769600" cy="304800"/>
+          </a:xfrm>
+          <a:prstGeom prst="rect">
+            <a:avLst/>
+          </a:prstGeom>
+          <a:noFill/>
+        </p:spPr>
+        <p:txBody>
+          <a:bodyPr wrap="none" lIns="0" rIns="0" tIns="0" bIns="0">
+            <a:noAutofit/>
+          </a:bodyPr>
+          <a:lstStyle/>
           <a:p>
             <a:pPr>
               <a:lnSpc>
-                <a:spcPts val="5830"/>
-              </a:lnSpc>
-              <a:spcAft>
-                <a:spcPts val="0"/>
-              </a:spcAft>
-              <a:defRPr sz="5500" b="1">
-                <a:solidFill>
-                  <a:srgbClr val="F4F0E7"/>
-                </a:solidFill>
-                <a:latin typeface="Arial"/>
-              </a:defRPr>
-            </a:pPr>
-            <a:r>
-              <a:t>vlastní tvář.</a:t>
-            </a:r>
-          </a:p>
-        </p:txBody>
-      </p:sp>
-      <p:sp>
-        <p:nvSpPr>
-          <p:cNvPr id="9" name="TextBox 8"/>
-          <p:cNvSpPr txBox="1"/>
-          <p:nvPr/>
-        </p:nvSpPr>
-        <p:spPr>
-          <a:xfrm>
-            <a:off x="533400" y="4724400"/>
-            <a:ext cx="7747000" cy="1104900"/>
-          </a:xfrm>
-          <a:prstGeom prst="rect">
-            <a:avLst/>
-          </a:prstGeom>
-          <a:noFill/>
-        </p:spPr>
-        <p:txBody>
-          <a:bodyPr wrap="none" lIns="0" rIns="0" tIns="0" bIns="0">
-            <a:spAutoFit/>
-          </a:bodyPr>
-          <a:lstStyle/>
-          <a:p>
-            <a:pPr>
-              <a:lnSpc>
-                <a:spcPts val="2356"/>
+                <a:spcPts val="2242"/>
               </a:lnSpc>
               <a:spcAft>
                 <a:spcPts val="0"/>
               </a:spcAft>
               <a:defRPr sz="1900" b="0">
                 <a:solidFill>
-                  <a:srgbClr val="F4F0E7"/>
+                  <a:srgbClr val="191B20"/>
                 </a:solidFill>
                 <a:latin typeface="Arial"/>
               </a:defRPr>
             </a:pPr>
             <a:r>
-              <a:t>Výrazná typografie. Asymetrická kompozice.</a:t>
-            </a:r>
-          </a:p>
+              <a:t>Michal Ladra · Matěj Mlejnek · Jan Martínek</a:t>
+            </a:r>
+          </a:p>
+        </p:txBody>
+      </p:sp>
+      <p:sp>
+        <p:nvSpPr>
+          <p:cNvPr id="9" name="Rectangle 8"/>
+          <p:cNvSpPr/>
+          <p:nvPr/>
+        </p:nvSpPr>
+        <p:spPr>
+          <a:xfrm>
+            <a:off x="711200" y="6248400"/>
+            <a:ext cx="10769600" cy="12700"/>
+          </a:xfrm>
+          <a:prstGeom prst="rect">
+            <a:avLst/>
+          </a:prstGeom>
+          <a:solidFill>
+            <a:srgbClr val="DFE2E7"/>
+          </a:solidFill>
+          <a:ln>
+            <a:noFill/>
+          </a:ln>
+        </p:spPr>
+        <p:style>
+          <a:lnRef idx="1">
+            <a:schemeClr val="accent1"/>
+          </a:lnRef>
+          <a:fillRef idx="3">
+            <a:schemeClr val="accent1"/>
+          </a:fillRef>
+          <a:effectRef idx="2">
+            <a:schemeClr val="accent1"/>
+          </a:effectRef>
+          <a:fontRef idx="minor">
+            <a:schemeClr val="lt1"/>
+          </a:fontRef>
+        </p:style>
+        <p:txBody>
+          <a:bodyPr rtlCol="0" anchor="ctr"/>
+          <a:lstStyle/>
+          <a:p>
+            <a:pPr algn="ctr"/>
+          </a:p>
+        </p:txBody>
+      </p:sp>
+      <p:sp>
+        <p:nvSpPr>
+          <p:cNvPr id="10" name="TextBox 9"/>
+          <p:cNvSpPr txBox="1"/>
+          <p:nvPr/>
+        </p:nvSpPr>
+        <p:spPr>
+          <a:xfrm>
+            <a:off x="711200" y="6438900"/>
+            <a:ext cx="9652000" cy="203200"/>
+          </a:xfrm>
+          <a:prstGeom prst="rect">
+            <a:avLst/>
+          </a:prstGeom>
+          <a:noFill/>
+        </p:spPr>
+        <p:txBody>
+          <a:bodyPr wrap="none" lIns="0" rIns="0" tIns="0" bIns="0">
+            <a:noAutofit/>
+          </a:bodyPr>
+          <a:lstStyle/>
           <a:p>
             <a:pPr>
               <a:lnSpc>
-                <a:spcPts val="2356"/>
+                <a:spcPts val="1297"/>
               </a:lnSpc>
               <a:spcAft>
                 <a:spcPts val="0"/>
               </a:spcAft>
-              <a:defRPr sz="1900" b="0">
+              <a:defRPr sz="1100" b="0">
                 <a:solidFill>
-                  <a:srgbClr val="F4F0E7"/>
+                  <a:srgbClr val="626773"/>
                 </a:solidFill>
                 <a:latin typeface="Arial"/>
               </a:defRPr>
             </a:pPr>
             <a:r>
-              <a:t>HTML · CSS · JavaScript.</a:t>
-            </a:r>
-          </a:p>
-        </p:txBody>
-      </p:sp>
-      <p:sp>
-        <p:nvSpPr>
-          <p:cNvPr id="10" name="TextBox 9"/>
+              <a:t>Prague Pulse Fest · Výstaviště Praha · 2027</a:t>
+            </a:r>
+          </a:p>
+        </p:txBody>
+      </p:sp>
+      <p:sp>
+        <p:nvSpPr>
+          <p:cNvPr id="11" name="TextBox 10"/>
           <p:cNvSpPr txBox="1"/>
           <p:nvPr/>
         </p:nvSpPr>
         <p:spPr>
           <a:xfrm>
-            <a:off x="9220200" y="889000"/>
-            <a:ext cx="2667000" cy="961135"/>
+            <a:off x="10807700" y="6413500"/>
+            <a:ext cx="673100" cy="215900"/>
           </a:xfrm>
           <a:prstGeom prst="rect">
             <a:avLst/>
@@ -4257,316 +4281,26 @@
         </p:spPr>
         <p:txBody>
           <a:bodyPr wrap="none" lIns="0" rIns="0" tIns="0" bIns="0">
-            <a:spAutoFit/>
+            <a:noAutofit/>
           </a:bodyPr>
           <a:lstStyle/>
           <a:p>
             <a:pPr>
               <a:lnSpc>
-                <a:spcPts val="7067"/>
+                <a:spcPts val="1416"/>
               </a:lnSpc>
               <a:spcAft>
                 <a:spcPts val="0"/>
               </a:spcAft>
-              <a:defRPr sz="5700" b="1">
+              <a:defRPr sz="1200" b="0">
                 <a:solidFill>
-                  <a:srgbClr val="181817"/>
+                  <a:srgbClr val="626773"/>
                 </a:solidFill>
                 <a:latin typeface="Arial"/>
               </a:defRPr>
             </a:pPr>
             <a:r>
-              <a:t>1—3</a:t>
-            </a:r>
-          </a:p>
-        </p:txBody>
-      </p:sp>
-      <p:sp>
-        <p:nvSpPr>
-          <p:cNvPr id="11" name="TextBox 10"/>
-          <p:cNvSpPr txBox="1"/>
-          <p:nvPr/>
-        </p:nvSpPr>
-        <p:spPr>
-          <a:xfrm>
-            <a:off x="9220200" y="1765300"/>
-            <a:ext cx="2667000" cy="551688"/>
-          </a:xfrm>
-          <a:prstGeom prst="rect">
-            <a:avLst/>
-          </a:prstGeom>
-          <a:noFill/>
-        </p:spPr>
-        <p:txBody>
-          <a:bodyPr wrap="none" lIns="0" rIns="0" tIns="0" bIns="0">
-            <a:spAutoFit/>
-          </a:bodyPr>
-          <a:lstStyle/>
-          <a:p>
-            <a:pPr>
-              <a:lnSpc>
-                <a:spcPts val="3844"/>
-              </a:lnSpc>
-              <a:spcAft>
-                <a:spcPts val="0"/>
-              </a:spcAft>
-              <a:defRPr sz="3100" b="1">
-                <a:solidFill>
-                  <a:srgbClr val="181817"/>
-                </a:solidFill>
-                <a:latin typeface="Arial"/>
-              </a:defRPr>
-            </a:pPr>
-            <a:r>
-              <a:t>SRPEN</a:t>
-            </a:r>
-          </a:p>
-        </p:txBody>
-      </p:sp>
-      <p:sp>
-        <p:nvSpPr>
-          <p:cNvPr id="12" name="TextBox 11"/>
-          <p:cNvSpPr txBox="1"/>
-          <p:nvPr/>
-        </p:nvSpPr>
-        <p:spPr>
-          <a:xfrm>
-            <a:off x="9220200" y="2247900"/>
-            <a:ext cx="2667000" cy="724916"/>
-          </a:xfrm>
-          <a:prstGeom prst="rect">
-            <a:avLst/>
-          </a:prstGeom>
-          <a:noFill/>
-        </p:spPr>
-        <p:txBody>
-          <a:bodyPr wrap="none" lIns="0" rIns="0" tIns="0" bIns="0">
-            <a:spAutoFit/>
-          </a:bodyPr>
-          <a:lstStyle/>
-          <a:p>
-            <a:pPr>
-              <a:lnSpc>
-                <a:spcPts val="5208"/>
-              </a:lnSpc>
-              <a:spcAft>
-                <a:spcPts val="0"/>
-              </a:spcAft>
-              <a:defRPr sz="4200" b="1">
-                <a:solidFill>
-                  <a:srgbClr val="181817"/>
-                </a:solidFill>
-                <a:latin typeface="Arial"/>
-              </a:defRPr>
-            </a:pPr>
-            <a:r>
-              <a:t>2027</a:t>
-            </a:r>
-          </a:p>
-        </p:txBody>
-      </p:sp>
-      <p:sp>
-        <p:nvSpPr>
-          <p:cNvPr id="13" name="TextBox 12"/>
-          <p:cNvSpPr txBox="1"/>
-          <p:nvPr/>
-        </p:nvSpPr>
-        <p:spPr>
-          <a:xfrm>
-            <a:off x="9220200" y="3619500"/>
-            <a:ext cx="2540000" cy="598932"/>
-          </a:xfrm>
-          <a:prstGeom prst="rect">
-            <a:avLst/>
-          </a:prstGeom>
-          <a:noFill/>
-        </p:spPr>
-        <p:txBody>
-          <a:bodyPr wrap="none" lIns="0" rIns="0" tIns="0" bIns="0">
-            <a:spAutoFit/>
-          </a:bodyPr>
-          <a:lstStyle/>
-          <a:p>
-            <a:pPr>
-              <a:lnSpc>
-                <a:spcPts val="2108"/>
-              </a:lnSpc>
-              <a:spcAft>
-                <a:spcPts val="0"/>
-              </a:spcAft>
-              <a:defRPr sz="1700" b="1">
-                <a:solidFill>
-                  <a:srgbClr val="181817"/>
-                </a:solidFill>
-                <a:latin typeface="Arial"/>
-              </a:defRPr>
-            </a:pPr>
-            <a:r>
-              <a:t>PRAHA</a:t>
-            </a:r>
-          </a:p>
-          <a:p>
-            <a:pPr>
-              <a:lnSpc>
-                <a:spcPts val="2108"/>
-              </a:lnSpc>
-              <a:spcAft>
-                <a:spcPts val="0"/>
-              </a:spcAft>
-              <a:defRPr sz="1700" b="1">
-                <a:solidFill>
-                  <a:srgbClr val="181817"/>
-                </a:solidFill>
-                <a:latin typeface="Arial"/>
-              </a:defRPr>
-            </a:pPr>
-            <a:r>
-              <a:t>VLTAVA PARK</a:t>
-            </a:r>
-          </a:p>
-        </p:txBody>
-      </p:sp>
-      <p:sp>
-        <p:nvSpPr>
-          <p:cNvPr id="14" name="TextBox 13"/>
-          <p:cNvSpPr txBox="1"/>
-          <p:nvPr/>
-        </p:nvSpPr>
-        <p:spPr>
-          <a:xfrm>
-            <a:off x="9220200" y="5054600"/>
-            <a:ext cx="2540000" cy="882396"/>
-          </a:xfrm>
-          <a:prstGeom prst="rect">
-            <a:avLst/>
-          </a:prstGeom>
-          <a:noFill/>
-        </p:spPr>
-        <p:txBody>
-          <a:bodyPr wrap="none" lIns="0" rIns="0" tIns="0" bIns="0">
-            <a:spAutoFit/>
-          </a:bodyPr>
-          <a:lstStyle/>
-          <a:p>
-            <a:pPr>
-              <a:lnSpc>
-                <a:spcPts val="3224"/>
-              </a:lnSpc>
-              <a:spcAft>
-                <a:spcPts val="0"/>
-              </a:spcAft>
-              <a:defRPr sz="2600" b="1">
-                <a:solidFill>
-                  <a:srgbClr val="181817"/>
-                </a:solidFill>
-                <a:latin typeface="Arial"/>
-              </a:defRPr>
-            </a:pPr>
-            <a:r>
-              <a:t>CVIČENÍ</a:t>
-            </a:r>
-          </a:p>
-          <a:p>
-            <a:pPr>
-              <a:lnSpc>
-                <a:spcPts val="3224"/>
-              </a:lnSpc>
-              <a:spcAft>
-                <a:spcPts val="0"/>
-              </a:spcAft>
-              <a:defRPr sz="2600" b="1">
-                <a:solidFill>
-                  <a:srgbClr val="181817"/>
-                </a:solidFill>
-                <a:latin typeface="Arial"/>
-              </a:defRPr>
-            </a:pPr>
-            <a:r>
-              <a:t>04</a:t>
-            </a:r>
-          </a:p>
-        </p:txBody>
-      </p:sp>
-      <p:sp>
-        <p:nvSpPr>
-          <p:cNvPr id="15" name="TextBox 14"/>
-          <p:cNvSpPr txBox="1"/>
-          <p:nvPr/>
-        </p:nvSpPr>
-        <p:spPr>
-          <a:xfrm>
-            <a:off x="533400" y="6413500"/>
-            <a:ext cx="10033000" cy="181610"/>
-          </a:xfrm>
-          <a:prstGeom prst="rect">
-            <a:avLst/>
-          </a:prstGeom>
-          <a:noFill/>
-        </p:spPr>
-        <p:txBody>
-          <a:bodyPr wrap="none" lIns="0" rIns="0" tIns="0" bIns="0">
-            <a:spAutoFit/>
-          </a:bodyPr>
-          <a:lstStyle/>
-          <a:p>
-            <a:pPr>
-              <a:lnSpc>
-                <a:spcPts val="930"/>
-              </a:lnSpc>
-              <a:spcAft>
-                <a:spcPts val="0"/>
-              </a:spcAft>
-              <a:defRPr sz="750" b="0">
-                <a:solidFill>
-                  <a:srgbClr val="F4F0E7"/>
-                </a:solidFill>
-                <a:latin typeface="Arial"/>
-              </a:defRPr>
-            </a:pPr>
-            <a:r>
-              <a:t>DODATEČNĚ PŘIPRAVENÝ PODKLAD K MILNÍKU</a:t>
-            </a:r>
-          </a:p>
-        </p:txBody>
-      </p:sp>
-      <p:sp>
-        <p:nvSpPr>
-          <p:cNvPr id="16" name="TextBox 15"/>
-          <p:cNvSpPr txBox="1"/>
-          <p:nvPr/>
-        </p:nvSpPr>
-        <p:spPr>
-          <a:xfrm>
-            <a:off x="10947400" y="6350000"/>
-            <a:ext cx="825500" cy="220979"/>
-          </a:xfrm>
-          <a:prstGeom prst="rect">
-            <a:avLst/>
-          </a:prstGeom>
-          <a:noFill/>
-        </p:spPr>
-        <p:txBody>
-          <a:bodyPr wrap="none" lIns="0" rIns="0" tIns="0" bIns="0">
-            <a:spAutoFit/>
-          </a:bodyPr>
-          <a:lstStyle/>
-          <a:p>
-            <a:pPr>
-              <a:lnSpc>
-                <a:spcPts val="1240"/>
-              </a:lnSpc>
-              <a:spcAft>
-                <a:spcPts val="0"/>
-              </a:spcAft>
-              <a:defRPr sz="1000" b="1">
-                <a:solidFill>
-                  <a:srgbClr val="F4F0E7"/>
-                </a:solidFill>
-                <a:latin typeface="Arial"/>
-              </a:defRPr>
-            </a:pPr>
-            <a:r>
-              <a:t>04 / 01</a:t>
+              <a:t>1 / 6</a:t>
             </a:r>
           </a:p>
         </p:txBody>
@@ -4604,7 +4338,7 @@
             <a:avLst/>
           </a:prstGeom>
           <a:solidFill>
-            <a:srgbClr val="F4F0E7"/>
+            <a:srgbClr val="FFFFFF"/>
           </a:solidFill>
           <a:ln>
             <a:noFill/>
@@ -4640,8 +4374,8 @@
         </p:nvSpPr>
         <p:spPr>
           <a:xfrm>
-            <a:off x="533400" y="304800"/>
-            <a:ext cx="1905000" cy="283972"/>
+            <a:off x="711200" y="457200"/>
+            <a:ext cx="10769600" cy="228600"/>
           </a:xfrm>
           <a:prstGeom prst="rect">
             <a:avLst/>
@@ -4650,172 +4384,46 @@
         </p:spPr>
         <p:txBody>
           <a:bodyPr wrap="none" lIns="0" rIns="0" tIns="0" bIns="0">
-            <a:spAutoFit/>
+            <a:noAutofit/>
           </a:bodyPr>
           <a:lstStyle/>
           <a:p>
             <a:pPr>
               <a:lnSpc>
-                <a:spcPts val="1736"/>
+                <a:spcPts val="1534"/>
               </a:lnSpc>
               <a:spcAft>
                 <a:spcPts val="0"/>
               </a:spcAft>
-              <a:defRPr sz="1400" b="1">
+              <a:defRPr sz="1300" b="1">
                 <a:solidFill>
-                  <a:srgbClr val="181817"/>
+                  <a:srgbClr val="626773"/>
                 </a:solidFill>
                 <a:latin typeface="Arial"/>
               </a:defRPr>
             </a:pPr>
             <a:r>
-              <a:t>PRAGUE</a:t>
-            </a:r>
-          </a:p>
-        </p:txBody>
-      </p:sp>
-      <p:sp>
-        <p:nvSpPr>
-          <p:cNvPr id="4" name="TextBox 3"/>
-          <p:cNvSpPr txBox="1"/>
-          <p:nvPr/>
-        </p:nvSpPr>
-        <p:spPr>
-          <a:xfrm>
-            <a:off x="533400" y="495300"/>
-            <a:ext cx="1905000" cy="409956"/>
-          </a:xfrm>
-          <a:prstGeom prst="rect">
-            <a:avLst/>
-          </a:prstGeom>
-          <a:noFill/>
-        </p:spPr>
-        <p:txBody>
-          <a:bodyPr wrap="none" lIns="0" rIns="0" tIns="0" bIns="0">
-            <a:spAutoFit/>
-          </a:bodyPr>
-          <a:lstStyle/>
-          <a:p>
-            <a:pPr>
-              <a:lnSpc>
-                <a:spcPts val="2728"/>
-              </a:lnSpc>
-              <a:spcAft>
-                <a:spcPts val="0"/>
-              </a:spcAft>
-              <a:defRPr sz="2200" b="1">
-                <a:solidFill>
-                  <a:srgbClr val="181817"/>
-                </a:solidFill>
-                <a:latin typeface="Arial"/>
-              </a:defRPr>
-            </a:pPr>
-            <a:r>
-              <a:t>PULSE</a:t>
-            </a:r>
-          </a:p>
-        </p:txBody>
-      </p:sp>
-      <p:sp>
-        <p:nvSpPr>
-          <p:cNvPr id="5" name="TextBox 4"/>
-          <p:cNvSpPr txBox="1"/>
-          <p:nvPr/>
-        </p:nvSpPr>
-        <p:spPr>
-          <a:xfrm>
-            <a:off x="533400" y="812800"/>
-            <a:ext cx="2032000" cy="165862"/>
-          </a:xfrm>
-          <a:prstGeom prst="rect">
-            <a:avLst/>
-          </a:prstGeom>
-          <a:noFill/>
-        </p:spPr>
-        <p:txBody>
-          <a:bodyPr wrap="none" lIns="0" rIns="0" tIns="0" bIns="0">
-            <a:spAutoFit/>
-          </a:bodyPr>
-          <a:lstStyle/>
-          <a:p>
-            <a:pPr>
-              <a:lnSpc>
-                <a:spcPts val="806"/>
-              </a:lnSpc>
-              <a:spcAft>
-                <a:spcPts val="0"/>
-              </a:spcAft>
-              <a:defRPr sz="650" b="1">
-                <a:solidFill>
-                  <a:srgbClr val="181817"/>
-                </a:solidFill>
-                <a:latin typeface="Arial"/>
-              </a:defRPr>
-            </a:pPr>
-            <a:r>
-              <a:t>FEST / 2027</a:t>
-            </a:r>
-          </a:p>
-        </p:txBody>
-      </p:sp>
-      <p:sp>
-        <p:nvSpPr>
-          <p:cNvPr id="6" name="TextBox 5"/>
-          <p:cNvSpPr txBox="1"/>
-          <p:nvPr/>
-        </p:nvSpPr>
-        <p:spPr>
-          <a:xfrm>
-            <a:off x="5588000" y="533400"/>
-            <a:ext cx="6070600" cy="220979"/>
-          </a:xfrm>
-          <a:prstGeom prst="rect">
-            <a:avLst/>
-          </a:prstGeom>
-          <a:noFill/>
-        </p:spPr>
-        <p:txBody>
-          <a:bodyPr wrap="none" lIns="0" rIns="0" tIns="0" bIns="0">
-            <a:spAutoFit/>
-          </a:bodyPr>
-          <a:lstStyle/>
-          <a:p>
-            <a:pPr>
-              <a:lnSpc>
-                <a:spcPts val="1240"/>
-              </a:lnSpc>
-              <a:spcAft>
-                <a:spcPts val="0"/>
-              </a:spcAft>
-              <a:defRPr sz="1000" b="1">
-                <a:solidFill>
-                  <a:srgbClr val="68635B"/>
-                </a:solidFill>
-                <a:latin typeface="Arial"/>
-              </a:defRPr>
-            </a:pPr>
-            <a:r>
-              <a:t>OBSAH A FUNKCE</a:t>
-            </a:r>
-          </a:p>
-        </p:txBody>
-      </p:sp>
-      <p:sp>
-        <p:nvSpPr>
-          <p:cNvPr id="7" name="Rectangle 6"/>
+              <a:t>PROTI PROTOTYPU</a:t>
+            </a:r>
+          </a:p>
+        </p:txBody>
+      </p:sp>
+      <p:sp>
+        <p:nvSpPr>
+          <p:cNvPr id="4" name="Rectangle 3"/>
           <p:cNvSpPr/>
           <p:nvPr/>
         </p:nvSpPr>
         <p:spPr>
           <a:xfrm>
-            <a:off x="533400" y="1155700"/>
-            <a:ext cx="11125200" cy="25400"/>
+            <a:off x="711200" y="876300"/>
+            <a:ext cx="622300" cy="50800"/>
           </a:xfrm>
           <a:prstGeom prst="rect">
             <a:avLst/>
           </a:prstGeom>
           <a:solidFill>
-            <a:srgbClr val="181817"/>
+            <a:srgbClr val="E55024"/>
           </a:solidFill>
           <a:ln>
             <a:noFill/>
@@ -4845,14 +4453,14 @@
       </p:sp>
       <p:sp>
         <p:nvSpPr>
-          <p:cNvPr id="8" name="TextBox 7"/>
+          <p:cNvPr id="5" name="TextBox 4"/>
           <p:cNvSpPr txBox="1"/>
           <p:nvPr/>
         </p:nvSpPr>
         <p:spPr>
           <a:xfrm>
-            <a:off x="508000" y="1422400"/>
-            <a:ext cx="11176000" cy="1079500"/>
+            <a:off x="685800" y="1257300"/>
+            <a:ext cx="10795000" cy="1168400"/>
           </a:xfrm>
           <a:prstGeom prst="rect">
             <a:avLst/>
@@ -4861,46 +4469,46 @@
         </p:spPr>
         <p:txBody>
           <a:bodyPr wrap="none" lIns="0" rIns="0" tIns="0" bIns="0">
-            <a:spAutoFit/>
+            <a:noAutofit/>
           </a:bodyPr>
           <a:lstStyle/>
           <a:p>
             <a:pPr>
               <a:lnSpc>
-                <a:spcPts val="3740"/>
+                <a:spcPts val="4032"/>
               </a:lnSpc>
               <a:spcAft>
                 <a:spcPts val="0"/>
               </a:spcAft>
-              <a:defRPr sz="3400" b="1">
+              <a:defRPr sz="3600" b="1">
                 <a:solidFill>
-                  <a:srgbClr val="181817"/>
+                  <a:srgbClr val="191B20"/>
                 </a:solidFill>
                 <a:latin typeface="Arial"/>
               </a:defRPr>
             </a:pPr>
             <a:r>
-              <a:t>Hlavní části jsou propojené.</a:t>
-            </a:r>
-          </a:p>
-        </p:txBody>
-      </p:sp>
-      <p:sp>
-        <p:nvSpPr>
-          <p:cNvPr id="9" name="Rectangle 8"/>
+              <a:t>Co přibylo proti prototypu</a:t>
+            </a:r>
+          </a:p>
+        </p:txBody>
+      </p:sp>
+      <p:sp>
+        <p:nvSpPr>
+          <p:cNvPr id="6" name="Rectangle 5"/>
           <p:cNvSpPr/>
           <p:nvPr/>
         </p:nvSpPr>
         <p:spPr>
           <a:xfrm>
-            <a:off x="533400" y="2768600"/>
-            <a:ext cx="3556000" cy="2603500"/>
+            <a:off x="723900" y="2273300"/>
+            <a:ext cx="101600" cy="101600"/>
           </a:xfrm>
           <a:prstGeom prst="rect">
             <a:avLst/>
           </a:prstGeom>
           <a:solidFill>
-            <a:srgbClr val="181817"/>
+            <a:srgbClr val="E55024"/>
           </a:solidFill>
           <a:ln>
             <a:noFill/>
@@ -4930,20 +4538,81 @@
       </p:sp>
       <p:sp>
         <p:nvSpPr>
-          <p:cNvPr id="10" name="Rectangle 9"/>
+          <p:cNvPr id="7" name="TextBox 6"/>
+          <p:cNvSpPr txBox="1"/>
+          <p:nvPr/>
+        </p:nvSpPr>
+        <p:spPr>
+          <a:xfrm>
+            <a:off x="1066800" y="2146300"/>
+            <a:ext cx="10160000" cy="845819"/>
+          </a:xfrm>
+          <a:prstGeom prst="rect">
+            <a:avLst/>
+          </a:prstGeom>
+          <a:noFill/>
+        </p:spPr>
+        <p:txBody>
+          <a:bodyPr wrap="none" lIns="0" rIns="0" tIns="0" bIns="0">
+            <a:noAutofit/>
+          </a:bodyPr>
+          <a:lstStyle/>
+          <a:p>
+            <a:pPr>
+              <a:lnSpc>
+                <a:spcPts val="3360"/>
+              </a:lnSpc>
+              <a:spcAft>
+                <a:spcPts val="0"/>
+              </a:spcAft>
+              <a:defRPr sz="2800" b="0">
+                <a:solidFill>
+                  <a:srgbClr val="191B20"/>
+                </a:solidFill>
+                <a:latin typeface="Arial"/>
+              </a:defRPr>
+            </a:pPr>
+            <a:r>
+              <a:t>Úvod, program, účinkující, scény, info a hledání jsou</a:t>
+            </a:r>
+          </a:p>
+          <a:p>
+            <a:pPr>
+              <a:lnSpc>
+                <a:spcPts val="3360"/>
+              </a:lnSpc>
+              <a:spcAft>
+                <a:spcPts val="0"/>
+              </a:spcAft>
+              <a:defRPr sz="2800" b="0">
+                <a:solidFill>
+                  <a:srgbClr val="191B20"/>
+                </a:solidFill>
+                <a:latin typeface="Arial"/>
+              </a:defRPr>
+            </a:pPr>
+            <a:r>
+              <a:t>propojené.</a:t>
+            </a:r>
+          </a:p>
+        </p:txBody>
+      </p:sp>
+      <p:sp>
+        <p:nvSpPr>
+          <p:cNvPr id="8" name="Rectangle 7"/>
           <p:cNvSpPr/>
           <p:nvPr/>
         </p:nvSpPr>
         <p:spPr>
           <a:xfrm>
-            <a:off x="533400" y="2768600"/>
-            <a:ext cx="3556000" cy="76200"/>
+            <a:off x="723900" y="3398520"/>
+            <a:ext cx="101600" cy="101600"/>
           </a:xfrm>
           <a:prstGeom prst="rect">
             <a:avLst/>
           </a:prstGeom>
           <a:solidFill>
-            <a:srgbClr val="F45E2B"/>
+            <a:srgbClr val="E55024"/>
           </a:solidFill>
           <a:ln>
             <a:noFill/>
@@ -4973,14 +4642,14 @@
       </p:sp>
       <p:sp>
         <p:nvSpPr>
-          <p:cNvPr id="11" name="TextBox 10"/>
+          <p:cNvPr id="9" name="TextBox 8"/>
           <p:cNvSpPr txBox="1"/>
           <p:nvPr/>
         </p:nvSpPr>
         <p:spPr>
           <a:xfrm>
-            <a:off x="749300" y="3035300"/>
-            <a:ext cx="3124200" cy="685800"/>
+            <a:off x="1066800" y="3271520"/>
+            <a:ext cx="10160000" cy="419100"/>
           </a:xfrm>
           <a:prstGeom prst="rect">
             <a:avLst/>
@@ -4989,180 +4658,46 @@
         </p:spPr>
         <p:txBody>
           <a:bodyPr wrap="none" lIns="0" rIns="0" tIns="0" bIns="0">
-            <a:spAutoFit/>
+            <a:noAutofit/>
           </a:bodyPr>
           <a:lstStyle/>
           <a:p>
             <a:pPr>
               <a:lnSpc>
-                <a:spcPts val="2200"/>
+                <a:spcPts val="3360"/>
               </a:lnSpc>
               <a:spcAft>
                 <a:spcPts val="0"/>
               </a:spcAft>
-              <a:defRPr sz="2000" b="1">
+              <a:defRPr sz="2800" b="0">
                 <a:solidFill>
-                  <a:srgbClr val="F4F0E7"/>
+                  <a:srgbClr val="191B20"/>
                 </a:solidFill>
                 <a:latin typeface="Arial"/>
               </a:defRPr>
             </a:pPr>
             <a:r>
-              <a:t>Objevovat</a:t>
-            </a:r>
-          </a:p>
-        </p:txBody>
-      </p:sp>
-      <p:sp>
-        <p:nvSpPr>
-          <p:cNvPr id="12" name="TextBox 11"/>
-          <p:cNvSpPr txBox="1"/>
-          <p:nvPr/>
-        </p:nvSpPr>
-        <p:spPr>
-          <a:xfrm>
-            <a:off x="749300" y="3733800"/>
-            <a:ext cx="3124200" cy="1511300"/>
-          </a:xfrm>
-          <a:prstGeom prst="rect">
-            <a:avLst/>
-          </a:prstGeom>
-          <a:noFill/>
-        </p:spPr>
-        <p:txBody>
-          <a:bodyPr wrap="none" lIns="0" rIns="0" tIns="0" bIns="0">
-            <a:spAutoFit/>
-          </a:bodyPr>
-          <a:lstStyle/>
-          <a:p>
-            <a:pPr>
-              <a:lnSpc>
-                <a:spcPts val="1689"/>
-              </a:lnSpc>
-              <a:spcAft>
-                <a:spcPts val="0"/>
-              </a:spcAft>
-              <a:defRPr sz="1420" b="0">
-                <a:solidFill>
-                  <a:srgbClr val="F4F0E7"/>
-                </a:solidFill>
-                <a:latin typeface="Arial"/>
-              </a:defRPr>
-            </a:pPr>
-            <a:r>
-              <a:t>Úvod, novinky, 60 skutečných</a:t>
-            </a:r>
-          </a:p>
-          <a:p>
-            <a:pPr>
-              <a:lnSpc>
-                <a:spcPts val="1689"/>
-              </a:lnSpc>
-              <a:spcAft>
-                <a:spcPts val="0"/>
-              </a:spcAft>
-              <a:defRPr sz="1420" b="0">
-                <a:solidFill>
-                  <a:srgbClr val="F4F0E7"/>
-                </a:solidFill>
-                <a:latin typeface="Arial"/>
-              </a:defRPr>
-            </a:pPr>
-            <a:r>
-              <a:t>interpretů, biografické detaily a</a:t>
-            </a:r>
-          </a:p>
-          <a:p>
-            <a:pPr>
-              <a:lnSpc>
-                <a:spcPts val="1689"/>
-              </a:lnSpc>
-              <a:spcAft>
-                <a:spcPts val="0"/>
-              </a:spcAft>
-              <a:defRPr sz="1420" b="0">
-                <a:solidFill>
-                  <a:srgbClr val="F4F0E7"/>
-                </a:solidFill>
-                <a:latin typeface="Arial"/>
-              </a:defRPr>
-            </a:pPr>
-            <a:r>
-              <a:t>hledání.</a:t>
-            </a:r>
-          </a:p>
-          <a:p>
-            <a:pPr>
-              <a:lnSpc>
-                <a:spcPts val="1689"/>
-              </a:lnSpc>
-              <a:spcAft>
-                <a:spcPts val="0"/>
-              </a:spcAft>
-              <a:defRPr sz="1420" b="0">
-                <a:solidFill>
-                  <a:srgbClr val="F4F0E7"/>
-                </a:solidFill>
-                <a:latin typeface="Arial"/>
-              </a:defRPr>
-            </a:pPr>
-          </a:p>
-          <a:p>
-            <a:pPr>
-              <a:lnSpc>
-                <a:spcPts val="1689"/>
-              </a:lnSpc>
-              <a:spcAft>
-                <a:spcPts val="0"/>
-              </a:spcAft>
-              <a:defRPr sz="1420" b="0">
-                <a:solidFill>
-                  <a:srgbClr val="F4F0E7"/>
-                </a:solidFill>
-                <a:latin typeface="Arial"/>
-              </a:defRPr>
-            </a:pPr>
-            <a:r>
-              <a:t>CZ / EN pro zahraniční</a:t>
-            </a:r>
-          </a:p>
-          <a:p>
-            <a:pPr>
-              <a:lnSpc>
-                <a:spcPts val="1689"/>
-              </a:lnSpc>
-              <a:spcAft>
-                <a:spcPts val="0"/>
-              </a:spcAft>
-              <a:defRPr sz="1420" b="0">
-                <a:solidFill>
-                  <a:srgbClr val="F4F0E7"/>
-                </a:solidFill>
-                <a:latin typeface="Arial"/>
-              </a:defRPr>
-            </a:pPr>
-            <a:r>
-              <a:t>návštěvníky.</a:t>
-            </a:r>
-          </a:p>
-        </p:txBody>
-      </p:sp>
-      <p:sp>
-        <p:nvSpPr>
-          <p:cNvPr id="13" name="Rectangle 12"/>
+              <a:t>Vlastní vizuální identita a přepínání češtiny / angličtiny.</a:t>
+            </a:r>
+          </a:p>
+        </p:txBody>
+      </p:sp>
+      <p:sp>
+        <p:nvSpPr>
+          <p:cNvPr id="10" name="Rectangle 9"/>
           <p:cNvSpPr/>
           <p:nvPr/>
         </p:nvSpPr>
         <p:spPr>
           <a:xfrm>
-            <a:off x="4318000" y="2768600"/>
-            <a:ext cx="3556000" cy="2603500"/>
+            <a:off x="723900" y="4097020"/>
+            <a:ext cx="101600" cy="101600"/>
           </a:xfrm>
           <a:prstGeom prst="rect">
             <a:avLst/>
           </a:prstGeom>
           <a:solidFill>
-            <a:srgbClr val="E7E0D5"/>
+            <a:srgbClr val="E55024"/>
           </a:solidFill>
           <a:ln>
             <a:noFill/>
@@ -5192,20 +4727,62 @@
       </p:sp>
       <p:sp>
         <p:nvSpPr>
-          <p:cNvPr id="14" name="Rectangle 13"/>
+          <p:cNvPr id="11" name="TextBox 10"/>
+          <p:cNvSpPr txBox="1"/>
+          <p:nvPr/>
+        </p:nvSpPr>
+        <p:spPr>
+          <a:xfrm>
+            <a:off x="1066800" y="3970020"/>
+            <a:ext cx="10160000" cy="419100"/>
+          </a:xfrm>
+          <a:prstGeom prst="rect">
+            <a:avLst/>
+          </a:prstGeom>
+          <a:noFill/>
+        </p:spPr>
+        <p:txBody>
+          <a:bodyPr wrap="none" lIns="0" rIns="0" tIns="0" bIns="0">
+            <a:noAutofit/>
+          </a:bodyPr>
+          <a:lstStyle/>
+          <a:p>
+            <a:pPr>
+              <a:lnSpc>
+                <a:spcPts val="3360"/>
+              </a:lnSpc>
+              <a:spcAft>
+                <a:spcPts val="0"/>
+              </a:spcAft>
+              <a:defRPr sz="2800" b="0">
+                <a:solidFill>
+                  <a:srgbClr val="191B20"/>
+                </a:solidFill>
+                <a:latin typeface="Arial"/>
+              </a:defRPr>
+            </a:pPr>
+            <a:r>
+              <a:t>Filtry, osobní program, detaily a lokální objednávka s PDF.</a:t>
+            </a:r>
+          </a:p>
+        </p:txBody>
+      </p:sp>
+      <p:sp>
+        <p:nvSpPr>
+          <p:cNvPr id="12" name="Rectangle 11"/>
           <p:cNvSpPr/>
           <p:nvPr/>
         </p:nvSpPr>
         <p:spPr>
           <a:xfrm>
-            <a:off x="4318000" y="2768600"/>
-            <a:ext cx="3556000" cy="76200"/>
+            <a:off x="723900" y="4795520"/>
+            <a:ext cx="101600" cy="101600"/>
           </a:xfrm>
           <a:prstGeom prst="rect">
             <a:avLst/>
           </a:prstGeom>
           <a:solidFill>
-            <a:srgbClr val="F45E2B"/>
+            <a:srgbClr val="E55024"/>
           </a:solidFill>
           <a:ln>
             <a:noFill/>
@@ -5235,14 +4812,14 @@
       </p:sp>
       <p:sp>
         <p:nvSpPr>
-          <p:cNvPr id="15" name="TextBox 14"/>
+          <p:cNvPr id="13" name="TextBox 12"/>
           <p:cNvSpPr txBox="1"/>
           <p:nvPr/>
         </p:nvSpPr>
         <p:spPr>
           <a:xfrm>
-            <a:off x="4533900" y="3035300"/>
-            <a:ext cx="3124200" cy="685800"/>
+            <a:off x="1066800" y="4668520"/>
+            <a:ext cx="10160000" cy="419100"/>
           </a:xfrm>
           <a:prstGeom prst="rect">
             <a:avLst/>
@@ -5251,161 +4828,46 @@
         </p:spPr>
         <p:txBody>
           <a:bodyPr wrap="none" lIns="0" rIns="0" tIns="0" bIns="0">
-            <a:spAutoFit/>
+            <a:noAutofit/>
           </a:bodyPr>
           <a:lstStyle/>
           <a:p>
             <a:pPr>
               <a:lnSpc>
-                <a:spcPts val="2200"/>
+                <a:spcPts val="3360"/>
               </a:lnSpc>
               <a:spcAft>
                 <a:spcPts val="0"/>
               </a:spcAft>
-              <a:defRPr sz="2000" b="1">
+              <a:defRPr sz="2800" b="0">
                 <a:solidFill>
-                  <a:srgbClr val="181817"/>
+                  <a:srgbClr val="191B20"/>
                 </a:solidFill>
                 <a:latin typeface="Arial"/>
               </a:defRPr>
             </a:pPr>
             <a:r>
-              <a:t>Plánovat</a:t>
-            </a:r>
-          </a:p>
-        </p:txBody>
-      </p:sp>
-      <p:sp>
-        <p:nvSpPr>
-          <p:cNvPr id="16" name="TextBox 15"/>
-          <p:cNvSpPr txBox="1"/>
-          <p:nvPr/>
-        </p:nvSpPr>
-        <p:spPr>
-          <a:xfrm>
-            <a:off x="4533900" y="3733800"/>
-            <a:ext cx="3124200" cy="1511300"/>
-          </a:xfrm>
-          <a:prstGeom prst="rect">
-            <a:avLst/>
-          </a:prstGeom>
-          <a:noFill/>
-        </p:spPr>
-        <p:txBody>
-          <a:bodyPr wrap="none" lIns="0" rIns="0" tIns="0" bIns="0">
-            <a:spAutoFit/>
-          </a:bodyPr>
-          <a:lstStyle/>
-          <a:p>
-            <a:pPr>
-              <a:lnSpc>
-                <a:spcPts val="1689"/>
-              </a:lnSpc>
-              <a:spcAft>
-                <a:spcPts val="0"/>
-              </a:spcAft>
-              <a:defRPr sz="1420" b="0">
-                <a:solidFill>
-                  <a:srgbClr val="181817"/>
-                </a:solidFill>
-                <a:latin typeface="Arial"/>
-              </a:defRPr>
-            </a:pPr>
-            <a:r>
-              <a:t>Mezinárodní / česká / klubová</a:t>
-            </a:r>
-          </a:p>
-          <a:p>
-            <a:pPr>
-              <a:lnSpc>
-                <a:spcPts val="1689"/>
-              </a:lnSpc>
-              <a:spcAft>
-                <a:spcPts val="0"/>
-              </a:spcAft>
-              <a:defRPr sz="1420" b="0">
-                <a:solidFill>
-                  <a:srgbClr val="181817"/>
-                </a:solidFill>
-                <a:latin typeface="Arial"/>
-              </a:defRPr>
-            </a:pPr>
-            <a:r>
-              <a:t>scéna.</a:t>
-            </a:r>
-          </a:p>
-          <a:p>
-            <a:pPr>
-              <a:lnSpc>
-                <a:spcPts val="1689"/>
-              </a:lnSpc>
-              <a:spcAft>
-                <a:spcPts val="0"/>
-              </a:spcAft>
-              <a:defRPr sz="1420" b="0">
-                <a:solidFill>
-                  <a:srgbClr val="181817"/>
-                </a:solidFill>
-                <a:latin typeface="Arial"/>
-              </a:defRPr>
-            </a:pPr>
-          </a:p>
-          <a:p>
-            <a:pPr>
-              <a:lnSpc>
-                <a:spcPts val="1689"/>
-              </a:lnSpc>
-              <a:spcAft>
-                <a:spcPts val="0"/>
-              </a:spcAft>
-              <a:defRPr sz="1420" b="0">
-                <a:solidFill>
-                  <a:srgbClr val="181817"/>
-                </a:solidFill>
-                <a:latin typeface="Arial"/>
-              </a:defRPr>
-            </a:pPr>
-            <a:r>
-              <a:t>Osobní program, doprava a offline</a:t>
-            </a:r>
-          </a:p>
-          <a:p>
-            <a:pPr>
-              <a:lnSpc>
-                <a:spcPts val="1689"/>
-              </a:lnSpc>
-              <a:spcAft>
-                <a:spcPts val="0"/>
-              </a:spcAft>
-              <a:defRPr sz="1420" b="0">
-                <a:solidFill>
-                  <a:srgbClr val="181817"/>
-                </a:solidFill>
-                <a:latin typeface="Arial"/>
-              </a:defRPr>
-            </a:pPr>
-            <a:r>
-              <a:t>plánek.</a:t>
-            </a:r>
-          </a:p>
-        </p:txBody>
-      </p:sp>
-      <p:sp>
-        <p:nvSpPr>
-          <p:cNvPr id="17" name="Rectangle 16"/>
+              <a:t>Účet není nutný k dokončení objednávky.</a:t>
+            </a:r>
+          </a:p>
+        </p:txBody>
+      </p:sp>
+      <p:sp>
+        <p:nvSpPr>
+          <p:cNvPr id="14" name="Rectangle 13"/>
           <p:cNvSpPr/>
           <p:nvPr/>
         </p:nvSpPr>
         <p:spPr>
           <a:xfrm>
-            <a:off x="8102600" y="2768600"/>
-            <a:ext cx="3556000" cy="2603500"/>
+            <a:off x="711200" y="6248400"/>
+            <a:ext cx="10769600" cy="12700"/>
           </a:xfrm>
           <a:prstGeom prst="rect">
             <a:avLst/>
           </a:prstGeom>
           <a:solidFill>
-            <a:srgbClr val="E7E0D5"/>
+            <a:srgbClr val="DFE2E7"/>
           </a:solidFill>
           <a:ln>
             <a:noFill/>
@@ -5435,57 +4897,14 @@
       </p:sp>
       <p:sp>
         <p:nvSpPr>
-          <p:cNvPr id="18" name="Rectangle 17"/>
-          <p:cNvSpPr/>
-          <p:nvPr/>
-        </p:nvSpPr>
-        <p:spPr>
-          <a:xfrm>
-            <a:off x="8102600" y="2768600"/>
-            <a:ext cx="3556000" cy="76200"/>
-          </a:xfrm>
-          <a:prstGeom prst="rect">
-            <a:avLst/>
-          </a:prstGeom>
-          <a:solidFill>
-            <a:srgbClr val="F45E2B"/>
-          </a:solidFill>
-          <a:ln>
-            <a:noFill/>
-          </a:ln>
-        </p:spPr>
-        <p:style>
-          <a:lnRef idx="1">
-            <a:schemeClr val="accent1"/>
-          </a:lnRef>
-          <a:fillRef idx="3">
-            <a:schemeClr val="accent1"/>
-          </a:fillRef>
-          <a:effectRef idx="2">
-            <a:schemeClr val="accent1"/>
-          </a:effectRef>
-          <a:fontRef idx="minor">
-            <a:schemeClr val="lt1"/>
-          </a:fontRef>
-        </p:style>
-        <p:txBody>
-          <a:bodyPr rtlCol="0" anchor="ctr"/>
-          <a:lstStyle/>
-          <a:p>
-            <a:pPr algn="ctr"/>
-          </a:p>
-        </p:txBody>
-      </p:sp>
-      <p:sp>
-        <p:nvSpPr>
-          <p:cNvPr id="19" name="TextBox 18"/>
+          <p:cNvPr id="15" name="TextBox 14"/>
           <p:cNvSpPr txBox="1"/>
           <p:nvPr/>
         </p:nvSpPr>
         <p:spPr>
           <a:xfrm>
-            <a:off x="8318500" y="3035300"/>
-            <a:ext cx="3124200" cy="685800"/>
+            <a:off x="711200" y="6438900"/>
+            <a:ext cx="9652000" cy="203200"/>
           </a:xfrm>
           <a:prstGeom prst="rect">
             <a:avLst/>
@@ -5494,40 +4913,40 @@
         </p:spPr>
         <p:txBody>
           <a:bodyPr wrap="none" lIns="0" rIns="0" tIns="0" bIns="0">
-            <a:spAutoFit/>
+            <a:noAutofit/>
           </a:bodyPr>
           <a:lstStyle/>
           <a:p>
             <a:pPr>
               <a:lnSpc>
-                <a:spcPts val="2200"/>
+                <a:spcPts val="1297"/>
               </a:lnSpc>
               <a:spcAft>
                 <a:spcPts val="0"/>
               </a:spcAft>
-              <a:defRPr sz="2000" b="1">
+              <a:defRPr sz="1100" b="0">
                 <a:solidFill>
-                  <a:srgbClr val="181817"/>
+                  <a:srgbClr val="626773"/>
                 </a:solidFill>
                 <a:latin typeface="Arial"/>
               </a:defRPr>
             </a:pPr>
             <a:r>
-              <a:t>Vybrat vstupenku</a:t>
-            </a:r>
-          </a:p>
-        </p:txBody>
-      </p:sp>
-      <p:sp>
-        <p:nvSpPr>
-          <p:cNvPr id="20" name="TextBox 19"/>
+              <a:t>Prague Pulse Fest · Výstaviště Praha · 2027</a:t>
+            </a:r>
+          </a:p>
+        </p:txBody>
+      </p:sp>
+      <p:sp>
+        <p:nvSpPr>
+          <p:cNvPr id="16" name="TextBox 15"/>
           <p:cNvSpPr txBox="1"/>
           <p:nvPr/>
         </p:nvSpPr>
         <p:spPr>
           <a:xfrm>
-            <a:off x="8318500" y="3733800"/>
-            <a:ext cx="3124200" cy="1511300"/>
+            <a:off x="10807700" y="6413500"/>
+            <a:ext cx="673100" cy="215900"/>
           </a:xfrm>
           <a:prstGeom prst="rect">
             <a:avLst/>
@@ -5536,183 +4955,26 @@
         </p:spPr>
         <p:txBody>
           <a:bodyPr wrap="none" lIns="0" rIns="0" tIns="0" bIns="0">
-            <a:spAutoFit/>
+            <a:noAutofit/>
           </a:bodyPr>
           <a:lstStyle/>
           <a:p>
             <a:pPr>
               <a:lnSpc>
-                <a:spcPts val="1689"/>
+                <a:spcPts val="1416"/>
               </a:lnSpc>
               <a:spcAft>
                 <a:spcPts val="0"/>
               </a:spcAft>
-              <a:defRPr sz="1420" b="0">
+              <a:defRPr sz="1200" b="0">
                 <a:solidFill>
-                  <a:srgbClr val="181817"/>
+                  <a:srgbClr val="626773"/>
                 </a:solidFill>
                 <a:latin typeface="Arial"/>
               </a:defRPr>
             </a:pPr>
             <a:r>
-              <a:t>Jeden, dva nebo tři dny. Vlastní</a:t>
-            </a:r>
-          </a:p>
-          <a:p>
-            <a:pPr>
-              <a:lnSpc>
-                <a:spcPts val="1689"/>
-              </a:lnSpc>
-              <a:spcAft>
-                <a:spcPts val="0"/>
-              </a:spcAft>
-              <a:defRPr sz="1420" b="0">
-                <a:solidFill>
-                  <a:srgbClr val="181817"/>
-                </a:solidFill>
-                <a:latin typeface="Arial"/>
-              </a:defRPr>
-            </a:pPr>
-            <a:r>
-              <a:t>sedadlo nebo stání.</a:t>
-            </a:r>
-          </a:p>
-          <a:p>
-            <a:pPr>
-              <a:lnSpc>
-                <a:spcPts val="1689"/>
-              </a:lnSpc>
-              <a:spcAft>
-                <a:spcPts val="0"/>
-              </a:spcAft>
-              <a:defRPr sz="1420" b="0">
-                <a:solidFill>
-                  <a:srgbClr val="181817"/>
-                </a:solidFill>
-                <a:latin typeface="Arial"/>
-              </a:defRPr>
-            </a:pPr>
-          </a:p>
-          <a:p>
-            <a:pPr>
-              <a:lnSpc>
-                <a:spcPts val="1689"/>
-              </a:lnSpc>
-              <a:spcAft>
-                <a:spcPts val="0"/>
-              </a:spcAft>
-              <a:defRPr sz="1420" b="0">
-                <a:solidFill>
-                  <a:srgbClr val="181817"/>
-                </a:solidFill>
-                <a:latin typeface="Arial"/>
-              </a:defRPr>
-            </a:pPr>
-            <a:r>
-              <a:t>Kemp, promo a daňový rozpis v</a:t>
-            </a:r>
-          </a:p>
-          <a:p>
-            <a:pPr>
-              <a:lnSpc>
-                <a:spcPts val="1689"/>
-              </a:lnSpc>
-              <a:spcAft>
-                <a:spcPts val="0"/>
-              </a:spcAft>
-              <a:defRPr sz="1420" b="0">
-                <a:solidFill>
-                  <a:srgbClr val="181817"/>
-                </a:solidFill>
-                <a:latin typeface="Arial"/>
-              </a:defRPr>
-            </a:pPr>
-            <a:r>
-              <a:t>PDF.</a:t>
-            </a:r>
-          </a:p>
-        </p:txBody>
-      </p:sp>
-      <p:sp>
-        <p:nvSpPr>
-          <p:cNvPr id="21" name="TextBox 20"/>
-          <p:cNvSpPr txBox="1"/>
-          <p:nvPr/>
-        </p:nvSpPr>
-        <p:spPr>
-          <a:xfrm>
-            <a:off x="533400" y="6413500"/>
-            <a:ext cx="10033000" cy="181610"/>
-          </a:xfrm>
-          <a:prstGeom prst="rect">
-            <a:avLst/>
-          </a:prstGeom>
-          <a:noFill/>
-        </p:spPr>
-        <p:txBody>
-          <a:bodyPr wrap="none" lIns="0" rIns="0" tIns="0" bIns="0">
-            <a:spAutoFit/>
-          </a:bodyPr>
-          <a:lstStyle/>
-          <a:p>
-            <a:pPr>
-              <a:lnSpc>
-                <a:spcPts val="930"/>
-              </a:lnSpc>
-              <a:spcAft>
-                <a:spcPts val="0"/>
-              </a:spcAft>
-              <a:defRPr sz="750" b="0">
-                <a:solidFill>
-                  <a:srgbClr val="68635B"/>
-                </a:solidFill>
-                <a:latin typeface="Arial"/>
-              </a:defRPr>
-            </a:pPr>
-            <a:r>
-              <a:t>DODATEČNĚ PŘIPRAVENÝ PODKLAD K MILNÍKU</a:t>
-            </a:r>
-          </a:p>
-        </p:txBody>
-      </p:sp>
-      <p:sp>
-        <p:nvSpPr>
-          <p:cNvPr id="22" name="TextBox 21"/>
-          <p:cNvSpPr txBox="1"/>
-          <p:nvPr/>
-        </p:nvSpPr>
-        <p:spPr>
-          <a:xfrm>
-            <a:off x="10947400" y="6350000"/>
-            <a:ext cx="825500" cy="220979"/>
-          </a:xfrm>
-          <a:prstGeom prst="rect">
-            <a:avLst/>
-          </a:prstGeom>
-          <a:noFill/>
-        </p:spPr>
-        <p:txBody>
-          <a:bodyPr wrap="none" lIns="0" rIns="0" tIns="0" bIns="0">
-            <a:spAutoFit/>
-          </a:bodyPr>
-          <a:lstStyle/>
-          <a:p>
-            <a:pPr>
-              <a:lnSpc>
-                <a:spcPts val="1240"/>
-              </a:lnSpc>
-              <a:spcAft>
-                <a:spcPts val="0"/>
-              </a:spcAft>
-              <a:defRPr sz="1000" b="1">
-                <a:solidFill>
-                  <a:srgbClr val="68635B"/>
-                </a:solidFill>
-                <a:latin typeface="Arial"/>
-              </a:defRPr>
-            </a:pPr>
-            <a:r>
-              <a:t>04 / 02</a:t>
+              <a:t>2 / 6</a:t>
             </a:r>
           </a:p>
         </p:txBody>
@@ -5750,7 +5012,7 @@
             <a:avLst/>
           </a:prstGeom>
           <a:solidFill>
-            <a:srgbClr val="F4F0E7"/>
+            <a:srgbClr val="FFFFFF"/>
           </a:solidFill>
           <a:ln>
             <a:noFill/>
@@ -5786,8 +5048,8 @@
         </p:nvSpPr>
         <p:spPr>
           <a:xfrm>
-            <a:off x="533400" y="304800"/>
-            <a:ext cx="1905000" cy="283972"/>
+            <a:off x="711200" y="457200"/>
+            <a:ext cx="10769600" cy="228600"/>
           </a:xfrm>
           <a:prstGeom prst="rect">
             <a:avLst/>
@@ -5796,172 +5058,46 @@
         </p:spPr>
         <p:txBody>
           <a:bodyPr wrap="none" lIns="0" rIns="0" tIns="0" bIns="0">
-            <a:spAutoFit/>
+            <a:noAutofit/>
           </a:bodyPr>
           <a:lstStyle/>
           <a:p>
             <a:pPr>
               <a:lnSpc>
-                <a:spcPts val="1736"/>
+                <a:spcPts val="1534"/>
               </a:lnSpc>
               <a:spcAft>
                 <a:spcPts val="0"/>
               </a:spcAft>
-              <a:defRPr sz="1400" b="1">
+              <a:defRPr sz="1300" b="1">
                 <a:solidFill>
-                  <a:srgbClr val="181817"/>
+                  <a:srgbClr val="626773"/>
                 </a:solidFill>
                 <a:latin typeface="Arial"/>
               </a:defRPr>
             </a:pPr>
             <a:r>
-              <a:t>PRAGUE</a:t>
-            </a:r>
-          </a:p>
-        </p:txBody>
-      </p:sp>
-      <p:sp>
-        <p:nvSpPr>
-          <p:cNvPr id="4" name="TextBox 3"/>
-          <p:cNvSpPr txBox="1"/>
-          <p:nvPr/>
-        </p:nvSpPr>
-        <p:spPr>
-          <a:xfrm>
-            <a:off x="533400" y="495300"/>
-            <a:ext cx="1905000" cy="409956"/>
-          </a:xfrm>
-          <a:prstGeom prst="rect">
-            <a:avLst/>
-          </a:prstGeom>
-          <a:noFill/>
-        </p:spPr>
-        <p:txBody>
-          <a:bodyPr wrap="none" lIns="0" rIns="0" tIns="0" bIns="0">
-            <a:spAutoFit/>
-          </a:bodyPr>
-          <a:lstStyle/>
-          <a:p>
-            <a:pPr>
-              <a:lnSpc>
-                <a:spcPts val="2728"/>
-              </a:lnSpc>
-              <a:spcAft>
-                <a:spcPts val="0"/>
-              </a:spcAft>
-              <a:defRPr sz="2200" b="1">
-                <a:solidFill>
-                  <a:srgbClr val="181817"/>
-                </a:solidFill>
-                <a:latin typeface="Arial"/>
-              </a:defRPr>
-            </a:pPr>
-            <a:r>
-              <a:t>PULSE</a:t>
-            </a:r>
-          </a:p>
-        </p:txBody>
-      </p:sp>
-      <p:sp>
-        <p:nvSpPr>
-          <p:cNvPr id="5" name="TextBox 4"/>
-          <p:cNvSpPr txBox="1"/>
-          <p:nvPr/>
-        </p:nvSpPr>
-        <p:spPr>
-          <a:xfrm>
-            <a:off x="533400" y="812800"/>
-            <a:ext cx="2032000" cy="165862"/>
-          </a:xfrm>
-          <a:prstGeom prst="rect">
-            <a:avLst/>
-          </a:prstGeom>
-          <a:noFill/>
-        </p:spPr>
-        <p:txBody>
-          <a:bodyPr wrap="none" lIns="0" rIns="0" tIns="0" bIns="0">
-            <a:spAutoFit/>
-          </a:bodyPr>
-          <a:lstStyle/>
-          <a:p>
-            <a:pPr>
-              <a:lnSpc>
-                <a:spcPts val="806"/>
-              </a:lnSpc>
-              <a:spcAft>
-                <a:spcPts val="0"/>
-              </a:spcAft>
-              <a:defRPr sz="650" b="1">
-                <a:solidFill>
-                  <a:srgbClr val="181817"/>
-                </a:solidFill>
-                <a:latin typeface="Arial"/>
-              </a:defRPr>
-            </a:pPr>
-            <a:r>
-              <a:t>FEST / 2027</a:t>
-            </a:r>
-          </a:p>
-        </p:txBody>
-      </p:sp>
-      <p:sp>
-        <p:nvSpPr>
-          <p:cNvPr id="6" name="TextBox 5"/>
-          <p:cNvSpPr txBox="1"/>
-          <p:nvPr/>
-        </p:nvSpPr>
-        <p:spPr>
-          <a:xfrm>
-            <a:off x="5588000" y="533400"/>
-            <a:ext cx="6070600" cy="220979"/>
-          </a:xfrm>
-          <a:prstGeom prst="rect">
-            <a:avLst/>
-          </a:prstGeom>
-          <a:noFill/>
-        </p:spPr>
-        <p:txBody>
-          <a:bodyPr wrap="none" lIns="0" rIns="0" tIns="0" bIns="0">
-            <a:spAutoFit/>
-          </a:bodyPr>
-          <a:lstStyle/>
-          <a:p>
-            <a:pPr>
-              <a:lnSpc>
-                <a:spcPts val="1240"/>
-              </a:lnSpc>
-              <a:spcAft>
-                <a:spcPts val="0"/>
-              </a:spcAft>
-              <a:defRPr sz="1000" b="1">
-                <a:solidFill>
-                  <a:srgbClr val="68635B"/>
-                </a:solidFill>
-                <a:latin typeface="Arial"/>
-              </a:defRPr>
-            </a:pPr>
-            <a:r>
-              <a:t>MOBILNÍ A DESKTOPOVÉ ZOBRAZENÍ</a:t>
-            </a:r>
-          </a:p>
-        </p:txBody>
-      </p:sp>
-      <p:sp>
-        <p:nvSpPr>
-          <p:cNvPr id="7" name="Rectangle 6"/>
+              <a:t>ROZLOŽENÍ A OVLÁDÁNÍ</a:t>
+            </a:r>
+          </a:p>
+        </p:txBody>
+      </p:sp>
+      <p:sp>
+        <p:nvSpPr>
+          <p:cNvPr id="4" name="Rectangle 3"/>
           <p:cNvSpPr/>
           <p:nvPr/>
         </p:nvSpPr>
         <p:spPr>
           <a:xfrm>
-            <a:off x="533400" y="1155700"/>
-            <a:ext cx="11125200" cy="25400"/>
+            <a:off x="711200" y="876300"/>
+            <a:ext cx="622300" cy="50800"/>
           </a:xfrm>
           <a:prstGeom prst="rect">
             <a:avLst/>
           </a:prstGeom>
           <a:solidFill>
-            <a:srgbClr val="181817"/>
+            <a:srgbClr val="E55024"/>
           </a:solidFill>
           <a:ln>
             <a:noFill/>
@@ -5991,14 +5127,14 @@
       </p:sp>
       <p:sp>
         <p:nvSpPr>
-          <p:cNvPr id="8" name="TextBox 7"/>
+          <p:cNvPr id="5" name="TextBox 4"/>
           <p:cNvSpPr txBox="1"/>
           <p:nvPr/>
         </p:nvSpPr>
         <p:spPr>
           <a:xfrm>
-            <a:off x="508000" y="1422400"/>
-            <a:ext cx="11176000" cy="1079500"/>
+            <a:off x="685800" y="1257300"/>
+            <a:ext cx="10795000" cy="1168400"/>
           </a:xfrm>
           <a:prstGeom prst="rect">
             <a:avLst/>
@@ -6007,46 +5143,46 @@
         </p:spPr>
         <p:txBody>
           <a:bodyPr wrap="none" lIns="0" rIns="0" tIns="0" bIns="0">
-            <a:spAutoFit/>
+            <a:noAutofit/>
           </a:bodyPr>
           <a:lstStyle/>
           <a:p>
             <a:pPr>
               <a:lnSpc>
-                <a:spcPts val="3740"/>
+                <a:spcPts val="4032"/>
               </a:lnSpc>
               <a:spcAft>
                 <a:spcPts val="0"/>
               </a:spcAft>
-              <a:defRPr sz="3400" b="1">
+              <a:defRPr sz="3600" b="1">
                 <a:solidFill>
-                  <a:srgbClr val="181817"/>
+                  <a:srgbClr val="191B20"/>
                 </a:solidFill>
                 <a:latin typeface="Arial"/>
               </a:defRPr>
             </a:pPr>
             <a:r>
-              <a:t>Flexbox i Grid mají své místo.</a:t>
-            </a:r>
-          </a:p>
-        </p:txBody>
-      </p:sp>
-      <p:sp>
-        <p:nvSpPr>
-          <p:cNvPr id="9" name="Rectangle 8"/>
+              <a:t>Mobilní a desktopové zobrazení</a:t>
+            </a:r>
+          </a:p>
+        </p:txBody>
+      </p:sp>
+      <p:sp>
+        <p:nvSpPr>
+          <p:cNvPr id="6" name="Rectangle 5"/>
           <p:cNvSpPr/>
           <p:nvPr/>
         </p:nvSpPr>
         <p:spPr>
           <a:xfrm>
-            <a:off x="533400" y="2768600"/>
-            <a:ext cx="5448300" cy="2603500"/>
+            <a:off x="723900" y="2273300"/>
+            <a:ext cx="101600" cy="101600"/>
           </a:xfrm>
           <a:prstGeom prst="rect">
             <a:avLst/>
           </a:prstGeom>
           <a:solidFill>
-            <a:srgbClr val="181817"/>
+            <a:srgbClr val="E55024"/>
           </a:solidFill>
           <a:ln>
             <a:noFill/>
@@ -6076,20 +5212,62 @@
       </p:sp>
       <p:sp>
         <p:nvSpPr>
-          <p:cNvPr id="10" name="Rectangle 9"/>
+          <p:cNvPr id="7" name="TextBox 6"/>
+          <p:cNvSpPr txBox="1"/>
+          <p:nvPr/>
+        </p:nvSpPr>
+        <p:spPr>
+          <a:xfrm>
+            <a:off x="1066800" y="2146300"/>
+            <a:ext cx="10160000" cy="419100"/>
+          </a:xfrm>
+          <a:prstGeom prst="rect">
+            <a:avLst/>
+          </a:prstGeom>
+          <a:noFill/>
+        </p:spPr>
+        <p:txBody>
+          <a:bodyPr wrap="none" lIns="0" rIns="0" tIns="0" bIns="0">
+            <a:noAutofit/>
+          </a:bodyPr>
+          <a:lstStyle/>
+          <a:p>
+            <a:pPr>
+              <a:lnSpc>
+                <a:spcPts val="3360"/>
+              </a:lnSpc>
+              <a:spcAft>
+                <a:spcPts val="0"/>
+              </a:spcAft>
+              <a:defRPr sz="2800" b="0">
+                <a:solidFill>
+                  <a:srgbClr val="191B20"/>
+                </a:solidFill>
+                <a:latin typeface="Arial"/>
+              </a:defRPr>
+            </a:pPr>
+            <a:r>
+              <a:t>Flexbox: navigace, tlačítka a řádky formulářů.</a:t>
+            </a:r>
+          </a:p>
+        </p:txBody>
+      </p:sp>
+      <p:sp>
+        <p:nvSpPr>
+          <p:cNvPr id="8" name="Rectangle 7"/>
           <p:cNvSpPr/>
           <p:nvPr/>
         </p:nvSpPr>
         <p:spPr>
           <a:xfrm>
-            <a:off x="533400" y="2768600"/>
-            <a:ext cx="5448300" cy="76200"/>
+            <a:off x="723900" y="2971800"/>
+            <a:ext cx="101600" cy="101600"/>
           </a:xfrm>
           <a:prstGeom prst="rect">
             <a:avLst/>
           </a:prstGeom>
           <a:solidFill>
-            <a:srgbClr val="F45E2B"/>
+            <a:srgbClr val="E55024"/>
           </a:solidFill>
           <a:ln>
             <a:noFill/>
@@ -6119,14 +5297,14 @@
       </p:sp>
       <p:sp>
         <p:nvSpPr>
-          <p:cNvPr id="11" name="TextBox 10"/>
+          <p:cNvPr id="9" name="TextBox 8"/>
           <p:cNvSpPr txBox="1"/>
           <p:nvPr/>
         </p:nvSpPr>
         <p:spPr>
           <a:xfrm>
-            <a:off x="749300" y="3035300"/>
-            <a:ext cx="5016500" cy="685800"/>
+            <a:off x="1066800" y="2844800"/>
+            <a:ext cx="10160000" cy="419100"/>
           </a:xfrm>
           <a:prstGeom prst="rect">
             <a:avLst/>
@@ -6135,123 +5313,46 @@
         </p:spPr>
         <p:txBody>
           <a:bodyPr wrap="none" lIns="0" rIns="0" tIns="0" bIns="0">
-            <a:spAutoFit/>
+            <a:noAutofit/>
           </a:bodyPr>
           <a:lstStyle/>
           <a:p>
             <a:pPr>
               <a:lnSpc>
-                <a:spcPts val="2200"/>
+                <a:spcPts val="3360"/>
               </a:lnSpc>
               <a:spcAft>
                 <a:spcPts val="0"/>
               </a:spcAft>
-              <a:defRPr sz="2000" b="1">
+              <a:defRPr sz="2800" b="0">
                 <a:solidFill>
-                  <a:srgbClr val="F4F0E7"/>
+                  <a:srgbClr val="191B20"/>
                 </a:solidFill>
                 <a:latin typeface="Arial"/>
               </a:defRPr>
             </a:pPr>
             <a:r>
-              <a:t>Flexbox</a:t>
-            </a:r>
-          </a:p>
-        </p:txBody>
-      </p:sp>
-      <p:sp>
-        <p:nvSpPr>
-          <p:cNvPr id="12" name="TextBox 11"/>
-          <p:cNvSpPr txBox="1"/>
-          <p:nvPr/>
-        </p:nvSpPr>
-        <p:spPr>
-          <a:xfrm>
-            <a:off x="749300" y="3733800"/>
-            <a:ext cx="5016500" cy="1511300"/>
-          </a:xfrm>
-          <a:prstGeom prst="rect">
-            <a:avLst/>
-          </a:prstGeom>
-          <a:noFill/>
-        </p:spPr>
-        <p:txBody>
-          <a:bodyPr wrap="none" lIns="0" rIns="0" tIns="0" bIns="0">
-            <a:spAutoFit/>
-          </a:bodyPr>
-          <a:lstStyle/>
-          <a:p>
-            <a:pPr>
-              <a:lnSpc>
-                <a:spcPts val="1689"/>
-              </a:lnSpc>
-              <a:spcAft>
-                <a:spcPts val="0"/>
-              </a:spcAft>
-              <a:defRPr sz="1420" b="0">
-                <a:solidFill>
-                  <a:srgbClr val="F4F0E7"/>
-                </a:solidFill>
-                <a:latin typeface="Arial"/>
-              </a:defRPr>
-            </a:pPr>
-            <a:r>
-              <a:t>Navigace, akce, přepínače a řádky formulářů.</a:t>
-            </a:r>
-          </a:p>
-          <a:p>
-            <a:pPr>
-              <a:lnSpc>
-                <a:spcPts val="1689"/>
-              </a:lnSpc>
-              <a:spcAft>
-                <a:spcPts val="0"/>
-              </a:spcAft>
-              <a:defRPr sz="1420" b="0">
-                <a:solidFill>
-                  <a:srgbClr val="F4F0E7"/>
-                </a:solidFill>
-                <a:latin typeface="Arial"/>
-              </a:defRPr>
-            </a:pPr>
-          </a:p>
-          <a:p>
-            <a:pPr>
-              <a:lnSpc>
-                <a:spcPts val="1689"/>
-              </a:lnSpc>
-              <a:spcAft>
-                <a:spcPts val="0"/>
-              </a:spcAft>
-              <a:defRPr sz="1420" b="0">
-                <a:solidFill>
-                  <a:srgbClr val="F4F0E7"/>
-                </a:solidFill>
-                <a:latin typeface="Arial"/>
-              </a:defRPr>
-            </a:pPr>
-            <a:r>
-              <a:t>Zalamování podle dostupného prostoru.</a:t>
-            </a:r>
-          </a:p>
-        </p:txBody>
-      </p:sp>
-      <p:sp>
-        <p:nvSpPr>
-          <p:cNvPr id="13" name="Rectangle 12"/>
+              <a:t>Grid: obsahové seznamy a karty podle šířky.</a:t>
+            </a:r>
+          </a:p>
+        </p:txBody>
+      </p:sp>
+      <p:sp>
+        <p:nvSpPr>
+          <p:cNvPr id="10" name="Rectangle 9"/>
           <p:cNvSpPr/>
           <p:nvPr/>
         </p:nvSpPr>
         <p:spPr>
           <a:xfrm>
-            <a:off x="6210300" y="2768600"/>
-            <a:ext cx="5448300" cy="2603500"/>
+            <a:off x="723900" y="3670300"/>
+            <a:ext cx="101600" cy="101600"/>
           </a:xfrm>
           <a:prstGeom prst="rect">
             <a:avLst/>
           </a:prstGeom>
           <a:solidFill>
-            <a:srgbClr val="E7E0D5"/>
+            <a:srgbClr val="E55024"/>
           </a:solidFill>
           <a:ln>
             <a:noFill/>
@@ -6281,20 +5382,62 @@
       </p:sp>
       <p:sp>
         <p:nvSpPr>
-          <p:cNvPr id="14" name="Rectangle 13"/>
+          <p:cNvPr id="11" name="TextBox 10"/>
+          <p:cNvSpPr txBox="1"/>
+          <p:nvPr/>
+        </p:nvSpPr>
+        <p:spPr>
+          <a:xfrm>
+            <a:off x="1066800" y="3543300"/>
+            <a:ext cx="10160000" cy="419100"/>
+          </a:xfrm>
+          <a:prstGeom prst="rect">
+            <a:avLst/>
+          </a:prstGeom>
+          <a:noFill/>
+        </p:spPr>
+        <p:txBody>
+          <a:bodyPr wrap="none" lIns="0" rIns="0" tIns="0" bIns="0">
+            <a:noAutofit/>
+          </a:bodyPr>
+          <a:lstStyle/>
+          <a:p>
+            <a:pPr>
+              <a:lnSpc>
+                <a:spcPts val="3360"/>
+              </a:lnSpc>
+              <a:spcAft>
+                <a:spcPts val="0"/>
+              </a:spcAft>
+              <a:defRPr sz="2800" b="0">
+                <a:solidFill>
+                  <a:srgbClr val="191B20"/>
+                </a:solidFill>
+                <a:latin typeface="Arial"/>
+              </a:defRPr>
+            </a:pPr>
+            <a:r>
+              <a:t>Pružné rozměry místo rozložení pro konkrétní telefon.</a:t>
+            </a:r>
+          </a:p>
+        </p:txBody>
+      </p:sp>
+      <p:sp>
+        <p:nvSpPr>
+          <p:cNvPr id="12" name="Rectangle 11"/>
           <p:cNvSpPr/>
           <p:nvPr/>
         </p:nvSpPr>
         <p:spPr>
           <a:xfrm>
-            <a:off x="6210300" y="2768600"/>
-            <a:ext cx="5448300" cy="76200"/>
+            <a:off x="723900" y="4368800"/>
+            <a:ext cx="101600" cy="101600"/>
           </a:xfrm>
           <a:prstGeom prst="rect">
             <a:avLst/>
           </a:prstGeom>
           <a:solidFill>
-            <a:srgbClr val="F45E2B"/>
+            <a:srgbClr val="E55024"/>
           </a:solidFill>
           <a:ln>
             <a:noFill/>
@@ -6324,14 +5467,14 @@
       </p:sp>
       <p:sp>
         <p:nvSpPr>
-          <p:cNvPr id="15" name="TextBox 14"/>
+          <p:cNvPr id="13" name="TextBox 12"/>
           <p:cNvSpPr txBox="1"/>
           <p:nvPr/>
         </p:nvSpPr>
         <p:spPr>
           <a:xfrm>
-            <a:off x="6426200" y="3035300"/>
-            <a:ext cx="5016500" cy="685800"/>
+            <a:off x="1066800" y="4241800"/>
+            <a:ext cx="10160000" cy="419100"/>
           </a:xfrm>
           <a:prstGeom prst="rect">
             <a:avLst/>
@@ -6340,40 +5483,83 @@
         </p:spPr>
         <p:txBody>
           <a:bodyPr wrap="none" lIns="0" rIns="0" tIns="0" bIns="0">
-            <a:spAutoFit/>
+            <a:noAutofit/>
           </a:bodyPr>
           <a:lstStyle/>
           <a:p>
             <a:pPr>
               <a:lnSpc>
-                <a:spcPts val="2200"/>
+                <a:spcPts val="3360"/>
               </a:lnSpc>
               <a:spcAft>
                 <a:spcPts val="0"/>
               </a:spcAft>
-              <a:defRPr sz="2000" b="1">
+              <a:defRPr sz="2800" b="0">
                 <a:solidFill>
-                  <a:srgbClr val="181817"/>
+                  <a:srgbClr val="191B20"/>
                 </a:solidFill>
                 <a:latin typeface="Arial"/>
               </a:defRPr>
             </a:pPr>
             <a:r>
-              <a:t>Grid</a:t>
-            </a:r>
-          </a:p>
-        </p:txBody>
-      </p:sp>
-      <p:sp>
-        <p:nvSpPr>
-          <p:cNvPr id="16" name="TextBox 15"/>
+              <a:t>Kontrola i s otevřeným menu, dialogem a plným košíkem.</a:t>
+            </a:r>
+          </a:p>
+        </p:txBody>
+      </p:sp>
+      <p:sp>
+        <p:nvSpPr>
+          <p:cNvPr id="14" name="Rectangle 13"/>
+          <p:cNvSpPr/>
+          <p:nvPr/>
+        </p:nvSpPr>
+        <p:spPr>
+          <a:xfrm>
+            <a:off x="711200" y="6248400"/>
+            <a:ext cx="10769600" cy="12700"/>
+          </a:xfrm>
+          <a:prstGeom prst="rect">
+            <a:avLst/>
+          </a:prstGeom>
+          <a:solidFill>
+            <a:srgbClr val="DFE2E7"/>
+          </a:solidFill>
+          <a:ln>
+            <a:noFill/>
+          </a:ln>
+        </p:spPr>
+        <p:style>
+          <a:lnRef idx="1">
+            <a:schemeClr val="accent1"/>
+          </a:lnRef>
+          <a:fillRef idx="3">
+            <a:schemeClr val="accent1"/>
+          </a:fillRef>
+          <a:effectRef idx="2">
+            <a:schemeClr val="accent1"/>
+          </a:effectRef>
+          <a:fontRef idx="minor">
+            <a:schemeClr val="lt1"/>
+          </a:fontRef>
+        </p:style>
+        <p:txBody>
+          <a:bodyPr rtlCol="0" anchor="ctr"/>
+          <a:lstStyle/>
+          <a:p>
+            <a:pPr algn="ctr"/>
+          </a:p>
+        </p:txBody>
+      </p:sp>
+      <p:sp>
+        <p:nvSpPr>
+          <p:cNvPr id="15" name="TextBox 14"/>
           <p:cNvSpPr txBox="1"/>
           <p:nvPr/>
         </p:nvSpPr>
         <p:spPr>
           <a:xfrm>
-            <a:off x="6426200" y="3733800"/>
-            <a:ext cx="5016500" cy="1511300"/>
+            <a:off x="711200" y="6438900"/>
+            <a:ext cx="9652000" cy="203200"/>
           </a:xfrm>
           <a:prstGeom prst="rect">
             <a:avLst/>
@@ -6382,187 +5568,68 @@
         </p:spPr>
         <p:txBody>
           <a:bodyPr wrap="none" lIns="0" rIns="0" tIns="0" bIns="0">
-            <a:spAutoFit/>
+            <a:noAutofit/>
           </a:bodyPr>
           <a:lstStyle/>
           <a:p>
             <a:pPr>
               <a:lnSpc>
-                <a:spcPts val="1689"/>
+                <a:spcPts val="1297"/>
               </a:lnSpc>
               <a:spcAft>
                 <a:spcPts val="0"/>
               </a:spcAft>
-              <a:defRPr sz="1420" b="0">
+              <a:defRPr sz="1100" b="0">
                 <a:solidFill>
-                  <a:srgbClr val="181817"/>
+                  <a:srgbClr val="626773"/>
                 </a:solidFill>
                 <a:latin typeface="Arial"/>
               </a:defRPr>
             </a:pPr>
             <a:r>
-              <a:t>Přehledy interpretů, program a obsahové bloky.</a:t>
-            </a:r>
-          </a:p>
+              <a:t>Prague Pulse Fest · Výstaviště Praha · 2027</a:t>
+            </a:r>
+          </a:p>
+        </p:txBody>
+      </p:sp>
+      <p:sp>
+        <p:nvSpPr>
+          <p:cNvPr id="16" name="TextBox 15"/>
+          <p:cNvSpPr txBox="1"/>
+          <p:nvPr/>
+        </p:nvSpPr>
+        <p:spPr>
+          <a:xfrm>
+            <a:off x="10807700" y="6413500"/>
+            <a:ext cx="673100" cy="215900"/>
+          </a:xfrm>
+          <a:prstGeom prst="rect">
+            <a:avLst/>
+          </a:prstGeom>
+          <a:noFill/>
+        </p:spPr>
+        <p:txBody>
+          <a:bodyPr wrap="none" lIns="0" rIns="0" tIns="0" bIns="0">
+            <a:noAutofit/>
+          </a:bodyPr>
+          <a:lstStyle/>
           <a:p>
             <a:pPr>
               <a:lnSpc>
-                <a:spcPts val="1689"/>
+                <a:spcPts val="1416"/>
               </a:lnSpc>
               <a:spcAft>
                 <a:spcPts val="0"/>
               </a:spcAft>
-              <a:defRPr sz="1420" b="0">
+              <a:defRPr sz="1200" b="0">
                 <a:solidFill>
-                  <a:srgbClr val="181817"/>
+                  <a:srgbClr val="626773"/>
                 </a:solidFill>
                 <a:latin typeface="Arial"/>
               </a:defRPr>
             </a:pPr>
-          </a:p>
-          <a:p>
-            <a:pPr>
-              <a:lnSpc>
-                <a:spcPts val="1689"/>
-              </a:lnSpc>
-              <a:spcAft>
-                <a:spcPts val="0"/>
-              </a:spcAft>
-              <a:defRPr sz="1420" b="0">
-                <a:solidFill>
-                  <a:srgbClr val="181817"/>
-                </a:solidFill>
-                <a:latin typeface="Arial"/>
-              </a:defRPr>
-            </a:pPr>
-            <a:r>
-              <a:t>Pružné sloupce, rozumné mezery, čitelná hierarchie.</a:t>
-            </a:r>
-          </a:p>
-        </p:txBody>
-      </p:sp>
-      <p:sp>
-        <p:nvSpPr>
-          <p:cNvPr id="17" name="TextBox 16"/>
-          <p:cNvSpPr txBox="1"/>
-          <p:nvPr/>
-        </p:nvSpPr>
-        <p:spPr>
-          <a:xfrm>
-            <a:off x="533400" y="5676900"/>
-            <a:ext cx="11125200" cy="546100"/>
-          </a:xfrm>
-          <a:prstGeom prst="rect">
-            <a:avLst/>
-          </a:prstGeom>
-          <a:noFill/>
-        </p:spPr>
-        <p:txBody>
-          <a:bodyPr wrap="none" lIns="0" rIns="0" tIns="0" bIns="0">
-            <a:spAutoFit/>
-          </a:bodyPr>
-          <a:lstStyle/>
-          <a:p>
-            <a:pPr>
-              <a:lnSpc>
-                <a:spcPts val="1583"/>
-              </a:lnSpc>
-              <a:spcAft>
-                <a:spcPts val="0"/>
-              </a:spcAft>
-              <a:defRPr sz="1320" b="0">
-                <a:solidFill>
-                  <a:srgbClr val="68635B"/>
-                </a:solidFill>
-                <a:latin typeface="Arial"/>
-              </a:defRPr>
-            </a:pPr>
-            <a:r>
-              <a:t>Kontrolujeme přetékání, čitelnost, ovládání, dialogy i vyplněný košík.</a:t>
-            </a:r>
-          </a:p>
-        </p:txBody>
-      </p:sp>
-      <p:sp>
-        <p:nvSpPr>
-          <p:cNvPr id="18" name="TextBox 17"/>
-          <p:cNvSpPr txBox="1"/>
-          <p:nvPr/>
-        </p:nvSpPr>
-        <p:spPr>
-          <a:xfrm>
-            <a:off x="533400" y="6413500"/>
-            <a:ext cx="10033000" cy="181610"/>
-          </a:xfrm>
-          <a:prstGeom prst="rect">
-            <a:avLst/>
-          </a:prstGeom>
-          <a:noFill/>
-        </p:spPr>
-        <p:txBody>
-          <a:bodyPr wrap="none" lIns="0" rIns="0" tIns="0" bIns="0">
-            <a:spAutoFit/>
-          </a:bodyPr>
-          <a:lstStyle/>
-          <a:p>
-            <a:pPr>
-              <a:lnSpc>
-                <a:spcPts val="930"/>
-              </a:lnSpc>
-              <a:spcAft>
-                <a:spcPts val="0"/>
-              </a:spcAft>
-              <a:defRPr sz="750" b="0">
-                <a:solidFill>
-                  <a:srgbClr val="68635B"/>
-                </a:solidFill>
-                <a:latin typeface="Arial"/>
-              </a:defRPr>
-            </a:pPr>
-            <a:r>
-              <a:t>DODATEČNĚ PŘIPRAVENÝ PODKLAD K MILNÍKU</a:t>
-            </a:r>
-          </a:p>
-        </p:txBody>
-      </p:sp>
-      <p:sp>
-        <p:nvSpPr>
-          <p:cNvPr id="19" name="TextBox 18"/>
-          <p:cNvSpPr txBox="1"/>
-          <p:nvPr/>
-        </p:nvSpPr>
-        <p:spPr>
-          <a:xfrm>
-            <a:off x="10947400" y="6350000"/>
-            <a:ext cx="825500" cy="220979"/>
-          </a:xfrm>
-          <a:prstGeom prst="rect">
-            <a:avLst/>
-          </a:prstGeom>
-          <a:noFill/>
-        </p:spPr>
-        <p:txBody>
-          <a:bodyPr wrap="none" lIns="0" rIns="0" tIns="0" bIns="0">
-            <a:spAutoFit/>
-          </a:bodyPr>
-          <a:lstStyle/>
-          <a:p>
-            <a:pPr>
-              <a:lnSpc>
-                <a:spcPts val="1240"/>
-              </a:lnSpc>
-              <a:spcAft>
-                <a:spcPts val="0"/>
-              </a:spcAft>
-              <a:defRPr sz="1000" b="1">
-                <a:solidFill>
-                  <a:srgbClr val="68635B"/>
-                </a:solidFill>
-                <a:latin typeface="Arial"/>
-              </a:defRPr>
-            </a:pPr>
-            <a:r>
-              <a:t>04 / 03</a:t>
+            <a:r>
+              <a:t>3 / 6</a:t>
             </a:r>
           </a:p>
         </p:txBody>
@@ -6600,7 +5667,7 @@
             <a:avLst/>
           </a:prstGeom>
           <a:solidFill>
-            <a:srgbClr val="F4F0E7"/>
+            <a:srgbClr val="FFFFFF"/>
           </a:solidFill>
           <a:ln>
             <a:noFill/>
@@ -6636,8 +5703,8 @@
         </p:nvSpPr>
         <p:spPr>
           <a:xfrm>
-            <a:off x="533400" y="304800"/>
-            <a:ext cx="1905000" cy="283972"/>
+            <a:off x="711200" y="457200"/>
+            <a:ext cx="10769600" cy="228600"/>
           </a:xfrm>
           <a:prstGeom prst="rect">
             <a:avLst/>
@@ -6646,172 +5713,46 @@
         </p:spPr>
         <p:txBody>
           <a:bodyPr wrap="none" lIns="0" rIns="0" tIns="0" bIns="0">
-            <a:spAutoFit/>
+            <a:noAutofit/>
           </a:bodyPr>
           <a:lstStyle/>
           <a:p>
             <a:pPr>
               <a:lnSpc>
-                <a:spcPts val="1736"/>
+                <a:spcPts val="1534"/>
               </a:lnSpc>
               <a:spcAft>
                 <a:spcPts val="0"/>
               </a:spcAft>
-              <a:defRPr sz="1400" b="1">
+              <a:defRPr sz="1300" b="1">
                 <a:solidFill>
-                  <a:srgbClr val="181817"/>
+                  <a:srgbClr val="626773"/>
                 </a:solidFill>
                 <a:latin typeface="Arial"/>
               </a:defRPr>
             </a:pPr>
             <a:r>
-              <a:t>PRAGUE</a:t>
-            </a:r>
-          </a:p>
-        </p:txBody>
-      </p:sp>
-      <p:sp>
-        <p:nvSpPr>
-          <p:cNvPr id="4" name="TextBox 3"/>
-          <p:cNvSpPr txBox="1"/>
-          <p:nvPr/>
-        </p:nvSpPr>
-        <p:spPr>
-          <a:xfrm>
-            <a:off x="533400" y="495300"/>
-            <a:ext cx="1905000" cy="409956"/>
-          </a:xfrm>
-          <a:prstGeom prst="rect">
-            <a:avLst/>
-          </a:prstGeom>
-          <a:noFill/>
-        </p:spPr>
-        <p:txBody>
-          <a:bodyPr wrap="none" lIns="0" rIns="0" tIns="0" bIns="0">
-            <a:spAutoFit/>
-          </a:bodyPr>
-          <a:lstStyle/>
-          <a:p>
-            <a:pPr>
-              <a:lnSpc>
-                <a:spcPts val="2728"/>
-              </a:lnSpc>
-              <a:spcAft>
-                <a:spcPts val="0"/>
-              </a:spcAft>
-              <a:defRPr sz="2200" b="1">
-                <a:solidFill>
-                  <a:srgbClr val="181817"/>
-                </a:solidFill>
-                <a:latin typeface="Arial"/>
-              </a:defRPr>
-            </a:pPr>
-            <a:r>
-              <a:t>PULSE</a:t>
-            </a:r>
-          </a:p>
-        </p:txBody>
-      </p:sp>
-      <p:sp>
-        <p:nvSpPr>
-          <p:cNvPr id="5" name="TextBox 4"/>
-          <p:cNvSpPr txBox="1"/>
-          <p:nvPr/>
-        </p:nvSpPr>
-        <p:spPr>
-          <a:xfrm>
-            <a:off x="533400" y="812800"/>
-            <a:ext cx="2032000" cy="165862"/>
-          </a:xfrm>
-          <a:prstGeom prst="rect">
-            <a:avLst/>
-          </a:prstGeom>
-          <a:noFill/>
-        </p:spPr>
-        <p:txBody>
-          <a:bodyPr wrap="none" lIns="0" rIns="0" tIns="0" bIns="0">
-            <a:spAutoFit/>
-          </a:bodyPr>
-          <a:lstStyle/>
-          <a:p>
-            <a:pPr>
-              <a:lnSpc>
-                <a:spcPts val="806"/>
-              </a:lnSpc>
-              <a:spcAft>
-                <a:spcPts val="0"/>
-              </a:spcAft>
-              <a:defRPr sz="650" b="1">
-                <a:solidFill>
-                  <a:srgbClr val="181817"/>
-                </a:solidFill>
-                <a:latin typeface="Arial"/>
-              </a:defRPr>
-            </a:pPr>
-            <a:r>
-              <a:t>FEST / 2027</a:t>
-            </a:r>
-          </a:p>
-        </p:txBody>
-      </p:sp>
-      <p:sp>
-        <p:nvSpPr>
-          <p:cNvPr id="6" name="TextBox 5"/>
-          <p:cNvSpPr txBox="1"/>
-          <p:nvPr/>
-        </p:nvSpPr>
-        <p:spPr>
-          <a:xfrm>
-            <a:off x="5588000" y="533400"/>
-            <a:ext cx="6070600" cy="220979"/>
-          </a:xfrm>
-          <a:prstGeom prst="rect">
-            <a:avLst/>
-          </a:prstGeom>
-          <a:noFill/>
-        </p:spPr>
-        <p:txBody>
-          <a:bodyPr wrap="none" lIns="0" rIns="0" tIns="0" bIns="0">
-            <a:spAutoFit/>
-          </a:bodyPr>
-          <a:lstStyle/>
-          <a:p>
-            <a:pPr>
-              <a:lnSpc>
-                <a:spcPts val="1240"/>
-              </a:lnSpc>
-              <a:spcAft>
-                <a:spcPts val="0"/>
-              </a:spcAft>
-              <a:defRPr sz="1000" b="1">
-                <a:solidFill>
-                  <a:srgbClr val="68635B"/>
-                </a:solidFill>
-                <a:latin typeface="Arial"/>
-              </a:defRPr>
-            </a:pPr>
-            <a:r>
-              <a:t>UKÁZKA IMPLEMENTACE</a:t>
-            </a:r>
-          </a:p>
-        </p:txBody>
-      </p:sp>
-      <p:sp>
-        <p:nvSpPr>
-          <p:cNvPr id="7" name="Rectangle 6"/>
+              <a:t>NAVIGACE A INTERAKTIVITA</a:t>
+            </a:r>
+          </a:p>
+        </p:txBody>
+      </p:sp>
+      <p:sp>
+        <p:nvSpPr>
+          <p:cNvPr id="4" name="Rectangle 3"/>
           <p:cNvSpPr/>
           <p:nvPr/>
         </p:nvSpPr>
         <p:spPr>
           <a:xfrm>
-            <a:off x="533400" y="1155700"/>
-            <a:ext cx="11125200" cy="25400"/>
+            <a:off x="711200" y="876300"/>
+            <a:ext cx="622300" cy="50800"/>
           </a:xfrm>
           <a:prstGeom prst="rect">
             <a:avLst/>
           </a:prstGeom>
           <a:solidFill>
-            <a:srgbClr val="181817"/>
+            <a:srgbClr val="E55024"/>
           </a:solidFill>
           <a:ln>
             <a:noFill/>
@@ -6841,14 +5782,14 @@
       </p:sp>
       <p:sp>
         <p:nvSpPr>
-          <p:cNvPr id="8" name="TextBox 7"/>
+          <p:cNvPr id="5" name="TextBox 4"/>
           <p:cNvSpPr txBox="1"/>
           <p:nvPr/>
         </p:nvSpPr>
         <p:spPr>
           <a:xfrm>
-            <a:off x="508000" y="1422400"/>
-            <a:ext cx="11176000" cy="1079500"/>
+            <a:off x="685800" y="1257300"/>
+            <a:ext cx="10795000" cy="1168400"/>
           </a:xfrm>
           <a:prstGeom prst="rect">
             <a:avLst/>
@@ -6857,46 +5798,592 @@
         </p:spPr>
         <p:txBody>
           <a:bodyPr wrap="none" lIns="0" rIns="0" tIns="0" bIns="0">
-            <a:spAutoFit/>
+            <a:noAutofit/>
           </a:bodyPr>
           <a:lstStyle/>
           <a:p>
             <a:pPr>
               <a:lnSpc>
-                <a:spcPts val="3740"/>
+                <a:spcPts val="4032"/>
               </a:lnSpc>
               <a:spcAft>
                 <a:spcPts val="0"/>
               </a:spcAft>
-              <a:defRPr sz="3400" b="1">
+              <a:defRPr sz="3600" b="1">
                 <a:solidFill>
-                  <a:srgbClr val="181817"/>
+                  <a:srgbClr val="191B20"/>
                 </a:solidFill>
                 <a:latin typeface="Arial"/>
               </a:defRPr>
             </a:pPr>
             <a:r>
-              <a:t>Dva scénáře předvést, ne popsat.</a:t>
-            </a:r>
-          </a:p>
-        </p:txBody>
-      </p:sp>
-      <p:sp>
-        <p:nvSpPr>
-          <p:cNvPr id="9" name="Rectangle 8"/>
+              <a:t>Dva scénáře ve finálním rozhraní</a:t>
+            </a:r>
+          </a:p>
+        </p:txBody>
+      </p:sp>
+      <p:sp>
+        <p:nvSpPr>
+          <p:cNvPr id="6" name="TextBox 5"/>
+          <p:cNvSpPr txBox="1"/>
+          <p:nvPr/>
+        </p:nvSpPr>
+        <p:spPr>
+          <a:xfrm>
+            <a:off x="711200" y="2146300"/>
+            <a:ext cx="482600" cy="355600"/>
+          </a:xfrm>
+          <a:prstGeom prst="rect">
+            <a:avLst/>
+          </a:prstGeom>
+          <a:noFill/>
+        </p:spPr>
+        <p:txBody>
+          <a:bodyPr wrap="none" lIns="0" rIns="0" tIns="0" bIns="0">
+            <a:noAutofit/>
+          </a:bodyPr>
+          <a:lstStyle/>
+          <a:p>
+            <a:pPr>
+              <a:lnSpc>
+                <a:spcPts val="2713"/>
+              </a:lnSpc>
+              <a:spcAft>
+                <a:spcPts val="0"/>
+              </a:spcAft>
+              <a:defRPr sz="2300" b="1">
+                <a:solidFill>
+                  <a:srgbClr val="E55024"/>
+                </a:solidFill>
+                <a:latin typeface="Arial"/>
+              </a:defRPr>
+            </a:pPr>
+            <a:r>
+              <a:t>01</a:t>
+            </a:r>
+          </a:p>
+        </p:txBody>
+      </p:sp>
+      <p:sp>
+        <p:nvSpPr>
+          <p:cNvPr id="7" name="TextBox 6"/>
+          <p:cNvSpPr txBox="1"/>
+          <p:nvPr/>
+        </p:nvSpPr>
+        <p:spPr>
+          <a:xfrm>
+            <a:off x="1346200" y="2146300"/>
+            <a:ext cx="3479800" cy="685800"/>
+          </a:xfrm>
+          <a:prstGeom prst="rect">
+            <a:avLst/>
+          </a:prstGeom>
+          <a:noFill/>
+        </p:spPr>
+        <p:txBody>
+          <a:bodyPr wrap="none" lIns="0" rIns="0" tIns="0" bIns="0">
+            <a:noAutofit/>
+          </a:bodyPr>
+          <a:lstStyle/>
+          <a:p>
+            <a:pPr>
+              <a:lnSpc>
+                <a:spcPts val="2832"/>
+              </a:lnSpc>
+              <a:spcAft>
+                <a:spcPts val="0"/>
+              </a:spcAft>
+              <a:defRPr sz="2400" b="1">
+                <a:solidFill>
+                  <a:srgbClr val="191B20"/>
+                </a:solidFill>
+                <a:latin typeface="Arial"/>
+              </a:defRPr>
+            </a:pPr>
+            <a:r>
+              <a:t>S1 / Program</a:t>
+            </a:r>
+          </a:p>
+        </p:txBody>
+      </p:sp>
+      <p:sp>
+        <p:nvSpPr>
+          <p:cNvPr id="8" name="TextBox 7"/>
+          <p:cNvSpPr txBox="1"/>
+          <p:nvPr/>
+        </p:nvSpPr>
+        <p:spPr>
+          <a:xfrm>
+            <a:off x="4965700" y="2171700"/>
+            <a:ext cx="6515100" cy="698500"/>
+          </a:xfrm>
+          <a:prstGeom prst="rect">
+            <a:avLst/>
+          </a:prstGeom>
+          <a:noFill/>
+        </p:spPr>
+        <p:txBody>
+          <a:bodyPr wrap="none" lIns="0" rIns="0" tIns="0" bIns="0">
+            <a:noAutofit/>
+          </a:bodyPr>
+          <a:lstStyle/>
+          <a:p>
+            <a:pPr>
+              <a:lnSpc>
+                <a:spcPts val="2713"/>
+              </a:lnSpc>
+              <a:spcAft>
+                <a:spcPts val="0"/>
+              </a:spcAft>
+              <a:defRPr sz="2300" b="0">
+                <a:solidFill>
+                  <a:srgbClr val="626773"/>
+                </a:solidFill>
+                <a:latin typeface="Arial"/>
+              </a:defRPr>
+            </a:pPr>
+            <a:r>
+              <a:t>Den a River Stage</a:t>
+            </a:r>
+          </a:p>
+        </p:txBody>
+      </p:sp>
+      <p:sp>
+        <p:nvSpPr>
+          <p:cNvPr id="9" name="TextBox 8"/>
+          <p:cNvSpPr txBox="1"/>
+          <p:nvPr/>
+        </p:nvSpPr>
+        <p:spPr>
+          <a:xfrm>
+            <a:off x="711200" y="2971800"/>
+            <a:ext cx="482600" cy="355600"/>
+          </a:xfrm>
+          <a:prstGeom prst="rect">
+            <a:avLst/>
+          </a:prstGeom>
+          <a:noFill/>
+        </p:spPr>
+        <p:txBody>
+          <a:bodyPr wrap="none" lIns="0" rIns="0" tIns="0" bIns="0">
+            <a:noAutofit/>
+          </a:bodyPr>
+          <a:lstStyle/>
+          <a:p>
+            <a:pPr>
+              <a:lnSpc>
+                <a:spcPts val="2713"/>
+              </a:lnSpc>
+              <a:spcAft>
+                <a:spcPts val="0"/>
+              </a:spcAft>
+              <a:defRPr sz="2300" b="1">
+                <a:solidFill>
+                  <a:srgbClr val="E55024"/>
+                </a:solidFill>
+                <a:latin typeface="Arial"/>
+              </a:defRPr>
+            </a:pPr>
+            <a:r>
+              <a:t>02</a:t>
+            </a:r>
+          </a:p>
+        </p:txBody>
+      </p:sp>
+      <p:sp>
+        <p:nvSpPr>
+          <p:cNvPr id="10" name="TextBox 9"/>
+          <p:cNvSpPr txBox="1"/>
+          <p:nvPr/>
+        </p:nvSpPr>
+        <p:spPr>
+          <a:xfrm>
+            <a:off x="1346200" y="2971800"/>
+            <a:ext cx="3479800" cy="685800"/>
+          </a:xfrm>
+          <a:prstGeom prst="rect">
+            <a:avLst/>
+          </a:prstGeom>
+          <a:noFill/>
+        </p:spPr>
+        <p:txBody>
+          <a:bodyPr wrap="none" lIns="0" rIns="0" tIns="0" bIns="0">
+            <a:noAutofit/>
+          </a:bodyPr>
+          <a:lstStyle/>
+          <a:p>
+            <a:pPr>
+              <a:lnSpc>
+                <a:spcPts val="2832"/>
+              </a:lnSpc>
+              <a:spcAft>
+                <a:spcPts val="0"/>
+              </a:spcAft>
+              <a:defRPr sz="2400" b="1">
+                <a:solidFill>
+                  <a:srgbClr val="191B20"/>
+                </a:solidFill>
+                <a:latin typeface="Arial"/>
+              </a:defRPr>
+            </a:pPr>
+            <a:r>
+              <a:t>Uložit</a:t>
+            </a:r>
+          </a:p>
+        </p:txBody>
+      </p:sp>
+      <p:sp>
+        <p:nvSpPr>
+          <p:cNvPr id="11" name="TextBox 10"/>
+          <p:cNvSpPr txBox="1"/>
+          <p:nvPr/>
+        </p:nvSpPr>
+        <p:spPr>
+          <a:xfrm>
+            <a:off x="4965700" y="2997200"/>
+            <a:ext cx="6515100" cy="698500"/>
+          </a:xfrm>
+          <a:prstGeom prst="rect">
+            <a:avLst/>
+          </a:prstGeom>
+          <a:noFill/>
+        </p:spPr>
+        <p:txBody>
+          <a:bodyPr wrap="none" lIns="0" rIns="0" tIns="0" bIns="0">
+            <a:noAutofit/>
+          </a:bodyPr>
+          <a:lstStyle/>
+          <a:p>
+            <a:pPr>
+              <a:lnSpc>
+                <a:spcPts val="2713"/>
+              </a:lnSpc>
+              <a:spcAft>
+                <a:spcPts val="0"/>
+              </a:spcAft>
+              <a:defRPr sz="2300" b="0">
+                <a:solidFill>
+                  <a:srgbClr val="626773"/>
+                </a:solidFill>
+                <a:latin typeface="Arial"/>
+              </a:defRPr>
+            </a:pPr>
+            <a:r>
+              <a:t>Otevřít můj program</a:t>
+            </a:r>
+          </a:p>
+        </p:txBody>
+      </p:sp>
+      <p:sp>
+        <p:nvSpPr>
+          <p:cNvPr id="12" name="TextBox 11"/>
+          <p:cNvSpPr txBox="1"/>
+          <p:nvPr/>
+        </p:nvSpPr>
+        <p:spPr>
+          <a:xfrm>
+            <a:off x="711200" y="3797300"/>
+            <a:ext cx="482600" cy="355600"/>
+          </a:xfrm>
+          <a:prstGeom prst="rect">
+            <a:avLst/>
+          </a:prstGeom>
+          <a:noFill/>
+        </p:spPr>
+        <p:txBody>
+          <a:bodyPr wrap="none" lIns="0" rIns="0" tIns="0" bIns="0">
+            <a:noAutofit/>
+          </a:bodyPr>
+          <a:lstStyle/>
+          <a:p>
+            <a:pPr>
+              <a:lnSpc>
+                <a:spcPts val="2713"/>
+              </a:lnSpc>
+              <a:spcAft>
+                <a:spcPts val="0"/>
+              </a:spcAft>
+              <a:defRPr sz="2300" b="1">
+                <a:solidFill>
+                  <a:srgbClr val="E55024"/>
+                </a:solidFill>
+                <a:latin typeface="Arial"/>
+              </a:defRPr>
+            </a:pPr>
+            <a:r>
+              <a:t>03</a:t>
+            </a:r>
+          </a:p>
+        </p:txBody>
+      </p:sp>
+      <p:sp>
+        <p:nvSpPr>
+          <p:cNvPr id="13" name="TextBox 12"/>
+          <p:cNvSpPr txBox="1"/>
+          <p:nvPr/>
+        </p:nvSpPr>
+        <p:spPr>
+          <a:xfrm>
+            <a:off x="1346200" y="3797300"/>
+            <a:ext cx="3479800" cy="685800"/>
+          </a:xfrm>
+          <a:prstGeom prst="rect">
+            <a:avLst/>
+          </a:prstGeom>
+          <a:noFill/>
+        </p:spPr>
+        <p:txBody>
+          <a:bodyPr wrap="none" lIns="0" rIns="0" tIns="0" bIns="0">
+            <a:noAutofit/>
+          </a:bodyPr>
+          <a:lstStyle/>
+          <a:p>
+            <a:pPr>
+              <a:lnSpc>
+                <a:spcPts val="2832"/>
+              </a:lnSpc>
+              <a:spcAft>
+                <a:spcPts val="0"/>
+              </a:spcAft>
+              <a:defRPr sz="2400" b="1">
+                <a:solidFill>
+                  <a:srgbClr val="191B20"/>
+                </a:solidFill>
+                <a:latin typeface="Arial"/>
+              </a:defRPr>
+            </a:pPr>
+            <a:r>
+              <a:t>S2 / Hledání</a:t>
+            </a:r>
+          </a:p>
+        </p:txBody>
+      </p:sp>
+      <p:sp>
+        <p:nvSpPr>
+          <p:cNvPr id="14" name="TextBox 13"/>
+          <p:cNvSpPr txBox="1"/>
+          <p:nvPr/>
+        </p:nvSpPr>
+        <p:spPr>
+          <a:xfrm>
+            <a:off x="4965700" y="3822700"/>
+            <a:ext cx="6515100" cy="698500"/>
+          </a:xfrm>
+          <a:prstGeom prst="rect">
+            <a:avLst/>
+          </a:prstGeom>
+          <a:noFill/>
+        </p:spPr>
+        <p:txBody>
+          <a:bodyPr wrap="none" lIns="0" rIns="0" tIns="0" bIns="0">
+            <a:noAutofit/>
+          </a:bodyPr>
+          <a:lstStyle/>
+          <a:p>
+            <a:pPr>
+              <a:lnSpc>
+                <a:spcPts val="2713"/>
+              </a:lnSpc>
+              <a:spcAft>
+                <a:spcPts val="0"/>
+              </a:spcAft>
+              <a:defRPr sz="2300" b="0">
+                <a:solidFill>
+                  <a:srgbClr val="626773"/>
+                </a:solidFill>
+                <a:latin typeface="Arial"/>
+              </a:defRPr>
+            </a:pPr>
+            <a:r>
+              <a:t>Vyhledat DARKZY</a:t>
+            </a:r>
+          </a:p>
+        </p:txBody>
+      </p:sp>
+      <p:sp>
+        <p:nvSpPr>
+          <p:cNvPr id="15" name="TextBox 14"/>
+          <p:cNvSpPr txBox="1"/>
+          <p:nvPr/>
+        </p:nvSpPr>
+        <p:spPr>
+          <a:xfrm>
+            <a:off x="711200" y="4622800"/>
+            <a:ext cx="482600" cy="355600"/>
+          </a:xfrm>
+          <a:prstGeom prst="rect">
+            <a:avLst/>
+          </a:prstGeom>
+          <a:noFill/>
+        </p:spPr>
+        <p:txBody>
+          <a:bodyPr wrap="none" lIns="0" rIns="0" tIns="0" bIns="0">
+            <a:noAutofit/>
+          </a:bodyPr>
+          <a:lstStyle/>
+          <a:p>
+            <a:pPr>
+              <a:lnSpc>
+                <a:spcPts val="2713"/>
+              </a:lnSpc>
+              <a:spcAft>
+                <a:spcPts val="0"/>
+              </a:spcAft>
+              <a:defRPr sz="2300" b="1">
+                <a:solidFill>
+                  <a:srgbClr val="E55024"/>
+                </a:solidFill>
+                <a:latin typeface="Arial"/>
+              </a:defRPr>
+            </a:pPr>
+            <a:r>
+              <a:t>04</a:t>
+            </a:r>
+          </a:p>
+        </p:txBody>
+      </p:sp>
+      <p:sp>
+        <p:nvSpPr>
+          <p:cNvPr id="16" name="TextBox 15"/>
+          <p:cNvSpPr txBox="1"/>
+          <p:nvPr/>
+        </p:nvSpPr>
+        <p:spPr>
+          <a:xfrm>
+            <a:off x="1346200" y="4622800"/>
+            <a:ext cx="3479800" cy="685800"/>
+          </a:xfrm>
+          <a:prstGeom prst="rect">
+            <a:avLst/>
+          </a:prstGeom>
+          <a:noFill/>
+        </p:spPr>
+        <p:txBody>
+          <a:bodyPr wrap="none" lIns="0" rIns="0" tIns="0" bIns="0">
+            <a:noAutofit/>
+          </a:bodyPr>
+          <a:lstStyle/>
+          <a:p>
+            <a:pPr>
+              <a:lnSpc>
+                <a:spcPts val="2832"/>
+              </a:lnSpc>
+              <a:spcAft>
+                <a:spcPts val="0"/>
+              </a:spcAft>
+              <a:defRPr sz="2400" b="1">
+                <a:solidFill>
+                  <a:srgbClr val="191B20"/>
+                </a:solidFill>
+                <a:latin typeface="Arial"/>
+              </a:defRPr>
+            </a:pPr>
+            <a:r>
+              <a:t>Detail</a:t>
+            </a:r>
+          </a:p>
+        </p:txBody>
+      </p:sp>
+      <p:sp>
+        <p:nvSpPr>
+          <p:cNvPr id="17" name="TextBox 16"/>
+          <p:cNvSpPr txBox="1"/>
+          <p:nvPr/>
+        </p:nvSpPr>
+        <p:spPr>
+          <a:xfrm>
+            <a:off x="4965700" y="4648200"/>
+            <a:ext cx="6515100" cy="698500"/>
+          </a:xfrm>
+          <a:prstGeom prst="rect">
+            <a:avLst/>
+          </a:prstGeom>
+          <a:noFill/>
+        </p:spPr>
+        <p:txBody>
+          <a:bodyPr wrap="none" lIns="0" rIns="0" tIns="0" bIns="0">
+            <a:noAutofit/>
+          </a:bodyPr>
+          <a:lstStyle/>
+          <a:p>
+            <a:pPr>
+              <a:lnSpc>
+                <a:spcPts val="2713"/>
+              </a:lnSpc>
+              <a:spcAft>
+                <a:spcPts val="0"/>
+              </a:spcAft>
+              <a:defRPr sz="2300" b="0">
+                <a:solidFill>
+                  <a:srgbClr val="626773"/>
+                </a:solidFill>
+                <a:latin typeface="Arial"/>
+              </a:defRPr>
+            </a:pPr>
+            <a:r>
+              <a:t>Zjistit čas a scénu</a:t>
+            </a:r>
+          </a:p>
+        </p:txBody>
+      </p:sp>
+      <p:sp>
+        <p:nvSpPr>
+          <p:cNvPr id="18" name="TextBox 17"/>
+          <p:cNvSpPr txBox="1"/>
+          <p:nvPr/>
+        </p:nvSpPr>
+        <p:spPr>
+          <a:xfrm>
+            <a:off x="711200" y="5473700"/>
+            <a:ext cx="10769600" cy="596900"/>
+          </a:xfrm>
+          <a:prstGeom prst="rect">
+            <a:avLst/>
+          </a:prstGeom>
+          <a:noFill/>
+        </p:spPr>
+        <p:txBody>
+          <a:bodyPr wrap="none" lIns="0" rIns="0" tIns="0" bIns="0">
+            <a:noAutofit/>
+          </a:bodyPr>
+          <a:lstStyle/>
+          <a:p>
+            <a:pPr>
+              <a:lnSpc>
+                <a:spcPts val="2124"/>
+              </a:lnSpc>
+              <a:spcAft>
+                <a:spcPts val="0"/>
+              </a:spcAft>
+              <a:defRPr sz="1800" b="0">
+                <a:solidFill>
+                  <a:srgbClr val="626773"/>
+                </a:solidFill>
+                <a:latin typeface="Arial"/>
+              </a:defRPr>
+            </a:pPr>
+            <a:r>
+              <a:t>Ukázka: navigace, změna výsledků a práce s klávesnicí.</a:t>
+            </a:r>
+          </a:p>
+        </p:txBody>
+      </p:sp>
+      <p:sp>
+        <p:nvSpPr>
+          <p:cNvPr id="19" name="Rectangle 18"/>
           <p:cNvSpPr/>
           <p:nvPr/>
         </p:nvSpPr>
         <p:spPr>
           <a:xfrm>
-            <a:off x="533400" y="2946400"/>
-            <a:ext cx="2552700" cy="1765300"/>
+            <a:off x="711200" y="6248400"/>
+            <a:ext cx="10769600" cy="12700"/>
           </a:xfrm>
           <a:prstGeom prst="rect">
             <a:avLst/>
           </a:prstGeom>
           <a:solidFill>
-            <a:srgbClr val="181817"/>
+            <a:srgbClr val="DFE2E7"/>
           </a:solidFill>
           <a:ln>
             <a:noFill/>
@@ -6926,14 +6413,14 @@
       </p:sp>
       <p:sp>
         <p:nvSpPr>
-          <p:cNvPr id="10" name="TextBox 9"/>
+          <p:cNvPr id="20" name="TextBox 19"/>
           <p:cNvSpPr txBox="1"/>
           <p:nvPr/>
         </p:nvSpPr>
         <p:spPr>
           <a:xfrm>
-            <a:off x="723900" y="3162300"/>
-            <a:ext cx="2133600" cy="236728"/>
+            <a:off x="711200" y="6438900"/>
+            <a:ext cx="9652000" cy="203200"/>
           </a:xfrm>
           <a:prstGeom prst="rect">
             <a:avLst/>
@@ -6942,40 +6429,40 @@
         </p:spPr>
         <p:txBody>
           <a:bodyPr wrap="none" lIns="0" rIns="0" tIns="0" bIns="0">
-            <a:spAutoFit/>
+            <a:noAutofit/>
           </a:bodyPr>
           <a:lstStyle/>
           <a:p>
             <a:pPr>
               <a:lnSpc>
-                <a:spcPts val="1364"/>
+                <a:spcPts val="1297"/>
               </a:lnSpc>
               <a:spcAft>
                 <a:spcPts val="0"/>
               </a:spcAft>
-              <a:defRPr sz="1100" b="1">
+              <a:defRPr sz="1100" b="0">
                 <a:solidFill>
-                  <a:srgbClr val="F45E2B"/>
+                  <a:srgbClr val="626773"/>
                 </a:solidFill>
                 <a:latin typeface="Arial"/>
               </a:defRPr>
             </a:pPr>
             <a:r>
-              <a:t>01</a:t>
-            </a:r>
-          </a:p>
-        </p:txBody>
-      </p:sp>
-      <p:sp>
-        <p:nvSpPr>
-          <p:cNvPr id="11" name="TextBox 10"/>
+              <a:t>Prague Pulse Fest · Výstaviště Praha · 2027</a:t>
+            </a:r>
+          </a:p>
+        </p:txBody>
+      </p:sp>
+      <p:sp>
+        <p:nvSpPr>
+          <p:cNvPr id="21" name="TextBox 20"/>
           <p:cNvSpPr txBox="1"/>
           <p:nvPr/>
         </p:nvSpPr>
         <p:spPr>
           <a:xfrm>
-            <a:off x="723900" y="3568700"/>
-            <a:ext cx="2133600" cy="444500"/>
+            <a:off x="10807700" y="6413500"/>
+            <a:ext cx="673100" cy="215900"/>
           </a:xfrm>
           <a:prstGeom prst="rect">
             <a:avLst/>
@@ -6984,846 +6471,26 @@
         </p:spPr>
         <p:txBody>
           <a:bodyPr wrap="none" lIns="0" rIns="0" tIns="0" bIns="0">
-            <a:spAutoFit/>
+            <a:noAutofit/>
           </a:bodyPr>
           <a:lstStyle/>
           <a:p>
             <a:pPr>
               <a:lnSpc>
-                <a:spcPts val="2728"/>
-              </a:lnSpc>
-              <a:spcAft>
-                <a:spcPts val="0"/>
-              </a:spcAft>
-              <a:defRPr sz="2200" b="1">
-                <a:solidFill>
-                  <a:srgbClr val="F4F0E7"/>
-                </a:solidFill>
-                <a:latin typeface="Arial"/>
-              </a:defRPr>
-            </a:pPr>
-            <a:r>
-              <a:t>S1</a:t>
-            </a:r>
-          </a:p>
-        </p:txBody>
-      </p:sp>
-      <p:sp>
-        <p:nvSpPr>
-          <p:cNvPr id="12" name="TextBox 11"/>
-          <p:cNvSpPr txBox="1"/>
-          <p:nvPr/>
-        </p:nvSpPr>
-        <p:spPr>
-          <a:xfrm>
-            <a:off x="723900" y="4140200"/>
-            <a:ext cx="2133600" cy="406400"/>
-          </a:xfrm>
-          <a:prstGeom prst="rect">
-            <a:avLst/>
-          </a:prstGeom>
-          <a:noFill/>
-        </p:spPr>
-        <p:txBody>
-          <a:bodyPr wrap="none" lIns="0" rIns="0" tIns="0" bIns="0">
-            <a:spAutoFit/>
-          </a:bodyPr>
-          <a:lstStyle/>
-          <a:p>
-            <a:pPr>
-              <a:lnSpc>
-                <a:spcPts val="1488"/>
+                <a:spcPts val="1416"/>
               </a:lnSpc>
               <a:spcAft>
                 <a:spcPts val="0"/>
               </a:spcAft>
               <a:defRPr sz="1200" b="0">
                 <a:solidFill>
-                  <a:srgbClr val="F4F0E7"/>
+                  <a:srgbClr val="626773"/>
                 </a:solidFill>
                 <a:latin typeface="Arial"/>
               </a:defRPr>
             </a:pPr>
             <a:r>
-              <a:t>Den + scéna</a:t>
-            </a:r>
-          </a:p>
-        </p:txBody>
-      </p:sp>
-      <p:sp>
-        <p:nvSpPr>
-          <p:cNvPr id="13" name="TextBox 12"/>
-          <p:cNvSpPr txBox="1"/>
-          <p:nvPr/>
-        </p:nvSpPr>
-        <p:spPr>
-          <a:xfrm>
-            <a:off x="3098800" y="3657600"/>
-            <a:ext cx="292100" cy="394208"/>
-          </a:xfrm>
-          <a:prstGeom prst="rect">
-            <a:avLst/>
-          </a:prstGeom>
-          <a:noFill/>
-        </p:spPr>
-        <p:txBody>
-          <a:bodyPr wrap="none" lIns="0" rIns="0" tIns="0" bIns="0">
-            <a:spAutoFit/>
-          </a:bodyPr>
-          <a:lstStyle/>
-          <a:p>
-            <a:pPr>
-              <a:lnSpc>
-                <a:spcPts val="2604"/>
-              </a:lnSpc>
-              <a:spcAft>
-                <a:spcPts val="0"/>
-              </a:spcAft>
-              <a:defRPr sz="2100" b="1">
-                <a:solidFill>
-                  <a:srgbClr val="181817"/>
-                </a:solidFill>
-                <a:latin typeface="Arial"/>
-              </a:defRPr>
-            </a:pPr>
-            <a:r>
-              <a:t>›</a:t>
-            </a:r>
-          </a:p>
-        </p:txBody>
-      </p:sp>
-      <p:sp>
-        <p:nvSpPr>
-          <p:cNvPr id="14" name="Rectangle 13"/>
-          <p:cNvSpPr/>
-          <p:nvPr/>
-        </p:nvSpPr>
-        <p:spPr>
-          <a:xfrm>
-            <a:off x="3390900" y="2946400"/>
-            <a:ext cx="2552700" cy="1765300"/>
-          </a:xfrm>
-          <a:prstGeom prst="rect">
-            <a:avLst/>
-          </a:prstGeom>
-          <a:solidFill>
-            <a:srgbClr val="E7E0D5"/>
-          </a:solidFill>
-          <a:ln>
-            <a:noFill/>
-          </a:ln>
-        </p:spPr>
-        <p:style>
-          <a:lnRef idx="1">
-            <a:schemeClr val="accent1"/>
-          </a:lnRef>
-          <a:fillRef idx="3">
-            <a:schemeClr val="accent1"/>
-          </a:fillRef>
-          <a:effectRef idx="2">
-            <a:schemeClr val="accent1"/>
-          </a:effectRef>
-          <a:fontRef idx="minor">
-            <a:schemeClr val="lt1"/>
-          </a:fontRef>
-        </p:style>
-        <p:txBody>
-          <a:bodyPr rtlCol="0" anchor="ctr"/>
-          <a:lstStyle/>
-          <a:p>
-            <a:pPr algn="ctr"/>
-          </a:p>
-        </p:txBody>
-      </p:sp>
-      <p:sp>
-        <p:nvSpPr>
-          <p:cNvPr id="15" name="TextBox 14"/>
-          <p:cNvSpPr txBox="1"/>
-          <p:nvPr/>
-        </p:nvSpPr>
-        <p:spPr>
-          <a:xfrm>
-            <a:off x="3581400" y="3162300"/>
-            <a:ext cx="2133600" cy="236728"/>
-          </a:xfrm>
-          <a:prstGeom prst="rect">
-            <a:avLst/>
-          </a:prstGeom>
-          <a:noFill/>
-        </p:spPr>
-        <p:txBody>
-          <a:bodyPr wrap="none" lIns="0" rIns="0" tIns="0" bIns="0">
-            <a:spAutoFit/>
-          </a:bodyPr>
-          <a:lstStyle/>
-          <a:p>
-            <a:pPr>
-              <a:lnSpc>
-                <a:spcPts val="1364"/>
-              </a:lnSpc>
-              <a:spcAft>
-                <a:spcPts val="0"/>
-              </a:spcAft>
-              <a:defRPr sz="1100" b="1">
-                <a:solidFill>
-                  <a:srgbClr val="F45E2B"/>
-                </a:solidFill>
-                <a:latin typeface="Arial"/>
-              </a:defRPr>
-            </a:pPr>
-            <a:r>
-              <a:t>02</a:t>
-            </a:r>
-          </a:p>
-        </p:txBody>
-      </p:sp>
-      <p:sp>
-        <p:nvSpPr>
-          <p:cNvPr id="16" name="TextBox 15"/>
-          <p:cNvSpPr txBox="1"/>
-          <p:nvPr/>
-        </p:nvSpPr>
-        <p:spPr>
-          <a:xfrm>
-            <a:off x="3581400" y="3568700"/>
-            <a:ext cx="2133600" cy="444500"/>
-          </a:xfrm>
-          <a:prstGeom prst="rect">
-            <a:avLst/>
-          </a:prstGeom>
-          <a:noFill/>
-        </p:spPr>
-        <p:txBody>
-          <a:bodyPr wrap="none" lIns="0" rIns="0" tIns="0" bIns="0">
-            <a:spAutoFit/>
-          </a:bodyPr>
-          <a:lstStyle/>
-          <a:p>
-            <a:pPr>
-              <a:lnSpc>
-                <a:spcPts val="2728"/>
-              </a:lnSpc>
-              <a:spcAft>
-                <a:spcPts val="0"/>
-              </a:spcAft>
-              <a:defRPr sz="2200" b="1">
-                <a:solidFill>
-                  <a:srgbClr val="181817"/>
-                </a:solidFill>
-                <a:latin typeface="Arial"/>
-              </a:defRPr>
-            </a:pPr>
-            <a:r>
-              <a:t>Výběr</a:t>
-            </a:r>
-          </a:p>
-        </p:txBody>
-      </p:sp>
-      <p:sp>
-        <p:nvSpPr>
-          <p:cNvPr id="17" name="TextBox 16"/>
-          <p:cNvSpPr txBox="1"/>
-          <p:nvPr/>
-        </p:nvSpPr>
-        <p:spPr>
-          <a:xfrm>
-            <a:off x="3581400" y="4140200"/>
-            <a:ext cx="2133600" cy="406400"/>
-          </a:xfrm>
-          <a:prstGeom prst="rect">
-            <a:avLst/>
-          </a:prstGeom>
-          <a:noFill/>
-        </p:spPr>
-        <p:txBody>
-          <a:bodyPr wrap="none" lIns="0" rIns="0" tIns="0" bIns="0">
-            <a:spAutoFit/>
-          </a:bodyPr>
-          <a:lstStyle/>
-          <a:p>
-            <a:pPr>
-              <a:lnSpc>
-                <a:spcPts val="1488"/>
-              </a:lnSpc>
-              <a:spcAft>
-                <a:spcPts val="0"/>
-              </a:spcAft>
-              <a:defRPr sz="1200" b="0">
-                <a:solidFill>
-                  <a:srgbClr val="181817"/>
-                </a:solidFill>
-                <a:latin typeface="Arial"/>
-              </a:defRPr>
-            </a:pPr>
-            <a:r>
-              <a:t>Uložit koncert</a:t>
-            </a:r>
-          </a:p>
-        </p:txBody>
-      </p:sp>
-      <p:sp>
-        <p:nvSpPr>
-          <p:cNvPr id="18" name="TextBox 17"/>
-          <p:cNvSpPr txBox="1"/>
-          <p:nvPr/>
-        </p:nvSpPr>
-        <p:spPr>
-          <a:xfrm>
-            <a:off x="5956300" y="3657600"/>
-            <a:ext cx="292100" cy="394208"/>
-          </a:xfrm>
-          <a:prstGeom prst="rect">
-            <a:avLst/>
-          </a:prstGeom>
-          <a:noFill/>
-        </p:spPr>
-        <p:txBody>
-          <a:bodyPr wrap="none" lIns="0" rIns="0" tIns="0" bIns="0">
-            <a:spAutoFit/>
-          </a:bodyPr>
-          <a:lstStyle/>
-          <a:p>
-            <a:pPr>
-              <a:lnSpc>
-                <a:spcPts val="2604"/>
-              </a:lnSpc>
-              <a:spcAft>
-                <a:spcPts val="0"/>
-              </a:spcAft>
-              <a:defRPr sz="2100" b="1">
-                <a:solidFill>
-                  <a:srgbClr val="181817"/>
-                </a:solidFill>
-                <a:latin typeface="Arial"/>
-              </a:defRPr>
-            </a:pPr>
-            <a:r>
-              <a:t>›</a:t>
-            </a:r>
-          </a:p>
-        </p:txBody>
-      </p:sp>
-      <p:sp>
-        <p:nvSpPr>
-          <p:cNvPr id="19" name="Rectangle 18"/>
-          <p:cNvSpPr/>
-          <p:nvPr/>
-        </p:nvSpPr>
-        <p:spPr>
-          <a:xfrm>
-            <a:off x="6248400" y="2946400"/>
-            <a:ext cx="2552700" cy="1765300"/>
-          </a:xfrm>
-          <a:prstGeom prst="rect">
-            <a:avLst/>
-          </a:prstGeom>
-          <a:solidFill>
-            <a:srgbClr val="E7E0D5"/>
-          </a:solidFill>
-          <a:ln>
-            <a:noFill/>
-          </a:ln>
-        </p:spPr>
-        <p:style>
-          <a:lnRef idx="1">
-            <a:schemeClr val="accent1"/>
-          </a:lnRef>
-          <a:fillRef idx="3">
-            <a:schemeClr val="accent1"/>
-          </a:fillRef>
-          <a:effectRef idx="2">
-            <a:schemeClr val="accent1"/>
-          </a:effectRef>
-          <a:fontRef idx="minor">
-            <a:schemeClr val="lt1"/>
-          </a:fontRef>
-        </p:style>
-        <p:txBody>
-          <a:bodyPr rtlCol="0" anchor="ctr"/>
-          <a:lstStyle/>
-          <a:p>
-            <a:pPr algn="ctr"/>
-          </a:p>
-        </p:txBody>
-      </p:sp>
-      <p:sp>
-        <p:nvSpPr>
-          <p:cNvPr id="20" name="TextBox 19"/>
-          <p:cNvSpPr txBox="1"/>
-          <p:nvPr/>
-        </p:nvSpPr>
-        <p:spPr>
-          <a:xfrm>
-            <a:off x="6438900" y="3162300"/>
-            <a:ext cx="2133600" cy="236728"/>
-          </a:xfrm>
-          <a:prstGeom prst="rect">
-            <a:avLst/>
-          </a:prstGeom>
-          <a:noFill/>
-        </p:spPr>
-        <p:txBody>
-          <a:bodyPr wrap="none" lIns="0" rIns="0" tIns="0" bIns="0">
-            <a:spAutoFit/>
-          </a:bodyPr>
-          <a:lstStyle/>
-          <a:p>
-            <a:pPr>
-              <a:lnSpc>
-                <a:spcPts val="1364"/>
-              </a:lnSpc>
-              <a:spcAft>
-                <a:spcPts val="0"/>
-              </a:spcAft>
-              <a:defRPr sz="1100" b="1">
-                <a:solidFill>
-                  <a:srgbClr val="F45E2B"/>
-                </a:solidFill>
-                <a:latin typeface="Arial"/>
-              </a:defRPr>
-            </a:pPr>
-            <a:r>
-              <a:t>03</a:t>
-            </a:r>
-          </a:p>
-        </p:txBody>
-      </p:sp>
-      <p:sp>
-        <p:nvSpPr>
-          <p:cNvPr id="21" name="TextBox 20"/>
-          <p:cNvSpPr txBox="1"/>
-          <p:nvPr/>
-        </p:nvSpPr>
-        <p:spPr>
-          <a:xfrm>
-            <a:off x="6438900" y="3568700"/>
-            <a:ext cx="2133600" cy="444500"/>
-          </a:xfrm>
-          <a:prstGeom prst="rect">
-            <a:avLst/>
-          </a:prstGeom>
-          <a:noFill/>
-        </p:spPr>
-        <p:txBody>
-          <a:bodyPr wrap="none" lIns="0" rIns="0" tIns="0" bIns="0">
-            <a:spAutoFit/>
-          </a:bodyPr>
-          <a:lstStyle/>
-          <a:p>
-            <a:pPr>
-              <a:lnSpc>
-                <a:spcPts val="2728"/>
-              </a:lnSpc>
-              <a:spcAft>
-                <a:spcPts val="0"/>
-              </a:spcAft>
-              <a:defRPr sz="2200" b="1">
-                <a:solidFill>
-                  <a:srgbClr val="181817"/>
-                </a:solidFill>
-                <a:latin typeface="Arial"/>
-              </a:defRPr>
-            </a:pPr>
-            <a:r>
-              <a:t>S2</a:t>
-            </a:r>
-          </a:p>
-        </p:txBody>
-      </p:sp>
-      <p:sp>
-        <p:nvSpPr>
-          <p:cNvPr id="22" name="TextBox 21"/>
-          <p:cNvSpPr txBox="1"/>
-          <p:nvPr/>
-        </p:nvSpPr>
-        <p:spPr>
-          <a:xfrm>
-            <a:off x="6438900" y="4140200"/>
-            <a:ext cx="2133600" cy="406400"/>
-          </a:xfrm>
-          <a:prstGeom prst="rect">
-            <a:avLst/>
-          </a:prstGeom>
-          <a:noFill/>
-        </p:spPr>
-        <p:txBody>
-          <a:bodyPr wrap="none" lIns="0" rIns="0" tIns="0" bIns="0">
-            <a:spAutoFit/>
-          </a:bodyPr>
-          <a:lstStyle/>
-          <a:p>
-            <a:pPr>
-              <a:lnSpc>
-                <a:spcPts val="1488"/>
-              </a:lnSpc>
-              <a:spcAft>
-                <a:spcPts val="0"/>
-              </a:spcAft>
-              <a:defRPr sz="1200" b="0">
-                <a:solidFill>
-                  <a:srgbClr val="181817"/>
-                </a:solidFill>
-                <a:latin typeface="Arial"/>
-              </a:defRPr>
-            </a:pPr>
-            <a:r>
-              <a:t>Vyhledat DARKZY</a:t>
-            </a:r>
-          </a:p>
-        </p:txBody>
-      </p:sp>
-      <p:sp>
-        <p:nvSpPr>
-          <p:cNvPr id="23" name="TextBox 22"/>
-          <p:cNvSpPr txBox="1"/>
-          <p:nvPr/>
-        </p:nvSpPr>
-        <p:spPr>
-          <a:xfrm>
-            <a:off x="8813800" y="3657600"/>
-            <a:ext cx="292100" cy="394208"/>
-          </a:xfrm>
-          <a:prstGeom prst="rect">
-            <a:avLst/>
-          </a:prstGeom>
-          <a:noFill/>
-        </p:spPr>
-        <p:txBody>
-          <a:bodyPr wrap="none" lIns="0" rIns="0" tIns="0" bIns="0">
-            <a:spAutoFit/>
-          </a:bodyPr>
-          <a:lstStyle/>
-          <a:p>
-            <a:pPr>
-              <a:lnSpc>
-                <a:spcPts val="2604"/>
-              </a:lnSpc>
-              <a:spcAft>
-                <a:spcPts val="0"/>
-              </a:spcAft>
-              <a:defRPr sz="2100" b="1">
-                <a:solidFill>
-                  <a:srgbClr val="181817"/>
-                </a:solidFill>
-                <a:latin typeface="Arial"/>
-              </a:defRPr>
-            </a:pPr>
-            <a:r>
-              <a:t>›</a:t>
-            </a:r>
-          </a:p>
-        </p:txBody>
-      </p:sp>
-      <p:sp>
-        <p:nvSpPr>
-          <p:cNvPr id="24" name="Rectangle 23"/>
-          <p:cNvSpPr/>
-          <p:nvPr/>
-        </p:nvSpPr>
-        <p:spPr>
-          <a:xfrm>
-            <a:off x="9105900" y="2946400"/>
-            <a:ext cx="2552700" cy="1765300"/>
-          </a:xfrm>
-          <a:prstGeom prst="rect">
-            <a:avLst/>
-          </a:prstGeom>
-          <a:solidFill>
-            <a:srgbClr val="E7E0D5"/>
-          </a:solidFill>
-          <a:ln>
-            <a:noFill/>
-          </a:ln>
-        </p:spPr>
-        <p:style>
-          <a:lnRef idx="1">
-            <a:schemeClr val="accent1"/>
-          </a:lnRef>
-          <a:fillRef idx="3">
-            <a:schemeClr val="accent1"/>
-          </a:fillRef>
-          <a:effectRef idx="2">
-            <a:schemeClr val="accent1"/>
-          </a:effectRef>
-          <a:fontRef idx="minor">
-            <a:schemeClr val="lt1"/>
-          </a:fontRef>
-        </p:style>
-        <p:txBody>
-          <a:bodyPr rtlCol="0" anchor="ctr"/>
-          <a:lstStyle/>
-          <a:p>
-            <a:pPr algn="ctr"/>
-          </a:p>
-        </p:txBody>
-      </p:sp>
-      <p:sp>
-        <p:nvSpPr>
-          <p:cNvPr id="25" name="TextBox 24"/>
-          <p:cNvSpPr txBox="1"/>
-          <p:nvPr/>
-        </p:nvSpPr>
-        <p:spPr>
-          <a:xfrm>
-            <a:off x="9296400" y="3162300"/>
-            <a:ext cx="2133600" cy="236728"/>
-          </a:xfrm>
-          <a:prstGeom prst="rect">
-            <a:avLst/>
-          </a:prstGeom>
-          <a:noFill/>
-        </p:spPr>
-        <p:txBody>
-          <a:bodyPr wrap="none" lIns="0" rIns="0" tIns="0" bIns="0">
-            <a:spAutoFit/>
-          </a:bodyPr>
-          <a:lstStyle/>
-          <a:p>
-            <a:pPr>
-              <a:lnSpc>
-                <a:spcPts val="1364"/>
-              </a:lnSpc>
-              <a:spcAft>
-                <a:spcPts val="0"/>
-              </a:spcAft>
-              <a:defRPr sz="1100" b="1">
-                <a:solidFill>
-                  <a:srgbClr val="F45E2B"/>
-                </a:solidFill>
-                <a:latin typeface="Arial"/>
-              </a:defRPr>
-            </a:pPr>
-            <a:r>
-              <a:t>04</a:t>
-            </a:r>
-          </a:p>
-        </p:txBody>
-      </p:sp>
-      <p:sp>
-        <p:nvSpPr>
-          <p:cNvPr id="26" name="TextBox 25"/>
-          <p:cNvSpPr txBox="1"/>
-          <p:nvPr/>
-        </p:nvSpPr>
-        <p:spPr>
-          <a:xfrm>
-            <a:off x="9296400" y="3568700"/>
-            <a:ext cx="2133600" cy="444500"/>
-          </a:xfrm>
-          <a:prstGeom prst="rect">
-            <a:avLst/>
-          </a:prstGeom>
-          <a:noFill/>
-        </p:spPr>
-        <p:txBody>
-          <a:bodyPr wrap="none" lIns="0" rIns="0" tIns="0" bIns="0">
-            <a:spAutoFit/>
-          </a:bodyPr>
-          <a:lstStyle/>
-          <a:p>
-            <a:pPr>
-              <a:lnSpc>
-                <a:spcPts val="2728"/>
-              </a:lnSpc>
-              <a:spcAft>
-                <a:spcPts val="0"/>
-              </a:spcAft>
-              <a:defRPr sz="2200" b="1">
-                <a:solidFill>
-                  <a:srgbClr val="181817"/>
-                </a:solidFill>
-                <a:latin typeface="Arial"/>
-              </a:defRPr>
-            </a:pPr>
-            <a:r>
-              <a:t>Detail</a:t>
-            </a:r>
-          </a:p>
-        </p:txBody>
-      </p:sp>
-      <p:sp>
-        <p:nvSpPr>
-          <p:cNvPr id="27" name="TextBox 26"/>
-          <p:cNvSpPr txBox="1"/>
-          <p:nvPr/>
-        </p:nvSpPr>
-        <p:spPr>
-          <a:xfrm>
-            <a:off x="9296400" y="4140200"/>
-            <a:ext cx="2133600" cy="406400"/>
-          </a:xfrm>
-          <a:prstGeom prst="rect">
-            <a:avLst/>
-          </a:prstGeom>
-          <a:noFill/>
-        </p:spPr>
-        <p:txBody>
-          <a:bodyPr wrap="none" lIns="0" rIns="0" tIns="0" bIns="0">
-            <a:spAutoFit/>
-          </a:bodyPr>
-          <a:lstStyle/>
-          <a:p>
-            <a:pPr>
-              <a:lnSpc>
-                <a:spcPts val="1488"/>
-              </a:lnSpc>
-              <a:spcAft>
-                <a:spcPts val="0"/>
-              </a:spcAft>
-              <a:defRPr sz="1200" b="0">
-                <a:solidFill>
-                  <a:srgbClr val="181817"/>
-                </a:solidFill>
-                <a:latin typeface="Arial"/>
-              </a:defRPr>
-            </a:pPr>
-            <a:r>
-              <a:t>Otevřít koncert</a:t>
-            </a:r>
-          </a:p>
-        </p:txBody>
-      </p:sp>
-      <p:sp>
-        <p:nvSpPr>
-          <p:cNvPr id="28" name="TextBox 27"/>
-          <p:cNvSpPr txBox="1"/>
-          <p:nvPr/>
-        </p:nvSpPr>
-        <p:spPr>
-          <a:xfrm>
-            <a:off x="533400" y="5207000"/>
-            <a:ext cx="11125200" cy="1016000"/>
-          </a:xfrm>
-          <a:prstGeom prst="rect">
-            <a:avLst/>
-          </a:prstGeom>
-          <a:noFill/>
-        </p:spPr>
-        <p:txBody>
-          <a:bodyPr wrap="none" lIns="0" rIns="0" tIns="0" bIns="0">
-            <a:spAutoFit/>
-          </a:bodyPr>
-          <a:lstStyle/>
-          <a:p>
-            <a:pPr>
-              <a:lnSpc>
-                <a:spcPts val="2108"/>
-              </a:lnSpc>
-              <a:spcAft>
-                <a:spcPts val="0"/>
-              </a:spcAft>
-              <a:defRPr sz="1700" b="0">
-                <a:solidFill>
-                  <a:srgbClr val="181817"/>
-                </a:solidFill>
-                <a:latin typeface="Arial"/>
-              </a:defRPr>
-            </a:pPr>
-            <a:r>
-              <a:t>Klávesnice: viditelný focus, dialog a návrat.</a:t>
-            </a:r>
-          </a:p>
-          <a:p>
-            <a:pPr>
-              <a:lnSpc>
-                <a:spcPts val="2108"/>
-              </a:lnSpc>
-              <a:spcAft>
-                <a:spcPts val="0"/>
-              </a:spcAft>
-              <a:defRPr sz="1700" b="0">
-                <a:solidFill>
-                  <a:srgbClr val="181817"/>
-                </a:solidFill>
-                <a:latin typeface="Arial"/>
-              </a:defRPr>
-            </a:pPr>
-            <a:r>
-              <a:t>Obsah: stejná data v seznamu i detailu.</a:t>
-            </a:r>
-          </a:p>
-        </p:txBody>
-      </p:sp>
-      <p:sp>
-        <p:nvSpPr>
-          <p:cNvPr id="29" name="TextBox 28"/>
-          <p:cNvSpPr txBox="1"/>
-          <p:nvPr/>
-        </p:nvSpPr>
-        <p:spPr>
-          <a:xfrm>
-            <a:off x="533400" y="6413500"/>
-            <a:ext cx="10033000" cy="181610"/>
-          </a:xfrm>
-          <a:prstGeom prst="rect">
-            <a:avLst/>
-          </a:prstGeom>
-          <a:noFill/>
-        </p:spPr>
-        <p:txBody>
-          <a:bodyPr wrap="none" lIns="0" rIns="0" tIns="0" bIns="0">
-            <a:spAutoFit/>
-          </a:bodyPr>
-          <a:lstStyle/>
-          <a:p>
-            <a:pPr>
-              <a:lnSpc>
-                <a:spcPts val="930"/>
-              </a:lnSpc>
-              <a:spcAft>
-                <a:spcPts val="0"/>
-              </a:spcAft>
-              <a:defRPr sz="750" b="0">
-                <a:solidFill>
-                  <a:srgbClr val="68635B"/>
-                </a:solidFill>
-                <a:latin typeface="Arial"/>
-              </a:defRPr>
-            </a:pPr>
-            <a:r>
-              <a:t>DODATEČNĚ PŘIPRAVENÝ PODKLAD K MILNÍKU</a:t>
-            </a:r>
-          </a:p>
-        </p:txBody>
-      </p:sp>
-      <p:sp>
-        <p:nvSpPr>
-          <p:cNvPr id="30" name="TextBox 29"/>
-          <p:cNvSpPr txBox="1"/>
-          <p:nvPr/>
-        </p:nvSpPr>
-        <p:spPr>
-          <a:xfrm>
-            <a:off x="10947400" y="6350000"/>
-            <a:ext cx="825500" cy="220979"/>
-          </a:xfrm>
-          <a:prstGeom prst="rect">
-            <a:avLst/>
-          </a:prstGeom>
-          <a:noFill/>
-        </p:spPr>
-        <p:txBody>
-          <a:bodyPr wrap="none" lIns="0" rIns="0" tIns="0" bIns="0">
-            <a:spAutoFit/>
-          </a:bodyPr>
-          <a:lstStyle/>
-          <a:p>
-            <a:pPr>
-              <a:lnSpc>
-                <a:spcPts val="1240"/>
-              </a:lnSpc>
-              <a:spcAft>
-                <a:spcPts val="0"/>
-              </a:spcAft>
-              <a:defRPr sz="1000" b="1">
-                <a:solidFill>
-                  <a:srgbClr val="68635B"/>
-                </a:solidFill>
-                <a:latin typeface="Arial"/>
-              </a:defRPr>
-            </a:pPr>
-            <a:r>
-              <a:t>04 / 04</a:t>
+              <a:t>4 / 6</a:t>
             </a:r>
           </a:p>
         </p:txBody>
@@ -7861,7 +6528,7 @@
             <a:avLst/>
           </a:prstGeom>
           <a:solidFill>
-            <a:srgbClr val="F4F0E7"/>
+            <a:srgbClr val="FFFFFF"/>
           </a:solidFill>
           <a:ln>
             <a:noFill/>
@@ -7897,8 +6564,8 @@
         </p:nvSpPr>
         <p:spPr>
           <a:xfrm>
-            <a:off x="533400" y="304800"/>
-            <a:ext cx="1905000" cy="283972"/>
+            <a:off x="711200" y="457200"/>
+            <a:ext cx="10769600" cy="228600"/>
           </a:xfrm>
           <a:prstGeom prst="rect">
             <a:avLst/>
@@ -7907,172 +6574,46 @@
         </p:spPr>
         <p:txBody>
           <a:bodyPr wrap="none" lIns="0" rIns="0" tIns="0" bIns="0">
-            <a:spAutoFit/>
+            <a:noAutofit/>
           </a:bodyPr>
           <a:lstStyle/>
           <a:p>
             <a:pPr>
               <a:lnSpc>
-                <a:spcPts val="1736"/>
+                <a:spcPts val="1534"/>
               </a:lnSpc>
               <a:spcAft>
                 <a:spcPts val="0"/>
               </a:spcAft>
-              <a:defRPr sz="1400" b="1">
+              <a:defRPr sz="1300" b="1">
                 <a:solidFill>
-                  <a:srgbClr val="181817"/>
+                  <a:srgbClr val="626773"/>
                 </a:solidFill>
                 <a:latin typeface="Arial"/>
               </a:defRPr>
             </a:pPr>
             <a:r>
-              <a:t>PRAGUE</a:t>
-            </a:r>
-          </a:p>
-        </p:txBody>
-      </p:sp>
-      <p:sp>
-        <p:nvSpPr>
-          <p:cNvPr id="4" name="TextBox 3"/>
-          <p:cNvSpPr txBox="1"/>
-          <p:nvPr/>
-        </p:nvSpPr>
-        <p:spPr>
-          <a:xfrm>
-            <a:off x="533400" y="495300"/>
-            <a:ext cx="1905000" cy="409956"/>
-          </a:xfrm>
-          <a:prstGeom prst="rect">
-            <a:avLst/>
-          </a:prstGeom>
-          <a:noFill/>
-        </p:spPr>
-        <p:txBody>
-          <a:bodyPr wrap="none" lIns="0" rIns="0" tIns="0" bIns="0">
-            <a:spAutoFit/>
-          </a:bodyPr>
-          <a:lstStyle/>
-          <a:p>
-            <a:pPr>
-              <a:lnSpc>
-                <a:spcPts val="2728"/>
-              </a:lnSpc>
-              <a:spcAft>
-                <a:spcPts val="0"/>
-              </a:spcAft>
-              <a:defRPr sz="2200" b="1">
-                <a:solidFill>
-                  <a:srgbClr val="181817"/>
-                </a:solidFill>
-                <a:latin typeface="Arial"/>
-              </a:defRPr>
-            </a:pPr>
-            <a:r>
-              <a:t>PULSE</a:t>
-            </a:r>
-          </a:p>
-        </p:txBody>
-      </p:sp>
-      <p:sp>
-        <p:nvSpPr>
-          <p:cNvPr id="5" name="TextBox 4"/>
-          <p:cNvSpPr txBox="1"/>
-          <p:nvPr/>
-        </p:nvSpPr>
-        <p:spPr>
-          <a:xfrm>
-            <a:off x="533400" y="812800"/>
-            <a:ext cx="2032000" cy="165862"/>
-          </a:xfrm>
-          <a:prstGeom prst="rect">
-            <a:avLst/>
-          </a:prstGeom>
-          <a:noFill/>
-        </p:spPr>
-        <p:txBody>
-          <a:bodyPr wrap="none" lIns="0" rIns="0" tIns="0" bIns="0">
-            <a:spAutoFit/>
-          </a:bodyPr>
-          <a:lstStyle/>
-          <a:p>
-            <a:pPr>
-              <a:lnSpc>
-                <a:spcPts val="806"/>
-              </a:lnSpc>
-              <a:spcAft>
-                <a:spcPts val="0"/>
-              </a:spcAft>
-              <a:defRPr sz="650" b="1">
-                <a:solidFill>
-                  <a:srgbClr val="181817"/>
-                </a:solidFill>
-                <a:latin typeface="Arial"/>
-              </a:defRPr>
-            </a:pPr>
-            <a:r>
-              <a:t>FEST / 2027</a:t>
-            </a:r>
-          </a:p>
-        </p:txBody>
-      </p:sp>
-      <p:sp>
-        <p:nvSpPr>
-          <p:cNvPr id="6" name="TextBox 5"/>
-          <p:cNvSpPr txBox="1"/>
-          <p:nvPr/>
-        </p:nvSpPr>
-        <p:spPr>
-          <a:xfrm>
-            <a:off x="5588000" y="533400"/>
-            <a:ext cx="6070600" cy="220979"/>
-          </a:xfrm>
-          <a:prstGeom prst="rect">
-            <a:avLst/>
-          </a:prstGeom>
-          <a:noFill/>
-        </p:spPr>
-        <p:txBody>
-          <a:bodyPr wrap="none" lIns="0" rIns="0" tIns="0" bIns="0">
-            <a:spAutoFit/>
-          </a:bodyPr>
-          <a:lstStyle/>
-          <a:p>
-            <a:pPr>
-              <a:lnSpc>
-                <a:spcPts val="1240"/>
-              </a:lnSpc>
-              <a:spcAft>
-                <a:spcPts val="0"/>
-              </a:spcAft>
-              <a:defRPr sz="1000" b="1">
-                <a:solidFill>
-                  <a:srgbClr val="68635B"/>
-                </a:solidFill>
-                <a:latin typeface="Arial"/>
-              </a:defRPr>
-            </a:pPr>
-            <a:r>
-              <a:t>XML → PŘIBALENÝ EXPORT → ROZHRANÍ</a:t>
-            </a:r>
-          </a:p>
-        </p:txBody>
-      </p:sp>
-      <p:sp>
-        <p:nvSpPr>
-          <p:cNvPr id="7" name="Rectangle 6"/>
+              <a:t>POUŽITÉ POSTUPY</a:t>
+            </a:r>
+          </a:p>
+        </p:txBody>
+      </p:sp>
+      <p:sp>
+        <p:nvSpPr>
+          <p:cNvPr id="4" name="Rectangle 3"/>
           <p:cNvSpPr/>
           <p:nvPr/>
         </p:nvSpPr>
         <p:spPr>
           <a:xfrm>
-            <a:off x="533400" y="1155700"/>
-            <a:ext cx="11125200" cy="25400"/>
+            <a:off x="711200" y="876300"/>
+            <a:ext cx="622300" cy="50800"/>
           </a:xfrm>
           <a:prstGeom prst="rect">
             <a:avLst/>
           </a:prstGeom>
           <a:solidFill>
-            <a:srgbClr val="181817"/>
+            <a:srgbClr val="E55024"/>
           </a:solidFill>
           <a:ln>
             <a:noFill/>
@@ -8102,14 +6643,14 @@
       </p:sp>
       <p:sp>
         <p:nvSpPr>
-          <p:cNvPr id="8" name="TextBox 7"/>
+          <p:cNvPr id="5" name="TextBox 4"/>
           <p:cNvSpPr txBox="1"/>
           <p:nvPr/>
         </p:nvSpPr>
         <p:spPr>
           <a:xfrm>
-            <a:off x="508000" y="1422400"/>
-            <a:ext cx="11176000" cy="1079500"/>
+            <a:off x="685800" y="1257300"/>
+            <a:ext cx="10795000" cy="1168400"/>
           </a:xfrm>
           <a:prstGeom prst="rect">
             <a:avLst/>
@@ -8118,46 +6659,46 @@
         </p:spPr>
         <p:txBody>
           <a:bodyPr wrap="none" lIns="0" rIns="0" tIns="0" bIns="0">
-            <a:spAutoFit/>
+            <a:noAutofit/>
           </a:bodyPr>
           <a:lstStyle/>
           <a:p>
             <a:pPr>
               <a:lnSpc>
-                <a:spcPts val="3740"/>
+                <a:spcPts val="4032"/>
               </a:lnSpc>
               <a:spcAft>
                 <a:spcPts val="0"/>
               </a:spcAft>
-              <a:defRPr sz="3400" b="1">
+              <a:defRPr sz="3600" b="1">
                 <a:solidFill>
-                  <a:srgbClr val="181817"/>
+                  <a:srgbClr val="191B20"/>
                 </a:solidFill>
                 <a:latin typeface="Arial"/>
               </a:defRPr>
             </a:pPr>
             <a:r>
-              <a:t>Zdroj dat zůstává jeden.</a:t>
-            </a:r>
-          </a:p>
-        </p:txBody>
-      </p:sp>
-      <p:sp>
-        <p:nvSpPr>
-          <p:cNvPr id="9" name="Rectangle 8"/>
+              <a:t>Konkrétní principy UX, přístupnosti a SEO</a:t>
+            </a:r>
+          </a:p>
+        </p:txBody>
+      </p:sp>
+      <p:sp>
+        <p:nvSpPr>
+          <p:cNvPr id="6" name="Rectangle 5"/>
           <p:cNvSpPr/>
           <p:nvPr/>
         </p:nvSpPr>
         <p:spPr>
           <a:xfrm>
-            <a:off x="533400" y="2768600"/>
-            <a:ext cx="5448300" cy="2603500"/>
+            <a:off x="723900" y="2273300"/>
+            <a:ext cx="101600" cy="101600"/>
           </a:xfrm>
           <a:prstGeom prst="rect">
             <a:avLst/>
           </a:prstGeom>
           <a:solidFill>
-            <a:srgbClr val="181817"/>
+            <a:srgbClr val="E55024"/>
           </a:solidFill>
           <a:ln>
             <a:noFill/>
@@ -8187,20 +6728,62 @@
       </p:sp>
       <p:sp>
         <p:nvSpPr>
-          <p:cNvPr id="10" name="Rectangle 9"/>
+          <p:cNvPr id="7" name="TextBox 6"/>
+          <p:cNvSpPr txBox="1"/>
+          <p:nvPr/>
+        </p:nvSpPr>
+        <p:spPr>
+          <a:xfrm>
+            <a:off x="1066800" y="2146300"/>
+            <a:ext cx="10160000" cy="419100"/>
+          </a:xfrm>
+          <a:prstGeom prst="rect">
+            <a:avLst/>
+          </a:prstGeom>
+          <a:noFill/>
+        </p:spPr>
+        <p:txBody>
+          <a:bodyPr wrap="none" lIns="0" rIns="0" tIns="0" bIns="0">
+            <a:noAutofit/>
+          </a:bodyPr>
+          <a:lstStyle/>
+          <a:p>
+            <a:pPr>
+              <a:lnSpc>
+                <a:spcPts val="3360"/>
+              </a:lnSpc>
+              <a:spcAft>
+                <a:spcPts val="0"/>
+              </a:spcAft>
+              <a:defRPr sz="2800" b="0">
+                <a:solidFill>
+                  <a:srgbClr val="191B20"/>
+                </a:solidFill>
+                <a:latin typeface="Arial"/>
+              </a:defRPr>
+            </a:pPr>
+            <a:r>
+              <a:t>Sémantické nadpisy, landmarky, popisky a viditelný focus.</a:t>
+            </a:r>
+          </a:p>
+        </p:txBody>
+      </p:sp>
+      <p:sp>
+        <p:nvSpPr>
+          <p:cNvPr id="8" name="Rectangle 7"/>
           <p:cNvSpPr/>
           <p:nvPr/>
         </p:nvSpPr>
         <p:spPr>
           <a:xfrm>
-            <a:off x="533400" y="2768600"/>
-            <a:ext cx="5448300" cy="76200"/>
+            <a:off x="723900" y="2971800"/>
+            <a:ext cx="101600" cy="101600"/>
           </a:xfrm>
           <a:prstGeom prst="rect">
             <a:avLst/>
           </a:prstGeom>
           <a:solidFill>
-            <a:srgbClr val="F45E2B"/>
+            <a:srgbClr val="E55024"/>
           </a:solidFill>
           <a:ln>
             <a:noFill/>
@@ -8230,14 +6813,14 @@
       </p:sp>
       <p:sp>
         <p:nvSpPr>
-          <p:cNvPr id="11" name="TextBox 10"/>
+          <p:cNvPr id="9" name="TextBox 8"/>
           <p:cNvSpPr txBox="1"/>
           <p:nvPr/>
         </p:nvSpPr>
         <p:spPr>
           <a:xfrm>
-            <a:off x="749300" y="3035300"/>
-            <a:ext cx="5016500" cy="685800"/>
+            <a:off x="1066800" y="2844800"/>
+            <a:ext cx="10160000" cy="419100"/>
           </a:xfrm>
           <a:prstGeom prst="rect">
             <a:avLst/>
@@ -8246,123 +6829,46 @@
         </p:spPr>
         <p:txBody>
           <a:bodyPr wrap="none" lIns="0" rIns="0" tIns="0" bIns="0">
-            <a:spAutoFit/>
+            <a:noAutofit/>
           </a:bodyPr>
           <a:lstStyle/>
           <a:p>
             <a:pPr>
               <a:lnSpc>
-                <a:spcPts val="2200"/>
+                <a:spcPts val="3360"/>
               </a:lnSpc>
               <a:spcAft>
                 <a:spcPts val="0"/>
               </a:spcAft>
-              <a:defRPr sz="2000" b="1">
+              <a:defRPr sz="2800" b="0">
                 <a:solidFill>
-                  <a:srgbClr val="F4F0E7"/>
+                  <a:srgbClr val="191B20"/>
                 </a:solidFill>
                 <a:latin typeface="Arial"/>
               </a:defRPr>
             </a:pPr>
             <a:r>
-              <a:t>XML jako zdroj</a:t>
-            </a:r>
-          </a:p>
-        </p:txBody>
-      </p:sp>
-      <p:sp>
-        <p:nvSpPr>
-          <p:cNvPr id="12" name="TextBox 11"/>
-          <p:cNvSpPr txBox="1"/>
-          <p:nvPr/>
-        </p:nvSpPr>
-        <p:spPr>
-          <a:xfrm>
-            <a:off x="749300" y="3733800"/>
-            <a:ext cx="5016500" cy="1511300"/>
-          </a:xfrm>
-          <a:prstGeom prst="rect">
-            <a:avLst/>
-          </a:prstGeom>
-          <a:noFill/>
-        </p:spPr>
-        <p:txBody>
-          <a:bodyPr wrap="none" lIns="0" rIns="0" tIns="0" bIns="0">
-            <a:spAutoFit/>
-          </a:bodyPr>
-          <a:lstStyle/>
-          <a:p>
-            <a:pPr>
-              <a:lnSpc>
-                <a:spcPts val="1689"/>
-              </a:lnSpc>
-              <a:spcAft>
-                <a:spcPts val="0"/>
-              </a:spcAft>
-              <a:defRPr sz="1420" b="0">
-                <a:solidFill>
-                  <a:srgbClr val="F4F0E7"/>
-                </a:solidFill>
-                <a:latin typeface="Arial"/>
-              </a:defRPr>
-            </a:pPr>
-            <a:r>
-              <a:t>60 jmen, 60 akcí, tarify, kemp a modelová sazba DPH.</a:t>
-            </a:r>
-          </a:p>
-          <a:p>
-            <a:pPr>
-              <a:lnSpc>
-                <a:spcPts val="1689"/>
-              </a:lnSpc>
-              <a:spcAft>
-                <a:spcPts val="0"/>
-              </a:spcAft>
-              <a:defRPr sz="1420" b="0">
-                <a:solidFill>
-                  <a:srgbClr val="F4F0E7"/>
-                </a:solidFill>
-                <a:latin typeface="Arial"/>
-              </a:defRPr>
-            </a:pPr>
-          </a:p>
-          <a:p>
-            <a:pPr>
-              <a:lnSpc>
-                <a:spcPts val="1689"/>
-              </a:lnSpc>
-              <a:spcAft>
-                <a:spcPts val="0"/>
-              </a:spcAft>
-              <a:defRPr sz="1420" b="0">
-                <a:solidFill>
-                  <a:srgbClr val="F4F0E7"/>
-                </a:solidFill>
-                <a:latin typeface="Arial"/>
-              </a:defRPr>
-            </a:pPr>
-            <a:r>
-              <a:t>Dvě vybraná data zůstávají přesná i v PDF.</a:t>
-            </a:r>
-          </a:p>
-        </p:txBody>
-      </p:sp>
-      <p:sp>
-        <p:nvSpPr>
-          <p:cNvPr id="13" name="Rectangle 12"/>
+              <a:t>Textové chyby formulářů a podpora omezeného pohybu.</a:t>
+            </a:r>
+          </a:p>
+        </p:txBody>
+      </p:sp>
+      <p:sp>
+        <p:nvSpPr>
+          <p:cNvPr id="10" name="Rectangle 9"/>
           <p:cNvSpPr/>
           <p:nvPr/>
         </p:nvSpPr>
         <p:spPr>
           <a:xfrm>
-            <a:off x="6210300" y="2768600"/>
-            <a:ext cx="5448300" cy="2603500"/>
+            <a:off x="723900" y="3670300"/>
+            <a:ext cx="101600" cy="101600"/>
           </a:xfrm>
           <a:prstGeom prst="rect">
             <a:avLst/>
           </a:prstGeom>
           <a:solidFill>
-            <a:srgbClr val="E7E0D5"/>
+            <a:srgbClr val="E55024"/>
           </a:solidFill>
           <a:ln>
             <a:noFill/>
@@ -8392,20 +6898,62 @@
       </p:sp>
       <p:sp>
         <p:nvSpPr>
-          <p:cNvPr id="14" name="Rectangle 13"/>
+          <p:cNvPr id="11" name="TextBox 10"/>
+          <p:cNvSpPr txBox="1"/>
+          <p:nvPr/>
+        </p:nvSpPr>
+        <p:spPr>
+          <a:xfrm>
+            <a:off x="1066800" y="3543300"/>
+            <a:ext cx="10160000" cy="419100"/>
+          </a:xfrm>
+          <a:prstGeom prst="rect">
+            <a:avLst/>
+          </a:prstGeom>
+          <a:noFill/>
+        </p:spPr>
+        <p:txBody>
+          <a:bodyPr wrap="none" lIns="0" rIns="0" tIns="0" bIns="0">
+            <a:noAutofit/>
+          </a:bodyPr>
+          <a:lstStyle/>
+          <a:p>
+            <a:pPr>
+              <a:lnSpc>
+                <a:spcPts val="3360"/>
+              </a:lnSpc>
+              <a:spcAft>
+                <a:spcPts val="0"/>
+              </a:spcAft>
+              <a:defRPr sz="2800" b="0">
+                <a:solidFill>
+                  <a:srgbClr val="191B20"/>
+                </a:solidFill>
+                <a:latin typeface="Arial"/>
+              </a:defRPr>
+            </a:pPr>
+            <a:r>
+              <a:t>Konkrétní titulky, popisy stránek a vnitřní odkazy.</a:t>
+            </a:r>
+          </a:p>
+        </p:txBody>
+      </p:sp>
+      <p:sp>
+        <p:nvSpPr>
+          <p:cNvPr id="12" name="Rectangle 11"/>
           <p:cNvSpPr/>
           <p:nvPr/>
         </p:nvSpPr>
         <p:spPr>
           <a:xfrm>
-            <a:off x="6210300" y="2768600"/>
-            <a:ext cx="5448300" cy="76200"/>
+            <a:off x="723900" y="4368800"/>
+            <a:ext cx="101600" cy="101600"/>
           </a:xfrm>
           <a:prstGeom prst="rect">
             <a:avLst/>
           </a:prstGeom>
           <a:solidFill>
-            <a:srgbClr val="F45E2B"/>
+            <a:srgbClr val="E55024"/>
           </a:solidFill>
           <a:ln>
             <a:noFill/>
@@ -8435,14 +6983,14 @@
       </p:sp>
       <p:sp>
         <p:nvSpPr>
-          <p:cNvPr id="15" name="TextBox 14"/>
+          <p:cNvPr id="13" name="TextBox 12"/>
           <p:cNvSpPr txBox="1"/>
           <p:nvPr/>
         </p:nvSpPr>
         <p:spPr>
           <a:xfrm>
-            <a:off x="6426200" y="3035300"/>
-            <a:ext cx="5016500" cy="685800"/>
+            <a:off x="1066800" y="4241800"/>
+            <a:ext cx="10160000" cy="419100"/>
           </a:xfrm>
           <a:prstGeom prst="rect">
             <a:avLst/>
@@ -8451,40 +6999,83 @@
         </p:spPr>
         <p:txBody>
           <a:bodyPr wrap="none" lIns="0" rIns="0" tIns="0" bIns="0">
-            <a:spAutoFit/>
+            <a:noAutofit/>
           </a:bodyPr>
           <a:lstStyle/>
           <a:p>
             <a:pPr>
               <a:lnSpc>
-                <a:spcPts val="2200"/>
+                <a:spcPts val="3360"/>
               </a:lnSpc>
               <a:spcAft>
                 <a:spcPts val="0"/>
               </a:spcAft>
-              <a:defRPr sz="2000" b="1">
+              <a:defRPr sz="2800" b="0">
                 <a:solidFill>
-                  <a:srgbClr val="181817"/>
+                  <a:srgbClr val="191B20"/>
                 </a:solidFill>
                 <a:latin typeface="Arial"/>
               </a:defRPr>
             </a:pPr>
             <a:r>
-              <a:t>Přehledný součet</a:t>
-            </a:r>
-          </a:p>
-        </p:txBody>
-      </p:sp>
-      <p:sp>
-        <p:nvSpPr>
-          <p:cNvPr id="16" name="TextBox 15"/>
+              <a:t>JSON-LD popisuje festival; údaje mají odpovídat stránce.</a:t>
+            </a:r>
+          </a:p>
+        </p:txBody>
+      </p:sp>
+      <p:sp>
+        <p:nvSpPr>
+          <p:cNvPr id="14" name="Rectangle 13"/>
+          <p:cNvSpPr/>
+          <p:nvPr/>
+        </p:nvSpPr>
+        <p:spPr>
+          <a:xfrm>
+            <a:off x="711200" y="6248400"/>
+            <a:ext cx="10769600" cy="12700"/>
+          </a:xfrm>
+          <a:prstGeom prst="rect">
+            <a:avLst/>
+          </a:prstGeom>
+          <a:solidFill>
+            <a:srgbClr val="DFE2E7"/>
+          </a:solidFill>
+          <a:ln>
+            <a:noFill/>
+          </a:ln>
+        </p:spPr>
+        <p:style>
+          <a:lnRef idx="1">
+            <a:schemeClr val="accent1"/>
+          </a:lnRef>
+          <a:fillRef idx="3">
+            <a:schemeClr val="accent1"/>
+          </a:fillRef>
+          <a:effectRef idx="2">
+            <a:schemeClr val="accent1"/>
+          </a:effectRef>
+          <a:fontRef idx="minor">
+            <a:schemeClr val="lt1"/>
+          </a:fontRef>
+        </p:style>
+        <p:txBody>
+          <a:bodyPr rtlCol="0" anchor="ctr"/>
+          <a:lstStyle/>
+          <a:p>
+            <a:pPr algn="ctr"/>
+          </a:p>
+        </p:txBody>
+      </p:sp>
+      <p:sp>
+        <p:nvSpPr>
+          <p:cNvPr id="15" name="TextBox 14"/>
           <p:cNvSpPr txBox="1"/>
           <p:nvPr/>
         </p:nvSpPr>
         <p:spPr>
           <a:xfrm>
-            <a:off x="6426200" y="3733800"/>
-            <a:ext cx="5016500" cy="1511300"/>
+            <a:off x="711200" y="6438900"/>
+            <a:ext cx="9652000" cy="203200"/>
           </a:xfrm>
           <a:prstGeom prst="rect">
             <a:avLst/>
@@ -8493,187 +7084,68 @@
         </p:spPr>
         <p:txBody>
           <a:bodyPr wrap="none" lIns="0" rIns="0" tIns="0" bIns="0">
-            <a:spAutoFit/>
+            <a:noAutofit/>
           </a:bodyPr>
           <a:lstStyle/>
           <a:p>
             <a:pPr>
               <a:lnSpc>
-                <a:spcPts val="1689"/>
+                <a:spcPts val="1297"/>
               </a:lnSpc>
               <a:spcAft>
                 <a:spcPts val="0"/>
               </a:spcAft>
-              <a:defRPr sz="1420" b="0">
+              <a:defRPr sz="1100" b="0">
                 <a:solidFill>
-                  <a:srgbClr val="181817"/>
+                  <a:srgbClr val="626773"/>
                 </a:solidFill>
                 <a:latin typeface="Arial"/>
               </a:defRPr>
             </a:pPr>
             <a:r>
-              <a:t>Promo jen na vstupenky, kemp samostatně.</a:t>
-            </a:r>
-          </a:p>
+              <a:t>Prague Pulse Fest · Výstaviště Praha · 2027</a:t>
+            </a:r>
+          </a:p>
+        </p:txBody>
+      </p:sp>
+      <p:sp>
+        <p:nvSpPr>
+          <p:cNvPr id="16" name="TextBox 15"/>
+          <p:cNvSpPr txBox="1"/>
+          <p:nvPr/>
+        </p:nvSpPr>
+        <p:spPr>
+          <a:xfrm>
+            <a:off x="10807700" y="6413500"/>
+            <a:ext cx="673100" cy="215900"/>
+          </a:xfrm>
+          <a:prstGeom prst="rect">
+            <a:avLst/>
+          </a:prstGeom>
+          <a:noFill/>
+        </p:spPr>
+        <p:txBody>
+          <a:bodyPr wrap="none" lIns="0" rIns="0" tIns="0" bIns="0">
+            <a:noAutofit/>
+          </a:bodyPr>
+          <a:lstStyle/>
           <a:p>
             <a:pPr>
               <a:lnSpc>
-                <a:spcPts val="1689"/>
+                <a:spcPts val="1416"/>
               </a:lnSpc>
               <a:spcAft>
                 <a:spcPts val="0"/>
               </a:spcAft>
-              <a:defRPr sz="1420" b="0">
+              <a:defRPr sz="1200" b="0">
                 <a:solidFill>
-                  <a:srgbClr val="181817"/>
+                  <a:srgbClr val="626773"/>
                 </a:solidFill>
                 <a:latin typeface="Arial"/>
               </a:defRPr>
             </a:pPr>
-          </a:p>
-          <a:p>
-            <a:pPr>
-              <a:lnSpc>
-                <a:spcPts val="1689"/>
-              </a:lnSpc>
-              <a:spcAft>
-                <a:spcPts val="0"/>
-              </a:spcAft>
-              <a:defRPr sz="1420" b="0">
-                <a:solidFill>
-                  <a:srgbClr val="181817"/>
-                </a:solidFill>
-                <a:latin typeface="Arial"/>
-              </a:defRPr>
-            </a:pPr>
-            <a:r>
-              <a:t>Ceny obsahují 12% DPH; poplatek objednávky 0 Kč.</a:t>
-            </a:r>
-          </a:p>
-        </p:txBody>
-      </p:sp>
-      <p:sp>
-        <p:nvSpPr>
-          <p:cNvPr id="17" name="TextBox 16"/>
-          <p:cNvSpPr txBox="1"/>
-          <p:nvPr/>
-        </p:nvSpPr>
-        <p:spPr>
-          <a:xfrm>
-            <a:off x="533400" y="5676900"/>
-            <a:ext cx="11125200" cy="546100"/>
-          </a:xfrm>
-          <a:prstGeom prst="rect">
-            <a:avLst/>
-          </a:prstGeom>
-          <a:noFill/>
-        </p:spPr>
-        <p:txBody>
-          <a:bodyPr wrap="none" lIns="0" rIns="0" tIns="0" bIns="0">
-            <a:spAutoFit/>
-          </a:bodyPr>
-          <a:lstStyle/>
-          <a:p>
-            <a:pPr>
-              <a:lnSpc>
-                <a:spcPts val="1583"/>
-              </a:lnSpc>
-              <a:spcAft>
-                <a:spcPts val="0"/>
-              </a:spcAft>
-              <a:defRPr sz="1320" b="0">
-                <a:solidFill>
-                  <a:srgbClr val="68635B"/>
-                </a:solidFill>
-                <a:latin typeface="Arial"/>
-              </a:defRPr>
-            </a:pPr>
-            <a:r>
-              <a:t>2× dvoudenní VIP + PULSE10 + stan pro 2 = 2 774 Kč včetně modelové DPH.</a:t>
-            </a:r>
-          </a:p>
-        </p:txBody>
-      </p:sp>
-      <p:sp>
-        <p:nvSpPr>
-          <p:cNvPr id="18" name="TextBox 17"/>
-          <p:cNvSpPr txBox="1"/>
-          <p:nvPr/>
-        </p:nvSpPr>
-        <p:spPr>
-          <a:xfrm>
-            <a:off x="533400" y="6413500"/>
-            <a:ext cx="10033000" cy="181610"/>
-          </a:xfrm>
-          <a:prstGeom prst="rect">
-            <a:avLst/>
-          </a:prstGeom>
-          <a:noFill/>
-        </p:spPr>
-        <p:txBody>
-          <a:bodyPr wrap="none" lIns="0" rIns="0" tIns="0" bIns="0">
-            <a:spAutoFit/>
-          </a:bodyPr>
-          <a:lstStyle/>
-          <a:p>
-            <a:pPr>
-              <a:lnSpc>
-                <a:spcPts val="930"/>
-              </a:lnSpc>
-              <a:spcAft>
-                <a:spcPts val="0"/>
-              </a:spcAft>
-              <a:defRPr sz="750" b="0">
-                <a:solidFill>
-                  <a:srgbClr val="68635B"/>
-                </a:solidFill>
-                <a:latin typeface="Arial"/>
-              </a:defRPr>
-            </a:pPr>
-            <a:r>
-              <a:t>DODATEČNĚ PŘIPRAVENÝ PODKLAD K MILNÍKU</a:t>
-            </a:r>
-          </a:p>
-        </p:txBody>
-      </p:sp>
-      <p:sp>
-        <p:nvSpPr>
-          <p:cNvPr id="19" name="TextBox 18"/>
-          <p:cNvSpPr txBox="1"/>
-          <p:nvPr/>
-        </p:nvSpPr>
-        <p:spPr>
-          <a:xfrm>
-            <a:off x="10947400" y="6350000"/>
-            <a:ext cx="825500" cy="220979"/>
-          </a:xfrm>
-          <a:prstGeom prst="rect">
-            <a:avLst/>
-          </a:prstGeom>
-          <a:noFill/>
-        </p:spPr>
-        <p:txBody>
-          <a:bodyPr wrap="none" lIns="0" rIns="0" tIns="0" bIns="0">
-            <a:spAutoFit/>
-          </a:bodyPr>
-          <a:lstStyle/>
-          <a:p>
-            <a:pPr>
-              <a:lnSpc>
-                <a:spcPts val="1240"/>
-              </a:lnSpc>
-              <a:spcAft>
-                <a:spcPts val="0"/>
-              </a:spcAft>
-              <a:defRPr sz="1000" b="1">
-                <a:solidFill>
-                  <a:srgbClr val="68635B"/>
-                </a:solidFill>
-                <a:latin typeface="Arial"/>
-              </a:defRPr>
-            </a:pPr>
-            <a:r>
-              <a:t>04 / 05</a:t>
+            <a:r>
+              <a:t>5 / 6</a:t>
             </a:r>
           </a:p>
         </p:txBody>
@@ -8711,7 +7183,7 @@
             <a:avLst/>
           </a:prstGeom>
           <a:solidFill>
-            <a:srgbClr val="F4F0E7"/>
+            <a:srgbClr val="FFFFFF"/>
           </a:solidFill>
           <a:ln>
             <a:noFill/>
@@ -8747,8 +7219,8 @@
         </p:nvSpPr>
         <p:spPr>
           <a:xfrm>
-            <a:off x="533400" y="304800"/>
-            <a:ext cx="1905000" cy="283972"/>
+            <a:off x="711200" y="457200"/>
+            <a:ext cx="10769600" cy="228600"/>
           </a:xfrm>
           <a:prstGeom prst="rect">
             <a:avLst/>
@@ -8757,172 +7229,46 @@
         </p:spPr>
         <p:txBody>
           <a:bodyPr wrap="none" lIns="0" rIns="0" tIns="0" bIns="0">
-            <a:spAutoFit/>
+            <a:noAutofit/>
           </a:bodyPr>
           <a:lstStyle/>
           <a:p>
             <a:pPr>
               <a:lnSpc>
-                <a:spcPts val="1736"/>
+                <a:spcPts val="1534"/>
               </a:lnSpc>
               <a:spcAft>
                 <a:spcPts val="0"/>
               </a:spcAft>
-              <a:defRPr sz="1400" b="1">
+              <a:defRPr sz="1300" b="1">
                 <a:solidFill>
-                  <a:srgbClr val="181817"/>
+                  <a:srgbClr val="626773"/>
                 </a:solidFill>
                 <a:latin typeface="Arial"/>
               </a:defRPr>
             </a:pPr>
             <a:r>
-              <a:t>PRAGUE</a:t>
-            </a:r>
-          </a:p>
-        </p:txBody>
-      </p:sp>
-      <p:sp>
-        <p:nvSpPr>
-          <p:cNvPr id="4" name="TextBox 3"/>
-          <p:cNvSpPr txBox="1"/>
-          <p:nvPr/>
-        </p:nvSpPr>
-        <p:spPr>
-          <a:xfrm>
-            <a:off x="533400" y="495300"/>
-            <a:ext cx="1905000" cy="409956"/>
-          </a:xfrm>
-          <a:prstGeom prst="rect">
-            <a:avLst/>
-          </a:prstGeom>
-          <a:noFill/>
-        </p:spPr>
-        <p:txBody>
-          <a:bodyPr wrap="none" lIns="0" rIns="0" tIns="0" bIns="0">
-            <a:spAutoFit/>
-          </a:bodyPr>
-          <a:lstStyle/>
-          <a:p>
-            <a:pPr>
-              <a:lnSpc>
-                <a:spcPts val="2728"/>
-              </a:lnSpc>
-              <a:spcAft>
-                <a:spcPts val="0"/>
-              </a:spcAft>
-              <a:defRPr sz="2200" b="1">
-                <a:solidFill>
-                  <a:srgbClr val="181817"/>
-                </a:solidFill>
-                <a:latin typeface="Arial"/>
-              </a:defRPr>
-            </a:pPr>
-            <a:r>
-              <a:t>PULSE</a:t>
-            </a:r>
-          </a:p>
-        </p:txBody>
-      </p:sp>
-      <p:sp>
-        <p:nvSpPr>
-          <p:cNvPr id="5" name="TextBox 4"/>
-          <p:cNvSpPr txBox="1"/>
-          <p:nvPr/>
-        </p:nvSpPr>
-        <p:spPr>
-          <a:xfrm>
-            <a:off x="533400" y="812800"/>
-            <a:ext cx="2032000" cy="165862"/>
-          </a:xfrm>
-          <a:prstGeom prst="rect">
-            <a:avLst/>
-          </a:prstGeom>
-          <a:noFill/>
-        </p:spPr>
-        <p:txBody>
-          <a:bodyPr wrap="none" lIns="0" rIns="0" tIns="0" bIns="0">
-            <a:spAutoFit/>
-          </a:bodyPr>
-          <a:lstStyle/>
-          <a:p>
-            <a:pPr>
-              <a:lnSpc>
-                <a:spcPts val="806"/>
-              </a:lnSpc>
-              <a:spcAft>
-                <a:spcPts val="0"/>
-              </a:spcAft>
-              <a:defRPr sz="650" b="1">
-                <a:solidFill>
-                  <a:srgbClr val="181817"/>
-                </a:solidFill>
-                <a:latin typeface="Arial"/>
-              </a:defRPr>
-            </a:pPr>
-            <a:r>
-              <a:t>FEST / 2027</a:t>
-            </a:r>
-          </a:p>
-        </p:txBody>
-      </p:sp>
-      <p:sp>
-        <p:nvSpPr>
-          <p:cNvPr id="6" name="TextBox 5"/>
-          <p:cNvSpPr txBox="1"/>
-          <p:nvPr/>
-        </p:nvSpPr>
-        <p:spPr>
-          <a:xfrm>
-            <a:off x="5588000" y="533400"/>
-            <a:ext cx="6070600" cy="220979"/>
-          </a:xfrm>
-          <a:prstGeom prst="rect">
-            <a:avLst/>
-          </a:prstGeom>
-          <a:noFill/>
-        </p:spPr>
-        <p:txBody>
-          <a:bodyPr wrap="none" lIns="0" rIns="0" tIns="0" bIns="0">
-            <a:spAutoFit/>
-          </a:bodyPr>
-          <a:lstStyle/>
-          <a:p>
-            <a:pPr>
-              <a:lnSpc>
-                <a:spcPts val="1240"/>
-              </a:lnSpc>
-              <a:spcAft>
-                <a:spcPts val="0"/>
-              </a:spcAft>
-              <a:defRPr sz="1000" b="1">
-                <a:solidFill>
-                  <a:srgbClr val="68635B"/>
-                </a:solidFill>
-                <a:latin typeface="Arial"/>
-              </a:defRPr>
-            </a:pPr>
-            <a:r>
-              <a:t>OVĚŘENÍ AI A VLASTNÍHO ŘEŠENÍ</a:t>
-            </a:r>
-          </a:p>
-        </p:txBody>
-      </p:sp>
-      <p:sp>
-        <p:nvSpPr>
-          <p:cNvPr id="7" name="Rectangle 6"/>
+              <a:t>DŮKAZ JE VE VÝSLEDKU</a:t>
+            </a:r>
+          </a:p>
+        </p:txBody>
+      </p:sp>
+      <p:sp>
+        <p:nvSpPr>
+          <p:cNvPr id="4" name="Rectangle 3"/>
           <p:cNvSpPr/>
           <p:nvPr/>
         </p:nvSpPr>
         <p:spPr>
           <a:xfrm>
-            <a:off x="533400" y="1155700"/>
-            <a:ext cx="11125200" cy="25400"/>
+            <a:off x="711200" y="876300"/>
+            <a:ext cx="622300" cy="50800"/>
           </a:xfrm>
           <a:prstGeom prst="rect">
             <a:avLst/>
           </a:prstGeom>
           <a:solidFill>
-            <a:srgbClr val="181817"/>
+            <a:srgbClr val="E55024"/>
           </a:solidFill>
           <a:ln>
             <a:noFill/>
@@ -8952,14 +7298,14 @@
       </p:sp>
       <p:sp>
         <p:nvSpPr>
-          <p:cNvPr id="8" name="TextBox 7"/>
+          <p:cNvPr id="5" name="TextBox 4"/>
           <p:cNvSpPr txBox="1"/>
           <p:nvPr/>
         </p:nvSpPr>
         <p:spPr>
           <a:xfrm>
-            <a:off x="508000" y="1422400"/>
-            <a:ext cx="11176000" cy="1079500"/>
+            <a:off x="685800" y="1257300"/>
+            <a:ext cx="10795000" cy="1168400"/>
           </a:xfrm>
           <a:prstGeom prst="rect">
             <a:avLst/>
@@ -8968,46 +7314,46 @@
         </p:spPr>
         <p:txBody>
           <a:bodyPr wrap="none" lIns="0" rIns="0" tIns="0" bIns="0">
-            <a:spAutoFit/>
+            <a:noAutofit/>
           </a:bodyPr>
           <a:lstStyle/>
           <a:p>
             <a:pPr>
               <a:lnSpc>
-                <a:spcPts val="3740"/>
+                <a:spcPts val="4032"/>
               </a:lnSpc>
               <a:spcAft>
                 <a:spcPts val="0"/>
               </a:spcAft>
-              <a:defRPr sz="3400" b="1">
+              <a:defRPr sz="3600" b="1">
                 <a:solidFill>
-                  <a:srgbClr val="181817"/>
+                  <a:srgbClr val="191B20"/>
                 </a:solidFill>
                 <a:latin typeface="Arial"/>
               </a:defRPr>
             </a:pPr>
             <a:r>
-              <a:t>Kontrola má konkrétní výstup.</a:t>
-            </a:r>
-          </a:p>
-        </p:txBody>
-      </p:sp>
-      <p:sp>
-        <p:nvSpPr>
-          <p:cNvPr id="9" name="Rectangle 8"/>
+              <a:t>AI a kontrola implementace</a:t>
+            </a:r>
+          </a:p>
+        </p:txBody>
+      </p:sp>
+      <p:sp>
+        <p:nvSpPr>
+          <p:cNvPr id="6" name="Rectangle 5"/>
           <p:cNvSpPr/>
           <p:nvPr/>
         </p:nvSpPr>
         <p:spPr>
           <a:xfrm>
-            <a:off x="533400" y="2768600"/>
-            <a:ext cx="5448300" cy="2603500"/>
+            <a:off x="723900" y="2273300"/>
+            <a:ext cx="101600" cy="101600"/>
           </a:xfrm>
           <a:prstGeom prst="rect">
             <a:avLst/>
           </a:prstGeom>
           <a:solidFill>
-            <a:srgbClr val="181817"/>
+            <a:srgbClr val="E55024"/>
           </a:solidFill>
           <a:ln>
             <a:noFill/>
@@ -9037,20 +7383,62 @@
       </p:sp>
       <p:sp>
         <p:nvSpPr>
-          <p:cNvPr id="10" name="Rectangle 9"/>
+          <p:cNvPr id="7" name="TextBox 6"/>
+          <p:cNvSpPr txBox="1"/>
+          <p:nvPr/>
+        </p:nvSpPr>
+        <p:spPr>
+          <a:xfrm>
+            <a:off x="1066800" y="2146300"/>
+            <a:ext cx="10160000" cy="419100"/>
+          </a:xfrm>
+          <a:prstGeom prst="rect">
+            <a:avLst/>
+          </a:prstGeom>
+          <a:noFill/>
+        </p:spPr>
+        <p:txBody>
+          <a:bodyPr wrap="none" lIns="0" rIns="0" tIns="0" bIns="0">
+            <a:noAutofit/>
+          </a:bodyPr>
+          <a:lstStyle/>
+          <a:p>
+            <a:pPr>
+              <a:lnSpc>
+                <a:spcPts val="3360"/>
+              </a:lnSpc>
+              <a:spcAft>
+                <a:spcPts val="0"/>
+              </a:spcAft>
+              <a:defRPr sz="2800" b="0">
+                <a:solidFill>
+                  <a:srgbClr val="191B20"/>
+                </a:solidFill>
+                <a:latin typeface="Arial"/>
+              </a:defRPr>
+            </a:pPr>
+            <a:r>
+              <a:t>AI: návrh rozhraní, obsah, kód a pomocné testy.</a:t>
+            </a:r>
+          </a:p>
+        </p:txBody>
+      </p:sp>
+      <p:sp>
+        <p:nvSpPr>
+          <p:cNvPr id="8" name="Rectangle 7"/>
           <p:cNvSpPr/>
           <p:nvPr/>
         </p:nvSpPr>
         <p:spPr>
           <a:xfrm>
-            <a:off x="533400" y="2768600"/>
-            <a:ext cx="5448300" cy="76200"/>
+            <a:off x="723900" y="2971800"/>
+            <a:ext cx="101600" cy="101600"/>
           </a:xfrm>
           <a:prstGeom prst="rect">
             <a:avLst/>
           </a:prstGeom>
           <a:solidFill>
-            <a:srgbClr val="F45E2B"/>
+            <a:srgbClr val="E55024"/>
           </a:solidFill>
           <a:ln>
             <a:noFill/>
@@ -9080,14 +7468,14 @@
       </p:sp>
       <p:sp>
         <p:nvSpPr>
-          <p:cNvPr id="11" name="TextBox 10"/>
+          <p:cNvPr id="9" name="TextBox 8"/>
           <p:cNvSpPr txBox="1"/>
           <p:nvPr/>
         </p:nvSpPr>
         <p:spPr>
           <a:xfrm>
-            <a:off x="749300" y="3035300"/>
-            <a:ext cx="5016500" cy="685800"/>
+            <a:off x="1066800" y="2844800"/>
+            <a:ext cx="10160000" cy="419100"/>
           </a:xfrm>
           <a:prstGeom prst="rect">
             <a:avLst/>
@@ -9096,123 +7484,46 @@
         </p:spPr>
         <p:txBody>
           <a:bodyPr wrap="none" lIns="0" rIns="0" tIns="0" bIns="0">
-            <a:spAutoFit/>
+            <a:noAutofit/>
           </a:bodyPr>
           <a:lstStyle/>
           <a:p>
             <a:pPr>
               <a:lnSpc>
-                <a:spcPts val="2200"/>
+                <a:spcPts val="3360"/>
               </a:lnSpc>
               <a:spcAft>
                 <a:spcPts val="0"/>
               </a:spcAft>
-              <a:defRPr sz="2000" b="1">
+              <a:defRPr sz="2800" b="0">
                 <a:solidFill>
-                  <a:srgbClr val="F4F0E7"/>
+                  <a:srgbClr val="191B20"/>
                 </a:solidFill>
                 <a:latin typeface="Arial"/>
               </a:defRPr>
             </a:pPr>
             <a:r>
-              <a:t>Technické důkazy</a:t>
-            </a:r>
-          </a:p>
-        </p:txBody>
-      </p:sp>
-      <p:sp>
-        <p:nvSpPr>
-          <p:cNvPr id="12" name="TextBox 11"/>
-          <p:cNvSpPr txBox="1"/>
-          <p:nvPr/>
-        </p:nvSpPr>
-        <p:spPr>
-          <a:xfrm>
-            <a:off x="749300" y="3733800"/>
-            <a:ext cx="5016500" cy="1511300"/>
-          </a:xfrm>
-          <a:prstGeom prst="rect">
-            <a:avLst/>
-          </a:prstGeom>
-          <a:noFill/>
-        </p:spPr>
-        <p:txBody>
-          <a:bodyPr wrap="none" lIns="0" rIns="0" tIns="0" bIns="0">
-            <a:spAutoFit/>
-          </a:bodyPr>
-          <a:lstStyle/>
-          <a:p>
-            <a:pPr>
-              <a:lnSpc>
-                <a:spcPts val="1689"/>
-              </a:lnSpc>
-              <a:spcAft>
-                <a:spcPts val="0"/>
-              </a:spcAft>
-              <a:defRPr sz="1420" b="0">
-                <a:solidFill>
-                  <a:srgbClr val="F4F0E7"/>
-                </a:solidFill>
-                <a:latin typeface="Arial"/>
-              </a:defRPr>
-            </a:pPr>
-            <a:r>
-              <a:t>Datový validátor a browserové průchody.</a:t>
-            </a:r>
-          </a:p>
-          <a:p>
-            <a:pPr>
-              <a:lnSpc>
-                <a:spcPts val="1689"/>
-              </a:lnSpc>
-              <a:spcAft>
-                <a:spcPts val="0"/>
-              </a:spcAft>
-              <a:defRPr sz="1420" b="0">
-                <a:solidFill>
-                  <a:srgbClr val="F4F0E7"/>
-                </a:solidFill>
-                <a:latin typeface="Arial"/>
-              </a:defRPr>
-            </a:pPr>
-          </a:p>
-          <a:p>
-            <a:pPr>
-              <a:lnSpc>
-                <a:spcPts val="1689"/>
-              </a:lnSpc>
-              <a:spcAft>
-                <a:spcPts val="0"/>
-              </a:spcAft>
-              <a:defRPr sz="1420" b="0">
-                <a:solidFill>
-                  <a:srgbClr val="F4F0E7"/>
-                </a:solidFill>
-                <a:latin typeface="Arial"/>
-              </a:defRPr>
-            </a:pPr>
-            <a:r>
-              <a:t>Aktuální výsledky: validation_report.md.</a:t>
-            </a:r>
-          </a:p>
-        </p:txBody>
-      </p:sp>
-      <p:sp>
-        <p:nvSpPr>
-          <p:cNvPr id="13" name="Rectangle 12"/>
+              <a:t>Upraveno: mobilní navigace, biografie a součty objednávky.</a:t>
+            </a:r>
+          </a:p>
+        </p:txBody>
+      </p:sp>
+      <p:sp>
+        <p:nvSpPr>
+          <p:cNvPr id="10" name="Rectangle 9"/>
           <p:cNvSpPr/>
           <p:nvPr/>
         </p:nvSpPr>
         <p:spPr>
           <a:xfrm>
-            <a:off x="6210300" y="2768600"/>
-            <a:ext cx="5448300" cy="2603500"/>
+            <a:off x="723900" y="3670300"/>
+            <a:ext cx="101600" cy="101600"/>
           </a:xfrm>
           <a:prstGeom prst="rect">
             <a:avLst/>
           </a:prstGeom>
           <a:solidFill>
-            <a:srgbClr val="E7E0D5"/>
+            <a:srgbClr val="E55024"/>
           </a:solidFill>
           <a:ln>
             <a:noFill/>
@@ -9242,20 +7553,62 @@
       </p:sp>
       <p:sp>
         <p:nvSpPr>
-          <p:cNvPr id="14" name="Rectangle 13"/>
+          <p:cNvPr id="11" name="TextBox 10"/>
+          <p:cNvSpPr txBox="1"/>
+          <p:nvPr/>
+        </p:nvSpPr>
+        <p:spPr>
+          <a:xfrm>
+            <a:off x="1066800" y="3543300"/>
+            <a:ext cx="10160000" cy="419100"/>
+          </a:xfrm>
+          <a:prstGeom prst="rect">
+            <a:avLst/>
+          </a:prstGeom>
+          <a:noFill/>
+        </p:spPr>
+        <p:txBody>
+          <a:bodyPr wrap="none" lIns="0" rIns="0" tIns="0" bIns="0">
+            <a:noAutofit/>
+          </a:bodyPr>
+          <a:lstStyle/>
+          <a:p>
+            <a:pPr>
+              <a:lnSpc>
+                <a:spcPts val="3360"/>
+              </a:lnSpc>
+              <a:spcAft>
+                <a:spcPts val="0"/>
+              </a:spcAft>
+              <a:defRPr sz="2800" b="0">
+                <a:solidFill>
+                  <a:srgbClr val="191B20"/>
+                </a:solidFill>
+                <a:latin typeface="Arial"/>
+              </a:defRPr>
+            </a:pPr>
+            <a:r>
+              <a:t>Odmítnuto: kopie cizí značky a backend mimo zadání.</a:t>
+            </a:r>
+          </a:p>
+        </p:txBody>
+      </p:sp>
+      <p:sp>
+        <p:nvSpPr>
+          <p:cNvPr id="12" name="Rectangle 11"/>
           <p:cNvSpPr/>
           <p:nvPr/>
         </p:nvSpPr>
         <p:spPr>
           <a:xfrm>
-            <a:off x="6210300" y="2768600"/>
-            <a:ext cx="5448300" cy="76200"/>
+            <a:off x="723900" y="4368800"/>
+            <a:ext cx="101600" cy="101600"/>
           </a:xfrm>
           <a:prstGeom prst="rect">
             <a:avLst/>
           </a:prstGeom>
           <a:solidFill>
-            <a:srgbClr val="F45E2B"/>
+            <a:srgbClr val="E55024"/>
           </a:solidFill>
           <a:ln>
             <a:noFill/>
@@ -9285,14 +7638,14 @@
       </p:sp>
       <p:sp>
         <p:nvSpPr>
-          <p:cNvPr id="15" name="TextBox 14"/>
+          <p:cNvPr id="13" name="TextBox 12"/>
           <p:cNvSpPr txBox="1"/>
           <p:nvPr/>
         </p:nvSpPr>
         <p:spPr>
           <a:xfrm>
-            <a:off x="6426200" y="3035300"/>
-            <a:ext cx="5016500" cy="685800"/>
+            <a:off x="1066800" y="4241800"/>
+            <a:ext cx="10160000" cy="419100"/>
           </a:xfrm>
           <a:prstGeom prst="rect">
             <a:avLst/>
@@ -9301,40 +7654,83 @@
         </p:spPr>
         <p:txBody>
           <a:bodyPr wrap="none" lIns="0" rIns="0" tIns="0" bIns="0">
-            <a:spAutoFit/>
+            <a:noAutofit/>
           </a:bodyPr>
           <a:lstStyle/>
           <a:p>
             <a:pPr>
               <a:lnSpc>
-                <a:spcPts val="2200"/>
+                <a:spcPts val="3360"/>
               </a:lnSpc>
               <a:spcAft>
                 <a:spcPts val="0"/>
               </a:spcAft>
-              <a:defRPr sz="2000" b="1">
+              <a:defRPr sz="2800" b="0">
                 <a:solidFill>
-                  <a:srgbClr val="181817"/>
+                  <a:srgbClr val="191B20"/>
                 </a:solidFill>
                 <a:latin typeface="Arial"/>
               </a:defRPr>
             </a:pPr>
             <a:r>
-              <a:t>Poctivé limity</a:t>
-            </a:r>
-          </a:p>
-        </p:txBody>
-      </p:sp>
-      <p:sp>
-        <p:nvSpPr>
-          <p:cNvPr id="16" name="TextBox 15"/>
+              <a:t>Ověřeno: XML, browserové scénáře a obsah výsledného PDF.</a:t>
+            </a:r>
+          </a:p>
+        </p:txBody>
+      </p:sp>
+      <p:sp>
+        <p:nvSpPr>
+          <p:cNvPr id="14" name="Rectangle 13"/>
+          <p:cNvSpPr/>
+          <p:nvPr/>
+        </p:nvSpPr>
+        <p:spPr>
+          <a:xfrm>
+            <a:off x="711200" y="6248400"/>
+            <a:ext cx="10769600" cy="12700"/>
+          </a:xfrm>
+          <a:prstGeom prst="rect">
+            <a:avLst/>
+          </a:prstGeom>
+          <a:solidFill>
+            <a:srgbClr val="DFE2E7"/>
+          </a:solidFill>
+          <a:ln>
+            <a:noFill/>
+          </a:ln>
+        </p:spPr>
+        <p:style>
+          <a:lnRef idx="1">
+            <a:schemeClr val="accent1"/>
+          </a:lnRef>
+          <a:fillRef idx="3">
+            <a:schemeClr val="accent1"/>
+          </a:fillRef>
+          <a:effectRef idx="2">
+            <a:schemeClr val="accent1"/>
+          </a:effectRef>
+          <a:fontRef idx="minor">
+            <a:schemeClr val="lt1"/>
+          </a:fontRef>
+        </p:style>
+        <p:txBody>
+          <a:bodyPr rtlCol="0" anchor="ctr"/>
+          <a:lstStyle/>
+          <a:p>
+            <a:pPr algn="ctr"/>
+          </a:p>
+        </p:txBody>
+      </p:sp>
+      <p:sp>
+        <p:nvSpPr>
+          <p:cNvPr id="15" name="TextBox 14"/>
           <p:cNvSpPr txBox="1"/>
           <p:nvPr/>
         </p:nvSpPr>
         <p:spPr>
           <a:xfrm>
-            <a:off x="6426200" y="3733800"/>
-            <a:ext cx="5016500" cy="1511300"/>
+            <a:off x="711200" y="6438900"/>
+            <a:ext cx="9652000" cy="203200"/>
           </a:xfrm>
           <a:prstGeom prst="rect">
             <a:avLst/>
@@ -9343,187 +7739,68 @@
         </p:spPr>
         <p:txBody>
           <a:bodyPr wrap="none" lIns="0" rIns="0" tIns="0" bIns="0">
-            <a:spAutoFit/>
+            <a:noAutofit/>
           </a:bodyPr>
           <a:lstStyle/>
           <a:p>
             <a:pPr>
               <a:lnSpc>
-                <a:spcPts val="1689"/>
+                <a:spcPts val="1297"/>
               </a:lnSpc>
               <a:spcAft>
                 <a:spcPts val="0"/>
               </a:spcAft>
-              <a:defRPr sz="1420" b="0">
+              <a:defRPr sz="1100" b="0">
                 <a:solidFill>
-                  <a:srgbClr val="181817"/>
+                  <a:srgbClr val="626773"/>
                 </a:solidFill>
                 <a:latin typeface="Arial"/>
               </a:defRPr>
             </a:pPr>
             <a:r>
-              <a:t>Žádná smyšlená měření uživatelů ani peer review.</a:t>
-            </a:r>
-          </a:p>
+              <a:t>Prague Pulse Fest · Výstaviště Praha · 2027</a:t>
+            </a:r>
+          </a:p>
+        </p:txBody>
+      </p:sp>
+      <p:sp>
+        <p:nvSpPr>
+          <p:cNvPr id="16" name="TextBox 15"/>
+          <p:cNvSpPr txBox="1"/>
+          <p:nvPr/>
+        </p:nvSpPr>
+        <p:spPr>
+          <a:xfrm>
+            <a:off x="10807700" y="6413500"/>
+            <a:ext cx="673100" cy="215900"/>
+          </a:xfrm>
+          <a:prstGeom prst="rect">
+            <a:avLst/>
+          </a:prstGeom>
+          <a:noFill/>
+        </p:spPr>
+        <p:txBody>
+          <a:bodyPr wrap="none" lIns="0" rIns="0" tIns="0" bIns="0">
+            <a:noAutofit/>
+          </a:bodyPr>
+          <a:lstStyle/>
           <a:p>
             <a:pPr>
               <a:lnSpc>
-                <a:spcPts val="1689"/>
+                <a:spcPts val="1416"/>
               </a:lnSpc>
               <a:spcAft>
                 <a:spcPts val="0"/>
               </a:spcAft>
-              <a:defRPr sz="1420" b="0">
+              <a:defRPr sz="1200" b="0">
                 <a:solidFill>
-                  <a:srgbClr val="181817"/>
+                  <a:srgbClr val="626773"/>
                 </a:solidFill>
                 <a:latin typeface="Arial"/>
               </a:defRPr>
             </a:pPr>
-          </a:p>
-          <a:p>
-            <a:pPr>
-              <a:lnSpc>
-                <a:spcPts val="1689"/>
-              </a:lnSpc>
-              <a:spcAft>
-                <a:spcPts val="0"/>
-              </a:spcAft>
-              <a:defRPr sz="1420" b="0">
-                <a:solidFill>
-                  <a:srgbClr val="181817"/>
-                </a:solidFill>
-                <a:latin typeface="Arial"/>
-              </a:defRPr>
-            </a:pPr>
-            <a:r>
-              <a:t>Fyzické telefony a plný audit WCAG nejsou doloženy.</a:t>
-            </a:r>
-          </a:p>
-        </p:txBody>
-      </p:sp>
-      <p:sp>
-        <p:nvSpPr>
-          <p:cNvPr id="17" name="TextBox 16"/>
-          <p:cNvSpPr txBox="1"/>
-          <p:nvPr/>
-        </p:nvSpPr>
-        <p:spPr>
-          <a:xfrm>
-            <a:off x="533400" y="5676900"/>
-            <a:ext cx="11125200" cy="546100"/>
-          </a:xfrm>
-          <a:prstGeom prst="rect">
-            <a:avLst/>
-          </a:prstGeom>
-          <a:noFill/>
-        </p:spPr>
-        <p:txBody>
-          <a:bodyPr wrap="none" lIns="0" rIns="0" tIns="0" bIns="0">
-            <a:spAutoFit/>
-          </a:bodyPr>
-          <a:lstStyle/>
-          <a:p>
-            <a:pPr>
-              <a:lnSpc>
-                <a:spcPts val="1583"/>
-              </a:lnSpc>
-              <a:spcAft>
-                <a:spcPts val="0"/>
-              </a:spcAft>
-              <a:defRPr sz="1320" b="0">
-                <a:solidFill>
-                  <a:srgbClr val="68635B"/>
-                </a:solidFill>
-                <a:latin typeface="Arial"/>
-              </a:defRPr>
-            </a:pPr>
-            <a:r>
-              <a:t>Přijato: vlastní identita a mobile-first. Odmítnuto: backend a kopie značky.</a:t>
-            </a:r>
-          </a:p>
-        </p:txBody>
-      </p:sp>
-      <p:sp>
-        <p:nvSpPr>
-          <p:cNvPr id="18" name="TextBox 17"/>
-          <p:cNvSpPr txBox="1"/>
-          <p:nvPr/>
-        </p:nvSpPr>
-        <p:spPr>
-          <a:xfrm>
-            <a:off x="533400" y="6413500"/>
-            <a:ext cx="10033000" cy="181610"/>
-          </a:xfrm>
-          <a:prstGeom prst="rect">
-            <a:avLst/>
-          </a:prstGeom>
-          <a:noFill/>
-        </p:spPr>
-        <p:txBody>
-          <a:bodyPr wrap="none" lIns="0" rIns="0" tIns="0" bIns="0">
-            <a:spAutoFit/>
-          </a:bodyPr>
-          <a:lstStyle/>
-          <a:p>
-            <a:pPr>
-              <a:lnSpc>
-                <a:spcPts val="930"/>
-              </a:lnSpc>
-              <a:spcAft>
-                <a:spcPts val="0"/>
-              </a:spcAft>
-              <a:defRPr sz="750" b="0">
-                <a:solidFill>
-                  <a:srgbClr val="68635B"/>
-                </a:solidFill>
-                <a:latin typeface="Arial"/>
-              </a:defRPr>
-            </a:pPr>
-            <a:r>
-              <a:t>DODATEČNĚ PŘIPRAVENÝ PODKLAD K MILNÍKU</a:t>
-            </a:r>
-          </a:p>
-        </p:txBody>
-      </p:sp>
-      <p:sp>
-        <p:nvSpPr>
-          <p:cNvPr id="19" name="TextBox 18"/>
-          <p:cNvSpPr txBox="1"/>
-          <p:nvPr/>
-        </p:nvSpPr>
-        <p:spPr>
-          <a:xfrm>
-            <a:off x="10947400" y="6350000"/>
-            <a:ext cx="825500" cy="220979"/>
-          </a:xfrm>
-          <a:prstGeom prst="rect">
-            <a:avLst/>
-          </a:prstGeom>
-          <a:noFill/>
-        </p:spPr>
-        <p:txBody>
-          <a:bodyPr wrap="none" lIns="0" rIns="0" tIns="0" bIns="0">
-            <a:spAutoFit/>
-          </a:bodyPr>
-          <a:lstStyle/>
-          <a:p>
-            <a:pPr>
-              <a:lnSpc>
-                <a:spcPts val="1240"/>
-              </a:lnSpc>
-              <a:spcAft>
-                <a:spcPts val="0"/>
-              </a:spcAft>
-              <a:defRPr sz="1000" b="1">
-                <a:solidFill>
-                  <a:srgbClr val="68635B"/>
-                </a:solidFill>
-                <a:latin typeface="Arial"/>
-              </a:defRPr>
-            </a:pPr>
-            <a:r>
-              <a:t>04 / 06</a:t>
+            <a:r>
+              <a:t>6 / 6</a:t>
             </a:r>
           </a:p>
         </p:txBody>

--- a/odevzdani/cviceni-04-implementace/prezentace.pptx
+++ b/odevzdani/cviceni-04-implementace/prezentace.pptx
@@ -577,7 +577,7 @@
           <a:lstStyle/>
           <a:p>
             <a:r>
-              <a:t>[35 s] Povinné obsahové části již neexistují jako oddělené ukázky. Z interpreta lze přejít ke koncertu a ze scény do filtrovaného programu. Hledání pokrývá všechna data včetně popisů. K jádru přibyly vstupenky na jeden, dva nebo tři dny, košík, kemp a PDF. Registrace i historie jsou lokální pro prohlížeč, účet není povinný. Nákup nyní nepředěláváme na vstupenky pro jednotlivé scény; toto rozhodnutí je ponechané k další samostatné úpravě.</a:t>
+              <a:t>[35 s] Povinné obsahové části již neexistují jako oddělené ukázky. Z interpreta lze přejít ke koncertu a ze scény do filtrovaného programu. Hledání pokrývá všechna data včetně popisů. K jádru přibyly vstupenky na jeden, dva nebo tři dny, košík, kemp a PDF. Registrace i historie jsou lokální pro prohlížeč, účet není povinný. Vstup lze zvolit na všechny scény nebo jen na jednu. Main Hall má sedadla i stání, River a Club pouze stání. Každá scéna má vlastní kapacitu a společný vstup se do všech započítá. Tři závěrečné koncerty denně navazují s půlhodinou na přesun; plné běžné sety se mezi scénami mohou překrývat.</a:t>
             </a:r>
           </a:p>
         </p:txBody>
@@ -3878,7 +3878,7 @@
             <a:avLst/>
           </a:prstGeom>
           <a:solidFill>
-            <a:srgbClr val="FFFFFF"/>
+            <a:srgbClr val="101217"/>
           </a:solidFill>
           <a:ln>
             <a:noFill/>
@@ -3914,14 +3914,14 @@
         </p:nvSpPr>
         <p:spPr>
           <a:xfrm>
-            <a:off x="711200" y="609600"/>
-            <a:ext cx="76200" cy="381000"/>
+            <a:off x="0" y="0"/>
+            <a:ext cx="152400" cy="6858000"/>
           </a:xfrm>
           <a:prstGeom prst="rect">
             <a:avLst/>
           </a:prstGeom>
           <a:solidFill>
-            <a:srgbClr val="E55024"/>
+            <a:srgbClr val="FF885D"/>
           </a:solidFill>
           <a:ln>
             <a:noFill/>
@@ -3951,56 +3951,100 @@
       </p:sp>
       <p:sp>
         <p:nvSpPr>
-          <p:cNvPr id="4" name="TextBox 3"/>
+          <p:cNvPr id="4" name="Rectangle 3"/>
+          <p:cNvSpPr/>
+          <p:nvPr/>
+        </p:nvSpPr>
+        <p:spPr>
+          <a:xfrm>
+            <a:off x="8255000" y="0"/>
+            <a:ext cx="3937000" cy="6858000"/>
+          </a:xfrm>
+          <a:prstGeom prst="rect">
+            <a:avLst/>
+          </a:prstGeom>
+          <a:solidFill>
+            <a:srgbClr val="1D222C"/>
+          </a:solidFill>
+          <a:ln>
+            <a:noFill/>
+          </a:ln>
+        </p:spPr>
+        <p:style>
+          <a:lnRef idx="1">
+            <a:schemeClr val="accent1"/>
+          </a:lnRef>
+          <a:fillRef idx="3">
+            <a:schemeClr val="accent1"/>
+          </a:fillRef>
+          <a:effectRef idx="2">
+            <a:schemeClr val="accent1"/>
+          </a:effectRef>
+          <a:fontRef idx="minor">
+            <a:schemeClr val="lt1"/>
+          </a:fontRef>
+        </p:style>
+        <p:txBody>
+          <a:bodyPr rtlCol="0" anchor="ctr"/>
+          <a:lstStyle/>
+          <a:p>
+            <a:pPr algn="ctr"/>
+          </a:p>
+        </p:txBody>
+      </p:sp>
+      <p:sp>
+        <p:nvSpPr>
+          <p:cNvPr id="5" name="Rectangle 4"/>
+          <p:cNvSpPr/>
+          <p:nvPr/>
+        </p:nvSpPr>
+        <p:spPr>
+          <a:xfrm>
+            <a:off x="8255000" y="0"/>
+            <a:ext cx="3937000" cy="101600"/>
+          </a:xfrm>
+          <a:prstGeom prst="rect">
+            <a:avLst/>
+          </a:prstGeom>
+          <a:solidFill>
+            <a:srgbClr val="FF885D"/>
+          </a:solidFill>
+          <a:ln>
+            <a:noFill/>
+          </a:ln>
+        </p:spPr>
+        <p:style>
+          <a:lnRef idx="1">
+            <a:schemeClr val="accent1"/>
+          </a:lnRef>
+          <a:fillRef idx="3">
+            <a:schemeClr val="accent1"/>
+          </a:fillRef>
+          <a:effectRef idx="2">
+            <a:schemeClr val="accent1"/>
+          </a:effectRef>
+          <a:fontRef idx="minor">
+            <a:schemeClr val="lt1"/>
+          </a:fontRef>
+        </p:style>
+        <p:txBody>
+          <a:bodyPr rtlCol="0" anchor="ctr"/>
+          <a:lstStyle/>
+          <a:p>
+            <a:pPr algn="ctr"/>
+          </a:p>
+        </p:txBody>
+      </p:sp>
+      <p:sp>
+        <p:nvSpPr>
+          <p:cNvPr id="6" name="TextBox 5"/>
           <p:cNvSpPr txBox="1"/>
           <p:nvPr/>
         </p:nvSpPr>
         <p:spPr>
           <a:xfrm>
-            <a:off x="977900" y="647700"/>
-            <a:ext cx="10502900" cy="317500"/>
-          </a:xfrm>
-          <a:prstGeom prst="rect">
-            <a:avLst/>
-          </a:prstGeom>
-          <a:noFill/>
-        </p:spPr>
-        <p:txBody>
-          <a:bodyPr wrap="none" lIns="0" rIns="0" tIns="0" bIns="0">
-            <a:noAutofit/>
-          </a:bodyPr>
-          <a:lstStyle/>
-          <a:p>
-            <a:pPr>
-              <a:lnSpc>
-                <a:spcPts val="2360"/>
-              </a:lnSpc>
-              <a:spcAft>
-                <a:spcPts val="0"/>
-              </a:spcAft>
-              <a:defRPr sz="2000" b="1">
-                <a:solidFill>
-                  <a:srgbClr val="191B20"/>
-                </a:solidFill>
-                <a:latin typeface="Arial"/>
-              </a:defRPr>
-            </a:pPr>
-            <a:r>
-              <a:t>PRAGUE PULSE FEST</a:t>
-            </a:r>
-          </a:p>
-        </p:txBody>
-      </p:sp>
-      <p:sp>
-        <p:nvSpPr>
-          <p:cNvPr id="5" name="TextBox 4"/>
-          <p:cNvSpPr txBox="1"/>
-          <p:nvPr/>
-        </p:nvSpPr>
-        <p:spPr>
-          <a:xfrm>
-            <a:off x="711200" y="1600200"/>
-            <a:ext cx="10769600" cy="241300"/>
+            <a:off x="609600" y="546100"/>
+            <a:ext cx="10972800" cy="304800"/>
           </a:xfrm>
           <a:prstGeom prst="rect">
             <a:avLst/>
@@ -4022,7 +4066,7 @@
               </a:spcAft>
               <a:defRPr sz="1400" b="1">
                 <a:solidFill>
-                  <a:srgbClr val="E55024"/>
+                  <a:srgbClr val="FF885D"/>
                 </a:solidFill>
                 <a:latin typeface="Arial"/>
               </a:defRPr>
@@ -4035,14 +4079,14 @@
       </p:sp>
       <p:sp>
         <p:nvSpPr>
-          <p:cNvPr id="6" name="TextBox 5"/>
+          <p:cNvPr id="7" name="TextBox 6"/>
           <p:cNvSpPr txBox="1"/>
           <p:nvPr/>
         </p:nvSpPr>
         <p:spPr>
           <a:xfrm>
-            <a:off x="685800" y="2146300"/>
-            <a:ext cx="10795000" cy="1816100"/>
+            <a:off x="571500" y="1193800"/>
+            <a:ext cx="10985500" cy="1879600"/>
           </a:xfrm>
           <a:prstGeom prst="rect">
             <a:avLst/>
@@ -4057,19 +4101,80 @@
           <a:p>
             <a:pPr>
               <a:lnSpc>
-                <a:spcPts val="5376"/>
+                <a:spcPts val="6467"/>
               </a:lnSpc>
               <a:spcAft>
                 <a:spcPts val="0"/>
               </a:spcAft>
-              <a:defRPr sz="4800" b="1">
+              <a:defRPr sz="6600" b="1">
                 <a:solidFill>
-                  <a:srgbClr val="191B20"/>
+                  <a:srgbClr val="F5F6FA"/>
                 </a:solidFill>
                 <a:latin typeface="Arial"/>
               </a:defRPr>
             </a:pPr>
             <a:r>
+              <a:t>PRAGUE</a:t>
+            </a:r>
+          </a:p>
+          <a:p>
+            <a:pPr>
+              <a:lnSpc>
+                <a:spcPts val="6467"/>
+              </a:lnSpc>
+              <a:spcAft>
+                <a:spcPts val="0"/>
+              </a:spcAft>
+              <a:defRPr sz="6600" b="1">
+                <a:solidFill>
+                  <a:srgbClr val="F5F6FA"/>
+                </a:solidFill>
+                <a:latin typeface="Arial"/>
+              </a:defRPr>
+            </a:pPr>
+            <a:r>
+              <a:t>PULSE FEST</a:t>
+            </a:r>
+          </a:p>
+        </p:txBody>
+      </p:sp>
+      <p:sp>
+        <p:nvSpPr>
+          <p:cNvPr id="8" name="TextBox 7"/>
+          <p:cNvSpPr txBox="1"/>
+          <p:nvPr/>
+        </p:nvSpPr>
+        <p:spPr>
+          <a:xfrm>
+            <a:off x="609600" y="3492500"/>
+            <a:ext cx="10858500" cy="1092200"/>
+          </a:xfrm>
+          <a:prstGeom prst="rect">
+            <a:avLst/>
+          </a:prstGeom>
+          <a:noFill/>
+        </p:spPr>
+        <p:txBody>
+          <a:bodyPr wrap="none" lIns="0" rIns="0" tIns="0" bIns="0">
+            <a:noAutofit/>
+          </a:bodyPr>
+          <a:lstStyle/>
+          <a:p>
+            <a:pPr>
+              <a:lnSpc>
+                <a:spcPts val="4028"/>
+              </a:lnSpc>
+              <a:spcAft>
+                <a:spcPts val="0"/>
+              </a:spcAft>
+              <a:defRPr sz="3800" b="1">
+                <a:solidFill>
+                  <a:srgbClr val="FF885D"/>
+                </a:solidFill>
+                <a:latin typeface="Arial"/>
+              </a:defRPr>
+            </a:pPr>
+            <a:r>
               <a:t>První funkční implementace</a:t>
             </a:r>
           </a:p>
@@ -4077,14 +4182,14 @@
       </p:sp>
       <p:sp>
         <p:nvSpPr>
-          <p:cNvPr id="7" name="TextBox 6"/>
+          <p:cNvPr id="9" name="TextBox 8"/>
           <p:cNvSpPr txBox="1"/>
           <p:nvPr/>
         </p:nvSpPr>
         <p:spPr>
           <a:xfrm>
-            <a:off x="711200" y="4191000"/>
-            <a:ext cx="10769600" cy="1016000"/>
+            <a:off x="609600" y="4889500"/>
+            <a:ext cx="10858500" cy="825500"/>
           </a:xfrm>
           <a:prstGeom prst="rect">
             <a:avLst/>
@@ -4106,7 +4211,7 @@
               </a:spcAft>
               <a:defRPr sz="2300" b="0">
                 <a:solidFill>
-                  <a:srgbClr val="626773"/>
+                  <a:srgbClr val="B7BFCC"/>
                 </a:solidFill>
                 <a:latin typeface="Arial"/>
               </a:defRPr>
@@ -4125,7 +4230,7 @@
               </a:spcAft>
               <a:defRPr sz="2300" b="0">
                 <a:solidFill>
-                  <a:srgbClr val="626773"/>
+                  <a:srgbClr val="B7BFCC"/>
                 </a:solidFill>
                 <a:latin typeface="Arial"/>
               </a:defRPr>
@@ -4138,14 +4243,14 @@
       </p:sp>
       <p:sp>
         <p:nvSpPr>
-          <p:cNvPr id="8" name="TextBox 7"/>
+          <p:cNvPr id="10" name="TextBox 9"/>
           <p:cNvSpPr txBox="1"/>
           <p:nvPr/>
         </p:nvSpPr>
         <p:spPr>
           <a:xfrm>
-            <a:off x="711200" y="5600700"/>
-            <a:ext cx="10769600" cy="304800"/>
+            <a:off x="609600" y="5880100"/>
+            <a:ext cx="10972800" cy="330200"/>
           </a:xfrm>
           <a:prstGeom prst="rect">
             <a:avLst/>
@@ -4160,14 +4265,14 @@
           <a:p>
             <a:pPr>
               <a:lnSpc>
-                <a:spcPts val="2242"/>
+                <a:spcPts val="2124"/>
               </a:lnSpc>
               <a:spcAft>
                 <a:spcPts val="0"/>
               </a:spcAft>
-              <a:defRPr sz="1900" b="0">
+              <a:defRPr sz="1800" b="0">
                 <a:solidFill>
-                  <a:srgbClr val="191B20"/>
+                  <a:srgbClr val="F5F6FA"/>
                 </a:solidFill>
                 <a:latin typeface="Arial"/>
               </a:defRPr>
@@ -4180,20 +4285,20 @@
       </p:sp>
       <p:sp>
         <p:nvSpPr>
-          <p:cNvPr id="9" name="Rectangle 8"/>
+          <p:cNvPr id="11" name="Rectangle 10"/>
           <p:cNvSpPr/>
           <p:nvPr/>
         </p:nvSpPr>
         <p:spPr>
           <a:xfrm>
-            <a:off x="711200" y="6248400"/>
-            <a:ext cx="10769600" cy="12700"/>
+            <a:off x="609600" y="6273800"/>
+            <a:ext cx="10972800" cy="12700"/>
           </a:xfrm>
           <a:prstGeom prst="rect">
             <a:avLst/>
           </a:prstGeom>
           <a:solidFill>
-            <a:srgbClr val="DFE2E7"/>
+            <a:srgbClr val="3D4552"/>
           </a:solidFill>
           <a:ln>
             <a:noFill/>
@@ -4223,14 +4328,14 @@
       </p:sp>
       <p:sp>
         <p:nvSpPr>
-          <p:cNvPr id="10" name="TextBox 9"/>
+          <p:cNvPr id="12" name="TextBox 11"/>
           <p:cNvSpPr txBox="1"/>
           <p:nvPr/>
         </p:nvSpPr>
         <p:spPr>
           <a:xfrm>
-            <a:off x="711200" y="6438900"/>
-            <a:ext cx="9652000" cy="203200"/>
+            <a:off x="609600" y="6464300"/>
+            <a:ext cx="9906000" cy="203200"/>
           </a:xfrm>
           <a:prstGeom prst="rect">
             <a:avLst/>
@@ -4252,7 +4357,7 @@
               </a:spcAft>
               <a:defRPr sz="1100" b="0">
                 <a:solidFill>
-                  <a:srgbClr val="626773"/>
+                  <a:srgbClr val="B7BFCC"/>
                 </a:solidFill>
                 <a:latin typeface="Arial"/>
               </a:defRPr>
@@ -4265,14 +4370,14 @@
       </p:sp>
       <p:sp>
         <p:nvSpPr>
-          <p:cNvPr id="11" name="TextBox 10"/>
+          <p:cNvPr id="13" name="TextBox 12"/>
           <p:cNvSpPr txBox="1"/>
           <p:nvPr/>
         </p:nvSpPr>
         <p:spPr>
           <a:xfrm>
-            <a:off x="10807700" y="6413500"/>
-            <a:ext cx="673100" cy="215900"/>
+            <a:off x="10972800" y="6438900"/>
+            <a:ext cx="609600" cy="215900"/>
           </a:xfrm>
           <a:prstGeom prst="rect">
             <a:avLst/>
@@ -4294,7 +4399,7 @@
               </a:spcAft>
               <a:defRPr sz="1200" b="0">
                 <a:solidFill>
-                  <a:srgbClr val="626773"/>
+                  <a:srgbClr val="B7BFCC"/>
                 </a:solidFill>
                 <a:latin typeface="Arial"/>
               </a:defRPr>
@@ -4338,7 +4443,7 @@
             <a:avLst/>
           </a:prstGeom>
           <a:solidFill>
-            <a:srgbClr val="FFFFFF"/>
+            <a:srgbClr val="101217"/>
           </a:solidFill>
           <a:ln>
             <a:noFill/>
@@ -4368,14 +4473,57 @@
       </p:sp>
       <p:sp>
         <p:nvSpPr>
-          <p:cNvPr id="3" name="TextBox 2"/>
+          <p:cNvPr id="3" name="Rectangle 2"/>
+          <p:cNvSpPr/>
+          <p:nvPr/>
+        </p:nvSpPr>
+        <p:spPr>
+          <a:xfrm>
+            <a:off x="0" y="0"/>
+            <a:ext cx="101600" cy="6858000"/>
+          </a:xfrm>
+          <a:prstGeom prst="rect">
+            <a:avLst/>
+          </a:prstGeom>
+          <a:solidFill>
+            <a:srgbClr val="FF885D"/>
+          </a:solidFill>
+          <a:ln>
+            <a:noFill/>
+          </a:ln>
+        </p:spPr>
+        <p:style>
+          <a:lnRef idx="1">
+            <a:schemeClr val="accent1"/>
+          </a:lnRef>
+          <a:fillRef idx="3">
+            <a:schemeClr val="accent1"/>
+          </a:fillRef>
+          <a:effectRef idx="2">
+            <a:schemeClr val="accent1"/>
+          </a:effectRef>
+          <a:fontRef idx="minor">
+            <a:schemeClr val="lt1"/>
+          </a:fontRef>
+        </p:style>
+        <p:txBody>
+          <a:bodyPr rtlCol="0" anchor="ctr"/>
+          <a:lstStyle/>
+          <a:p>
+            <a:pPr algn="ctr"/>
+          </a:p>
+        </p:txBody>
+      </p:sp>
+      <p:sp>
+        <p:nvSpPr>
+          <p:cNvPr id="4" name="TextBox 3"/>
           <p:cNvSpPr txBox="1"/>
           <p:nvPr/>
         </p:nvSpPr>
         <p:spPr>
           <a:xfrm>
-            <a:off x="711200" y="457200"/>
-            <a:ext cx="10769600" cy="228600"/>
+            <a:off x="609600" y="444500"/>
+            <a:ext cx="10972800" cy="279400"/>
           </a:xfrm>
           <a:prstGeom prst="rect">
             <a:avLst/>
@@ -4397,7 +4545,7 @@
               </a:spcAft>
               <a:defRPr sz="1300" b="1">
                 <a:solidFill>
-                  <a:srgbClr val="626773"/>
+                  <a:srgbClr val="B7BFCC"/>
                 </a:solidFill>
                 <a:latin typeface="Arial"/>
               </a:defRPr>
@@ -4410,20 +4558,20 @@
       </p:sp>
       <p:sp>
         <p:nvSpPr>
-          <p:cNvPr id="4" name="Rectangle 3"/>
+          <p:cNvPr id="5" name="Rectangle 4"/>
           <p:cNvSpPr/>
           <p:nvPr/>
         </p:nvSpPr>
         <p:spPr>
           <a:xfrm>
-            <a:off x="711200" y="876300"/>
-            <a:ext cx="622300" cy="50800"/>
+            <a:off x="609600" y="876300"/>
+            <a:ext cx="685800" cy="50800"/>
           </a:xfrm>
           <a:prstGeom prst="rect">
             <a:avLst/>
           </a:prstGeom>
           <a:solidFill>
-            <a:srgbClr val="E55024"/>
+            <a:srgbClr val="FF885D"/>
           </a:solidFill>
           <a:ln>
             <a:noFill/>
@@ -4453,14 +4601,14 @@
       </p:sp>
       <p:sp>
         <p:nvSpPr>
-          <p:cNvPr id="5" name="TextBox 4"/>
+          <p:cNvPr id="6" name="TextBox 5"/>
           <p:cNvSpPr txBox="1"/>
           <p:nvPr/>
         </p:nvSpPr>
         <p:spPr>
           <a:xfrm>
-            <a:off x="685800" y="1257300"/>
-            <a:ext cx="10795000" cy="1168400"/>
+            <a:off x="584200" y="1206500"/>
+            <a:ext cx="10998200" cy="1130300"/>
           </a:xfrm>
           <a:prstGeom prst="rect">
             <a:avLst/>
@@ -4482,7 +4630,7 @@
               </a:spcAft>
               <a:defRPr sz="3600" b="1">
                 <a:solidFill>
-                  <a:srgbClr val="191B20"/>
+                  <a:srgbClr val="F5F6FA"/>
                 </a:solidFill>
                 <a:latin typeface="Arial"/>
               </a:defRPr>
@@ -4495,20 +4643,20 @@
       </p:sp>
       <p:sp>
         <p:nvSpPr>
-          <p:cNvPr id="6" name="Rectangle 5"/>
+          <p:cNvPr id="7" name="Rectangle 6"/>
           <p:cNvSpPr/>
           <p:nvPr/>
         </p:nvSpPr>
         <p:spPr>
           <a:xfrm>
-            <a:off x="723900" y="2273300"/>
+            <a:off x="711200" y="2336800"/>
             <a:ext cx="101600" cy="101600"/>
           </a:xfrm>
           <a:prstGeom prst="rect">
             <a:avLst/>
           </a:prstGeom>
           <a:solidFill>
-            <a:srgbClr val="E55024"/>
+            <a:srgbClr val="FF885D"/>
           </a:solidFill>
           <a:ln>
             <a:noFill/>
@@ -4538,13 +4686,13 @@
       </p:sp>
       <p:sp>
         <p:nvSpPr>
-          <p:cNvPr id="7" name="TextBox 6"/>
+          <p:cNvPr id="8" name="TextBox 7"/>
           <p:cNvSpPr txBox="1"/>
           <p:nvPr/>
         </p:nvSpPr>
         <p:spPr>
           <a:xfrm>
-            <a:off x="1066800" y="2146300"/>
+            <a:off x="1066800" y="2209800"/>
             <a:ext cx="10160000" cy="845819"/>
           </a:xfrm>
           <a:prstGeom prst="rect">
@@ -4567,7 +4715,7 @@
               </a:spcAft>
               <a:defRPr sz="2800" b="0">
                 <a:solidFill>
-                  <a:srgbClr val="191B20"/>
+                  <a:srgbClr val="F5F6FA"/>
                 </a:solidFill>
                 <a:latin typeface="Arial"/>
               </a:defRPr>
@@ -4586,7 +4734,7 @@
               </a:spcAft>
               <a:defRPr sz="2800" b="0">
                 <a:solidFill>
-                  <a:srgbClr val="191B20"/>
+                  <a:srgbClr val="F5F6FA"/>
                 </a:solidFill>
                 <a:latin typeface="Arial"/>
               </a:defRPr>
@@ -4599,20 +4747,20 @@
       </p:sp>
       <p:sp>
         <p:nvSpPr>
-          <p:cNvPr id="8" name="Rectangle 7"/>
+          <p:cNvPr id="9" name="Rectangle 8"/>
           <p:cNvSpPr/>
           <p:nvPr/>
         </p:nvSpPr>
         <p:spPr>
           <a:xfrm>
-            <a:off x="723900" y="3398520"/>
+            <a:off x="711200" y="3436620"/>
             <a:ext cx="101600" cy="101600"/>
           </a:xfrm>
           <a:prstGeom prst="rect">
             <a:avLst/>
           </a:prstGeom>
           <a:solidFill>
-            <a:srgbClr val="E55024"/>
+            <a:srgbClr val="FF885D"/>
           </a:solidFill>
           <a:ln>
             <a:noFill/>
@@ -4642,13 +4790,13 @@
       </p:sp>
       <p:sp>
         <p:nvSpPr>
-          <p:cNvPr id="9" name="TextBox 8"/>
+          <p:cNvPr id="10" name="TextBox 9"/>
           <p:cNvSpPr txBox="1"/>
           <p:nvPr/>
         </p:nvSpPr>
         <p:spPr>
           <a:xfrm>
-            <a:off x="1066800" y="3271520"/>
+            <a:off x="1066800" y="3309620"/>
             <a:ext cx="10160000" cy="419100"/>
           </a:xfrm>
           <a:prstGeom prst="rect">
@@ -4671,7 +4819,7 @@
               </a:spcAft>
               <a:defRPr sz="2800" b="0">
                 <a:solidFill>
-                  <a:srgbClr val="191B20"/>
+                  <a:srgbClr val="F5F6FA"/>
                 </a:solidFill>
                 <a:latin typeface="Arial"/>
               </a:defRPr>
@@ -4684,20 +4832,20 @@
       </p:sp>
       <p:sp>
         <p:nvSpPr>
-          <p:cNvPr id="10" name="Rectangle 9"/>
+          <p:cNvPr id="11" name="Rectangle 10"/>
           <p:cNvSpPr/>
           <p:nvPr/>
         </p:nvSpPr>
         <p:spPr>
           <a:xfrm>
-            <a:off x="723900" y="4097020"/>
+            <a:off x="711200" y="4109720"/>
             <a:ext cx="101600" cy="101600"/>
           </a:xfrm>
           <a:prstGeom prst="rect">
             <a:avLst/>
           </a:prstGeom>
           <a:solidFill>
-            <a:srgbClr val="E55024"/>
+            <a:srgbClr val="FF885D"/>
           </a:solidFill>
           <a:ln>
             <a:noFill/>
@@ -4727,14 +4875,14 @@
       </p:sp>
       <p:sp>
         <p:nvSpPr>
-          <p:cNvPr id="11" name="TextBox 10"/>
+          <p:cNvPr id="12" name="TextBox 11"/>
           <p:cNvSpPr txBox="1"/>
           <p:nvPr/>
         </p:nvSpPr>
         <p:spPr>
           <a:xfrm>
-            <a:off x="1066800" y="3970020"/>
-            <a:ext cx="10160000" cy="419100"/>
+            <a:off x="1066800" y="3982720"/>
+            <a:ext cx="10160000" cy="845819"/>
           </a:xfrm>
           <a:prstGeom prst="rect">
             <a:avLst/>
@@ -4756,81 +4904,15 @@
               </a:spcAft>
               <a:defRPr sz="2800" b="0">
                 <a:solidFill>
-                  <a:srgbClr val="191B20"/>
+                  <a:srgbClr val="F5F6FA"/>
                 </a:solidFill>
                 <a:latin typeface="Arial"/>
               </a:defRPr>
             </a:pPr>
             <a:r>
-              <a:t>Filtry, osobní program, detaily a lokální objednávka s PDF.</a:t>
-            </a:r>
-          </a:p>
-        </p:txBody>
-      </p:sp>
-      <p:sp>
-        <p:nvSpPr>
-          <p:cNvPr id="12" name="Rectangle 11"/>
-          <p:cNvSpPr/>
-          <p:nvPr/>
-        </p:nvSpPr>
-        <p:spPr>
-          <a:xfrm>
-            <a:off x="723900" y="4795520"/>
-            <a:ext cx="101600" cy="101600"/>
-          </a:xfrm>
-          <a:prstGeom prst="rect">
-            <a:avLst/>
-          </a:prstGeom>
-          <a:solidFill>
-            <a:srgbClr val="E55024"/>
-          </a:solidFill>
-          <a:ln>
-            <a:noFill/>
-          </a:ln>
-        </p:spPr>
-        <p:style>
-          <a:lnRef idx="1">
-            <a:schemeClr val="accent1"/>
-          </a:lnRef>
-          <a:fillRef idx="3">
-            <a:schemeClr val="accent1"/>
-          </a:fillRef>
-          <a:effectRef idx="2">
-            <a:schemeClr val="accent1"/>
-          </a:effectRef>
-          <a:fontRef idx="minor">
-            <a:schemeClr val="lt1"/>
-          </a:fontRef>
-        </p:style>
-        <p:txBody>
-          <a:bodyPr rtlCol="0" anchor="ctr"/>
-          <a:lstStyle/>
-          <a:p>
-            <a:pPr algn="ctr"/>
-          </a:p>
-        </p:txBody>
-      </p:sp>
-      <p:sp>
-        <p:nvSpPr>
-          <p:cNvPr id="13" name="TextBox 12"/>
-          <p:cNvSpPr txBox="1"/>
-          <p:nvPr/>
-        </p:nvSpPr>
-        <p:spPr>
-          <a:xfrm>
-            <a:off x="1066800" y="4668520"/>
-            <a:ext cx="10160000" cy="419100"/>
-          </a:xfrm>
-          <a:prstGeom prst="rect">
-            <a:avLst/>
-          </a:prstGeom>
-          <a:noFill/>
-        </p:spPr>
-        <p:txBody>
-          <a:bodyPr wrap="none" lIns="0" rIns="0" tIns="0" bIns="0">
-            <a:noAutofit/>
-          </a:bodyPr>
-          <a:lstStyle/>
+              <a:t>Osobní program s kolizemi a vstup na všechny nebo jednu</a:t>
+            </a:r>
+          </a:p>
           <a:p>
             <a:pPr>
               <a:lnSpc>
@@ -4841,33 +4923,33 @@
               </a:spcAft>
               <a:defRPr sz="2800" b="0">
                 <a:solidFill>
-                  <a:srgbClr val="191B20"/>
+                  <a:srgbClr val="F5F6FA"/>
                 </a:solidFill>
                 <a:latin typeface="Arial"/>
               </a:defRPr>
             </a:pPr>
             <a:r>
-              <a:t>Účet není nutný k dokončení objednávky.</a:t>
-            </a:r>
-          </a:p>
-        </p:txBody>
-      </p:sp>
-      <p:sp>
-        <p:nvSpPr>
-          <p:cNvPr id="14" name="Rectangle 13"/>
+              <a:t>scénu.</a:t>
+            </a:r>
+          </a:p>
+        </p:txBody>
+      </p:sp>
+      <p:sp>
+        <p:nvSpPr>
+          <p:cNvPr id="13" name="Rectangle 12"/>
           <p:cNvSpPr/>
           <p:nvPr/>
         </p:nvSpPr>
         <p:spPr>
           <a:xfrm>
-            <a:off x="711200" y="6248400"/>
-            <a:ext cx="10769600" cy="12700"/>
+            <a:off x="711200" y="5209540"/>
+            <a:ext cx="101600" cy="101600"/>
           </a:xfrm>
           <a:prstGeom prst="rect">
             <a:avLst/>
           </a:prstGeom>
           <a:solidFill>
-            <a:srgbClr val="DFE2E7"/>
+            <a:srgbClr val="FF885D"/>
           </a:solidFill>
           <a:ln>
             <a:noFill/>
@@ -4897,14 +4979,99 @@
       </p:sp>
       <p:sp>
         <p:nvSpPr>
-          <p:cNvPr id="15" name="TextBox 14"/>
+          <p:cNvPr id="14" name="TextBox 13"/>
           <p:cNvSpPr txBox="1"/>
           <p:nvPr/>
         </p:nvSpPr>
         <p:spPr>
           <a:xfrm>
-            <a:off x="711200" y="6438900"/>
-            <a:ext cx="9652000" cy="203200"/>
+            <a:off x="1066800" y="5082540"/>
+            <a:ext cx="10160000" cy="419100"/>
+          </a:xfrm>
+          <a:prstGeom prst="rect">
+            <a:avLst/>
+          </a:prstGeom>
+          <a:noFill/>
+        </p:spPr>
+        <p:txBody>
+          <a:bodyPr wrap="none" lIns="0" rIns="0" tIns="0" bIns="0">
+            <a:noAutofit/>
+          </a:bodyPr>
+          <a:lstStyle/>
+          <a:p>
+            <a:pPr>
+              <a:lnSpc>
+                <a:spcPts val="3360"/>
+              </a:lnSpc>
+              <a:spcAft>
+                <a:spcPts val="0"/>
+              </a:spcAft>
+              <a:defRPr sz="2800" b="0">
+                <a:solidFill>
+                  <a:srgbClr val="F5F6FA"/>
+                </a:solidFill>
+                <a:latin typeface="Arial"/>
+              </a:defRPr>
+            </a:pPr>
+            <a:r>
+              <a:t>Účet není nutný k dokončení objednávky.</a:t>
+            </a:r>
+          </a:p>
+        </p:txBody>
+      </p:sp>
+      <p:sp>
+        <p:nvSpPr>
+          <p:cNvPr id="15" name="Rectangle 14"/>
+          <p:cNvSpPr/>
+          <p:nvPr/>
+        </p:nvSpPr>
+        <p:spPr>
+          <a:xfrm>
+            <a:off x="609600" y="6273800"/>
+            <a:ext cx="10972800" cy="12700"/>
+          </a:xfrm>
+          <a:prstGeom prst="rect">
+            <a:avLst/>
+          </a:prstGeom>
+          <a:solidFill>
+            <a:srgbClr val="3D4552"/>
+          </a:solidFill>
+          <a:ln>
+            <a:noFill/>
+          </a:ln>
+        </p:spPr>
+        <p:style>
+          <a:lnRef idx="1">
+            <a:schemeClr val="accent1"/>
+          </a:lnRef>
+          <a:fillRef idx="3">
+            <a:schemeClr val="accent1"/>
+          </a:fillRef>
+          <a:effectRef idx="2">
+            <a:schemeClr val="accent1"/>
+          </a:effectRef>
+          <a:fontRef idx="minor">
+            <a:schemeClr val="lt1"/>
+          </a:fontRef>
+        </p:style>
+        <p:txBody>
+          <a:bodyPr rtlCol="0" anchor="ctr"/>
+          <a:lstStyle/>
+          <a:p>
+            <a:pPr algn="ctr"/>
+          </a:p>
+        </p:txBody>
+      </p:sp>
+      <p:sp>
+        <p:nvSpPr>
+          <p:cNvPr id="16" name="TextBox 15"/>
+          <p:cNvSpPr txBox="1"/>
+          <p:nvPr/>
+        </p:nvSpPr>
+        <p:spPr>
+          <a:xfrm>
+            <a:off x="609600" y="6464300"/>
+            <a:ext cx="9906000" cy="203200"/>
           </a:xfrm>
           <a:prstGeom prst="rect">
             <a:avLst/>
@@ -4926,7 +5093,7 @@
               </a:spcAft>
               <a:defRPr sz="1100" b="0">
                 <a:solidFill>
-                  <a:srgbClr val="626773"/>
+                  <a:srgbClr val="B7BFCC"/>
                 </a:solidFill>
                 <a:latin typeface="Arial"/>
               </a:defRPr>
@@ -4939,14 +5106,14 @@
       </p:sp>
       <p:sp>
         <p:nvSpPr>
-          <p:cNvPr id="16" name="TextBox 15"/>
+          <p:cNvPr id="17" name="TextBox 16"/>
           <p:cNvSpPr txBox="1"/>
           <p:nvPr/>
         </p:nvSpPr>
         <p:spPr>
           <a:xfrm>
-            <a:off x="10807700" y="6413500"/>
-            <a:ext cx="673100" cy="215900"/>
+            <a:off x="10972800" y="6438900"/>
+            <a:ext cx="609600" cy="215900"/>
           </a:xfrm>
           <a:prstGeom prst="rect">
             <a:avLst/>
@@ -4968,7 +5135,7 @@
               </a:spcAft>
               <a:defRPr sz="1200" b="0">
                 <a:solidFill>
-                  <a:srgbClr val="626773"/>
+                  <a:srgbClr val="B7BFCC"/>
                 </a:solidFill>
                 <a:latin typeface="Arial"/>
               </a:defRPr>
@@ -5012,7 +5179,7 @@
             <a:avLst/>
           </a:prstGeom>
           <a:solidFill>
-            <a:srgbClr val="FFFFFF"/>
+            <a:srgbClr val="101217"/>
           </a:solidFill>
           <a:ln>
             <a:noFill/>
@@ -5042,14 +5209,57 @@
       </p:sp>
       <p:sp>
         <p:nvSpPr>
-          <p:cNvPr id="3" name="TextBox 2"/>
+          <p:cNvPr id="3" name="Rectangle 2"/>
+          <p:cNvSpPr/>
+          <p:nvPr/>
+        </p:nvSpPr>
+        <p:spPr>
+          <a:xfrm>
+            <a:off x="0" y="0"/>
+            <a:ext cx="101600" cy="6858000"/>
+          </a:xfrm>
+          <a:prstGeom prst="rect">
+            <a:avLst/>
+          </a:prstGeom>
+          <a:solidFill>
+            <a:srgbClr val="FF885D"/>
+          </a:solidFill>
+          <a:ln>
+            <a:noFill/>
+          </a:ln>
+        </p:spPr>
+        <p:style>
+          <a:lnRef idx="1">
+            <a:schemeClr val="accent1"/>
+          </a:lnRef>
+          <a:fillRef idx="3">
+            <a:schemeClr val="accent1"/>
+          </a:fillRef>
+          <a:effectRef idx="2">
+            <a:schemeClr val="accent1"/>
+          </a:effectRef>
+          <a:fontRef idx="minor">
+            <a:schemeClr val="lt1"/>
+          </a:fontRef>
+        </p:style>
+        <p:txBody>
+          <a:bodyPr rtlCol="0" anchor="ctr"/>
+          <a:lstStyle/>
+          <a:p>
+            <a:pPr algn="ctr"/>
+          </a:p>
+        </p:txBody>
+      </p:sp>
+      <p:sp>
+        <p:nvSpPr>
+          <p:cNvPr id="4" name="TextBox 3"/>
           <p:cNvSpPr txBox="1"/>
           <p:nvPr/>
         </p:nvSpPr>
         <p:spPr>
           <a:xfrm>
-            <a:off x="711200" y="457200"/>
-            <a:ext cx="10769600" cy="228600"/>
+            <a:off x="609600" y="444500"/>
+            <a:ext cx="10972800" cy="279400"/>
           </a:xfrm>
           <a:prstGeom prst="rect">
             <a:avLst/>
@@ -5071,7 +5281,7 @@
               </a:spcAft>
               <a:defRPr sz="1300" b="1">
                 <a:solidFill>
-                  <a:srgbClr val="626773"/>
+                  <a:srgbClr val="B7BFCC"/>
                 </a:solidFill>
                 <a:latin typeface="Arial"/>
               </a:defRPr>
@@ -5084,20 +5294,20 @@
       </p:sp>
       <p:sp>
         <p:nvSpPr>
-          <p:cNvPr id="4" name="Rectangle 3"/>
+          <p:cNvPr id="5" name="Rectangle 4"/>
           <p:cNvSpPr/>
           <p:nvPr/>
         </p:nvSpPr>
         <p:spPr>
           <a:xfrm>
-            <a:off x="711200" y="876300"/>
-            <a:ext cx="622300" cy="50800"/>
+            <a:off x="609600" y="876300"/>
+            <a:ext cx="685800" cy="50800"/>
           </a:xfrm>
           <a:prstGeom prst="rect">
             <a:avLst/>
           </a:prstGeom>
           <a:solidFill>
-            <a:srgbClr val="E55024"/>
+            <a:srgbClr val="FF885D"/>
           </a:solidFill>
           <a:ln>
             <a:noFill/>
@@ -5127,14 +5337,14 @@
       </p:sp>
       <p:sp>
         <p:nvSpPr>
-          <p:cNvPr id="5" name="TextBox 4"/>
+          <p:cNvPr id="6" name="TextBox 5"/>
           <p:cNvSpPr txBox="1"/>
           <p:nvPr/>
         </p:nvSpPr>
         <p:spPr>
           <a:xfrm>
-            <a:off x="685800" y="1257300"/>
-            <a:ext cx="10795000" cy="1168400"/>
+            <a:off x="584200" y="1206500"/>
+            <a:ext cx="10998200" cy="1130300"/>
           </a:xfrm>
           <a:prstGeom prst="rect">
             <a:avLst/>
@@ -5156,7 +5366,7 @@
               </a:spcAft>
               <a:defRPr sz="3600" b="1">
                 <a:solidFill>
-                  <a:srgbClr val="191B20"/>
+                  <a:srgbClr val="F5F6FA"/>
                 </a:solidFill>
                 <a:latin typeface="Arial"/>
               </a:defRPr>
@@ -5169,20 +5379,20 @@
       </p:sp>
       <p:sp>
         <p:nvSpPr>
-          <p:cNvPr id="6" name="Rectangle 5"/>
+          <p:cNvPr id="7" name="Rectangle 6"/>
           <p:cNvSpPr/>
           <p:nvPr/>
         </p:nvSpPr>
         <p:spPr>
           <a:xfrm>
-            <a:off x="723900" y="2273300"/>
+            <a:off x="711200" y="2336800"/>
             <a:ext cx="101600" cy="101600"/>
           </a:xfrm>
           <a:prstGeom prst="rect">
             <a:avLst/>
           </a:prstGeom>
           <a:solidFill>
-            <a:srgbClr val="E55024"/>
+            <a:srgbClr val="FF885D"/>
           </a:solidFill>
           <a:ln>
             <a:noFill/>
@@ -5212,13 +5422,13 @@
       </p:sp>
       <p:sp>
         <p:nvSpPr>
-          <p:cNvPr id="7" name="TextBox 6"/>
+          <p:cNvPr id="8" name="TextBox 7"/>
           <p:cNvSpPr txBox="1"/>
           <p:nvPr/>
         </p:nvSpPr>
         <p:spPr>
           <a:xfrm>
-            <a:off x="1066800" y="2146300"/>
+            <a:off x="1066800" y="2209800"/>
             <a:ext cx="10160000" cy="419100"/>
           </a:xfrm>
           <a:prstGeom prst="rect">
@@ -5241,7 +5451,7 @@
               </a:spcAft>
               <a:defRPr sz="2800" b="0">
                 <a:solidFill>
-                  <a:srgbClr val="191B20"/>
+                  <a:srgbClr val="F5F6FA"/>
                 </a:solidFill>
                 <a:latin typeface="Arial"/>
               </a:defRPr>
@@ -5254,20 +5464,20 @@
       </p:sp>
       <p:sp>
         <p:nvSpPr>
-          <p:cNvPr id="8" name="Rectangle 7"/>
+          <p:cNvPr id="9" name="Rectangle 8"/>
           <p:cNvSpPr/>
           <p:nvPr/>
         </p:nvSpPr>
         <p:spPr>
           <a:xfrm>
-            <a:off x="723900" y="2971800"/>
+            <a:off x="711200" y="3009900"/>
             <a:ext cx="101600" cy="101600"/>
           </a:xfrm>
           <a:prstGeom prst="rect">
             <a:avLst/>
           </a:prstGeom>
           <a:solidFill>
-            <a:srgbClr val="E55024"/>
+            <a:srgbClr val="FF885D"/>
           </a:solidFill>
           <a:ln>
             <a:noFill/>
@@ -5297,13 +5507,13 @@
       </p:sp>
       <p:sp>
         <p:nvSpPr>
-          <p:cNvPr id="9" name="TextBox 8"/>
+          <p:cNvPr id="10" name="TextBox 9"/>
           <p:cNvSpPr txBox="1"/>
           <p:nvPr/>
         </p:nvSpPr>
         <p:spPr>
           <a:xfrm>
-            <a:off x="1066800" y="2844800"/>
+            <a:off x="1066800" y="2882900"/>
             <a:ext cx="10160000" cy="419100"/>
           </a:xfrm>
           <a:prstGeom prst="rect">
@@ -5326,7 +5536,7 @@
               </a:spcAft>
               <a:defRPr sz="2800" b="0">
                 <a:solidFill>
-                  <a:srgbClr val="191B20"/>
+                  <a:srgbClr val="F5F6FA"/>
                 </a:solidFill>
                 <a:latin typeface="Arial"/>
               </a:defRPr>
@@ -5339,20 +5549,20 @@
       </p:sp>
       <p:sp>
         <p:nvSpPr>
-          <p:cNvPr id="10" name="Rectangle 9"/>
+          <p:cNvPr id="11" name="Rectangle 10"/>
           <p:cNvSpPr/>
           <p:nvPr/>
         </p:nvSpPr>
         <p:spPr>
           <a:xfrm>
-            <a:off x="723900" y="3670300"/>
+            <a:off x="711200" y="3683000"/>
             <a:ext cx="101600" cy="101600"/>
           </a:xfrm>
           <a:prstGeom prst="rect">
             <a:avLst/>
           </a:prstGeom>
           <a:solidFill>
-            <a:srgbClr val="E55024"/>
+            <a:srgbClr val="FF885D"/>
           </a:solidFill>
           <a:ln>
             <a:noFill/>
@@ -5382,13 +5592,13 @@
       </p:sp>
       <p:sp>
         <p:nvSpPr>
-          <p:cNvPr id="11" name="TextBox 10"/>
+          <p:cNvPr id="12" name="TextBox 11"/>
           <p:cNvSpPr txBox="1"/>
           <p:nvPr/>
         </p:nvSpPr>
         <p:spPr>
           <a:xfrm>
-            <a:off x="1066800" y="3543300"/>
+            <a:off x="1066800" y="3556000"/>
             <a:ext cx="10160000" cy="419100"/>
           </a:xfrm>
           <a:prstGeom prst="rect">
@@ -5411,7 +5621,7 @@
               </a:spcAft>
               <a:defRPr sz="2800" b="0">
                 <a:solidFill>
-                  <a:srgbClr val="191B20"/>
+                  <a:srgbClr val="F5F6FA"/>
                 </a:solidFill>
                 <a:latin typeface="Arial"/>
               </a:defRPr>
@@ -5424,20 +5634,20 @@
       </p:sp>
       <p:sp>
         <p:nvSpPr>
-          <p:cNvPr id="12" name="Rectangle 11"/>
+          <p:cNvPr id="13" name="Rectangle 12"/>
           <p:cNvSpPr/>
           <p:nvPr/>
         </p:nvSpPr>
         <p:spPr>
           <a:xfrm>
-            <a:off x="723900" y="4368800"/>
+            <a:off x="711200" y="4356100"/>
             <a:ext cx="101600" cy="101600"/>
           </a:xfrm>
           <a:prstGeom prst="rect">
             <a:avLst/>
           </a:prstGeom>
           <a:solidFill>
-            <a:srgbClr val="E55024"/>
+            <a:srgbClr val="FF885D"/>
           </a:solidFill>
           <a:ln>
             <a:noFill/>
@@ -5467,13 +5677,13 @@
       </p:sp>
       <p:sp>
         <p:nvSpPr>
-          <p:cNvPr id="13" name="TextBox 12"/>
+          <p:cNvPr id="14" name="TextBox 13"/>
           <p:cNvSpPr txBox="1"/>
           <p:nvPr/>
         </p:nvSpPr>
         <p:spPr>
           <a:xfrm>
-            <a:off x="1066800" y="4241800"/>
+            <a:off x="1066800" y="4229100"/>
             <a:ext cx="10160000" cy="419100"/>
           </a:xfrm>
           <a:prstGeom prst="rect">
@@ -5496,7 +5706,7 @@
               </a:spcAft>
               <a:defRPr sz="2800" b="0">
                 <a:solidFill>
-                  <a:srgbClr val="191B20"/>
+                  <a:srgbClr val="F5F6FA"/>
                 </a:solidFill>
                 <a:latin typeface="Arial"/>
               </a:defRPr>
@@ -5509,20 +5719,20 @@
       </p:sp>
       <p:sp>
         <p:nvSpPr>
-          <p:cNvPr id="14" name="Rectangle 13"/>
+          <p:cNvPr id="15" name="Rectangle 14"/>
           <p:cNvSpPr/>
           <p:nvPr/>
         </p:nvSpPr>
         <p:spPr>
           <a:xfrm>
-            <a:off x="711200" y="6248400"/>
-            <a:ext cx="10769600" cy="12700"/>
+            <a:off x="609600" y="6273800"/>
+            <a:ext cx="10972800" cy="12700"/>
           </a:xfrm>
           <a:prstGeom prst="rect">
             <a:avLst/>
           </a:prstGeom>
           <a:solidFill>
-            <a:srgbClr val="DFE2E7"/>
+            <a:srgbClr val="3D4552"/>
           </a:solidFill>
           <a:ln>
             <a:noFill/>
@@ -5552,14 +5762,14 @@
       </p:sp>
       <p:sp>
         <p:nvSpPr>
-          <p:cNvPr id="15" name="TextBox 14"/>
+          <p:cNvPr id="16" name="TextBox 15"/>
           <p:cNvSpPr txBox="1"/>
           <p:nvPr/>
         </p:nvSpPr>
         <p:spPr>
           <a:xfrm>
-            <a:off x="711200" y="6438900"/>
-            <a:ext cx="9652000" cy="203200"/>
+            <a:off x="609600" y="6464300"/>
+            <a:ext cx="9906000" cy="203200"/>
           </a:xfrm>
           <a:prstGeom prst="rect">
             <a:avLst/>
@@ -5581,7 +5791,7 @@
               </a:spcAft>
               <a:defRPr sz="1100" b="0">
                 <a:solidFill>
-                  <a:srgbClr val="626773"/>
+                  <a:srgbClr val="B7BFCC"/>
                 </a:solidFill>
                 <a:latin typeface="Arial"/>
               </a:defRPr>
@@ -5594,14 +5804,14 @@
       </p:sp>
       <p:sp>
         <p:nvSpPr>
-          <p:cNvPr id="16" name="TextBox 15"/>
+          <p:cNvPr id="17" name="TextBox 16"/>
           <p:cNvSpPr txBox="1"/>
           <p:nvPr/>
         </p:nvSpPr>
         <p:spPr>
           <a:xfrm>
-            <a:off x="10807700" y="6413500"/>
-            <a:ext cx="673100" cy="215900"/>
+            <a:off x="10972800" y="6438900"/>
+            <a:ext cx="609600" cy="215900"/>
           </a:xfrm>
           <a:prstGeom prst="rect">
             <a:avLst/>
@@ -5623,7 +5833,7 @@
               </a:spcAft>
               <a:defRPr sz="1200" b="0">
                 <a:solidFill>
-                  <a:srgbClr val="626773"/>
+                  <a:srgbClr val="B7BFCC"/>
                 </a:solidFill>
                 <a:latin typeface="Arial"/>
               </a:defRPr>
@@ -5667,7 +5877,7 @@
             <a:avLst/>
           </a:prstGeom>
           <a:solidFill>
-            <a:srgbClr val="FFFFFF"/>
+            <a:srgbClr val="101217"/>
           </a:solidFill>
           <a:ln>
             <a:noFill/>
@@ -5697,14 +5907,57 @@
       </p:sp>
       <p:sp>
         <p:nvSpPr>
-          <p:cNvPr id="3" name="TextBox 2"/>
+          <p:cNvPr id="3" name="Rectangle 2"/>
+          <p:cNvSpPr/>
+          <p:nvPr/>
+        </p:nvSpPr>
+        <p:spPr>
+          <a:xfrm>
+            <a:off x="0" y="0"/>
+            <a:ext cx="101600" cy="6858000"/>
+          </a:xfrm>
+          <a:prstGeom prst="rect">
+            <a:avLst/>
+          </a:prstGeom>
+          <a:solidFill>
+            <a:srgbClr val="FF885D"/>
+          </a:solidFill>
+          <a:ln>
+            <a:noFill/>
+          </a:ln>
+        </p:spPr>
+        <p:style>
+          <a:lnRef idx="1">
+            <a:schemeClr val="accent1"/>
+          </a:lnRef>
+          <a:fillRef idx="3">
+            <a:schemeClr val="accent1"/>
+          </a:fillRef>
+          <a:effectRef idx="2">
+            <a:schemeClr val="accent1"/>
+          </a:effectRef>
+          <a:fontRef idx="minor">
+            <a:schemeClr val="lt1"/>
+          </a:fontRef>
+        </p:style>
+        <p:txBody>
+          <a:bodyPr rtlCol="0" anchor="ctr"/>
+          <a:lstStyle/>
+          <a:p>
+            <a:pPr algn="ctr"/>
+          </a:p>
+        </p:txBody>
+      </p:sp>
+      <p:sp>
+        <p:nvSpPr>
+          <p:cNvPr id="4" name="TextBox 3"/>
           <p:cNvSpPr txBox="1"/>
           <p:nvPr/>
         </p:nvSpPr>
         <p:spPr>
           <a:xfrm>
-            <a:off x="711200" y="457200"/>
-            <a:ext cx="10769600" cy="228600"/>
+            <a:off x="609600" y="444500"/>
+            <a:ext cx="10972800" cy="279400"/>
           </a:xfrm>
           <a:prstGeom prst="rect">
             <a:avLst/>
@@ -5726,7 +5979,7 @@
               </a:spcAft>
               <a:defRPr sz="1300" b="1">
                 <a:solidFill>
-                  <a:srgbClr val="626773"/>
+                  <a:srgbClr val="B7BFCC"/>
                 </a:solidFill>
                 <a:latin typeface="Arial"/>
               </a:defRPr>
@@ -5739,20 +5992,20 @@
       </p:sp>
       <p:sp>
         <p:nvSpPr>
-          <p:cNvPr id="4" name="Rectangle 3"/>
+          <p:cNvPr id="5" name="Rectangle 4"/>
           <p:cNvSpPr/>
           <p:nvPr/>
         </p:nvSpPr>
         <p:spPr>
           <a:xfrm>
-            <a:off x="711200" y="876300"/>
-            <a:ext cx="622300" cy="50800"/>
+            <a:off x="609600" y="876300"/>
+            <a:ext cx="685800" cy="50800"/>
           </a:xfrm>
           <a:prstGeom prst="rect">
             <a:avLst/>
           </a:prstGeom>
           <a:solidFill>
-            <a:srgbClr val="E55024"/>
+            <a:srgbClr val="FF885D"/>
           </a:solidFill>
           <a:ln>
             <a:noFill/>
@@ -5782,14 +6035,14 @@
       </p:sp>
       <p:sp>
         <p:nvSpPr>
-          <p:cNvPr id="5" name="TextBox 4"/>
+          <p:cNvPr id="6" name="TextBox 5"/>
           <p:cNvSpPr txBox="1"/>
           <p:nvPr/>
         </p:nvSpPr>
         <p:spPr>
           <a:xfrm>
-            <a:off x="685800" y="1257300"/>
-            <a:ext cx="10795000" cy="1168400"/>
+            <a:off x="584200" y="1206500"/>
+            <a:ext cx="10998200" cy="1130300"/>
           </a:xfrm>
           <a:prstGeom prst="rect">
             <a:avLst/>
@@ -5811,7 +6064,7 @@
               </a:spcAft>
               <a:defRPr sz="3600" b="1">
                 <a:solidFill>
-                  <a:srgbClr val="191B20"/>
+                  <a:srgbClr val="F5F6FA"/>
                 </a:solidFill>
                 <a:latin typeface="Arial"/>
               </a:defRPr>
@@ -5824,14 +6077,57 @@
       </p:sp>
       <p:sp>
         <p:nvSpPr>
-          <p:cNvPr id="6" name="TextBox 5"/>
+          <p:cNvPr id="7" name="Rectangle 6"/>
+          <p:cNvSpPr/>
+          <p:nvPr/>
+        </p:nvSpPr>
+        <p:spPr>
+          <a:xfrm>
+            <a:off x="609600" y="2209800"/>
+            <a:ext cx="609600" cy="482600"/>
+          </a:xfrm>
+          <a:prstGeom prst="rect">
+            <a:avLst/>
+          </a:prstGeom>
+          <a:solidFill>
+            <a:srgbClr val="1D222C"/>
+          </a:solidFill>
+          <a:ln>
+            <a:noFill/>
+          </a:ln>
+        </p:spPr>
+        <p:style>
+          <a:lnRef idx="1">
+            <a:schemeClr val="accent1"/>
+          </a:lnRef>
+          <a:fillRef idx="3">
+            <a:schemeClr val="accent1"/>
+          </a:fillRef>
+          <a:effectRef idx="2">
+            <a:schemeClr val="accent1"/>
+          </a:effectRef>
+          <a:fontRef idx="minor">
+            <a:schemeClr val="lt1"/>
+          </a:fontRef>
+        </p:style>
+        <p:txBody>
+          <a:bodyPr rtlCol="0" anchor="ctr"/>
+          <a:lstStyle/>
+          <a:p>
+            <a:pPr algn="ctr"/>
+          </a:p>
+        </p:txBody>
+      </p:sp>
+      <p:sp>
+        <p:nvSpPr>
+          <p:cNvPr id="8" name="TextBox 7"/>
           <p:cNvSpPr txBox="1"/>
           <p:nvPr/>
         </p:nvSpPr>
         <p:spPr>
           <a:xfrm>
-            <a:off x="711200" y="2146300"/>
-            <a:ext cx="482600" cy="355600"/>
+            <a:off x="736600" y="2286000"/>
+            <a:ext cx="482600" cy="368300"/>
           </a:xfrm>
           <a:prstGeom prst="rect">
             <a:avLst/>
@@ -5846,14 +6142,14 @@
           <a:p>
             <a:pPr>
               <a:lnSpc>
-                <a:spcPts val="2713"/>
+                <a:spcPts val="2477"/>
               </a:lnSpc>
               <a:spcAft>
                 <a:spcPts val="0"/>
               </a:spcAft>
-              <a:defRPr sz="2300" b="1">
+              <a:defRPr sz="2100" b="1">
                 <a:solidFill>
-                  <a:srgbClr val="E55024"/>
+                  <a:srgbClr val="FF885D"/>
                 </a:solidFill>
                 <a:latin typeface="Arial"/>
               </a:defRPr>
@@ -5866,14 +6162,14 @@
       </p:sp>
       <p:sp>
         <p:nvSpPr>
-          <p:cNvPr id="7" name="TextBox 6"/>
+          <p:cNvPr id="9" name="TextBox 8"/>
           <p:cNvSpPr txBox="1"/>
           <p:nvPr/>
         </p:nvSpPr>
         <p:spPr>
           <a:xfrm>
-            <a:off x="1346200" y="2146300"/>
-            <a:ext cx="3479800" cy="685800"/>
+            <a:off x="1422400" y="2247900"/>
+            <a:ext cx="3403600" cy="685800"/>
           </a:xfrm>
           <a:prstGeom prst="rect">
             <a:avLst/>
@@ -5895,7 +6191,7 @@
               </a:spcAft>
               <a:defRPr sz="2400" b="1">
                 <a:solidFill>
-                  <a:srgbClr val="191B20"/>
+                  <a:srgbClr val="F5F6FA"/>
                 </a:solidFill>
                 <a:latin typeface="Arial"/>
               </a:defRPr>
@@ -5908,13 +6204,13 @@
       </p:sp>
       <p:sp>
         <p:nvSpPr>
-          <p:cNvPr id="8" name="TextBox 7"/>
+          <p:cNvPr id="10" name="TextBox 9"/>
           <p:cNvSpPr txBox="1"/>
           <p:nvPr/>
         </p:nvSpPr>
         <p:spPr>
           <a:xfrm>
-            <a:off x="4965700" y="2171700"/>
+            <a:off x="4965700" y="2273300"/>
             <a:ext cx="6515100" cy="698500"/>
           </a:xfrm>
           <a:prstGeom prst="rect">
@@ -5937,7 +6233,7 @@
               </a:spcAft>
               <a:defRPr sz="2300" b="0">
                 <a:solidFill>
-                  <a:srgbClr val="626773"/>
+                  <a:srgbClr val="B7BFCC"/>
                 </a:solidFill>
                 <a:latin typeface="Arial"/>
               </a:defRPr>
@@ -5950,14 +6246,57 @@
       </p:sp>
       <p:sp>
         <p:nvSpPr>
-          <p:cNvPr id="9" name="TextBox 8"/>
+          <p:cNvPr id="11" name="Rectangle 10"/>
+          <p:cNvSpPr/>
+          <p:nvPr/>
+        </p:nvSpPr>
+        <p:spPr>
+          <a:xfrm>
+            <a:off x="609600" y="3035300"/>
+            <a:ext cx="609600" cy="482600"/>
+          </a:xfrm>
+          <a:prstGeom prst="rect">
+            <a:avLst/>
+          </a:prstGeom>
+          <a:solidFill>
+            <a:srgbClr val="1D222C"/>
+          </a:solidFill>
+          <a:ln>
+            <a:noFill/>
+          </a:ln>
+        </p:spPr>
+        <p:style>
+          <a:lnRef idx="1">
+            <a:schemeClr val="accent1"/>
+          </a:lnRef>
+          <a:fillRef idx="3">
+            <a:schemeClr val="accent1"/>
+          </a:fillRef>
+          <a:effectRef idx="2">
+            <a:schemeClr val="accent1"/>
+          </a:effectRef>
+          <a:fontRef idx="minor">
+            <a:schemeClr val="lt1"/>
+          </a:fontRef>
+        </p:style>
+        <p:txBody>
+          <a:bodyPr rtlCol="0" anchor="ctr"/>
+          <a:lstStyle/>
+          <a:p>
+            <a:pPr algn="ctr"/>
+          </a:p>
+        </p:txBody>
+      </p:sp>
+      <p:sp>
+        <p:nvSpPr>
+          <p:cNvPr id="12" name="TextBox 11"/>
           <p:cNvSpPr txBox="1"/>
           <p:nvPr/>
         </p:nvSpPr>
         <p:spPr>
           <a:xfrm>
-            <a:off x="711200" y="2971800"/>
-            <a:ext cx="482600" cy="355600"/>
+            <a:off x="736600" y="3111500"/>
+            <a:ext cx="482600" cy="368300"/>
           </a:xfrm>
           <a:prstGeom prst="rect">
             <a:avLst/>
@@ -5972,14 +6311,14 @@
           <a:p>
             <a:pPr>
               <a:lnSpc>
-                <a:spcPts val="2713"/>
+                <a:spcPts val="2477"/>
               </a:lnSpc>
               <a:spcAft>
                 <a:spcPts val="0"/>
               </a:spcAft>
-              <a:defRPr sz="2300" b="1">
+              <a:defRPr sz="2100" b="1">
                 <a:solidFill>
-                  <a:srgbClr val="E55024"/>
+                  <a:srgbClr val="FF885D"/>
                 </a:solidFill>
                 <a:latin typeface="Arial"/>
               </a:defRPr>
@@ -5992,14 +6331,14 @@
       </p:sp>
       <p:sp>
         <p:nvSpPr>
-          <p:cNvPr id="10" name="TextBox 9"/>
+          <p:cNvPr id="13" name="TextBox 12"/>
           <p:cNvSpPr txBox="1"/>
           <p:nvPr/>
         </p:nvSpPr>
         <p:spPr>
           <a:xfrm>
-            <a:off x="1346200" y="2971800"/>
-            <a:ext cx="3479800" cy="685800"/>
+            <a:off x="1422400" y="3073400"/>
+            <a:ext cx="3403600" cy="685800"/>
           </a:xfrm>
           <a:prstGeom prst="rect">
             <a:avLst/>
@@ -6021,7 +6360,7 @@
               </a:spcAft>
               <a:defRPr sz="2400" b="1">
                 <a:solidFill>
-                  <a:srgbClr val="191B20"/>
+                  <a:srgbClr val="F5F6FA"/>
                 </a:solidFill>
                 <a:latin typeface="Arial"/>
               </a:defRPr>
@@ -6034,13 +6373,13 @@
       </p:sp>
       <p:sp>
         <p:nvSpPr>
-          <p:cNvPr id="11" name="TextBox 10"/>
+          <p:cNvPr id="14" name="TextBox 13"/>
           <p:cNvSpPr txBox="1"/>
           <p:nvPr/>
         </p:nvSpPr>
         <p:spPr>
           <a:xfrm>
-            <a:off x="4965700" y="2997200"/>
+            <a:off x="4965700" y="3098800"/>
             <a:ext cx="6515100" cy="698500"/>
           </a:xfrm>
           <a:prstGeom prst="rect">
@@ -6063,7 +6402,7 @@
               </a:spcAft>
               <a:defRPr sz="2300" b="0">
                 <a:solidFill>
-                  <a:srgbClr val="626773"/>
+                  <a:srgbClr val="B7BFCC"/>
                 </a:solidFill>
                 <a:latin typeface="Arial"/>
               </a:defRPr>
@@ -6076,14 +6415,57 @@
       </p:sp>
       <p:sp>
         <p:nvSpPr>
-          <p:cNvPr id="12" name="TextBox 11"/>
+          <p:cNvPr id="15" name="Rectangle 14"/>
+          <p:cNvSpPr/>
+          <p:nvPr/>
+        </p:nvSpPr>
+        <p:spPr>
+          <a:xfrm>
+            <a:off x="609600" y="3860800"/>
+            <a:ext cx="609600" cy="482600"/>
+          </a:xfrm>
+          <a:prstGeom prst="rect">
+            <a:avLst/>
+          </a:prstGeom>
+          <a:solidFill>
+            <a:srgbClr val="1D222C"/>
+          </a:solidFill>
+          <a:ln>
+            <a:noFill/>
+          </a:ln>
+        </p:spPr>
+        <p:style>
+          <a:lnRef idx="1">
+            <a:schemeClr val="accent1"/>
+          </a:lnRef>
+          <a:fillRef idx="3">
+            <a:schemeClr val="accent1"/>
+          </a:fillRef>
+          <a:effectRef idx="2">
+            <a:schemeClr val="accent1"/>
+          </a:effectRef>
+          <a:fontRef idx="minor">
+            <a:schemeClr val="lt1"/>
+          </a:fontRef>
+        </p:style>
+        <p:txBody>
+          <a:bodyPr rtlCol="0" anchor="ctr"/>
+          <a:lstStyle/>
+          <a:p>
+            <a:pPr algn="ctr"/>
+          </a:p>
+        </p:txBody>
+      </p:sp>
+      <p:sp>
+        <p:nvSpPr>
+          <p:cNvPr id="16" name="TextBox 15"/>
           <p:cNvSpPr txBox="1"/>
           <p:nvPr/>
         </p:nvSpPr>
         <p:spPr>
           <a:xfrm>
-            <a:off x="711200" y="3797300"/>
-            <a:ext cx="482600" cy="355600"/>
+            <a:off x="736600" y="3937000"/>
+            <a:ext cx="482600" cy="368300"/>
           </a:xfrm>
           <a:prstGeom prst="rect">
             <a:avLst/>
@@ -6098,14 +6480,14 @@
           <a:p>
             <a:pPr>
               <a:lnSpc>
-                <a:spcPts val="2713"/>
+                <a:spcPts val="2477"/>
               </a:lnSpc>
               <a:spcAft>
                 <a:spcPts val="0"/>
               </a:spcAft>
-              <a:defRPr sz="2300" b="1">
+              <a:defRPr sz="2100" b="1">
                 <a:solidFill>
-                  <a:srgbClr val="E55024"/>
+                  <a:srgbClr val="FF885D"/>
                 </a:solidFill>
                 <a:latin typeface="Arial"/>
               </a:defRPr>
@@ -6118,14 +6500,14 @@
       </p:sp>
       <p:sp>
         <p:nvSpPr>
-          <p:cNvPr id="13" name="TextBox 12"/>
+          <p:cNvPr id="17" name="TextBox 16"/>
           <p:cNvSpPr txBox="1"/>
           <p:nvPr/>
         </p:nvSpPr>
         <p:spPr>
           <a:xfrm>
-            <a:off x="1346200" y="3797300"/>
-            <a:ext cx="3479800" cy="685800"/>
+            <a:off x="1422400" y="3898900"/>
+            <a:ext cx="3403600" cy="685800"/>
           </a:xfrm>
           <a:prstGeom prst="rect">
             <a:avLst/>
@@ -6147,7 +6529,7 @@
               </a:spcAft>
               <a:defRPr sz="2400" b="1">
                 <a:solidFill>
-                  <a:srgbClr val="191B20"/>
+                  <a:srgbClr val="F5F6FA"/>
                 </a:solidFill>
                 <a:latin typeface="Arial"/>
               </a:defRPr>
@@ -6160,13 +6542,13 @@
       </p:sp>
       <p:sp>
         <p:nvSpPr>
-          <p:cNvPr id="14" name="TextBox 13"/>
+          <p:cNvPr id="18" name="TextBox 17"/>
           <p:cNvSpPr txBox="1"/>
           <p:nvPr/>
         </p:nvSpPr>
         <p:spPr>
           <a:xfrm>
-            <a:off x="4965700" y="3822700"/>
+            <a:off x="4965700" y="3924300"/>
             <a:ext cx="6515100" cy="698500"/>
           </a:xfrm>
           <a:prstGeom prst="rect">
@@ -6189,7 +6571,7 @@
               </a:spcAft>
               <a:defRPr sz="2300" b="0">
                 <a:solidFill>
-                  <a:srgbClr val="626773"/>
+                  <a:srgbClr val="B7BFCC"/>
                 </a:solidFill>
                 <a:latin typeface="Arial"/>
               </a:defRPr>
@@ -6202,14 +6584,57 @@
       </p:sp>
       <p:sp>
         <p:nvSpPr>
-          <p:cNvPr id="15" name="TextBox 14"/>
+          <p:cNvPr id="19" name="Rectangle 18"/>
+          <p:cNvSpPr/>
+          <p:nvPr/>
+        </p:nvSpPr>
+        <p:spPr>
+          <a:xfrm>
+            <a:off x="609600" y="4686300"/>
+            <a:ext cx="609600" cy="482600"/>
+          </a:xfrm>
+          <a:prstGeom prst="rect">
+            <a:avLst/>
+          </a:prstGeom>
+          <a:solidFill>
+            <a:srgbClr val="1D222C"/>
+          </a:solidFill>
+          <a:ln>
+            <a:noFill/>
+          </a:ln>
+        </p:spPr>
+        <p:style>
+          <a:lnRef idx="1">
+            <a:schemeClr val="accent1"/>
+          </a:lnRef>
+          <a:fillRef idx="3">
+            <a:schemeClr val="accent1"/>
+          </a:fillRef>
+          <a:effectRef idx="2">
+            <a:schemeClr val="accent1"/>
+          </a:effectRef>
+          <a:fontRef idx="minor">
+            <a:schemeClr val="lt1"/>
+          </a:fontRef>
+        </p:style>
+        <p:txBody>
+          <a:bodyPr rtlCol="0" anchor="ctr"/>
+          <a:lstStyle/>
+          <a:p>
+            <a:pPr algn="ctr"/>
+          </a:p>
+        </p:txBody>
+      </p:sp>
+      <p:sp>
+        <p:nvSpPr>
+          <p:cNvPr id="20" name="TextBox 19"/>
           <p:cNvSpPr txBox="1"/>
           <p:nvPr/>
         </p:nvSpPr>
         <p:spPr>
           <a:xfrm>
-            <a:off x="711200" y="4622800"/>
-            <a:ext cx="482600" cy="355600"/>
+            <a:off x="736600" y="4762500"/>
+            <a:ext cx="482600" cy="368300"/>
           </a:xfrm>
           <a:prstGeom prst="rect">
             <a:avLst/>
@@ -6224,14 +6649,14 @@
           <a:p>
             <a:pPr>
               <a:lnSpc>
-                <a:spcPts val="2713"/>
+                <a:spcPts val="2477"/>
               </a:lnSpc>
               <a:spcAft>
                 <a:spcPts val="0"/>
               </a:spcAft>
-              <a:defRPr sz="2300" b="1">
+              <a:defRPr sz="2100" b="1">
                 <a:solidFill>
-                  <a:srgbClr val="E55024"/>
+                  <a:srgbClr val="FF885D"/>
                 </a:solidFill>
                 <a:latin typeface="Arial"/>
               </a:defRPr>
@@ -6244,14 +6669,14 @@
       </p:sp>
       <p:sp>
         <p:nvSpPr>
-          <p:cNvPr id="16" name="TextBox 15"/>
+          <p:cNvPr id="21" name="TextBox 20"/>
           <p:cNvSpPr txBox="1"/>
           <p:nvPr/>
         </p:nvSpPr>
         <p:spPr>
           <a:xfrm>
-            <a:off x="1346200" y="4622800"/>
-            <a:ext cx="3479800" cy="685800"/>
+            <a:off x="1422400" y="4724400"/>
+            <a:ext cx="3403600" cy="685800"/>
           </a:xfrm>
           <a:prstGeom prst="rect">
             <a:avLst/>
@@ -6273,7 +6698,7 @@
               </a:spcAft>
               <a:defRPr sz="2400" b="1">
                 <a:solidFill>
-                  <a:srgbClr val="191B20"/>
+                  <a:srgbClr val="F5F6FA"/>
                 </a:solidFill>
                 <a:latin typeface="Arial"/>
               </a:defRPr>
@@ -6286,13 +6711,13 @@
       </p:sp>
       <p:sp>
         <p:nvSpPr>
-          <p:cNvPr id="17" name="TextBox 16"/>
+          <p:cNvPr id="22" name="TextBox 21"/>
           <p:cNvSpPr txBox="1"/>
           <p:nvPr/>
         </p:nvSpPr>
         <p:spPr>
           <a:xfrm>
-            <a:off x="4965700" y="4648200"/>
+            <a:off x="4965700" y="4749800"/>
             <a:ext cx="6515100" cy="698500"/>
           </a:xfrm>
           <a:prstGeom prst="rect">
@@ -6315,7 +6740,7 @@
               </a:spcAft>
               <a:defRPr sz="2300" b="0">
                 <a:solidFill>
-                  <a:srgbClr val="626773"/>
+                  <a:srgbClr val="B7BFCC"/>
                 </a:solidFill>
                 <a:latin typeface="Arial"/>
               </a:defRPr>
@@ -6328,14 +6753,14 @@
       </p:sp>
       <p:sp>
         <p:nvSpPr>
-          <p:cNvPr id="18" name="TextBox 17"/>
+          <p:cNvPr id="23" name="TextBox 22"/>
           <p:cNvSpPr txBox="1"/>
           <p:nvPr/>
         </p:nvSpPr>
         <p:spPr>
           <a:xfrm>
-            <a:off x="711200" y="5473700"/>
-            <a:ext cx="10769600" cy="596900"/>
+            <a:off x="609600" y="5651500"/>
+            <a:ext cx="10972800" cy="508000"/>
           </a:xfrm>
           <a:prstGeom prst="rect">
             <a:avLst/>
@@ -6357,7 +6782,7 @@
               </a:spcAft>
               <a:defRPr sz="1800" b="0">
                 <a:solidFill>
-                  <a:srgbClr val="626773"/>
+                  <a:srgbClr val="B7BFCC"/>
                 </a:solidFill>
                 <a:latin typeface="Arial"/>
               </a:defRPr>
@@ -6370,20 +6795,20 @@
       </p:sp>
       <p:sp>
         <p:nvSpPr>
-          <p:cNvPr id="19" name="Rectangle 18"/>
+          <p:cNvPr id="24" name="Rectangle 23"/>
           <p:cNvSpPr/>
           <p:nvPr/>
         </p:nvSpPr>
         <p:spPr>
           <a:xfrm>
-            <a:off x="711200" y="6248400"/>
-            <a:ext cx="10769600" cy="12700"/>
+            <a:off x="609600" y="6273800"/>
+            <a:ext cx="10972800" cy="12700"/>
           </a:xfrm>
           <a:prstGeom prst="rect">
             <a:avLst/>
           </a:prstGeom>
           <a:solidFill>
-            <a:srgbClr val="DFE2E7"/>
+            <a:srgbClr val="3D4552"/>
           </a:solidFill>
           <a:ln>
             <a:noFill/>
@@ -6413,14 +6838,14 @@
       </p:sp>
       <p:sp>
         <p:nvSpPr>
-          <p:cNvPr id="20" name="TextBox 19"/>
+          <p:cNvPr id="25" name="TextBox 24"/>
           <p:cNvSpPr txBox="1"/>
           <p:nvPr/>
         </p:nvSpPr>
         <p:spPr>
           <a:xfrm>
-            <a:off x="711200" y="6438900"/>
-            <a:ext cx="9652000" cy="203200"/>
+            <a:off x="609600" y="6464300"/>
+            <a:ext cx="9906000" cy="203200"/>
           </a:xfrm>
           <a:prstGeom prst="rect">
             <a:avLst/>
@@ -6442,7 +6867,7 @@
               </a:spcAft>
               <a:defRPr sz="1100" b="0">
                 <a:solidFill>
-                  <a:srgbClr val="626773"/>
+                  <a:srgbClr val="B7BFCC"/>
                 </a:solidFill>
                 <a:latin typeface="Arial"/>
               </a:defRPr>
@@ -6455,14 +6880,14 @@
       </p:sp>
       <p:sp>
         <p:nvSpPr>
-          <p:cNvPr id="21" name="TextBox 20"/>
+          <p:cNvPr id="26" name="TextBox 25"/>
           <p:cNvSpPr txBox="1"/>
           <p:nvPr/>
         </p:nvSpPr>
         <p:spPr>
           <a:xfrm>
-            <a:off x="10807700" y="6413500"/>
-            <a:ext cx="673100" cy="215900"/>
+            <a:off x="10972800" y="6438900"/>
+            <a:ext cx="609600" cy="215900"/>
           </a:xfrm>
           <a:prstGeom prst="rect">
             <a:avLst/>
@@ -6484,7 +6909,7 @@
               </a:spcAft>
               <a:defRPr sz="1200" b="0">
                 <a:solidFill>
-                  <a:srgbClr val="626773"/>
+                  <a:srgbClr val="B7BFCC"/>
                 </a:solidFill>
                 <a:latin typeface="Arial"/>
               </a:defRPr>
@@ -6528,7 +6953,7 @@
             <a:avLst/>
           </a:prstGeom>
           <a:solidFill>
-            <a:srgbClr val="FFFFFF"/>
+            <a:srgbClr val="101217"/>
           </a:solidFill>
           <a:ln>
             <a:noFill/>
@@ -6558,14 +6983,57 @@
       </p:sp>
       <p:sp>
         <p:nvSpPr>
-          <p:cNvPr id="3" name="TextBox 2"/>
+          <p:cNvPr id="3" name="Rectangle 2"/>
+          <p:cNvSpPr/>
+          <p:nvPr/>
+        </p:nvSpPr>
+        <p:spPr>
+          <a:xfrm>
+            <a:off x="0" y="0"/>
+            <a:ext cx="101600" cy="6858000"/>
+          </a:xfrm>
+          <a:prstGeom prst="rect">
+            <a:avLst/>
+          </a:prstGeom>
+          <a:solidFill>
+            <a:srgbClr val="FF885D"/>
+          </a:solidFill>
+          <a:ln>
+            <a:noFill/>
+          </a:ln>
+        </p:spPr>
+        <p:style>
+          <a:lnRef idx="1">
+            <a:schemeClr val="accent1"/>
+          </a:lnRef>
+          <a:fillRef idx="3">
+            <a:schemeClr val="accent1"/>
+          </a:fillRef>
+          <a:effectRef idx="2">
+            <a:schemeClr val="accent1"/>
+          </a:effectRef>
+          <a:fontRef idx="minor">
+            <a:schemeClr val="lt1"/>
+          </a:fontRef>
+        </p:style>
+        <p:txBody>
+          <a:bodyPr rtlCol="0" anchor="ctr"/>
+          <a:lstStyle/>
+          <a:p>
+            <a:pPr algn="ctr"/>
+          </a:p>
+        </p:txBody>
+      </p:sp>
+      <p:sp>
+        <p:nvSpPr>
+          <p:cNvPr id="4" name="TextBox 3"/>
           <p:cNvSpPr txBox="1"/>
           <p:nvPr/>
         </p:nvSpPr>
         <p:spPr>
           <a:xfrm>
-            <a:off x="711200" y="457200"/>
-            <a:ext cx="10769600" cy="228600"/>
+            <a:off x="609600" y="444500"/>
+            <a:ext cx="10972800" cy="279400"/>
           </a:xfrm>
           <a:prstGeom prst="rect">
             <a:avLst/>
@@ -6587,7 +7055,7 @@
               </a:spcAft>
               <a:defRPr sz="1300" b="1">
                 <a:solidFill>
-                  <a:srgbClr val="626773"/>
+                  <a:srgbClr val="B7BFCC"/>
                 </a:solidFill>
                 <a:latin typeface="Arial"/>
               </a:defRPr>
@@ -6600,20 +7068,20 @@
       </p:sp>
       <p:sp>
         <p:nvSpPr>
-          <p:cNvPr id="4" name="Rectangle 3"/>
+          <p:cNvPr id="5" name="Rectangle 4"/>
           <p:cNvSpPr/>
           <p:nvPr/>
         </p:nvSpPr>
         <p:spPr>
           <a:xfrm>
-            <a:off x="711200" y="876300"/>
-            <a:ext cx="622300" cy="50800"/>
+            <a:off x="609600" y="876300"/>
+            <a:ext cx="685800" cy="50800"/>
           </a:xfrm>
           <a:prstGeom prst="rect">
             <a:avLst/>
           </a:prstGeom>
           <a:solidFill>
-            <a:srgbClr val="E55024"/>
+            <a:srgbClr val="FF885D"/>
           </a:solidFill>
           <a:ln>
             <a:noFill/>
@@ -6643,14 +7111,14 @@
       </p:sp>
       <p:sp>
         <p:nvSpPr>
-          <p:cNvPr id="5" name="TextBox 4"/>
+          <p:cNvPr id="6" name="TextBox 5"/>
           <p:cNvSpPr txBox="1"/>
           <p:nvPr/>
         </p:nvSpPr>
         <p:spPr>
           <a:xfrm>
-            <a:off x="685800" y="1257300"/>
-            <a:ext cx="10795000" cy="1168400"/>
+            <a:off x="584200" y="1206500"/>
+            <a:ext cx="10998200" cy="1130300"/>
           </a:xfrm>
           <a:prstGeom prst="rect">
             <a:avLst/>
@@ -6672,7 +7140,7 @@
               </a:spcAft>
               <a:defRPr sz="3600" b="1">
                 <a:solidFill>
-                  <a:srgbClr val="191B20"/>
+                  <a:srgbClr val="F5F6FA"/>
                 </a:solidFill>
                 <a:latin typeface="Arial"/>
               </a:defRPr>
@@ -6685,20 +7153,20 @@
       </p:sp>
       <p:sp>
         <p:nvSpPr>
-          <p:cNvPr id="6" name="Rectangle 5"/>
+          <p:cNvPr id="7" name="Rectangle 6"/>
           <p:cNvSpPr/>
           <p:nvPr/>
         </p:nvSpPr>
         <p:spPr>
           <a:xfrm>
-            <a:off x="723900" y="2273300"/>
+            <a:off x="711200" y="2336800"/>
             <a:ext cx="101600" cy="101600"/>
           </a:xfrm>
           <a:prstGeom prst="rect">
             <a:avLst/>
           </a:prstGeom>
           <a:solidFill>
-            <a:srgbClr val="E55024"/>
+            <a:srgbClr val="FF885D"/>
           </a:solidFill>
           <a:ln>
             <a:noFill/>
@@ -6728,13 +7196,13 @@
       </p:sp>
       <p:sp>
         <p:nvSpPr>
-          <p:cNvPr id="7" name="TextBox 6"/>
+          <p:cNvPr id="8" name="TextBox 7"/>
           <p:cNvSpPr txBox="1"/>
           <p:nvPr/>
         </p:nvSpPr>
         <p:spPr>
           <a:xfrm>
-            <a:off x="1066800" y="2146300"/>
+            <a:off x="1066800" y="2209800"/>
             <a:ext cx="10160000" cy="419100"/>
           </a:xfrm>
           <a:prstGeom prst="rect">
@@ -6757,7 +7225,7 @@
               </a:spcAft>
               <a:defRPr sz="2800" b="0">
                 <a:solidFill>
-                  <a:srgbClr val="191B20"/>
+                  <a:srgbClr val="F5F6FA"/>
                 </a:solidFill>
                 <a:latin typeface="Arial"/>
               </a:defRPr>
@@ -6770,20 +7238,20 @@
       </p:sp>
       <p:sp>
         <p:nvSpPr>
-          <p:cNvPr id="8" name="Rectangle 7"/>
+          <p:cNvPr id="9" name="Rectangle 8"/>
           <p:cNvSpPr/>
           <p:nvPr/>
         </p:nvSpPr>
         <p:spPr>
           <a:xfrm>
-            <a:off x="723900" y="2971800"/>
+            <a:off x="711200" y="3009900"/>
             <a:ext cx="101600" cy="101600"/>
           </a:xfrm>
           <a:prstGeom prst="rect">
             <a:avLst/>
           </a:prstGeom>
           <a:solidFill>
-            <a:srgbClr val="E55024"/>
+            <a:srgbClr val="FF885D"/>
           </a:solidFill>
           <a:ln>
             <a:noFill/>
@@ -6813,13 +7281,13 @@
       </p:sp>
       <p:sp>
         <p:nvSpPr>
-          <p:cNvPr id="9" name="TextBox 8"/>
+          <p:cNvPr id="10" name="TextBox 9"/>
           <p:cNvSpPr txBox="1"/>
           <p:nvPr/>
         </p:nvSpPr>
         <p:spPr>
           <a:xfrm>
-            <a:off x="1066800" y="2844800"/>
+            <a:off x="1066800" y="2882900"/>
             <a:ext cx="10160000" cy="419100"/>
           </a:xfrm>
           <a:prstGeom prst="rect">
@@ -6842,7 +7310,7 @@
               </a:spcAft>
               <a:defRPr sz="2800" b="0">
                 <a:solidFill>
-                  <a:srgbClr val="191B20"/>
+                  <a:srgbClr val="F5F6FA"/>
                 </a:solidFill>
                 <a:latin typeface="Arial"/>
               </a:defRPr>
@@ -6855,20 +7323,20 @@
       </p:sp>
       <p:sp>
         <p:nvSpPr>
-          <p:cNvPr id="10" name="Rectangle 9"/>
+          <p:cNvPr id="11" name="Rectangle 10"/>
           <p:cNvSpPr/>
           <p:nvPr/>
         </p:nvSpPr>
         <p:spPr>
           <a:xfrm>
-            <a:off x="723900" y="3670300"/>
+            <a:off x="711200" y="3683000"/>
             <a:ext cx="101600" cy="101600"/>
           </a:xfrm>
           <a:prstGeom prst="rect">
             <a:avLst/>
           </a:prstGeom>
           <a:solidFill>
-            <a:srgbClr val="E55024"/>
+            <a:srgbClr val="FF885D"/>
           </a:solidFill>
           <a:ln>
             <a:noFill/>
@@ -6898,13 +7366,13 @@
       </p:sp>
       <p:sp>
         <p:nvSpPr>
-          <p:cNvPr id="11" name="TextBox 10"/>
+          <p:cNvPr id="12" name="TextBox 11"/>
           <p:cNvSpPr txBox="1"/>
           <p:nvPr/>
         </p:nvSpPr>
         <p:spPr>
           <a:xfrm>
-            <a:off x="1066800" y="3543300"/>
+            <a:off x="1066800" y="3556000"/>
             <a:ext cx="10160000" cy="419100"/>
           </a:xfrm>
           <a:prstGeom prst="rect">
@@ -6927,7 +7395,7 @@
               </a:spcAft>
               <a:defRPr sz="2800" b="0">
                 <a:solidFill>
-                  <a:srgbClr val="191B20"/>
+                  <a:srgbClr val="F5F6FA"/>
                 </a:solidFill>
                 <a:latin typeface="Arial"/>
               </a:defRPr>
@@ -6940,20 +7408,20 @@
       </p:sp>
       <p:sp>
         <p:nvSpPr>
-          <p:cNvPr id="12" name="Rectangle 11"/>
+          <p:cNvPr id="13" name="Rectangle 12"/>
           <p:cNvSpPr/>
           <p:nvPr/>
         </p:nvSpPr>
         <p:spPr>
           <a:xfrm>
-            <a:off x="723900" y="4368800"/>
+            <a:off x="711200" y="4356100"/>
             <a:ext cx="101600" cy="101600"/>
           </a:xfrm>
           <a:prstGeom prst="rect">
             <a:avLst/>
           </a:prstGeom>
           <a:solidFill>
-            <a:srgbClr val="E55024"/>
+            <a:srgbClr val="FF885D"/>
           </a:solidFill>
           <a:ln>
             <a:noFill/>
@@ -6983,13 +7451,13 @@
       </p:sp>
       <p:sp>
         <p:nvSpPr>
-          <p:cNvPr id="13" name="TextBox 12"/>
+          <p:cNvPr id="14" name="TextBox 13"/>
           <p:cNvSpPr txBox="1"/>
           <p:nvPr/>
         </p:nvSpPr>
         <p:spPr>
           <a:xfrm>
-            <a:off x="1066800" y="4241800"/>
+            <a:off x="1066800" y="4229100"/>
             <a:ext cx="10160000" cy="419100"/>
           </a:xfrm>
           <a:prstGeom prst="rect">
@@ -7012,7 +7480,7 @@
               </a:spcAft>
               <a:defRPr sz="2800" b="0">
                 <a:solidFill>
-                  <a:srgbClr val="191B20"/>
+                  <a:srgbClr val="F5F6FA"/>
                 </a:solidFill>
                 <a:latin typeface="Arial"/>
               </a:defRPr>
@@ -7025,20 +7493,20 @@
       </p:sp>
       <p:sp>
         <p:nvSpPr>
-          <p:cNvPr id="14" name="Rectangle 13"/>
+          <p:cNvPr id="15" name="Rectangle 14"/>
           <p:cNvSpPr/>
           <p:nvPr/>
         </p:nvSpPr>
         <p:spPr>
           <a:xfrm>
-            <a:off x="711200" y="6248400"/>
-            <a:ext cx="10769600" cy="12700"/>
+            <a:off x="609600" y="6273800"/>
+            <a:ext cx="10972800" cy="12700"/>
           </a:xfrm>
           <a:prstGeom prst="rect">
             <a:avLst/>
           </a:prstGeom>
           <a:solidFill>
-            <a:srgbClr val="DFE2E7"/>
+            <a:srgbClr val="3D4552"/>
           </a:solidFill>
           <a:ln>
             <a:noFill/>
@@ -7068,14 +7536,14 @@
       </p:sp>
       <p:sp>
         <p:nvSpPr>
-          <p:cNvPr id="15" name="TextBox 14"/>
+          <p:cNvPr id="16" name="TextBox 15"/>
           <p:cNvSpPr txBox="1"/>
           <p:nvPr/>
         </p:nvSpPr>
         <p:spPr>
           <a:xfrm>
-            <a:off x="711200" y="6438900"/>
-            <a:ext cx="9652000" cy="203200"/>
+            <a:off x="609600" y="6464300"/>
+            <a:ext cx="9906000" cy="203200"/>
           </a:xfrm>
           <a:prstGeom prst="rect">
             <a:avLst/>
@@ -7097,7 +7565,7 @@
               </a:spcAft>
               <a:defRPr sz="1100" b="0">
                 <a:solidFill>
-                  <a:srgbClr val="626773"/>
+                  <a:srgbClr val="B7BFCC"/>
                 </a:solidFill>
                 <a:latin typeface="Arial"/>
               </a:defRPr>
@@ -7110,14 +7578,14 @@
       </p:sp>
       <p:sp>
         <p:nvSpPr>
-          <p:cNvPr id="16" name="TextBox 15"/>
+          <p:cNvPr id="17" name="TextBox 16"/>
           <p:cNvSpPr txBox="1"/>
           <p:nvPr/>
         </p:nvSpPr>
         <p:spPr>
           <a:xfrm>
-            <a:off x="10807700" y="6413500"/>
-            <a:ext cx="673100" cy="215900"/>
+            <a:off x="10972800" y="6438900"/>
+            <a:ext cx="609600" cy="215900"/>
           </a:xfrm>
           <a:prstGeom prst="rect">
             <a:avLst/>
@@ -7139,7 +7607,7 @@
               </a:spcAft>
               <a:defRPr sz="1200" b="0">
                 <a:solidFill>
-                  <a:srgbClr val="626773"/>
+                  <a:srgbClr val="B7BFCC"/>
                 </a:solidFill>
                 <a:latin typeface="Arial"/>
               </a:defRPr>
@@ -7183,7 +7651,7 @@
             <a:avLst/>
           </a:prstGeom>
           <a:solidFill>
-            <a:srgbClr val="FFFFFF"/>
+            <a:srgbClr val="101217"/>
           </a:solidFill>
           <a:ln>
             <a:noFill/>
@@ -7213,14 +7681,57 @@
       </p:sp>
       <p:sp>
         <p:nvSpPr>
-          <p:cNvPr id="3" name="TextBox 2"/>
+          <p:cNvPr id="3" name="Rectangle 2"/>
+          <p:cNvSpPr/>
+          <p:nvPr/>
+        </p:nvSpPr>
+        <p:spPr>
+          <a:xfrm>
+            <a:off x="0" y="0"/>
+            <a:ext cx="101600" cy="6858000"/>
+          </a:xfrm>
+          <a:prstGeom prst="rect">
+            <a:avLst/>
+          </a:prstGeom>
+          <a:solidFill>
+            <a:srgbClr val="FF885D"/>
+          </a:solidFill>
+          <a:ln>
+            <a:noFill/>
+          </a:ln>
+        </p:spPr>
+        <p:style>
+          <a:lnRef idx="1">
+            <a:schemeClr val="accent1"/>
+          </a:lnRef>
+          <a:fillRef idx="3">
+            <a:schemeClr val="accent1"/>
+          </a:fillRef>
+          <a:effectRef idx="2">
+            <a:schemeClr val="accent1"/>
+          </a:effectRef>
+          <a:fontRef idx="minor">
+            <a:schemeClr val="lt1"/>
+          </a:fontRef>
+        </p:style>
+        <p:txBody>
+          <a:bodyPr rtlCol="0" anchor="ctr"/>
+          <a:lstStyle/>
+          <a:p>
+            <a:pPr algn="ctr"/>
+          </a:p>
+        </p:txBody>
+      </p:sp>
+      <p:sp>
+        <p:nvSpPr>
+          <p:cNvPr id="4" name="TextBox 3"/>
           <p:cNvSpPr txBox="1"/>
           <p:nvPr/>
         </p:nvSpPr>
         <p:spPr>
           <a:xfrm>
-            <a:off x="711200" y="457200"/>
-            <a:ext cx="10769600" cy="228600"/>
+            <a:off x="609600" y="444500"/>
+            <a:ext cx="10972800" cy="279400"/>
           </a:xfrm>
           <a:prstGeom prst="rect">
             <a:avLst/>
@@ -7242,7 +7753,7 @@
               </a:spcAft>
               <a:defRPr sz="1300" b="1">
                 <a:solidFill>
-                  <a:srgbClr val="626773"/>
+                  <a:srgbClr val="B7BFCC"/>
                 </a:solidFill>
                 <a:latin typeface="Arial"/>
               </a:defRPr>
@@ -7255,20 +7766,20 @@
       </p:sp>
       <p:sp>
         <p:nvSpPr>
-          <p:cNvPr id="4" name="Rectangle 3"/>
+          <p:cNvPr id="5" name="Rectangle 4"/>
           <p:cNvSpPr/>
           <p:nvPr/>
         </p:nvSpPr>
         <p:spPr>
           <a:xfrm>
-            <a:off x="711200" y="876300"/>
-            <a:ext cx="622300" cy="50800"/>
+            <a:off x="609600" y="876300"/>
+            <a:ext cx="685800" cy="50800"/>
           </a:xfrm>
           <a:prstGeom prst="rect">
             <a:avLst/>
           </a:prstGeom>
           <a:solidFill>
-            <a:srgbClr val="E55024"/>
+            <a:srgbClr val="FF885D"/>
           </a:solidFill>
           <a:ln>
             <a:noFill/>
@@ -7298,14 +7809,14 @@
       </p:sp>
       <p:sp>
         <p:nvSpPr>
-          <p:cNvPr id="5" name="TextBox 4"/>
+          <p:cNvPr id="6" name="TextBox 5"/>
           <p:cNvSpPr txBox="1"/>
           <p:nvPr/>
         </p:nvSpPr>
         <p:spPr>
           <a:xfrm>
-            <a:off x="685800" y="1257300"/>
-            <a:ext cx="10795000" cy="1168400"/>
+            <a:off x="584200" y="1206500"/>
+            <a:ext cx="10998200" cy="1130300"/>
           </a:xfrm>
           <a:prstGeom prst="rect">
             <a:avLst/>
@@ -7327,7 +7838,7 @@
               </a:spcAft>
               <a:defRPr sz="3600" b="1">
                 <a:solidFill>
-                  <a:srgbClr val="191B20"/>
+                  <a:srgbClr val="F5F6FA"/>
                 </a:solidFill>
                 <a:latin typeface="Arial"/>
               </a:defRPr>
@@ -7340,20 +7851,20 @@
       </p:sp>
       <p:sp>
         <p:nvSpPr>
-          <p:cNvPr id="6" name="Rectangle 5"/>
+          <p:cNvPr id="7" name="Rectangle 6"/>
           <p:cNvSpPr/>
           <p:nvPr/>
         </p:nvSpPr>
         <p:spPr>
           <a:xfrm>
-            <a:off x="723900" y="2273300"/>
+            <a:off x="711200" y="2336800"/>
             <a:ext cx="101600" cy="101600"/>
           </a:xfrm>
           <a:prstGeom prst="rect">
             <a:avLst/>
           </a:prstGeom>
           <a:solidFill>
-            <a:srgbClr val="E55024"/>
+            <a:srgbClr val="FF885D"/>
           </a:solidFill>
           <a:ln>
             <a:noFill/>
@@ -7383,13 +7894,13 @@
       </p:sp>
       <p:sp>
         <p:nvSpPr>
-          <p:cNvPr id="7" name="TextBox 6"/>
+          <p:cNvPr id="8" name="TextBox 7"/>
           <p:cNvSpPr txBox="1"/>
           <p:nvPr/>
         </p:nvSpPr>
         <p:spPr>
           <a:xfrm>
-            <a:off x="1066800" y="2146300"/>
+            <a:off x="1066800" y="2209800"/>
             <a:ext cx="10160000" cy="419100"/>
           </a:xfrm>
           <a:prstGeom prst="rect">
@@ -7412,7 +7923,7 @@
               </a:spcAft>
               <a:defRPr sz="2800" b="0">
                 <a:solidFill>
-                  <a:srgbClr val="191B20"/>
+                  <a:srgbClr val="F5F6FA"/>
                 </a:solidFill>
                 <a:latin typeface="Arial"/>
               </a:defRPr>
@@ -7425,20 +7936,20 @@
       </p:sp>
       <p:sp>
         <p:nvSpPr>
-          <p:cNvPr id="8" name="Rectangle 7"/>
+          <p:cNvPr id="9" name="Rectangle 8"/>
           <p:cNvSpPr/>
           <p:nvPr/>
         </p:nvSpPr>
         <p:spPr>
           <a:xfrm>
-            <a:off x="723900" y="2971800"/>
+            <a:off x="711200" y="3009900"/>
             <a:ext cx="101600" cy="101600"/>
           </a:xfrm>
           <a:prstGeom prst="rect">
             <a:avLst/>
           </a:prstGeom>
           <a:solidFill>
-            <a:srgbClr val="E55024"/>
+            <a:srgbClr val="FF885D"/>
           </a:solidFill>
           <a:ln>
             <a:noFill/>
@@ -7468,13 +7979,13 @@
       </p:sp>
       <p:sp>
         <p:nvSpPr>
-          <p:cNvPr id="9" name="TextBox 8"/>
+          <p:cNvPr id="10" name="TextBox 9"/>
           <p:cNvSpPr txBox="1"/>
           <p:nvPr/>
         </p:nvSpPr>
         <p:spPr>
           <a:xfrm>
-            <a:off x="1066800" y="2844800"/>
+            <a:off x="1066800" y="2882900"/>
             <a:ext cx="10160000" cy="419100"/>
           </a:xfrm>
           <a:prstGeom prst="rect">
@@ -7497,7 +8008,7 @@
               </a:spcAft>
               <a:defRPr sz="2800" b="0">
                 <a:solidFill>
-                  <a:srgbClr val="191B20"/>
+                  <a:srgbClr val="F5F6FA"/>
                 </a:solidFill>
                 <a:latin typeface="Arial"/>
               </a:defRPr>
@@ -7510,20 +8021,20 @@
       </p:sp>
       <p:sp>
         <p:nvSpPr>
-          <p:cNvPr id="10" name="Rectangle 9"/>
+          <p:cNvPr id="11" name="Rectangle 10"/>
           <p:cNvSpPr/>
           <p:nvPr/>
         </p:nvSpPr>
         <p:spPr>
           <a:xfrm>
-            <a:off x="723900" y="3670300"/>
+            <a:off x="711200" y="3683000"/>
             <a:ext cx="101600" cy="101600"/>
           </a:xfrm>
           <a:prstGeom prst="rect">
             <a:avLst/>
           </a:prstGeom>
           <a:solidFill>
-            <a:srgbClr val="E55024"/>
+            <a:srgbClr val="FF885D"/>
           </a:solidFill>
           <a:ln>
             <a:noFill/>
@@ -7553,13 +8064,13 @@
       </p:sp>
       <p:sp>
         <p:nvSpPr>
-          <p:cNvPr id="11" name="TextBox 10"/>
+          <p:cNvPr id="12" name="TextBox 11"/>
           <p:cNvSpPr txBox="1"/>
           <p:nvPr/>
         </p:nvSpPr>
         <p:spPr>
           <a:xfrm>
-            <a:off x="1066800" y="3543300"/>
+            <a:off x="1066800" y="3556000"/>
             <a:ext cx="10160000" cy="419100"/>
           </a:xfrm>
           <a:prstGeom prst="rect">
@@ -7582,7 +8093,7 @@
               </a:spcAft>
               <a:defRPr sz="2800" b="0">
                 <a:solidFill>
-                  <a:srgbClr val="191B20"/>
+                  <a:srgbClr val="F5F6FA"/>
                 </a:solidFill>
                 <a:latin typeface="Arial"/>
               </a:defRPr>
@@ -7595,20 +8106,20 @@
       </p:sp>
       <p:sp>
         <p:nvSpPr>
-          <p:cNvPr id="12" name="Rectangle 11"/>
+          <p:cNvPr id="13" name="Rectangle 12"/>
           <p:cNvSpPr/>
           <p:nvPr/>
         </p:nvSpPr>
         <p:spPr>
           <a:xfrm>
-            <a:off x="723900" y="4368800"/>
+            <a:off x="711200" y="4356100"/>
             <a:ext cx="101600" cy="101600"/>
           </a:xfrm>
           <a:prstGeom prst="rect">
             <a:avLst/>
           </a:prstGeom>
           <a:solidFill>
-            <a:srgbClr val="E55024"/>
+            <a:srgbClr val="FF885D"/>
           </a:solidFill>
           <a:ln>
             <a:noFill/>
@@ -7638,13 +8149,13 @@
       </p:sp>
       <p:sp>
         <p:nvSpPr>
-          <p:cNvPr id="13" name="TextBox 12"/>
+          <p:cNvPr id="14" name="TextBox 13"/>
           <p:cNvSpPr txBox="1"/>
           <p:nvPr/>
         </p:nvSpPr>
         <p:spPr>
           <a:xfrm>
-            <a:off x="1066800" y="4241800"/>
+            <a:off x="1066800" y="4229100"/>
             <a:ext cx="10160000" cy="419100"/>
           </a:xfrm>
           <a:prstGeom prst="rect">
@@ -7667,7 +8178,7 @@
               </a:spcAft>
               <a:defRPr sz="2800" b="0">
                 <a:solidFill>
-                  <a:srgbClr val="191B20"/>
+                  <a:srgbClr val="F5F6FA"/>
                 </a:solidFill>
                 <a:latin typeface="Arial"/>
               </a:defRPr>
@@ -7680,20 +8191,20 @@
       </p:sp>
       <p:sp>
         <p:nvSpPr>
-          <p:cNvPr id="14" name="Rectangle 13"/>
+          <p:cNvPr id="15" name="Rectangle 14"/>
           <p:cNvSpPr/>
           <p:nvPr/>
         </p:nvSpPr>
         <p:spPr>
           <a:xfrm>
-            <a:off x="711200" y="6248400"/>
-            <a:ext cx="10769600" cy="12700"/>
+            <a:off x="609600" y="6273800"/>
+            <a:ext cx="10972800" cy="12700"/>
           </a:xfrm>
           <a:prstGeom prst="rect">
             <a:avLst/>
           </a:prstGeom>
           <a:solidFill>
-            <a:srgbClr val="DFE2E7"/>
+            <a:srgbClr val="3D4552"/>
           </a:solidFill>
           <a:ln>
             <a:noFill/>
@@ -7723,14 +8234,14 @@
       </p:sp>
       <p:sp>
         <p:nvSpPr>
-          <p:cNvPr id="15" name="TextBox 14"/>
+          <p:cNvPr id="16" name="TextBox 15"/>
           <p:cNvSpPr txBox="1"/>
           <p:nvPr/>
         </p:nvSpPr>
         <p:spPr>
           <a:xfrm>
-            <a:off x="711200" y="6438900"/>
-            <a:ext cx="9652000" cy="203200"/>
+            <a:off x="609600" y="6464300"/>
+            <a:ext cx="9906000" cy="203200"/>
           </a:xfrm>
           <a:prstGeom prst="rect">
             <a:avLst/>
@@ -7752,7 +8263,7 @@
               </a:spcAft>
               <a:defRPr sz="1100" b="0">
                 <a:solidFill>
-                  <a:srgbClr val="626773"/>
+                  <a:srgbClr val="B7BFCC"/>
                 </a:solidFill>
                 <a:latin typeface="Arial"/>
               </a:defRPr>
@@ -7765,14 +8276,14 @@
       </p:sp>
       <p:sp>
         <p:nvSpPr>
-          <p:cNvPr id="16" name="TextBox 15"/>
+          <p:cNvPr id="17" name="TextBox 16"/>
           <p:cNvSpPr txBox="1"/>
           <p:nvPr/>
         </p:nvSpPr>
         <p:spPr>
           <a:xfrm>
-            <a:off x="10807700" y="6413500"/>
-            <a:ext cx="673100" cy="215900"/>
+            <a:off x="10972800" y="6438900"/>
+            <a:ext cx="609600" cy="215900"/>
           </a:xfrm>
           <a:prstGeom prst="rect">
             <a:avLst/>
@@ -7794,7 +8305,7 @@
               </a:spcAft>
               <a:defRPr sz="1200" b="0">
                 <a:solidFill>
-                  <a:srgbClr val="626773"/>
+                  <a:srgbClr val="B7BFCC"/>
                 </a:solidFill>
                 <a:latin typeface="Arial"/>
               </a:defRPr>

--- a/odevzdani/cviceni-04-implementace/prezentace.pptx
+++ b/odevzdani/cviceni-04-implementace/prezentace.pptx
@@ -507,7 +507,7 @@
           <a:lstStyle/>
           <a:p>
             <a:r>
-              <a:t>[30 s] Oproti wireframu ukazujeme současný hotový web s vlastní vizuální identitou, češtinou a angličtinou a rozšířenými funkcemi. Základem zůstává HTML, CSS a JavaScript bez backendu a instalačního kroku. Balíček obsahuje dnešní verzi webu, nikoli nedoložený historický stav ze cvičení. Při prezentaci se zaměříme na mobilní i desktopové zobrazení, funkční navigaci a dva stejné scénáře jako v prototypu.</a:t>
+              <a:t>[30 s] Oproti wireframu ukazujeme současný hotový web s vlastní vizuální identitou, češtinou a angličtinou a rozšířenými funkcemi. Základem zůstává HTML, CSS a JavaScript bez backendu a instalačního kroku.  Při prezentaci se zaměříme na mobilní i desktopové zobrazení, funkční navigaci a dva stejné scénáře jako v prototypu.</a:t>
             </a:r>
           </a:p>
         </p:txBody>
@@ -577,7 +577,7 @@
           <a:lstStyle/>
           <a:p>
             <a:r>
-              <a:t>[35 s] Povinné obsahové části již neexistují jako oddělené ukázky. Z interpreta lze přejít ke koncertu a ze scény do filtrovaného programu. Hledání pokrývá všechna data včetně popisů. K jádru přibyly vstupenky na jeden, dva nebo tři dny, košík, kemp a PDF. Registrace i historie jsou lokální pro prohlížeč, účet není povinný. Vstup lze zvolit na všechny scény nebo jen na jednu. Main Hall má sedadla i stání, River a Club pouze stání. Každá scéna má vlastní kapacitu a společný vstup se do všech započítá. Tři závěrečné koncerty denně navazují s půlhodinou na přesun; plné běžné sety se mezi scénami mohou překrývat.</a:t>
+              <a:t>[40 s] Proti wireframu máme propojený nákup. Detail interpreta používá jeho skutečné vystoupení a předvyplní den a scénu. Návštěvník může přepnout na jiné dny či společný vstup. U sedadel počet osob vychází z počtu označených míst, u stání ho zadává. Dvoudenní vstup vyžaduje dvě různé zvolené hodnoty. Změna výběru i odebrání z košíku okamžitě přepočítají cenu. Kapacita vychází z platných objednávek a před dokončením se znovu kontroluje. Stejná objednávka je zdrojem historie a PDF, včetně použitého kódu a slevy.</a:t>
             </a:r>
           </a:p>
         </p:txBody>
@@ -717,7 +717,7 @@
           <a:lstStyle/>
           <a:p>
             <a:r>
-              <a:t>[50 s včetně ukázky] Nejprve předvedeme filtr prvního dne a River Stage a uložíme koncert do osobního programu. Potom přes globální hledání najdeme DARKZY, otevřeme detail a přejdeme ke koncertu. Sledujeme správnost údajů a srozumitelnost cesty, ne pouze animace. Krátce ukážeme focus klávesnice, zavření dialogu a návrat k obsahu. Stejné ID propojuje seznam i detail, takže nevznikají rozdílné ručně napsané časy. Tyto scénáře budou moci zopakovat hodnotitelé v dalším milníku.</a:t>
+              <a:t>[45 s včetně ukázky] V prvním průchodu vybereme první srpen a River Stage a uložíme koncert. Otevřeme osobní program a po obnovení ověříme zachování výběru. Potom vyhledáme DARKZY a z jeho detailu přejdeme na vstup pro jeho koncert. Ukážeme předvolenou scénu a den, zbývající kapacitu a cenu. Přidáme vstup do košíku a po odebrání zkontrolujeme nový součet. Důležité funkce nejsou pevné odkazy na náhodnou nabídku: hodnoty se odvozují z propojených objektů. Stejné kroky lze zopakovat na telefonu a klávesnicí.</a:t>
             </a:r>
           </a:p>
         </p:txBody>
@@ -4693,7 +4693,7 @@
         <p:spPr>
           <a:xfrm>
             <a:off x="1066800" y="2209800"/>
-            <a:ext cx="10160000" cy="845819"/>
+            <a:ext cx="10160000" cy="419100"/>
           </a:xfrm>
           <a:prstGeom prst="rect">
             <a:avLst/>
@@ -4721,9 +4721,75 @@
               </a:defRPr>
             </a:pPr>
             <a:r>
-              <a:t>Úvod, program, účinkující, scény, info a hledání jsou</a:t>
-            </a:r>
-          </a:p>
+              <a:t>Seznam, detail, program a vstupenka používají stejná data.</a:t>
+            </a:r>
+          </a:p>
+        </p:txBody>
+      </p:sp>
+      <p:sp>
+        <p:nvSpPr>
+          <p:cNvPr id="9" name="Rectangle 8"/>
+          <p:cNvSpPr/>
+          <p:nvPr/>
+        </p:nvSpPr>
+        <p:spPr>
+          <a:xfrm>
+            <a:off x="711200" y="3009900"/>
+            <a:ext cx="101600" cy="101600"/>
+          </a:xfrm>
+          <a:prstGeom prst="rect">
+            <a:avLst/>
+          </a:prstGeom>
+          <a:solidFill>
+            <a:srgbClr val="FF885D"/>
+          </a:solidFill>
+          <a:ln>
+            <a:noFill/>
+          </a:ln>
+        </p:spPr>
+        <p:style>
+          <a:lnRef idx="1">
+            <a:schemeClr val="accent1"/>
+          </a:lnRef>
+          <a:fillRef idx="3">
+            <a:schemeClr val="accent1"/>
+          </a:fillRef>
+          <a:effectRef idx="2">
+            <a:schemeClr val="accent1"/>
+          </a:effectRef>
+          <a:fontRef idx="minor">
+            <a:schemeClr val="lt1"/>
+          </a:fontRef>
+        </p:style>
+        <p:txBody>
+          <a:bodyPr rtlCol="0" anchor="ctr"/>
+          <a:lstStyle/>
+          <a:p>
+            <a:pPr algn="ctr"/>
+          </a:p>
+        </p:txBody>
+      </p:sp>
+      <p:sp>
+        <p:nvSpPr>
+          <p:cNvPr id="10" name="TextBox 9"/>
+          <p:cNvSpPr txBox="1"/>
+          <p:nvPr/>
+        </p:nvSpPr>
+        <p:spPr>
+          <a:xfrm>
+            <a:off x="1066800" y="2882900"/>
+            <a:ext cx="10160000" cy="419100"/>
+          </a:xfrm>
+          <a:prstGeom prst="rect">
+            <a:avLst/>
+          </a:prstGeom>
+          <a:noFill/>
+        </p:spPr>
+        <p:txBody>
+          <a:bodyPr wrap="none" lIns="0" rIns="0" tIns="0" bIns="0">
+            <a:noAutofit/>
+          </a:bodyPr>
+          <a:lstStyle/>
           <a:p>
             <a:pPr>
               <a:lnSpc>
@@ -4740,20 +4806,20 @@
               </a:defRPr>
             </a:pPr>
             <a:r>
-              <a:t>propojené.</a:t>
-            </a:r>
-          </a:p>
-        </p:txBody>
-      </p:sp>
-      <p:sp>
-        <p:nvSpPr>
-          <p:cNvPr id="9" name="Rectangle 8"/>
+              <a:t>Detail interpreta předvolí přesný den a scénu nákupu.</a:t>
+            </a:r>
+          </a:p>
+        </p:txBody>
+      </p:sp>
+      <p:sp>
+        <p:nvSpPr>
+          <p:cNvPr id="11" name="Rectangle 10"/>
           <p:cNvSpPr/>
           <p:nvPr/>
         </p:nvSpPr>
         <p:spPr>
           <a:xfrm>
-            <a:off x="711200" y="3436620"/>
+            <a:off x="711200" y="3683000"/>
             <a:ext cx="101600" cy="101600"/>
           </a:xfrm>
           <a:prstGeom prst="rect">
@@ -4790,13 +4856,13 @@
       </p:sp>
       <p:sp>
         <p:nvSpPr>
-          <p:cNvPr id="10" name="TextBox 9"/>
+          <p:cNvPr id="12" name="TextBox 11"/>
           <p:cNvSpPr txBox="1"/>
           <p:nvPr/>
         </p:nvSpPr>
         <p:spPr>
           <a:xfrm>
-            <a:off x="1066800" y="3309620"/>
+            <a:off x="1066800" y="3556000"/>
             <a:ext cx="10160000" cy="419100"/>
           </a:xfrm>
           <a:prstGeom prst="rect">
@@ -4825,20 +4891,20 @@
               </a:defRPr>
             </a:pPr>
             <a:r>
-              <a:t>Vlastní vizuální identita a přepínání češtiny / angličtiny.</a:t>
-            </a:r>
-          </a:p>
-        </p:txBody>
-      </p:sp>
-      <p:sp>
-        <p:nvSpPr>
-          <p:cNvPr id="11" name="Rectangle 10"/>
+              <a:t>Kapacita a cena se mění podle vybraných vstupenek.</a:t>
+            </a:r>
+          </a:p>
+        </p:txBody>
+      </p:sp>
+      <p:sp>
+        <p:nvSpPr>
+          <p:cNvPr id="13" name="Rectangle 12"/>
           <p:cNvSpPr/>
           <p:nvPr/>
         </p:nvSpPr>
         <p:spPr>
           <a:xfrm>
-            <a:off x="711200" y="4109720"/>
+            <a:off x="711200" y="4356100"/>
             <a:ext cx="101600" cy="101600"/>
           </a:xfrm>
           <a:prstGeom prst="rect">
@@ -4875,14 +4941,14 @@
       </p:sp>
       <p:sp>
         <p:nvSpPr>
-          <p:cNvPr id="12" name="TextBox 11"/>
+          <p:cNvPr id="14" name="TextBox 13"/>
           <p:cNvSpPr txBox="1"/>
           <p:nvPr/>
         </p:nvSpPr>
         <p:spPr>
           <a:xfrm>
-            <a:off x="1066800" y="3982720"/>
-            <a:ext cx="10160000" cy="845819"/>
+            <a:off x="1066800" y="4229100"/>
+            <a:ext cx="10160000" cy="419100"/>
           </a:xfrm>
           <a:prstGeom prst="rect">
             <a:avLst/>
@@ -4910,111 +4976,7 @@
               </a:defRPr>
             </a:pPr>
             <a:r>
-              <a:t>Osobní program s kolizemi a vstup na všechny nebo jednu</a:t>
-            </a:r>
-          </a:p>
-          <a:p>
-            <a:pPr>
-              <a:lnSpc>
-                <a:spcPts val="3360"/>
-              </a:lnSpc>
-              <a:spcAft>
-                <a:spcPts val="0"/>
-              </a:spcAft>
-              <a:defRPr sz="2800" b="0">
-                <a:solidFill>
-                  <a:srgbClr val="F5F6FA"/>
-                </a:solidFill>
-                <a:latin typeface="Arial"/>
-              </a:defRPr>
-            </a:pPr>
-            <a:r>
-              <a:t>scénu.</a:t>
-            </a:r>
-          </a:p>
-        </p:txBody>
-      </p:sp>
-      <p:sp>
-        <p:nvSpPr>
-          <p:cNvPr id="13" name="Rectangle 12"/>
-          <p:cNvSpPr/>
-          <p:nvPr/>
-        </p:nvSpPr>
-        <p:spPr>
-          <a:xfrm>
-            <a:off x="711200" y="5209540"/>
-            <a:ext cx="101600" cy="101600"/>
-          </a:xfrm>
-          <a:prstGeom prst="rect">
-            <a:avLst/>
-          </a:prstGeom>
-          <a:solidFill>
-            <a:srgbClr val="FF885D"/>
-          </a:solidFill>
-          <a:ln>
-            <a:noFill/>
-          </a:ln>
-        </p:spPr>
-        <p:style>
-          <a:lnRef idx="1">
-            <a:schemeClr val="accent1"/>
-          </a:lnRef>
-          <a:fillRef idx="3">
-            <a:schemeClr val="accent1"/>
-          </a:fillRef>
-          <a:effectRef idx="2">
-            <a:schemeClr val="accent1"/>
-          </a:effectRef>
-          <a:fontRef idx="minor">
-            <a:schemeClr val="lt1"/>
-          </a:fontRef>
-        </p:style>
-        <p:txBody>
-          <a:bodyPr rtlCol="0" anchor="ctr"/>
-          <a:lstStyle/>
-          <a:p>
-            <a:pPr algn="ctr"/>
-          </a:p>
-        </p:txBody>
-      </p:sp>
-      <p:sp>
-        <p:nvSpPr>
-          <p:cNvPr id="14" name="TextBox 13"/>
-          <p:cNvSpPr txBox="1"/>
-          <p:nvPr/>
-        </p:nvSpPr>
-        <p:spPr>
-          <a:xfrm>
-            <a:off x="1066800" y="5082540"/>
-            <a:ext cx="10160000" cy="419100"/>
-          </a:xfrm>
-          <a:prstGeom prst="rect">
-            <a:avLst/>
-          </a:prstGeom>
-          <a:noFill/>
-        </p:spPr>
-        <p:txBody>
-          <a:bodyPr wrap="none" lIns="0" rIns="0" tIns="0" bIns="0">
-            <a:noAutofit/>
-          </a:bodyPr>
-          <a:lstStyle/>
-          <a:p>
-            <a:pPr>
-              <a:lnSpc>
-                <a:spcPts val="3360"/>
-              </a:lnSpc>
-              <a:spcAft>
-                <a:spcPts val="0"/>
-              </a:spcAft>
-              <a:defRPr sz="2800" b="0">
-                <a:solidFill>
-                  <a:srgbClr val="F5F6FA"/>
-                </a:solidFill>
-                <a:latin typeface="Arial"/>
-              </a:defRPr>
-            </a:pPr>
-            <a:r>
-              <a:t>Účet není nutný k dokončení objednávky.</a:t>
+              <a:t>Host i účet: objednávka, historie a datové PDF.</a:t>
             </a:r>
           </a:p>
         </p:txBody>
@@ -6535,7 +6497,7 @@
               </a:defRPr>
             </a:pPr>
             <a:r>
-              <a:t>S2 / Hledání</a:t>
+              <a:t>S2 / Interpret</a:t>
             </a:r>
           </a:p>
         </p:txBody>
@@ -6704,7 +6666,7 @@
               </a:defRPr>
             </a:pPr>
             <a:r>
-              <a:t>Detail</a:t>
+              <a:t>Vstupenka</a:t>
             </a:r>
           </a:p>
         </p:txBody>
@@ -6746,7 +6708,7 @@
               </a:defRPr>
             </a:pPr>
             <a:r>
-              <a:t>Zjistit čas a scénu</a:t>
+              <a:t>Správný den a Club Stage</a:t>
             </a:r>
           </a:p>
         </p:txBody>
